--- a/docs/portfolio/mulino-coreano-portfolio-ko.pptx
+++ b/docs/portfolio/mulino-coreano-portfolio-ko.pptx
@@ -2,26 +2,26 @@
 <file path=ppt/presentation.xml><?xml version="1.0" encoding="utf-8"?>
 <p:presentation xmlns:p="http://schemas.openxmlformats.org/presentationml/2006/main">
   <p:sldMasterIdLst>
-    <p:sldMasterId xmlns:r="http://schemas.openxmlformats.org/officeDocument/2006/relationships" id="2147483648" r:id="R43a872d2731a4ff9"/>
+    <p:sldMasterId xmlns:r="http://schemas.openxmlformats.org/officeDocument/2006/relationships" id="2147483648" r:id="Rbcc3ce8e02624350"/>
   </p:sldMasterIdLst>
   <p:notesMasterIdLst>
-    <p:notesMasterId xmlns:r="http://schemas.openxmlformats.org/officeDocument/2006/relationships" r:id="R5306ee921b094eb6"/>
+    <p:notesMasterId xmlns:r="http://schemas.openxmlformats.org/officeDocument/2006/relationships" r:id="R470da54f270f46d3"/>
   </p:notesMasterIdLst>
   <p:sldIdLst>
-    <p:sldId xmlns:r="http://schemas.openxmlformats.org/officeDocument/2006/relationships" id="256" r:id="Ra8335e60e58740a2"/>
-    <p:sldId xmlns:r="http://schemas.openxmlformats.org/officeDocument/2006/relationships" id="257" r:id="Rc52aee1918e349be"/>
-    <p:sldId xmlns:r="http://schemas.openxmlformats.org/officeDocument/2006/relationships" id="258" r:id="R242709a248f248ba"/>
-    <p:sldId xmlns:r="http://schemas.openxmlformats.org/officeDocument/2006/relationships" id="259" r:id="R806b9504bc1b4a83"/>
-    <p:sldId xmlns:r="http://schemas.openxmlformats.org/officeDocument/2006/relationships" id="260" r:id="R831b208115734db8"/>
-    <p:sldId xmlns:r="http://schemas.openxmlformats.org/officeDocument/2006/relationships" id="261" r:id="R4c70e7aa67b64b9c"/>
-    <p:sldId xmlns:r="http://schemas.openxmlformats.org/officeDocument/2006/relationships" id="262" r:id="R5ae255de49564c62"/>
-    <p:sldId xmlns:r="http://schemas.openxmlformats.org/officeDocument/2006/relationships" id="263" r:id="Rff6ba0ebea524d7d"/>
-    <p:sldId xmlns:r="http://schemas.openxmlformats.org/officeDocument/2006/relationships" id="264" r:id="Rddc72d8aed3b404f"/>
-    <p:sldId xmlns:r="http://schemas.openxmlformats.org/officeDocument/2006/relationships" id="265" r:id="R2225d18a50304b51"/>
-    <p:sldId xmlns:r="http://schemas.openxmlformats.org/officeDocument/2006/relationships" id="266" r:id="R0ebf1e0bc29545d0"/>
-    <p:sldId xmlns:r="http://schemas.openxmlformats.org/officeDocument/2006/relationships" id="267" r:id="R8eac31e9d5904b9c"/>
-    <p:sldId xmlns:r="http://schemas.openxmlformats.org/officeDocument/2006/relationships" id="268" r:id="R0ab59e605f7c4aa8"/>
-    <p:sldId xmlns:r="http://schemas.openxmlformats.org/officeDocument/2006/relationships" id="269" r:id="Ra63f2d94e6724be0"/>
+    <p:sldId xmlns:r="http://schemas.openxmlformats.org/officeDocument/2006/relationships" id="256" r:id="R5f7db1fd12b34d02"/>
+    <p:sldId xmlns:r="http://schemas.openxmlformats.org/officeDocument/2006/relationships" id="257" r:id="Re341e864a55040de"/>
+    <p:sldId xmlns:r="http://schemas.openxmlformats.org/officeDocument/2006/relationships" id="258" r:id="R33e1cc46d7de4a23"/>
+    <p:sldId xmlns:r="http://schemas.openxmlformats.org/officeDocument/2006/relationships" id="259" r:id="R4211de1264274184"/>
+    <p:sldId xmlns:r="http://schemas.openxmlformats.org/officeDocument/2006/relationships" id="260" r:id="Rb65a4de717224545"/>
+    <p:sldId xmlns:r="http://schemas.openxmlformats.org/officeDocument/2006/relationships" id="261" r:id="R82ae9c0a400d4691"/>
+    <p:sldId xmlns:r="http://schemas.openxmlformats.org/officeDocument/2006/relationships" id="262" r:id="R565800049ee14a04"/>
+    <p:sldId xmlns:r="http://schemas.openxmlformats.org/officeDocument/2006/relationships" id="263" r:id="R5364c025fc64432b"/>
+    <p:sldId xmlns:r="http://schemas.openxmlformats.org/officeDocument/2006/relationships" id="264" r:id="R7649be52d6c04857"/>
+    <p:sldId xmlns:r="http://schemas.openxmlformats.org/officeDocument/2006/relationships" id="265" r:id="R3230a30f10274602"/>
+    <p:sldId xmlns:r="http://schemas.openxmlformats.org/officeDocument/2006/relationships" id="266" r:id="Rb1f502b288524a12"/>
+    <p:sldId xmlns:r="http://schemas.openxmlformats.org/officeDocument/2006/relationships" id="267" r:id="R56e1d2e764344455"/>
+    <p:sldId xmlns:r="http://schemas.openxmlformats.org/officeDocument/2006/relationships" id="268" r:id="R0671c6c9f6c84410"/>
+    <p:sldId xmlns:r="http://schemas.openxmlformats.org/officeDocument/2006/relationships" id="269" r:id="R4ee60707e23a4e69"/>
   </p:sldIdLst>
   <p:sldSz cx="12192000" cy="6858000"/>
   <p:notesSz cx="6858000" cy="9144000"/>
@@ -595,7 +595,7 @@
           <a:lstStyle xmlns:a="http://schemas.openxmlformats.org/drawingml/2006/main"/>
           <a:p xmlns:a="http://schemas.openxmlformats.org/drawingml/2006/main">
             <a:r>
-              <a:t>검증량은 업무 인수/규제 완전성을 뜻하지 않는다. Supplier 567 discovered -18 scenario discovery skips =549 executable passed, failures0 errors0. SIT current20=P2P6+QM6+RC6+restart2. Separate #44 source tooling checks: MCP26 runner57 Zig7 CLI smoke32. Native model acceptance separate. 출처: evidence.json 및 해시로 식별한 supplier/final-report.json, evidence/result.json. 원본 전체 로그는 coordinator 비공개 인수 bundle에 보존한다.</a:t>
+              <a:t>검증량은 업무 인수/규제 완전성을 뜻하지 않는다. Supplier 567 discovered -18 scenario discovery skips =549 executable passed, failures0 errors0. SIT current20=P2P6+QM6+RC6+restart2. Separate #44 tooling: MCP26 runner57 Zig7 CLI32. Final native source2d2a900 runner76/helper7/SIT20 pass, SIT before final logging-only Codex diagnostics. Full549 not repeated. Native acceptance incomplete. 출처: evidence.json 및 해시로 식별한 supplier/final-report.json, evidence/result.json. 원본 전체 로그는 coordinator 비공개 인수 bundle에 보존한다.</a:t>
             </a:r>
           </a:p>
         </p:txBody>
@@ -665,7 +665,7 @@
           <a:lstStyle xmlns:a="http://schemas.openxmlformats.org/drawingml/2006/main"/>
           <a:p xmlns:a="http://schemas.openxmlformats.org/drawingml/2006/main">
             <a:r>
-              <a:t>과거 2026-10-03 source cb04403 actual Claude UAT3 pass. 최신 source 0132e0a에 대한 5개 native UAT는 작성 시점에 진행 중. 비용과 token 모르면 null/unknown 유지. #35 actual client pending. 최신 기록은 coordinator 통합 시 docs15/16/17에 추가한다. 출처: docs/14_cli_and_runtime.md, docs/16_scenario_tests.md, docs/17_test_classification.md, evidence.json의 nativeUat.</a:t>
+              <a:t>최종 인수/harness source 2d2a900b59a8704e27a4462740196b2c4902829b, production baseline 0132e0a62ad9f086e5c70c5c857d4546f5921ef9. image sha256:aa055d76d0c8d44b9707c84726101e551ec123dc0dba714bea4746b02d4d4656, JAR 4cc3ed1977f72538b51e025b09937f4b122a19e6305f4d0f5a939d82cfbb3369, CLI/role/JAR unchanged. CLAUDE/claude-sonnet-5: P2P001 and002 PASS,004/QM001 FAIL,RC001 INCOMPLETE. P2P002 manager BLOCK reason scenario BLOCK, CaseOPEN/coordinatorABORTED, no separate original decision/work/Attention DB export. 004 PO17000 does not excuse final coordinator MODEL_PROCESS_FAILED and usageComplete=false. QM zero is CLI reported, not imputed. RC rawPASSED preserved but final native usage missing, no valid reacceptance. CODEX/gpt-5.6-sol catalogdefaultlow firstRun fails before proposal, all metrics andresolvedModel unknown, executionReadyfalse/accountingStatusPARTIAL. Current account/rateLimits/read AUTHENTICATION does not establish earlier failure cause. Human login refresh prepared, not executed. Known CLI costUSD12.661439 only, overallunknown. Historical 2026-10-03 cb04403 Claude3PASS does not establish current acceptance. Source: evidence.json, https://github.com/se0nghe0n/mulino-coreano-erp/blob/2d2a900b59a8704e27a4462740196b2c4902829b/docs/16_scenario_tests.md, https://github.com/se0nghe0n/mulino-coreano-erp/blob/2d2a900b59a8704e27a4462740196b2c4902829b/docs/17_test_classification.md.</a:t>
             </a:r>
           </a:p>
         </p:txBody>
@@ -805,7 +805,7 @@
           <a:lstStyle xmlns:a="http://schemas.openxmlformats.org/drawingml/2006/main"/>
           <a:p xmlns:a="http://schemas.openxmlformats.org/drawingml/2006/main">
             <a:r>
-              <a:t>10–15분 발표 제안. 구매에서 원료 품질과 추적을 연결하고 마지막에 증거/monitor로 같은Case responsibility를 보여준다. 실제 명령과 고정 business clock은 docs15/16, 분류 docs17. Current native UAT in flight; integration gate owned by coordinator. 출처: docs/15_demo_runbook.md, docs/16_scenario_tests.md, docs/17_test_classification.md, docs/portfolio/README.md. 발표 목적은 한국 현지화/인간 승인/지속 Case의 설계와 실제 local proof를 설명하는 것이다.</a:t>
+              <a:t>데모 runbook의 scripted/JAR proof와 현재 모델 인수를 구분한다. 최종 native source 2d2a900b59a8704e27a4462740196b2c4902829b, production baseline 0132e0a62ad9f086e5c70c5c857d4546f5921ef9. Valid Claude2PASS, 004/QMFAIL, RCINCOMPLETE and CodexFAIL. Known cost12.661439 only, overallunknown. Current Codex authmetadata error does not prove earlier cause. Verified human login refresh procedure prepared NOTexecuted. No recovery calls, production or actualclient35 acceptance. 출처: https://github.com/se0nghe0n/mulino-coreano-erp/blob/2d2a900b59a8704e27a4462740196b2c4902829b/docs/15_demo_runbook.md, https://github.com/se0nghe0n/mulino-coreano-erp/blob/2d2a900b59a8704e27a4462740196b2c4902829b/docs/16_scenario_tests.md, evidence.json.</a:t>
             </a:r>
           </a:p>
         </p:txBody>
@@ -1433,7 +1433,7 @@
   </p:cSld>
   <p:clrMap bg1="lt1" tx1="dk1" bg2="lt2" tx2="dk2" accent1="accent1" accent2="accent2" accent3="accent3" accent4="accent4" accent5="accent5" accent6="accent6" hlink="hlink" folHlink="folHlink"/>
   <p:sldLayoutIdLst>
-    <p:sldLayoutId xmlns:r="http://schemas.openxmlformats.org/officeDocument/2006/relationships" id="2147483649" r:id="R55b7070ad0464b3b"/>
+    <p:sldLayoutId xmlns:r="http://schemas.openxmlformats.org/officeDocument/2006/relationships" id="2147483649" r:id="Re278db9a657941c0"/>
   </p:sldLayoutIdLst>
   <p:txStyles>
     <p:titleStyle>
@@ -2166,7 +2166,7 @@
           <p:cNvPr id="6" name="">
             <a:extLst xmlns:a="http://schemas.openxmlformats.org/drawingml/2006/main">
               <a:ext uri="{FF2B5EF4-FFF2-40B4-BE49-F238E27FC236}">
-                <a16:creationId xmlns:a16="http://schemas.microsoft.com/office/drawing/2014/main" id="{46B217DD-6D33-4F71-AB22-E5A5A5260F93}"/>
+                <a16:creationId xmlns:a16="http://schemas.microsoft.com/office/drawing/2014/main" id="{8799E9F7-6142-4E3A-8ED2-68FD95AEBFCA}"/>
               </a:ext>
             </a:extLst>
           </p:cNvPr>
@@ -2223,7 +2223,7 @@
           <p:cNvPr id="2" name="">
             <a:extLst xmlns:a="http://schemas.openxmlformats.org/drawingml/2006/main">
               <a:ext uri="{FF2B5EF4-FFF2-40B4-BE49-F238E27FC236}">
-                <a16:creationId xmlns:a16="http://schemas.microsoft.com/office/drawing/2014/main" id="{2CBACB05-3817-4DBE-8B39-5B405CC8C561}"/>
+                <a16:creationId xmlns:a16="http://schemas.microsoft.com/office/drawing/2014/main" id="{44870D4A-872C-4C97-8DD3-96E9ED674A72}"/>
               </a:ext>
             </a:extLst>
           </p:cNvPr>
@@ -2280,7 +2280,7 @@
           <p:cNvPr id="3" name="">
             <a:extLst xmlns:a="http://schemas.openxmlformats.org/drawingml/2006/main">
               <a:ext uri="{FF2B5EF4-FFF2-40B4-BE49-F238E27FC236}">
-                <a16:creationId xmlns:a16="http://schemas.microsoft.com/office/drawing/2014/main" id="{5ACB0753-A267-47C6-BCBC-1BB9ABBAA023}"/>
+                <a16:creationId xmlns:a16="http://schemas.microsoft.com/office/drawing/2014/main" id="{16BE941E-4E80-4B9B-A9DC-80F6AAAE8578}"/>
               </a:ext>
             </a:extLst>
           </p:cNvPr>
@@ -2360,7 +2360,7 @@
           <p:cNvPr id="4" name="">
             <a:extLst xmlns:a="http://schemas.openxmlformats.org/drawingml/2006/main">
               <a:ext uri="{FF2B5EF4-FFF2-40B4-BE49-F238E27FC236}">
-                <a16:creationId xmlns:a16="http://schemas.microsoft.com/office/drawing/2014/main" id="{878FF910-AFEB-4D11-865A-12A732EAB14B}"/>
+                <a16:creationId xmlns:a16="http://schemas.microsoft.com/office/drawing/2014/main" id="{88BADEEA-6B74-4625-8222-764896828B56}"/>
               </a:ext>
             </a:extLst>
           </p:cNvPr>
@@ -2417,7 +2417,7 @@
           <p:cNvPr id="5" name="">
             <a:extLst xmlns:a="http://schemas.openxmlformats.org/drawingml/2006/main">
               <a:ext uri="{FF2B5EF4-FFF2-40B4-BE49-F238E27FC236}">
-                <a16:creationId xmlns:a16="http://schemas.microsoft.com/office/drawing/2014/main" id="{EBE6E9E1-9385-432F-9732-75E963669AEC}"/>
+                <a16:creationId xmlns:a16="http://schemas.microsoft.com/office/drawing/2014/main" id="{9C1DF49D-75A9-45B1-B11D-F2536ABCE7B0}"/>
               </a:ext>
             </a:extLst>
           </p:cNvPr>
@@ -2472,7 +2472,7 @@
     </p:spTree>
     <p:extLst>
       <p:ext uri="{BB962C8B-B14F-4D97-AF65-F5344CB8AC3E}">
-        <p14:creationId xmlns:p14="http://schemas.microsoft.com/office/powerpoint/2010/main" val="207729975"/>
+        <p14:creationId xmlns:p14="http://schemas.microsoft.com/office/powerpoint/2010/main" val="1957195764"/>
       </p:ext>
     </p:extLst>
   </p:cSld>
@@ -2503,7 +2503,7 @@
           <p:cNvPr id="5" name="">
             <a:extLst xmlns:a="http://schemas.openxmlformats.org/drawingml/2006/main">
               <a:ext uri="{FF2B5EF4-FFF2-40B4-BE49-F238E27FC236}">
-                <a16:creationId xmlns:a16="http://schemas.microsoft.com/office/drawing/2014/main" id="{CF31D524-D2D0-4D69-84D2-8D017D682447}"/>
+                <a16:creationId xmlns:a16="http://schemas.microsoft.com/office/drawing/2014/main" id="{13AF8638-125B-4166-B86B-618CE81F58D8}"/>
               </a:ext>
             </a:extLst>
           </p:cNvPr>
@@ -2560,7 +2560,7 @@
           <p:cNvPr id="2" name="">
             <a:extLst xmlns:a="http://schemas.openxmlformats.org/drawingml/2006/main">
               <a:ext uri="{FF2B5EF4-FFF2-40B4-BE49-F238E27FC236}">
-                <a16:creationId xmlns:a16="http://schemas.microsoft.com/office/drawing/2014/main" id="{DF4E5A76-89E7-4F57-ADF5-B42936A61E7C}"/>
+                <a16:creationId xmlns:a16="http://schemas.microsoft.com/office/drawing/2014/main" id="{FFFC5975-A056-4DFF-970C-D67CF4991F09}"/>
               </a:ext>
             </a:extLst>
           </p:cNvPr>
@@ -3084,7 +3084,7 @@
           <p:cNvPr id="4" name="">
             <a:extLst xmlns:a="http://schemas.openxmlformats.org/drawingml/2006/main">
               <a:ext uri="{FF2B5EF4-FFF2-40B4-BE49-F238E27FC236}">
-                <a16:creationId xmlns:a16="http://schemas.microsoft.com/office/drawing/2014/main" id="{586ED415-7E07-41AF-A382-6EBB93D2ED5C}"/>
+                <a16:creationId xmlns:a16="http://schemas.microsoft.com/office/drawing/2014/main" id="{1FF209C7-87FD-4531-98EF-9DD05BBEC26E}"/>
               </a:ext>
             </a:extLst>
           </p:cNvPr>
@@ -3139,7 +3139,7 @@
     </p:spTree>
     <p:extLst>
       <p:ext uri="{BB962C8B-B14F-4D97-AF65-F5344CB8AC3E}">
-        <p14:creationId xmlns:p14="http://schemas.microsoft.com/office/powerpoint/2010/main" val="574336522"/>
+        <p14:creationId xmlns:p14="http://schemas.microsoft.com/office/powerpoint/2010/main" val="2007796444"/>
       </p:ext>
     </p:extLst>
   </p:cSld>
@@ -3170,7 +3170,7 @@
           <p:cNvPr id="9" name="">
             <a:extLst xmlns:a="http://schemas.openxmlformats.org/drawingml/2006/main">
               <a:ext uri="{FF2B5EF4-FFF2-40B4-BE49-F238E27FC236}">
-                <a16:creationId xmlns:a16="http://schemas.microsoft.com/office/drawing/2014/main" id="{5E9FD016-A868-49DA-9C9E-1B6FE6331D61}"/>
+                <a16:creationId xmlns:a16="http://schemas.microsoft.com/office/drawing/2014/main" id="{6669A4FF-A07C-4ADE-AED1-360A82C29790}"/>
               </a:ext>
             </a:extLst>
           </p:cNvPr>
@@ -3227,7 +3227,7 @@
           <p:cNvPr id="2" name="">
             <a:extLst xmlns:a="http://schemas.openxmlformats.org/drawingml/2006/main">
               <a:ext uri="{FF2B5EF4-FFF2-40B4-BE49-F238E27FC236}">
-                <a16:creationId xmlns:a16="http://schemas.microsoft.com/office/drawing/2014/main" id="{596869CF-9B88-49BD-BD4D-F3174468570D}"/>
+                <a16:creationId xmlns:a16="http://schemas.microsoft.com/office/drawing/2014/main" id="{6A45095A-5C31-489E-8967-D38B060C6E16}"/>
               </a:ext>
             </a:extLst>
           </p:cNvPr>
@@ -3291,7 +3291,7 @@
         </p:xfrm>
         <a:graphic xmlns:a="http://schemas.openxmlformats.org/drawingml/2006/main">
           <a:graphicData uri="http://schemas.openxmlformats.org/drawingml/2006/chart">
-            <c:chart xmlns:r="http://schemas.openxmlformats.org/officeDocument/2006/relationships" xmlns:c="http://schemas.openxmlformats.org/drawingml/2006/chart" r:id="R9f3a6447f70146b9"/>
+            <c:chart xmlns:r="http://schemas.openxmlformats.org/officeDocument/2006/relationships" xmlns:c="http://schemas.openxmlformats.org/drawingml/2006/chart" r:id="R7bae05097eea4661"/>
           </a:graphicData>
         </a:graphic>
       </p:graphicFrame>
@@ -3300,7 +3300,7 @@
           <p:cNvPr id="4" name="">
             <a:extLst xmlns:a="http://schemas.openxmlformats.org/drawingml/2006/main">
               <a:ext uri="{FF2B5EF4-FFF2-40B4-BE49-F238E27FC236}">
-                <a16:creationId xmlns:a16="http://schemas.microsoft.com/office/drawing/2014/main" id="{229E5F36-431E-494A-979A-F94B845A19FE}"/>
+                <a16:creationId xmlns:a16="http://schemas.microsoft.com/office/drawing/2014/main" id="{A2E9918C-A8E1-4EC6-98D5-80EAA1A2F5EC}"/>
               </a:ext>
             </a:extLst>
           </p:cNvPr>
@@ -3357,7 +3357,7 @@
           <p:cNvPr id="5" name="">
             <a:extLst xmlns:a="http://schemas.openxmlformats.org/drawingml/2006/main">
               <a:ext uri="{FF2B5EF4-FFF2-40B4-BE49-F238E27FC236}">
-                <a16:creationId xmlns:a16="http://schemas.microsoft.com/office/drawing/2014/main" id="{57A173C8-D5BA-4E04-AD05-ECE6B473FB64}"/>
+                <a16:creationId xmlns:a16="http://schemas.microsoft.com/office/drawing/2014/main" id="{8D0D8402-2164-4F08-B525-26C8CE3BD330}"/>
               </a:ext>
             </a:extLst>
           </p:cNvPr>
@@ -3437,7 +3437,7 @@
           <p:cNvPr id="6" name="">
             <a:extLst xmlns:a="http://schemas.openxmlformats.org/drawingml/2006/main">
               <a:ext uri="{FF2B5EF4-FFF2-40B4-BE49-F238E27FC236}">
-                <a16:creationId xmlns:a16="http://schemas.microsoft.com/office/drawing/2014/main" id="{99E111FC-18EC-4C94-B0AE-C7D3ADCB36BB}"/>
+                <a16:creationId xmlns:a16="http://schemas.microsoft.com/office/drawing/2014/main" id="{DA336E77-0217-42BB-97C2-AB8B140B7B6B}"/>
               </a:ext>
             </a:extLst>
           </p:cNvPr>
@@ -3448,7 +3448,7 @@
         </p:nvSpPr>
         <p:spPr>
           <a:xfrm xmlns:a="http://schemas.openxmlformats.org/drawingml/2006/main">
-            <a:off x="7381875" y="3533775"/>
+            <a:off x="7381875" y="3381375"/>
             <a:ext cx="4095750" cy="495300"/>
           </a:xfrm>
           <a:prstGeom xmlns:a="http://schemas.openxmlformats.org/drawingml/2006/main" prst="rect">
@@ -3484,7 +3484,7 @@
                 <a:ea typeface="Apple SD Gothic Neo"/>
                 <a:cs typeface="Apple SD Gothic Neo"/>
               </a:rPr>
-              <a:t>#44 별도 도구 검증</a:t>
+              <a:t>최신 native harness 검증</a:t>
             </a:r>
           </a:p>
         </p:txBody>
@@ -3494,7 +3494,7 @@
           <p:cNvPr id="7" name="">
             <a:extLst xmlns:a="http://schemas.openxmlformats.org/drawingml/2006/main">
               <a:ext uri="{FF2B5EF4-FFF2-40B4-BE49-F238E27FC236}">
-                <a16:creationId xmlns:a16="http://schemas.microsoft.com/office/drawing/2014/main" id="{415CA50D-45EF-4B54-B4B1-4D897B762803}"/>
+                <a16:creationId xmlns:a16="http://schemas.microsoft.com/office/drawing/2014/main" id="{A4CE9346-6923-4163-821F-F3B292A77C80}"/>
               </a:ext>
             </a:extLst>
           </p:cNvPr>
@@ -3505,8 +3505,8 @@
         </p:nvSpPr>
         <p:spPr>
           <a:xfrm xmlns:a="http://schemas.openxmlformats.org/drawingml/2006/main">
-            <a:off x="7381875" y="4124325"/>
-            <a:ext cx="4095750" cy="762000"/>
+            <a:off x="7381875" y="3971925"/>
+            <a:ext cx="4095750" cy="1209675"/>
           </a:xfrm>
           <a:prstGeom xmlns:a="http://schemas.openxmlformats.org/drawingml/2006/main" prst="rect">
             <a:avLst/>
@@ -3541,7 +3541,7 @@
                 <a:ea typeface="Apple SD Gothic Neo"/>
                 <a:cs typeface="Apple SD Gothic Neo"/>
               </a:rPr>
-              <a:t>MCP 26 / runner 57</a:t>
+              <a:t>runner 76 / helper 7</a:t>
             </a:r>
           </a:p>
           <a:p xmlns:a="http://schemas.openxmlformats.org/drawingml/2006/main">
@@ -3564,7 +3564,30 @@
                 <a:ea typeface="Apple SD Gothic Neo"/>
                 <a:cs typeface="Apple SD Gothic Neo"/>
               </a:rPr>
-              <a:t>Zig 7 / CLI smoke 32</a:t>
+              <a:t>SIT 20 통과</a:t>
+            </a:r>
+          </a:p>
+          <a:p xmlns:a="http://schemas.openxmlformats.org/drawingml/2006/main">
+            <a:pPr>
+              <a:defRPr sz="1950" b="0">
+                <a:solidFill>
+                  <a:srgbClr val="142B2C"/>
+                </a:solidFill>
+                <a:latin typeface="Apple SD Gothic Neo"/>
+                <a:ea typeface="Apple SD Gothic Neo"/>
+                <a:cs typeface="Apple SD Gothic Neo"/>
+              </a:defRPr>
+            </a:pPr>
+            <a:r>
+              <a:rPr sz="1950" b="0">
+                <a:solidFill>
+                  <a:srgbClr val="142B2C"/>
+                </a:solidFill>
+                <a:latin typeface="Apple SD Gothic Neo"/>
+                <a:ea typeface="Apple SD Gothic Neo"/>
+                <a:cs typeface="Apple SD Gothic Neo"/>
+              </a:rPr>
+              <a:t>#44 MCP 26 / Zig 7 / CLI 32</a:t>
             </a:r>
           </a:p>
         </p:txBody>
@@ -3574,7 +3597,7 @@
           <p:cNvPr id="8" name="">
             <a:extLst xmlns:a="http://schemas.openxmlformats.org/drawingml/2006/main">
               <a:ext uri="{FF2B5EF4-FFF2-40B4-BE49-F238E27FC236}">
-                <a16:creationId xmlns:a16="http://schemas.microsoft.com/office/drawing/2014/main" id="{7FE52D52-75E1-4177-BF4E-28797FF520AA}"/>
+                <a16:creationId xmlns:a16="http://schemas.microsoft.com/office/drawing/2014/main" id="{5D72A8EF-BD2E-4BA6-94BD-CEB607647BE5}"/>
               </a:ext>
             </a:extLst>
           </p:cNvPr>
@@ -3629,7 +3652,7 @@
     </p:spTree>
     <p:extLst>
       <p:ext uri="{BB962C8B-B14F-4D97-AF65-F5344CB8AC3E}">
-        <p14:creationId xmlns:p14="http://schemas.microsoft.com/office/powerpoint/2010/main" val="28786448"/>
+        <p14:creationId xmlns:p14="http://schemas.microsoft.com/office/powerpoint/2010/main" val="1552606471"/>
       </p:ext>
     </p:extLst>
   </p:cSld>
@@ -3660,7 +3683,7 @@
           <p:cNvPr id="5" name="">
             <a:extLst xmlns:a="http://schemas.openxmlformats.org/drawingml/2006/main">
               <a:ext uri="{FF2B5EF4-FFF2-40B4-BE49-F238E27FC236}">
-                <a16:creationId xmlns:a16="http://schemas.microsoft.com/office/drawing/2014/main" id="{5B8DA901-7F20-4CA2-A299-DC6B9E4FE6E7}"/>
+                <a16:creationId xmlns:a16="http://schemas.microsoft.com/office/drawing/2014/main" id="{4AF621A8-27CC-456D-9F5F-A4E81C112F12}"/>
               </a:ext>
             </a:extLst>
           </p:cNvPr>
@@ -3707,7 +3730,7 @@
                 <a:ea typeface="Apple SD Gothic Neo"/>
                 <a:cs typeface="Apple SD Gothic Neo"/>
               </a:rPr>
-              <a:t>실모델 UAT의 시간·source 경계</a:t>
+              <a:t>현재 native UAT: 2 PASS, 전체 인수 미완료</a:t>
             </a:r>
           </a:p>
         </p:txBody>
@@ -3717,7 +3740,7 @@
           <p:cNvPr id="2" name="">
             <a:extLst xmlns:a="http://schemas.openxmlformats.org/drawingml/2006/main">
               <a:ext uri="{FF2B5EF4-FFF2-40B4-BE49-F238E27FC236}">
-                <a16:creationId xmlns:a16="http://schemas.microsoft.com/office/drawing/2014/main" id="{ABADBD2A-7B43-4826-A476-74D33697A47B}"/>
+                <a16:creationId xmlns:a16="http://schemas.microsoft.com/office/drawing/2014/main" id="{B31AD3CB-B521-4612-B19C-926CC3ACDB1E}"/>
               </a:ext>
             </a:extLst>
           </p:cNvPr>
@@ -3776,19 +3799,19 @@
           <p:nvPr/>
         </p:nvGraphicFramePr>
         <p:xfrm>
-          <a:off xmlns:a="http://schemas.openxmlformats.org/drawingml/2006/main" x="685800" y="1524000"/>
-          <a:ext xmlns:a="http://schemas.openxmlformats.org/drawingml/2006/main" cx="10820400" cy="3771900"/>
+          <a:off xmlns:a="http://schemas.openxmlformats.org/drawingml/2006/main" x="685800" y="1381125"/>
+          <a:ext xmlns:a="http://schemas.openxmlformats.org/drawingml/2006/main" cx="10820400" cy="4114800"/>
         </p:xfrm>
         <a:graphic xmlns:a="http://schemas.openxmlformats.org/drawingml/2006/main">
           <a:graphicData uri="http://schemas.openxmlformats.org/drawingml/2006/table">
             <a:tbl>
               <a:tblPr/>
               <a:tblGrid>
-                <a:gridCol w="2857500"/>
-                <a:gridCol w="4286250"/>
-                <a:gridCol w="3676650"/>
+                <a:gridCol w="2619375"/>
+                <a:gridCol w="6191250"/>
+                <a:gridCol w="2009775"/>
               </a:tblGrid>
-              <a:tr h="754380">
+              <a:tr h="587829">
                 <a:tc>
                   <a:txBody>
                     <a:bodyPr/>
@@ -3803,7 +3826,7 @@
                           <a:ea typeface="Apple SD Gothic Neo"/>
                           <a:cs typeface="Apple SD Gothic Neo"/>
                         </a:rPr>
-                        <a:t>계층</a:t>
+                        <a:t>runtime·Case</a:t>
                       </a:r>
                     </a:p>
                   </a:txBody>
@@ -3827,7 +3850,7 @@
                           <a:ea typeface="Apple SD Gothic Neo"/>
                           <a:cs typeface="Apple SD Gothic Neo"/>
                         </a:rPr>
-                        <a:t>관측</a:t>
+                        <a:t>최종 판정·업무 결과</a:t>
                       </a:r>
                     </a:p>
                   </a:txBody>
@@ -3851,7 +3874,7 @@
                           <a:ea typeface="Apple SD Gothic Neo"/>
                           <a:cs typeface="Apple SD Gothic Neo"/>
                         </a:rPr>
-                        <a:t>인수 의미</a:t>
+                        <a:t>보고 비용 USD</a:t>
                       </a:r>
                     </a:p>
                   </a:txBody>
@@ -3862,7 +3885,7 @@
                   </a:tcPr>
                 </a:tc>
               </a:tr>
-              <a:tr h="754380">
+              <a:tr h="587829">
                 <a:tc>
                   <a:txBody>
                     <a:bodyPr/>
@@ -3877,7 +3900,7 @@
                           <a:ea typeface="Apple SD Gothic Neo"/>
                           <a:cs typeface="Apple SD Gothic Neo"/>
                         </a:rPr>
-                        <a:t>과거 native UAT</a:t>
+                        <a:t>Claude P2P-001</a:t>
                       </a:r>
                     </a:p>
                   </a:txBody>
@@ -3901,20 +3924,7 @@
                           <a:ea typeface="Apple SD Gothic Neo"/>
                           <a:cs typeface="Apple SD Gothic Neo"/>
                         </a:rPr>
-                        <a:t>10월 3일 Claude 3건</a:t>
-                      </a:r>
-                    </a:p>
-                    <a:p>
-                      <a:r>
-                        <a:rPr sz="1875" b="0">
-                          <a:solidFill>
-                            <a:srgbClr val="142B2C"/>
-                          </a:solidFill>
-                          <a:latin typeface="Apple SD Gothic Neo"/>
-                          <a:ea typeface="Apple SD Gothic Neo"/>
-                          <a:cs typeface="Apple SD Gothic Neo"/>
-                        </a:rPr>
-                        <a:t>source cb04403</a:t>
+                        <a:t>PASS. PO 1 · 16,500원, coordinator DONE</a:t>
                       </a:r>
                     </a:p>
                   </a:txBody>
@@ -3938,7 +3948,7 @@
                           <a:ea typeface="Apple SD Gothic Neo"/>
                           <a:cs typeface="Apple SD Gothic Neo"/>
                         </a:rPr>
-                        <a:t>그 source의 과거 기록</a:t>
+                        <a:t>3.0874898</a:t>
                       </a:r>
                     </a:p>
                   </a:txBody>
@@ -3949,7 +3959,7 @@
                   </a:tcPr>
                 </a:tc>
               </a:tr>
-              <a:tr h="754380">
+              <a:tr h="587829">
                 <a:tc>
                   <a:txBody>
                     <a:bodyPr/>
@@ -3964,7 +3974,7 @@
                           <a:ea typeface="Apple SD Gothic Neo"/>
                           <a:cs typeface="Apple SD Gothic Neo"/>
                         </a:rPr>
-                        <a:t>현재 native UAT</a:t>
+                        <a:t>Claude P2P-002</a:t>
                       </a:r>
                     </a:p>
                   </a:txBody>
@@ -3988,20 +3998,7 @@
                           <a:ea typeface="Apple SD Gothic Neo"/>
                           <a:cs typeface="Apple SD Gothic Neo"/>
                         </a:rPr>
-                        <a:t>P2P-001 통과 / 나머지 4개 진행 중</a:t>
-                      </a:r>
-                    </a:p>
-                    <a:p>
-                      <a:r>
-                        <a:rPr sz="1875" b="0">
-                          <a:solidFill>
-                            <a:srgbClr val="142B2C"/>
-                          </a:solidFill>
-                          <a:latin typeface="Apple SD Gothic Neo"/>
-                          <a:ea typeface="Apple SD Gothic Neo"/>
-                          <a:cs typeface="Apple SD Gothic Neo"/>
-                        </a:rPr>
-                        <a:t>PO 1개, 16,500원, coordinator DONE</a:t>
+                        <a:t>PASS. PO·followup 0, MANAGER BLOCK</a:t>
                       </a:r>
                     </a:p>
                   </a:txBody>
@@ -4025,20 +4022,7 @@
                           <a:ea typeface="Apple SD Gothic Neo"/>
                           <a:cs typeface="Apple SD Gothic Neo"/>
                         </a:rPr>
-                        <a:t>현재 checkpoint</a:t>
-                      </a:r>
-                    </a:p>
-                    <a:p>
-                      <a:r>
-                        <a:rPr sz="1875" b="0">
-                          <a:solidFill>
-                            <a:srgbClr val="142B2C"/>
-                          </a:solidFill>
-                          <a:latin typeface="Apple SD Gothic Neo"/>
-                          <a:ea typeface="Apple SD Gothic Neo"/>
-                          <a:cs typeface="Apple SD Gothic Neo"/>
-                        </a:rPr>
-                        <a:t>전체 인수는 대기</a:t>
+                        <a:t>3.2866446</a:t>
                       </a:r>
                     </a:p>
                   </a:txBody>
@@ -4049,7 +4033,7 @@
                   </a:tcPr>
                 </a:tc>
               </a:tr>
-              <a:tr h="754380">
+              <a:tr h="587829">
                 <a:tc>
                   <a:txBody>
                     <a:bodyPr/>
@@ -4064,7 +4048,7 @@
                           <a:ea typeface="Apple SD Gothic Neo"/>
                           <a:cs typeface="Apple SD Gothic Neo"/>
                         </a:rPr>
-                        <a:t>실제 대화 클라이언트</a:t>
+                        <a:t>Claude P2P-004</a:t>
                       </a:r>
                     </a:p>
                   </a:txBody>
@@ -4088,7 +4072,7 @@
                           <a:ea typeface="Apple SD Gothic Neo"/>
                           <a:cs typeface="Apple SD Gothic Neo"/>
                         </a:rPr>
-                        <a:t>실제 #35 연결·UX 미인수</a:t>
+                        <a:t>FAIL. PO 17,000원 후 최종 조정 실패</a:t>
                       </a:r>
                     </a:p>
                   </a:txBody>
@@ -4112,7 +4096,7 @@
                           <a:ea typeface="Apple SD Gothic Neo"/>
                           <a:cs typeface="Apple SD Gothic Neo"/>
                         </a:rPr>
-                        <a:t>로컬 stdio와 별도</a:t>
+                        <a:t>6.2873046</a:t>
                       </a:r>
                     </a:p>
                   </a:txBody>
@@ -4123,7 +4107,7 @@
                   </a:tcPr>
                 </a:tc>
               </a:tr>
-              <a:tr h="754380">
+              <a:tr h="587829">
                 <a:tc>
                   <a:txBody>
                     <a:bodyPr/>
@@ -4138,7 +4122,7 @@
                           <a:ea typeface="Apple SD Gothic Neo"/>
                           <a:cs typeface="Apple SD Gothic Neo"/>
                         </a:rPr>
-                        <a:t>운영 배포</a:t>
+                        <a:t>Claude QM-001</a:t>
                       </a:r>
                     </a:p>
                   </a:txBody>
@@ -4162,7 +4146,7 @@
                           <a:ea typeface="Apple SD Gothic Neo"/>
                           <a:cs typeface="Apple SD Gothic Neo"/>
                         </a:rPr>
-                        <a:t>미실시</a:t>
+                        <a:t>FAIL. 검사 제안 전 실행 실패</a:t>
                       </a:r>
                     </a:p>
                   </a:txBody>
@@ -4186,7 +4170,155 @@
                           <a:ea typeface="Apple SD Gothic Neo"/>
                           <a:cs typeface="Apple SD Gothic Neo"/>
                         </a:rPr>
-                        <a:t>로컬 PoC 범위</a:t>
+                        <a:t>0 (CLI 보고)</a:t>
+                      </a:r>
+                    </a:p>
+                  </a:txBody>
+                  <a:tcPr marL="91440" marR="91440" marT="45720" marB="45720">
+                    <a:solidFill>
+                      <a:srgbClr val="EAF0EA"/>
+                    </a:solidFill>
+                  </a:tcPr>
+                </a:tc>
+              </a:tr>
+              <a:tr h="587829">
+                <a:tc>
+                  <a:txBody>
+                    <a:bodyPr/>
+                    <a:lstStyle/>
+                    <a:p>
+                      <a:r>
+                        <a:rPr sz="1875" b="0">
+                          <a:solidFill>
+                            <a:srgbClr val="142B2C"/>
+                          </a:solidFill>
+                          <a:latin typeface="Apple SD Gothic Neo"/>
+                          <a:ea typeface="Apple SD Gothic Neo"/>
+                          <a:cs typeface="Apple SD Gothic Neo"/>
+                        </a:rPr>
+                        <a:t>Claude RC-001</a:t>
+                      </a:r>
+                    </a:p>
+                  </a:txBody>
+                  <a:tcPr marL="91440" marR="91440" marT="45720" marB="45720">
+                    <a:solidFill>
+                      <a:srgbClr val="FAFAF6"/>
+                    </a:solidFill>
+                  </a:tcPr>
+                </a:tc>
+                <a:tc>
+                  <a:txBody>
+                    <a:bodyPr/>
+                    <a:lstStyle/>
+                    <a:p>
+                      <a:r>
+                        <a:rPr sz="1875" b="0">
+                          <a:solidFill>
+                            <a:srgbClr val="142B2C"/>
+                          </a:solidFill>
+                          <a:latin typeface="Apple SD Gothic Neo"/>
+                          <a:ea typeface="Apple SD Gothic Neo"/>
+                          <a:cs typeface="Apple SD Gothic Neo"/>
+                        </a:rPr>
+                        <a:t>INCOMPLETE. native 종료·사용량 누락</a:t>
+                      </a:r>
+                    </a:p>
+                  </a:txBody>
+                  <a:tcPr marL="91440" marR="91440" marT="45720" marB="45720">
+                    <a:solidFill>
+                      <a:srgbClr val="FAFAF6"/>
+                    </a:solidFill>
+                  </a:tcPr>
+                </a:tc>
+                <a:tc>
+                  <a:txBody>
+                    <a:bodyPr/>
+                    <a:lstStyle/>
+                    <a:p>
+                      <a:r>
+                        <a:rPr sz="1875" b="0">
+                          <a:solidFill>
+                            <a:srgbClr val="142B2C"/>
+                          </a:solidFill>
+                          <a:latin typeface="Apple SD Gothic Neo"/>
+                          <a:ea typeface="Apple SD Gothic Neo"/>
+                          <a:cs typeface="Apple SD Gothic Neo"/>
+                        </a:rPr>
+                        <a:t>unknown</a:t>
+                      </a:r>
+                    </a:p>
+                  </a:txBody>
+                  <a:tcPr marL="91440" marR="91440" marT="45720" marB="45720">
+                    <a:solidFill>
+                      <a:srgbClr val="FAFAF6"/>
+                    </a:solidFill>
+                  </a:tcPr>
+                </a:tc>
+              </a:tr>
+              <a:tr h="587829">
+                <a:tc>
+                  <a:txBody>
+                    <a:bodyPr/>
+                    <a:lstStyle/>
+                    <a:p>
+                      <a:r>
+                        <a:rPr sz="1875" b="0">
+                          <a:solidFill>
+                            <a:srgbClr val="142B2C"/>
+                          </a:solidFill>
+                          <a:latin typeface="Apple SD Gothic Neo"/>
+                          <a:ea typeface="Apple SD Gothic Neo"/>
+                          <a:cs typeface="Apple SD Gothic Neo"/>
+                        </a:rPr>
+                        <a:t>Codex P2P-001</a:t>
+                      </a:r>
+                    </a:p>
+                  </a:txBody>
+                  <a:tcPr marL="91440" marR="91440" marT="45720" marB="45720">
+                    <a:solidFill>
+                      <a:srgbClr val="EAF0EA"/>
+                    </a:solidFill>
+                  </a:tcPr>
+                </a:tc>
+                <a:tc>
+                  <a:txBody>
+                    <a:bodyPr/>
+                    <a:lstStyle/>
+                    <a:p>
+                      <a:r>
+                        <a:rPr sz="1875" b="0">
+                          <a:solidFill>
+                            <a:srgbClr val="142B2C"/>
+                          </a:solidFill>
+                          <a:latin typeface="Apple SD Gothic Neo"/>
+                          <a:ea typeface="Apple SD Gothic Neo"/>
+                          <a:cs typeface="Apple SD Gothic Neo"/>
+                        </a:rPr>
+                        <a:t>FAIL. 제안 전 실행 실패, 사용량 미보고</a:t>
+                      </a:r>
+                    </a:p>
+                  </a:txBody>
+                  <a:tcPr marL="91440" marR="91440" marT="45720" marB="45720">
+                    <a:solidFill>
+                      <a:srgbClr val="EAF0EA"/>
+                    </a:solidFill>
+                  </a:tcPr>
+                </a:tc>
+                <a:tc>
+                  <a:txBody>
+                    <a:bodyPr/>
+                    <a:lstStyle/>
+                    <a:p>
+                      <a:r>
+                        <a:rPr sz="1875" b="0">
+                          <a:solidFill>
+                            <a:srgbClr val="142B2C"/>
+                          </a:solidFill>
+                          <a:latin typeface="Apple SD Gothic Neo"/>
+                          <a:ea typeface="Apple SD Gothic Neo"/>
+                          <a:cs typeface="Apple SD Gothic Neo"/>
+                        </a:rPr>
+                        <a:t>unknown</a:t>
                       </a:r>
                     </a:p>
                   </a:txBody>
@@ -4206,7 +4338,7 @@
           <p:cNvPr id="4" name="">
             <a:extLst xmlns:a="http://schemas.openxmlformats.org/drawingml/2006/main">
               <a:ext uri="{FF2B5EF4-FFF2-40B4-BE49-F238E27FC236}">
-                <a16:creationId xmlns:a16="http://schemas.microsoft.com/office/drawing/2014/main" id="{EAB8FC97-6F03-4757-B0AC-FF1CF94627ED}"/>
+                <a16:creationId xmlns:a16="http://schemas.microsoft.com/office/drawing/2014/main" id="{73D5F753-F692-436F-B035-89126717922F}"/>
               </a:ext>
             </a:extLst>
           </p:cNvPr>
@@ -4253,7 +4385,7 @@
                 <a:ea typeface="Apple SD Gothic Neo"/>
                 <a:cs typeface="Apple SD Gothic Neo"/>
               </a:rPr>
-              <a:t>현재 P2P-001의 CLI 보고 비용은 USD 3.0874898이다. 전체 5건 결과·비용·tokens는 아직 미확정이다.</a:t>
+              <a:t>알려진 보고 비용 USD 12.661439, 전체 비용 unknown. 현재 Codex 접근 gate: AUTHENTICATION</a:t>
             </a:r>
           </a:p>
         </p:txBody>
@@ -4261,7 +4393,7 @@
     </p:spTree>
     <p:extLst>
       <p:ext uri="{BB962C8B-B14F-4D97-AF65-F5344CB8AC3E}">
-        <p14:creationId xmlns:p14="http://schemas.microsoft.com/office/powerpoint/2010/main" val="1983462570"/>
+        <p14:creationId xmlns:p14="http://schemas.microsoft.com/office/powerpoint/2010/main" val="302678"/>
       </p:ext>
     </p:extLst>
   </p:cSld>
@@ -4292,7 +4424,7 @@
           <p:cNvPr id="10" name="">
             <a:extLst xmlns:a="http://schemas.openxmlformats.org/drawingml/2006/main">
               <a:ext uri="{FF2B5EF4-FFF2-40B4-BE49-F238E27FC236}">
-                <a16:creationId xmlns:a16="http://schemas.microsoft.com/office/drawing/2014/main" id="{4D4A92B4-DCBA-46E5-B975-04579409C70F}"/>
+                <a16:creationId xmlns:a16="http://schemas.microsoft.com/office/drawing/2014/main" id="{72F8A784-0717-4E22-B958-561B6786750B}"/>
               </a:ext>
             </a:extLst>
           </p:cNvPr>
@@ -4349,7 +4481,7 @@
           <p:cNvPr id="2" name="">
             <a:extLst xmlns:a="http://schemas.openxmlformats.org/drawingml/2006/main">
               <a:ext uri="{FF2B5EF4-FFF2-40B4-BE49-F238E27FC236}">
-                <a16:creationId xmlns:a16="http://schemas.microsoft.com/office/drawing/2014/main" id="{74EDB2B6-42C7-40CE-8CF1-EF2CE817CE88}"/>
+                <a16:creationId xmlns:a16="http://schemas.microsoft.com/office/drawing/2014/main" id="{BA6B2FFD-19F8-42C3-9299-349023A5B2F7}"/>
               </a:ext>
             </a:extLst>
           </p:cNvPr>
@@ -4406,7 +4538,7 @@
           <p:cNvPr id="3" name="">
             <a:extLst xmlns:a="http://schemas.openxmlformats.org/drawingml/2006/main">
               <a:ext uri="{FF2B5EF4-FFF2-40B4-BE49-F238E27FC236}">
-                <a16:creationId xmlns:a16="http://schemas.microsoft.com/office/drawing/2014/main" id="{7064D5F7-11CF-4CE4-8F40-818F6062EB22}"/>
+                <a16:creationId xmlns:a16="http://schemas.microsoft.com/office/drawing/2014/main" id="{3F742531-D99D-4550-B3BD-3C145A51D664}"/>
               </a:ext>
             </a:extLst>
           </p:cNvPr>
@@ -4463,7 +4595,7 @@
           <p:cNvPr id="4" name="">
             <a:extLst xmlns:a="http://schemas.openxmlformats.org/drawingml/2006/main">
               <a:ext uri="{FF2B5EF4-FFF2-40B4-BE49-F238E27FC236}">
-                <a16:creationId xmlns:a16="http://schemas.microsoft.com/office/drawing/2014/main" id="{14983BDF-07F6-4C70-8229-06309E961623}"/>
+                <a16:creationId xmlns:a16="http://schemas.microsoft.com/office/drawing/2014/main" id="{A5C66684-416F-40EE-B5E4-1C26615AF0F5}"/>
               </a:ext>
             </a:extLst>
           </p:cNvPr>
@@ -4520,7 +4652,7 @@
           <p:cNvPr id="5" name="">
             <a:extLst xmlns:a="http://schemas.openxmlformats.org/drawingml/2006/main">
               <a:ext uri="{FF2B5EF4-FFF2-40B4-BE49-F238E27FC236}">
-                <a16:creationId xmlns:a16="http://schemas.microsoft.com/office/drawing/2014/main" id="{B91CC27D-59B5-4116-91B0-F3CF7F23D902}"/>
+                <a16:creationId xmlns:a16="http://schemas.microsoft.com/office/drawing/2014/main" id="{BBCAB269-72E4-45B0-8AA7-D5E442FEFB66}"/>
               </a:ext>
             </a:extLst>
           </p:cNvPr>
@@ -4577,7 +4709,7 @@
           <p:cNvPr id="6" name="">
             <a:extLst xmlns:a="http://schemas.openxmlformats.org/drawingml/2006/main">
               <a:ext uri="{FF2B5EF4-FFF2-40B4-BE49-F238E27FC236}">
-                <a16:creationId xmlns:a16="http://schemas.microsoft.com/office/drawing/2014/main" id="{1E85371D-0C72-4FCF-9BDB-24348D59E031}"/>
+                <a16:creationId xmlns:a16="http://schemas.microsoft.com/office/drawing/2014/main" id="{A2DE3CDA-D212-43A1-BFBD-F94FAB3C55D4}"/>
               </a:ext>
             </a:extLst>
           </p:cNvPr>
@@ -4634,7 +4766,7 @@
           <p:cNvPr id="7" name="">
             <a:extLst xmlns:a="http://schemas.openxmlformats.org/drawingml/2006/main">
               <a:ext uri="{FF2B5EF4-FFF2-40B4-BE49-F238E27FC236}">
-                <a16:creationId xmlns:a16="http://schemas.microsoft.com/office/drawing/2014/main" id="{69C9EAFB-2E69-4145-88CE-FB8FA8B243A1}"/>
+                <a16:creationId xmlns:a16="http://schemas.microsoft.com/office/drawing/2014/main" id="{D569291D-EC9C-4A90-A963-78426FC32AD3}"/>
               </a:ext>
             </a:extLst>
           </p:cNvPr>
@@ -4691,7 +4823,7 @@
           <p:cNvPr id="8" name="">
             <a:extLst xmlns:a="http://schemas.openxmlformats.org/drawingml/2006/main">
               <a:ext uri="{FF2B5EF4-FFF2-40B4-BE49-F238E27FC236}">
-                <a16:creationId xmlns:a16="http://schemas.microsoft.com/office/drawing/2014/main" id="{4D014447-273F-4FB4-907C-24F53EE19C90}"/>
+                <a16:creationId xmlns:a16="http://schemas.microsoft.com/office/drawing/2014/main" id="{96C2B4B2-DA46-4201-8856-00BBE57FB4CF}"/>
               </a:ext>
             </a:extLst>
           </p:cNvPr>
@@ -4748,7 +4880,7 @@
           <p:cNvPr id="9" name="">
             <a:extLst xmlns:a="http://schemas.openxmlformats.org/drawingml/2006/main">
               <a:ext uri="{FF2B5EF4-FFF2-40B4-BE49-F238E27FC236}">
-                <a16:creationId xmlns:a16="http://schemas.microsoft.com/office/drawing/2014/main" id="{C4DFC539-B87D-45E2-BD5E-41CC1CA13932}"/>
+                <a16:creationId xmlns:a16="http://schemas.microsoft.com/office/drawing/2014/main" id="{F376C74C-CF54-4EF6-9225-1A96BD9C398D}"/>
               </a:ext>
             </a:extLst>
           </p:cNvPr>
@@ -4803,7 +4935,7 @@
     </p:spTree>
     <p:extLst>
       <p:ext uri="{BB962C8B-B14F-4D97-AF65-F5344CB8AC3E}">
-        <p14:creationId xmlns:p14="http://schemas.microsoft.com/office/powerpoint/2010/main" val="1542612824"/>
+        <p14:creationId xmlns:p14="http://schemas.microsoft.com/office/powerpoint/2010/main" val="1963465298"/>
       </p:ext>
     </p:extLst>
   </p:cSld>
@@ -4834,7 +4966,7 @@
           <p:cNvPr id="10" name="">
             <a:extLst xmlns:a="http://schemas.openxmlformats.org/drawingml/2006/main">
               <a:ext uri="{FF2B5EF4-FFF2-40B4-BE49-F238E27FC236}">
-                <a16:creationId xmlns:a16="http://schemas.microsoft.com/office/drawing/2014/main" id="{5BAC0508-E42D-4906-94ED-27F2631082B5}"/>
+                <a16:creationId xmlns:a16="http://schemas.microsoft.com/office/drawing/2014/main" id="{4C7316EA-2760-4BFC-B7FE-0CCE40E6F000}"/>
               </a:ext>
             </a:extLst>
           </p:cNvPr>
@@ -4881,7 +5013,7 @@
                 <a:ea typeface="Apple SD Gothic Neo"/>
                 <a:cs typeface="Apple SD Gothic Neo"/>
               </a:rPr>
-              <a:t>데모 순서와 포트폴리오 인수</a:t>
+              <a:t>데모와 남은 runtime 인수 gate</a:t>
             </a:r>
           </a:p>
         </p:txBody>
@@ -4891,7 +5023,7 @@
           <p:cNvPr id="2" name="">
             <a:extLst xmlns:a="http://schemas.openxmlformats.org/drawingml/2006/main">
               <a:ext uri="{FF2B5EF4-FFF2-40B4-BE49-F238E27FC236}">
-                <a16:creationId xmlns:a16="http://schemas.microsoft.com/office/drawing/2014/main" id="{6DABC4F0-3C8E-4B12-A76A-CF5C26F4440B}"/>
+                <a16:creationId xmlns:a16="http://schemas.microsoft.com/office/drawing/2014/main" id="{0B18700B-C7D3-4A66-8F7D-B6BC99E19B23}"/>
               </a:ext>
             </a:extLst>
           </p:cNvPr>
@@ -4948,7 +5080,7 @@
           <p:cNvPr id="3" name="">
             <a:extLst xmlns:a="http://schemas.openxmlformats.org/drawingml/2006/main">
               <a:ext uri="{FF2B5EF4-FFF2-40B4-BE49-F238E27FC236}">
-                <a16:creationId xmlns:a16="http://schemas.microsoft.com/office/drawing/2014/main" id="{916EA74E-05E5-4C98-B86D-3A1EC3C8330A}"/>
+                <a16:creationId xmlns:a16="http://schemas.microsoft.com/office/drawing/2014/main" id="{D574AB4E-9650-4AC0-AF00-990EBA94201B}"/>
               </a:ext>
             </a:extLst>
           </p:cNvPr>
@@ -4995,7 +5127,7 @@
                 <a:ea typeface="Apple SD Gothic Neo"/>
                 <a:cs typeface="Apple SD Gothic Neo"/>
               </a:rPr>
-              <a:t>구매 승인에서 업무 지속성을 보여준다</a:t>
+              <a:t>구매 데모와 현재 모델 결과를 구분한다</a:t>
             </a:r>
           </a:p>
         </p:txBody>
@@ -5005,7 +5137,7 @@
           <p:cNvPr id="4" name="">
             <a:extLst xmlns:a="http://schemas.openxmlformats.org/drawingml/2006/main">
               <a:ext uri="{FF2B5EF4-FFF2-40B4-BE49-F238E27FC236}">
-                <a16:creationId xmlns:a16="http://schemas.microsoft.com/office/drawing/2014/main" id="{45C382F5-625A-4258-9CE0-34D75ED8E97A}"/>
+                <a16:creationId xmlns:a16="http://schemas.microsoft.com/office/drawing/2014/main" id="{43D2F1ED-F537-41B6-8825-19FC861E2108}"/>
               </a:ext>
             </a:extLst>
           </p:cNvPr>
@@ -5052,7 +5184,7 @@
                 <a:ea typeface="Apple SD Gothic Neo"/>
                 <a:cs typeface="Apple SD Gothic Neo"/>
               </a:rPr>
-              <a:t>제안·반려·승인·중복 요청을 PO 상태와 같은 Case로 설명한다.</a:t>
+              <a:t>001·002는 PASS다. 004는 발주가 있어도 최종 조정 실패로 FAIL이다.</a:t>
             </a:r>
           </a:p>
         </p:txBody>
@@ -5062,7 +5194,7 @@
           <p:cNvPr id="5" name="">
             <a:extLst xmlns:a="http://schemas.openxmlformats.org/drawingml/2006/main">
               <a:ext uri="{FF2B5EF4-FFF2-40B4-BE49-F238E27FC236}">
-                <a16:creationId xmlns:a16="http://schemas.microsoft.com/office/drawing/2014/main" id="{D71D9EB9-5F05-4378-AE70-FFD15039E019}"/>
+                <a16:creationId xmlns:a16="http://schemas.microsoft.com/office/drawing/2014/main" id="{F0842A37-3BE8-42A9-A584-C37064C97C1E}"/>
               </a:ext>
             </a:extLst>
           </p:cNvPr>
@@ -5109,7 +5241,7 @@
                 <a:ea typeface="Apple SD Gothic Neo"/>
                 <a:cs typeface="Apple SD Gothic Neo"/>
               </a:rPr>
-              <a:t>품질·리콜에서 적용 범위를 보여준다</a:t>
+              <a:t>품질·리콜의 미인수 결과를 보존한다</a:t>
             </a:r>
           </a:p>
         </p:txBody>
@@ -5119,7 +5251,7 @@
           <p:cNvPr id="6" name="">
             <a:extLst xmlns:a="http://schemas.openxmlformats.org/drawingml/2006/main">
               <a:ext uri="{FF2B5EF4-FFF2-40B4-BE49-F238E27FC236}">
-                <a16:creationId xmlns:a16="http://schemas.microsoft.com/office/drawing/2014/main" id="{C52E663B-6A79-45D7-A23E-F380DB09ADF4}"/>
+                <a16:creationId xmlns:a16="http://schemas.microsoft.com/office/drawing/2014/main" id="{999D2113-647A-46E3-97A4-11CEF0E3F8CB}"/>
               </a:ext>
             </a:extLst>
           </p:cNvPr>
@@ -5166,7 +5298,7 @@
                 <a:ea typeface="Apple SD Gothic Neo"/>
                 <a:cs typeface="Apple SD Gothic Neo"/>
               </a:rPr>
-              <a:t>QC·ADMIN 판단, 10개 LOT과 무관 LOT, OFFLINE 보고 초안을 대조한다.</a:t>
+              <a:t>QM은 검사 제안 전 FAIL, RC는 종료·사용량 누락으로 INCOMPLETE다.</a:t>
             </a:r>
           </a:p>
         </p:txBody>
@@ -5176,7 +5308,7 @@
           <p:cNvPr id="7" name="">
             <a:extLst xmlns:a="http://schemas.openxmlformats.org/drawingml/2006/main">
               <a:ext uri="{FF2B5EF4-FFF2-40B4-BE49-F238E27FC236}">
-                <a16:creationId xmlns:a16="http://schemas.microsoft.com/office/drawing/2014/main" id="{C3AB9E11-7B32-4461-881A-7C817F53D5A2}"/>
+                <a16:creationId xmlns:a16="http://schemas.microsoft.com/office/drawing/2014/main" id="{3CD76AE9-4AEE-4850-8F33-92D0B18938D7}"/>
               </a:ext>
             </a:extLst>
           </p:cNvPr>
@@ -5223,7 +5355,7 @@
                 <a:ea typeface="Apple SD Gothic Neo"/>
                 <a:cs typeface="Apple SD Gothic Neo"/>
               </a:rPr>
-              <a:t>증거·MONITOR에서 판단 근거를 보여준다</a:t>
+              <a:t>현재 접근 gate와 인간 절차를 명시한다</a:t>
             </a:r>
           </a:p>
         </p:txBody>
@@ -5233,7 +5365,7 @@
           <p:cNvPr id="8" name="">
             <a:extLst xmlns:a="http://schemas.openxmlformats.org/drawingml/2006/main">
               <a:ext uri="{FF2B5EF4-FFF2-40B4-BE49-F238E27FC236}">
-                <a16:creationId xmlns:a16="http://schemas.microsoft.com/office/drawing/2014/main" id="{C8883EDE-761F-4187-B11E-9F220879ECBC}"/>
+                <a16:creationId xmlns:a16="http://schemas.microsoft.com/office/drawing/2014/main" id="{ED7B8A03-F1A8-4DDA-8D8E-29F3B37BD804}"/>
               </a:ext>
             </a:extLst>
           </p:cNvPr>
@@ -5280,7 +5412,7 @@
                 <a:ea typeface="Apple SD Gothic Neo"/>
                 <a:cs typeface="Apple SD Gothic Neo"/>
               </a:rPr>
-              <a:t>충돌·successor·주의 항목을 확인한다. 현재 native·client 인수 결과를 별도로 제시한다.</a:t>
+              <a:t>Codex account 접근은 AUTHENTICATION이다. 인간 login 갱신 절차는 준비했고 실행하지 않았다.</a:t>
             </a:r>
           </a:p>
         </p:txBody>
@@ -5290,7 +5422,7 @@
           <p:cNvPr id="9" name="">
             <a:extLst xmlns:a="http://schemas.openxmlformats.org/drawingml/2006/main">
               <a:ext uri="{FF2B5EF4-FFF2-40B4-BE49-F238E27FC236}">
-                <a16:creationId xmlns:a16="http://schemas.microsoft.com/office/drawing/2014/main" id="{C3900215-200C-4287-B33A-7205535B225B}"/>
+                <a16:creationId xmlns:a16="http://schemas.microsoft.com/office/drawing/2014/main" id="{D5569BF2-DB5D-4F92-A50D-70386AD6F236}"/>
               </a:ext>
             </a:extLst>
           </p:cNvPr>
@@ -5337,7 +5469,7 @@
                 <a:ea typeface="Apple SD Gothic Neo"/>
                 <a:cs typeface="Apple SD Gothic Neo"/>
               </a:rPr>
-              <a:t>최종 인수 기준은 업무 결과·승인 경계·재개·사용량 기록이다. 실제 클라이언트 인수는 아직 남아 있다.</a:t>
+              <a:t>5개 native 인수·Codex parity·실제 클라이언트 #35는 미완료다. 과거 PASS를 현재 source로 이월하지 않는다.</a:t>
             </a:r>
           </a:p>
         </p:txBody>
@@ -5345,7 +5477,7 @@
     </p:spTree>
     <p:extLst>
       <p:ext uri="{BB962C8B-B14F-4D97-AF65-F5344CB8AC3E}">
-        <p14:creationId xmlns:p14="http://schemas.microsoft.com/office/powerpoint/2010/main" val="1723417238"/>
+        <p14:creationId xmlns:p14="http://schemas.microsoft.com/office/powerpoint/2010/main" val="1932185867"/>
       </p:ext>
     </p:extLst>
   </p:cSld>
@@ -5376,7 +5508,7 @@
           <p:cNvPr id="5" name="">
             <a:extLst xmlns:a="http://schemas.openxmlformats.org/drawingml/2006/main">
               <a:ext uri="{FF2B5EF4-FFF2-40B4-BE49-F238E27FC236}">
-                <a16:creationId xmlns:a16="http://schemas.microsoft.com/office/drawing/2014/main" id="{E7A1E066-22B0-4C23-B9BF-ADAD14F6475E}"/>
+                <a16:creationId xmlns:a16="http://schemas.microsoft.com/office/drawing/2014/main" id="{57C5651F-D85C-4A0D-B991-428C31136075}"/>
               </a:ext>
             </a:extLst>
           </p:cNvPr>
@@ -5433,7 +5565,7 @@
           <p:cNvPr id="2" name="">
             <a:extLst xmlns:a="http://schemas.openxmlformats.org/drawingml/2006/main">
               <a:ext uri="{FF2B5EF4-FFF2-40B4-BE49-F238E27FC236}">
-                <a16:creationId xmlns:a16="http://schemas.microsoft.com/office/drawing/2014/main" id="{792ED277-CB23-4F8A-96CD-A8EB460E42E1}"/>
+                <a16:creationId xmlns:a16="http://schemas.microsoft.com/office/drawing/2014/main" id="{F63824D1-8C53-4263-8EE1-BE0CD941B906}"/>
               </a:ext>
             </a:extLst>
           </p:cNvPr>
@@ -5957,7 +6089,7 @@
           <p:cNvPr id="4" name="">
             <a:extLst xmlns:a="http://schemas.openxmlformats.org/drawingml/2006/main">
               <a:ext uri="{FF2B5EF4-FFF2-40B4-BE49-F238E27FC236}">
-                <a16:creationId xmlns:a16="http://schemas.microsoft.com/office/drawing/2014/main" id="{791589FA-BB39-433A-94CC-C4263EC13893}"/>
+                <a16:creationId xmlns:a16="http://schemas.microsoft.com/office/drawing/2014/main" id="{3D5FE85B-2B92-4868-B72A-1F125755F541}"/>
               </a:ext>
             </a:extLst>
           </p:cNvPr>
@@ -6012,7 +6144,7 @@
     </p:spTree>
     <p:extLst>
       <p:ext uri="{BB962C8B-B14F-4D97-AF65-F5344CB8AC3E}">
-        <p14:creationId xmlns:p14="http://schemas.microsoft.com/office/powerpoint/2010/main" val="934768137"/>
+        <p14:creationId xmlns:p14="http://schemas.microsoft.com/office/powerpoint/2010/main" val="904963157"/>
       </p:ext>
     </p:extLst>
   </p:cSld>
@@ -6043,7 +6175,7 @@
           <p:cNvPr id="5" name="">
             <a:extLst xmlns:a="http://schemas.openxmlformats.org/drawingml/2006/main">
               <a:ext uri="{FF2B5EF4-FFF2-40B4-BE49-F238E27FC236}">
-                <a16:creationId xmlns:a16="http://schemas.microsoft.com/office/drawing/2014/main" id="{4E2B5AE9-529D-49D9-902F-EA9EB7834A73}"/>
+                <a16:creationId xmlns:a16="http://schemas.microsoft.com/office/drawing/2014/main" id="{D5A6BA8C-BF56-40A4-A1D9-2CAAE4828A7F}"/>
               </a:ext>
             </a:extLst>
           </p:cNvPr>
@@ -6100,7 +6232,7 @@
           <p:cNvPr id="2" name="">
             <a:extLst xmlns:a="http://schemas.openxmlformats.org/drawingml/2006/main">
               <a:ext uri="{FF2B5EF4-FFF2-40B4-BE49-F238E27FC236}">
-                <a16:creationId xmlns:a16="http://schemas.microsoft.com/office/drawing/2014/main" id="{ADB747EA-479A-42BF-AA14-672945476F50}"/>
+                <a16:creationId xmlns:a16="http://schemas.microsoft.com/office/drawing/2014/main" id="{EF27FB19-848B-4BAF-82F3-DBF28B9301BF}"/>
               </a:ext>
             </a:extLst>
           </p:cNvPr>
@@ -6698,7 +6830,7 @@
           <p:cNvPr id="4" name="">
             <a:extLst xmlns:a="http://schemas.openxmlformats.org/drawingml/2006/main">
               <a:ext uri="{FF2B5EF4-FFF2-40B4-BE49-F238E27FC236}">
-                <a16:creationId xmlns:a16="http://schemas.microsoft.com/office/drawing/2014/main" id="{500FB7A4-E827-4AF4-9F6C-E3EEE8871E00}"/>
+                <a16:creationId xmlns:a16="http://schemas.microsoft.com/office/drawing/2014/main" id="{25EC8ADE-2BA7-46A8-ADD7-0D1F01509FC4}"/>
               </a:ext>
             </a:extLst>
           </p:cNvPr>
@@ -6753,7 +6885,7 @@
     </p:spTree>
     <p:extLst>
       <p:ext uri="{BB962C8B-B14F-4D97-AF65-F5344CB8AC3E}">
-        <p14:creationId xmlns:p14="http://schemas.microsoft.com/office/powerpoint/2010/main" val="775929643"/>
+        <p14:creationId xmlns:p14="http://schemas.microsoft.com/office/powerpoint/2010/main" val="84698760"/>
       </p:ext>
     </p:extLst>
   </p:cSld>
@@ -6784,7 +6916,7 @@
           <p:cNvPr id="13" name="">
             <a:extLst xmlns:a="http://schemas.openxmlformats.org/drawingml/2006/main">
               <a:ext uri="{FF2B5EF4-FFF2-40B4-BE49-F238E27FC236}">
-                <a16:creationId xmlns:a16="http://schemas.microsoft.com/office/drawing/2014/main" id="{F81E0A8B-21BD-4F45-A777-EDDF249513EA}"/>
+                <a16:creationId xmlns:a16="http://schemas.microsoft.com/office/drawing/2014/main" id="{8084A84F-0792-44B9-9BBF-2887DF22E183}"/>
               </a:ext>
             </a:extLst>
           </p:cNvPr>
@@ -6841,7 +6973,7 @@
           <p:cNvPr id="2" name="">
             <a:extLst xmlns:a="http://schemas.openxmlformats.org/drawingml/2006/main">
               <a:ext uri="{FF2B5EF4-FFF2-40B4-BE49-F238E27FC236}">
-                <a16:creationId xmlns:a16="http://schemas.microsoft.com/office/drawing/2014/main" id="{45B636D2-05A2-45B1-BCC5-D7C5B09B6CFC}"/>
+                <a16:creationId xmlns:a16="http://schemas.microsoft.com/office/drawing/2014/main" id="{16012AC1-FC96-48B6-A45B-B835C85A9FA0}"/>
               </a:ext>
             </a:extLst>
           </p:cNvPr>
@@ -6898,7 +7030,7 @@
           <p:cNvPr id="3" name="">
             <a:extLst xmlns:a="http://schemas.openxmlformats.org/drawingml/2006/main">
               <a:ext uri="{FF2B5EF4-FFF2-40B4-BE49-F238E27FC236}">
-                <a16:creationId xmlns:a16="http://schemas.microsoft.com/office/drawing/2014/main" id="{1DF7D2F3-8AB4-4E09-9D04-03DC91D91971}"/>
+                <a16:creationId xmlns:a16="http://schemas.microsoft.com/office/drawing/2014/main" id="{1868333F-EED0-4C51-9778-8345A14975F0}"/>
               </a:ext>
             </a:extLst>
           </p:cNvPr>
@@ -6980,7 +7112,7 @@
           <p:cNvPr id="4" name="">
             <a:extLst xmlns:a="http://schemas.openxmlformats.org/drawingml/2006/main">
               <a:ext uri="{FF2B5EF4-FFF2-40B4-BE49-F238E27FC236}">
-                <a16:creationId xmlns:a16="http://schemas.microsoft.com/office/drawing/2014/main" id="{08150DA8-8BA7-47BA-BAE4-FAF2F5DDAD48}"/>
+                <a16:creationId xmlns:a16="http://schemas.microsoft.com/office/drawing/2014/main" id="{1D849E14-C877-4B14-A5F0-E47D5A260206}"/>
               </a:ext>
             </a:extLst>
           </p:cNvPr>
@@ -7062,7 +7194,7 @@
           <p:cNvPr id="5" name="">
             <a:extLst xmlns:a="http://schemas.openxmlformats.org/drawingml/2006/main">
               <a:ext uri="{FF2B5EF4-FFF2-40B4-BE49-F238E27FC236}">
-                <a16:creationId xmlns:a16="http://schemas.microsoft.com/office/drawing/2014/main" id="{7CFD9AA4-441F-4CA1-86C9-8FA214B30EA8}"/>
+                <a16:creationId xmlns:a16="http://schemas.microsoft.com/office/drawing/2014/main" id="{89C96DE7-AF2B-450D-85CE-B4C4B30CEB5E}"/>
               </a:ext>
             </a:extLst>
           </p:cNvPr>
@@ -7144,7 +7276,7 @@
           <p:cNvPr id="6" name="">
             <a:extLst xmlns:a="http://schemas.openxmlformats.org/drawingml/2006/main">
               <a:ext uri="{FF2B5EF4-FFF2-40B4-BE49-F238E27FC236}">
-                <a16:creationId xmlns:a16="http://schemas.microsoft.com/office/drawing/2014/main" id="{A584D320-9178-4524-BDF1-482A1E3EB89F}"/>
+                <a16:creationId xmlns:a16="http://schemas.microsoft.com/office/drawing/2014/main" id="{F5E3E65B-7469-4D96-B1CA-D81D1DC1FF0F}"/>
               </a:ext>
             </a:extLst>
           </p:cNvPr>
@@ -7174,7 +7306,7 @@
           <p:cNvPr id="7" name="">
             <a:extLst xmlns:a="http://schemas.openxmlformats.org/drawingml/2006/main">
               <a:ext uri="{FF2B5EF4-FFF2-40B4-BE49-F238E27FC236}">
-                <a16:creationId xmlns:a16="http://schemas.microsoft.com/office/drawing/2014/main" id="{74A75959-91E6-4C3E-883B-2C9DF8DD3B4D}"/>
+                <a16:creationId xmlns:a16="http://schemas.microsoft.com/office/drawing/2014/main" id="{24F8AD82-40C8-4708-8E4C-3A0B92BF76E0}"/>
               </a:ext>
             </a:extLst>
           </p:cNvPr>
@@ -7204,7 +7336,7 @@
           <p:cNvPr id="8" name="">
             <a:extLst xmlns:a="http://schemas.openxmlformats.org/drawingml/2006/main">
               <a:ext uri="{FF2B5EF4-FFF2-40B4-BE49-F238E27FC236}">
-                <a16:creationId xmlns:a16="http://schemas.microsoft.com/office/drawing/2014/main" id="{F1996565-2440-4D75-BFCE-337A6E8B96BF}"/>
+                <a16:creationId xmlns:a16="http://schemas.microsoft.com/office/drawing/2014/main" id="{EFEF2AA4-81EE-43C3-B551-44B4F67914A6}"/>
               </a:ext>
             </a:extLst>
           </p:cNvPr>
@@ -7234,7 +7366,7 @@
           <p:cNvPr id="9" name="">
             <a:extLst xmlns:a="http://schemas.openxmlformats.org/drawingml/2006/main">
               <a:ext uri="{FF2B5EF4-FFF2-40B4-BE49-F238E27FC236}">
-                <a16:creationId xmlns:a16="http://schemas.microsoft.com/office/drawing/2014/main" id="{79844184-B84B-4DBE-8155-1C2957F54BDC}"/>
+                <a16:creationId xmlns:a16="http://schemas.microsoft.com/office/drawing/2014/main" id="{AAB1622E-1E2C-4D1A-A993-C1AE9F69339A}"/>
               </a:ext>
             </a:extLst>
           </p:cNvPr>
@@ -7293,7 +7425,7 @@
           <p:cNvPr id="10" name="">
             <a:extLst xmlns:a="http://schemas.openxmlformats.org/drawingml/2006/main">
               <a:ext uri="{FF2B5EF4-FFF2-40B4-BE49-F238E27FC236}">
-                <a16:creationId xmlns:a16="http://schemas.microsoft.com/office/drawing/2014/main" id="{23A2FA32-2589-408D-B54F-E6F29A7635E6}"/>
+                <a16:creationId xmlns:a16="http://schemas.microsoft.com/office/drawing/2014/main" id="{22E48DEE-20E5-4D13-A54E-30B241D62347}"/>
               </a:ext>
             </a:extLst>
           </p:cNvPr>
@@ -7323,7 +7455,7 @@
           <p:cNvPr id="11" name="">
             <a:extLst xmlns:a="http://schemas.openxmlformats.org/drawingml/2006/main">
               <a:ext uri="{FF2B5EF4-FFF2-40B4-BE49-F238E27FC236}">
-                <a16:creationId xmlns:a16="http://schemas.microsoft.com/office/drawing/2014/main" id="{A669C103-F3D6-4257-BDF2-D326AA7BB33A}"/>
+                <a16:creationId xmlns:a16="http://schemas.microsoft.com/office/drawing/2014/main" id="{AC84E26E-2433-45FE-887E-A7A225EA23FE}"/>
               </a:ext>
             </a:extLst>
           </p:cNvPr>
@@ -7382,7 +7514,7 @@
           <p:cNvPr id="12" name="">
             <a:extLst xmlns:a="http://schemas.openxmlformats.org/drawingml/2006/main">
               <a:ext uri="{FF2B5EF4-FFF2-40B4-BE49-F238E27FC236}">
-                <a16:creationId xmlns:a16="http://schemas.microsoft.com/office/drawing/2014/main" id="{F784AA92-055C-4F50-A6E6-EC7B478C12F8}"/>
+                <a16:creationId xmlns:a16="http://schemas.microsoft.com/office/drawing/2014/main" id="{345846FC-FD8F-49B0-80A5-637606B6FEC8}"/>
               </a:ext>
             </a:extLst>
           </p:cNvPr>
@@ -7437,7 +7569,7 @@
     </p:spTree>
     <p:extLst>
       <p:ext uri="{BB962C8B-B14F-4D97-AF65-F5344CB8AC3E}">
-        <p14:creationId xmlns:p14="http://schemas.microsoft.com/office/powerpoint/2010/main" val="1307289512"/>
+        <p14:creationId xmlns:p14="http://schemas.microsoft.com/office/powerpoint/2010/main" val="1133555174"/>
       </p:ext>
     </p:extLst>
   </p:cSld>
@@ -7468,7 +7600,7 @@
           <p:cNvPr id="13" name="">
             <a:extLst xmlns:a="http://schemas.openxmlformats.org/drawingml/2006/main">
               <a:ext uri="{FF2B5EF4-FFF2-40B4-BE49-F238E27FC236}">
-                <a16:creationId xmlns:a16="http://schemas.microsoft.com/office/drawing/2014/main" id="{F899858B-2039-4C3C-8BE3-628FF32ECE85}"/>
+                <a16:creationId xmlns:a16="http://schemas.microsoft.com/office/drawing/2014/main" id="{9F12C7F8-43C7-4DCF-AC6B-9E3818400544}"/>
               </a:ext>
             </a:extLst>
           </p:cNvPr>
@@ -7525,7 +7657,7 @@
           <p:cNvPr id="2" name="">
             <a:extLst xmlns:a="http://schemas.openxmlformats.org/drawingml/2006/main">
               <a:ext uri="{FF2B5EF4-FFF2-40B4-BE49-F238E27FC236}">
-                <a16:creationId xmlns:a16="http://schemas.microsoft.com/office/drawing/2014/main" id="{0A581BC5-97CE-4413-84CB-F14E865EDB2F}"/>
+                <a16:creationId xmlns:a16="http://schemas.microsoft.com/office/drawing/2014/main" id="{3217B1E5-C974-439B-9AC1-5E339CEE05A1}"/>
               </a:ext>
             </a:extLst>
           </p:cNvPr>
@@ -7582,7 +7714,7 @@
           <p:cNvPr id="3" name="">
             <a:extLst xmlns:a="http://schemas.openxmlformats.org/drawingml/2006/main">
               <a:ext uri="{FF2B5EF4-FFF2-40B4-BE49-F238E27FC236}">
-                <a16:creationId xmlns:a16="http://schemas.microsoft.com/office/drawing/2014/main" id="{5348F13F-66CC-4DD2-8A58-D367F5DEE6B6}"/>
+                <a16:creationId xmlns:a16="http://schemas.microsoft.com/office/drawing/2014/main" id="{E87B71E6-DABB-43B5-98A3-A53D055EE4E7}"/>
               </a:ext>
             </a:extLst>
           </p:cNvPr>
@@ -7664,7 +7796,7 @@
           <p:cNvPr id="4" name="">
             <a:extLst xmlns:a="http://schemas.openxmlformats.org/drawingml/2006/main">
               <a:ext uri="{FF2B5EF4-FFF2-40B4-BE49-F238E27FC236}">
-                <a16:creationId xmlns:a16="http://schemas.microsoft.com/office/drawing/2014/main" id="{7FC50041-3407-4DB5-BED7-3E6B37FD5C52}"/>
+                <a16:creationId xmlns:a16="http://schemas.microsoft.com/office/drawing/2014/main" id="{F37B0114-F6A6-4F08-8937-F709D8577536}"/>
               </a:ext>
             </a:extLst>
           </p:cNvPr>
@@ -7694,7 +7826,7 @@
           <p:cNvPr id="5" name="">
             <a:extLst xmlns:a="http://schemas.openxmlformats.org/drawingml/2006/main">
               <a:ext uri="{FF2B5EF4-FFF2-40B4-BE49-F238E27FC236}">
-                <a16:creationId xmlns:a16="http://schemas.microsoft.com/office/drawing/2014/main" id="{FD220F1D-4F66-4B80-B674-375B302C1D8D}"/>
+                <a16:creationId xmlns:a16="http://schemas.microsoft.com/office/drawing/2014/main" id="{765FA9C3-45E3-4A7B-9E0C-26263F885287}"/>
               </a:ext>
             </a:extLst>
           </p:cNvPr>
@@ -7776,7 +7908,7 @@
           <p:cNvPr id="6" name="">
             <a:extLst xmlns:a="http://schemas.openxmlformats.org/drawingml/2006/main">
               <a:ext uri="{FF2B5EF4-FFF2-40B4-BE49-F238E27FC236}">
-                <a16:creationId xmlns:a16="http://schemas.microsoft.com/office/drawing/2014/main" id="{374BBD55-C7E8-427D-A9C8-FD05C3A44AA2}"/>
+                <a16:creationId xmlns:a16="http://schemas.microsoft.com/office/drawing/2014/main" id="{894747A2-E5AC-4208-A9BF-44CFEF3621D7}"/>
               </a:ext>
             </a:extLst>
           </p:cNvPr>
@@ -7806,7 +7938,7 @@
           <p:cNvPr id="7" name="">
             <a:extLst xmlns:a="http://schemas.openxmlformats.org/drawingml/2006/main">
               <a:ext uri="{FF2B5EF4-FFF2-40B4-BE49-F238E27FC236}">
-                <a16:creationId xmlns:a16="http://schemas.microsoft.com/office/drawing/2014/main" id="{95AEF907-3C69-4B69-A217-AF8009C47070}"/>
+                <a16:creationId xmlns:a16="http://schemas.microsoft.com/office/drawing/2014/main" id="{113C2B7B-4F6B-4556-ABF8-E05CF2652D7A}"/>
               </a:ext>
             </a:extLst>
           </p:cNvPr>
@@ -7888,7 +8020,7 @@
           <p:cNvPr id="8" name="">
             <a:extLst xmlns:a="http://schemas.openxmlformats.org/drawingml/2006/main">
               <a:ext uri="{FF2B5EF4-FFF2-40B4-BE49-F238E27FC236}">
-                <a16:creationId xmlns:a16="http://schemas.microsoft.com/office/drawing/2014/main" id="{CAA93B54-2E98-43CF-84FE-A572B32515AF}"/>
+                <a16:creationId xmlns:a16="http://schemas.microsoft.com/office/drawing/2014/main" id="{A09A8D9A-2C43-4B72-96FE-619B90247621}"/>
               </a:ext>
             </a:extLst>
           </p:cNvPr>
@@ -7918,7 +8050,7 @@
           <p:cNvPr id="9" name="">
             <a:extLst xmlns:a="http://schemas.openxmlformats.org/drawingml/2006/main">
               <a:ext uri="{FF2B5EF4-FFF2-40B4-BE49-F238E27FC236}">
-                <a16:creationId xmlns:a16="http://schemas.microsoft.com/office/drawing/2014/main" id="{CE62DE45-632B-4CF7-8E8B-FBF28673DEA9}"/>
+                <a16:creationId xmlns:a16="http://schemas.microsoft.com/office/drawing/2014/main" id="{DDC66083-48E6-40BB-9E1F-C012EEC69738}"/>
               </a:ext>
             </a:extLst>
           </p:cNvPr>
@@ -8000,7 +8132,7 @@
           <p:cNvPr id="10" name="">
             <a:extLst xmlns:a="http://schemas.openxmlformats.org/drawingml/2006/main">
               <a:ext uri="{FF2B5EF4-FFF2-40B4-BE49-F238E27FC236}">
-                <a16:creationId xmlns:a16="http://schemas.microsoft.com/office/drawing/2014/main" id="{C8B0ECD5-AB4B-4196-AB28-3377679D49FF}"/>
+                <a16:creationId xmlns:a16="http://schemas.microsoft.com/office/drawing/2014/main" id="{5472F88E-F545-4BD8-AAAD-26E1FA2393EA}"/>
               </a:ext>
             </a:extLst>
           </p:cNvPr>
@@ -8057,7 +8189,7 @@
           <p:cNvPr id="11" name="">
             <a:extLst xmlns:a="http://schemas.openxmlformats.org/drawingml/2006/main">
               <a:ext uri="{FF2B5EF4-FFF2-40B4-BE49-F238E27FC236}">
-                <a16:creationId xmlns:a16="http://schemas.microsoft.com/office/drawing/2014/main" id="{34789BC6-BC6D-4FA3-A996-6B0A8DFF3577}"/>
+                <a16:creationId xmlns:a16="http://schemas.microsoft.com/office/drawing/2014/main" id="{2EC7D1AE-8458-40A4-A140-DEE73F4C0855}"/>
               </a:ext>
             </a:extLst>
           </p:cNvPr>
@@ -8114,7 +8246,7 @@
           <p:cNvPr id="12" name="">
             <a:extLst xmlns:a="http://schemas.openxmlformats.org/drawingml/2006/main">
               <a:ext uri="{FF2B5EF4-FFF2-40B4-BE49-F238E27FC236}">
-                <a16:creationId xmlns:a16="http://schemas.microsoft.com/office/drawing/2014/main" id="{A045818F-9A44-4487-AC52-72263ABC7107}"/>
+                <a16:creationId xmlns:a16="http://schemas.microsoft.com/office/drawing/2014/main" id="{E253724C-6A2F-4038-BBE1-DEA34999D482}"/>
               </a:ext>
             </a:extLst>
           </p:cNvPr>
@@ -8169,7 +8301,7 @@
     </p:spTree>
     <p:extLst>
       <p:ext uri="{BB962C8B-B14F-4D97-AF65-F5344CB8AC3E}">
-        <p14:creationId xmlns:p14="http://schemas.microsoft.com/office/powerpoint/2010/main" val="812572839"/>
+        <p14:creationId xmlns:p14="http://schemas.microsoft.com/office/powerpoint/2010/main" val="2054261624"/>
       </p:ext>
     </p:extLst>
   </p:cSld>
@@ -8200,7 +8332,7 @@
           <p:cNvPr id="10" name="">
             <a:extLst xmlns:a="http://schemas.openxmlformats.org/drawingml/2006/main">
               <a:ext uri="{FF2B5EF4-FFF2-40B4-BE49-F238E27FC236}">
-                <a16:creationId xmlns:a16="http://schemas.microsoft.com/office/drawing/2014/main" id="{B45F4C74-F291-42B6-A801-FF42E874C5A6}"/>
+                <a16:creationId xmlns:a16="http://schemas.microsoft.com/office/drawing/2014/main" id="{FF66BDFD-0561-4A11-84CF-978222851FD9}"/>
               </a:ext>
             </a:extLst>
           </p:cNvPr>
@@ -8257,7 +8389,7 @@
           <p:cNvPr id="2" name="">
             <a:extLst xmlns:a="http://schemas.openxmlformats.org/drawingml/2006/main">
               <a:ext uri="{FF2B5EF4-FFF2-40B4-BE49-F238E27FC236}">
-                <a16:creationId xmlns:a16="http://schemas.microsoft.com/office/drawing/2014/main" id="{192A1380-AF16-4BDA-B01A-AF60906D130F}"/>
+                <a16:creationId xmlns:a16="http://schemas.microsoft.com/office/drawing/2014/main" id="{4F00AA6B-4736-4371-9956-9AE06477A3A9}"/>
               </a:ext>
             </a:extLst>
           </p:cNvPr>
@@ -8314,7 +8446,7 @@
           <p:cNvPr id="3" name="">
             <a:extLst xmlns:a="http://schemas.openxmlformats.org/drawingml/2006/main">
               <a:ext uri="{FF2B5EF4-FFF2-40B4-BE49-F238E27FC236}">
-                <a16:creationId xmlns:a16="http://schemas.microsoft.com/office/drawing/2014/main" id="{E864D83B-DF63-44A1-AFE9-58B20A972818}"/>
+                <a16:creationId xmlns:a16="http://schemas.microsoft.com/office/drawing/2014/main" id="{E39A27DD-BC0D-44F0-9AA9-5CA6D7006A21}"/>
               </a:ext>
             </a:extLst>
           </p:cNvPr>
@@ -8371,7 +8503,7 @@
           <p:cNvPr id="4" name="">
             <a:extLst xmlns:a="http://schemas.openxmlformats.org/drawingml/2006/main">
               <a:ext uri="{FF2B5EF4-FFF2-40B4-BE49-F238E27FC236}">
-                <a16:creationId xmlns:a16="http://schemas.microsoft.com/office/drawing/2014/main" id="{B7B98A63-7914-490A-B722-8E12FDC52B52}"/>
+                <a16:creationId xmlns:a16="http://schemas.microsoft.com/office/drawing/2014/main" id="{6D63B68F-CBC7-438B-969D-385C76B7A542}"/>
               </a:ext>
             </a:extLst>
           </p:cNvPr>
@@ -8428,7 +8560,7 @@
           <p:cNvPr id="5" name="">
             <a:extLst xmlns:a="http://schemas.openxmlformats.org/drawingml/2006/main">
               <a:ext uri="{FF2B5EF4-FFF2-40B4-BE49-F238E27FC236}">
-                <a16:creationId xmlns:a16="http://schemas.microsoft.com/office/drawing/2014/main" id="{5647FC22-D001-4056-97EA-87DEC63C04B0}"/>
+                <a16:creationId xmlns:a16="http://schemas.microsoft.com/office/drawing/2014/main" id="{8C276699-7A53-4A0C-B328-3A8083007DBC}"/>
               </a:ext>
             </a:extLst>
           </p:cNvPr>
@@ -8485,7 +8617,7 @@
           <p:cNvPr id="6" name="">
             <a:extLst xmlns:a="http://schemas.openxmlformats.org/drawingml/2006/main">
               <a:ext uri="{FF2B5EF4-FFF2-40B4-BE49-F238E27FC236}">
-                <a16:creationId xmlns:a16="http://schemas.microsoft.com/office/drawing/2014/main" id="{D9C4008A-C8BF-40AB-8FA4-1A26E2EEEDF7}"/>
+                <a16:creationId xmlns:a16="http://schemas.microsoft.com/office/drawing/2014/main" id="{B0E53FC4-7B8A-4085-A50C-A864B80CF49F}"/>
               </a:ext>
             </a:extLst>
           </p:cNvPr>
@@ -8542,7 +8674,7 @@
           <p:cNvPr id="7" name="">
             <a:extLst xmlns:a="http://schemas.openxmlformats.org/drawingml/2006/main">
               <a:ext uri="{FF2B5EF4-FFF2-40B4-BE49-F238E27FC236}">
-                <a16:creationId xmlns:a16="http://schemas.microsoft.com/office/drawing/2014/main" id="{99092D01-CB8E-47CF-8A43-849147CAED0F}"/>
+                <a16:creationId xmlns:a16="http://schemas.microsoft.com/office/drawing/2014/main" id="{7747C8FC-09C4-47E1-AE2B-E0E953C5C378}"/>
               </a:ext>
             </a:extLst>
           </p:cNvPr>
@@ -8599,7 +8731,7 @@
           <p:cNvPr id="8" name="">
             <a:extLst xmlns:a="http://schemas.openxmlformats.org/drawingml/2006/main">
               <a:ext uri="{FF2B5EF4-FFF2-40B4-BE49-F238E27FC236}">
-                <a16:creationId xmlns:a16="http://schemas.microsoft.com/office/drawing/2014/main" id="{F7F7DB1C-ADA0-4E80-957A-670B6216480D}"/>
+                <a16:creationId xmlns:a16="http://schemas.microsoft.com/office/drawing/2014/main" id="{232D61AF-9547-45D4-8EEC-C5743BB3C681}"/>
               </a:ext>
             </a:extLst>
           </p:cNvPr>
@@ -8656,7 +8788,7 @@
           <p:cNvPr id="9" name="">
             <a:extLst xmlns:a="http://schemas.openxmlformats.org/drawingml/2006/main">
               <a:ext uri="{FF2B5EF4-FFF2-40B4-BE49-F238E27FC236}">
-                <a16:creationId xmlns:a16="http://schemas.microsoft.com/office/drawing/2014/main" id="{2391716C-1139-44EC-B4A1-454A73785E08}"/>
+                <a16:creationId xmlns:a16="http://schemas.microsoft.com/office/drawing/2014/main" id="{741A9402-12B6-4DCF-A895-B7183EDA7B29}"/>
               </a:ext>
             </a:extLst>
           </p:cNvPr>
@@ -8711,7 +8843,7 @@
     </p:spTree>
     <p:extLst>
       <p:ext uri="{BB962C8B-B14F-4D97-AF65-F5344CB8AC3E}">
-        <p14:creationId xmlns:p14="http://schemas.microsoft.com/office/powerpoint/2010/main" val="2016749066"/>
+        <p14:creationId xmlns:p14="http://schemas.microsoft.com/office/powerpoint/2010/main" val="296239952"/>
       </p:ext>
     </p:extLst>
   </p:cSld>
@@ -8742,7 +8874,7 @@
           <p:cNvPr id="10" name="">
             <a:extLst xmlns:a="http://schemas.openxmlformats.org/drawingml/2006/main">
               <a:ext uri="{FF2B5EF4-FFF2-40B4-BE49-F238E27FC236}">
-                <a16:creationId xmlns:a16="http://schemas.microsoft.com/office/drawing/2014/main" id="{6553D424-5B27-480D-9548-5E0BA2747007}"/>
+                <a16:creationId xmlns:a16="http://schemas.microsoft.com/office/drawing/2014/main" id="{D53092A6-AD20-45B3-8512-B1619EE3E077}"/>
               </a:ext>
             </a:extLst>
           </p:cNvPr>
@@ -8799,7 +8931,7 @@
           <p:cNvPr id="2" name="">
             <a:extLst xmlns:a="http://schemas.openxmlformats.org/drawingml/2006/main">
               <a:ext uri="{FF2B5EF4-FFF2-40B4-BE49-F238E27FC236}">
-                <a16:creationId xmlns:a16="http://schemas.microsoft.com/office/drawing/2014/main" id="{D309A0B8-34CC-41A6-93F4-E3D8D2B2F34A}"/>
+                <a16:creationId xmlns:a16="http://schemas.microsoft.com/office/drawing/2014/main" id="{CB789B08-0A2F-47CE-B373-86A282F46BFE}"/>
               </a:ext>
             </a:extLst>
           </p:cNvPr>
@@ -8856,7 +8988,7 @@
           <p:cNvPr id="3" name="">
             <a:extLst xmlns:a="http://schemas.openxmlformats.org/drawingml/2006/main">
               <a:ext uri="{FF2B5EF4-FFF2-40B4-BE49-F238E27FC236}">
-                <a16:creationId xmlns:a16="http://schemas.microsoft.com/office/drawing/2014/main" id="{DE171352-D3E0-48C8-AAE9-853DA3999D27}"/>
+                <a16:creationId xmlns:a16="http://schemas.microsoft.com/office/drawing/2014/main" id="{AFCABE88-30C1-414E-B5E6-6A1C9AF03489}"/>
               </a:ext>
             </a:extLst>
           </p:cNvPr>
@@ -8913,7 +9045,7 @@
           <p:cNvPr id="4" name="">
             <a:extLst xmlns:a="http://schemas.openxmlformats.org/drawingml/2006/main">
               <a:ext uri="{FF2B5EF4-FFF2-40B4-BE49-F238E27FC236}">
-                <a16:creationId xmlns:a16="http://schemas.microsoft.com/office/drawing/2014/main" id="{E74E5B95-F40F-4905-9CEE-3761BCC460DE}"/>
+                <a16:creationId xmlns:a16="http://schemas.microsoft.com/office/drawing/2014/main" id="{4A1ECA75-0880-45EA-BCC5-A6FE080CBAD0}"/>
               </a:ext>
             </a:extLst>
           </p:cNvPr>
@@ -8970,7 +9102,7 @@
           <p:cNvPr id="5" name="">
             <a:extLst xmlns:a="http://schemas.openxmlformats.org/drawingml/2006/main">
               <a:ext uri="{FF2B5EF4-FFF2-40B4-BE49-F238E27FC236}">
-                <a16:creationId xmlns:a16="http://schemas.microsoft.com/office/drawing/2014/main" id="{DA313014-09E0-420D-A81E-A9D35F76B939}"/>
+                <a16:creationId xmlns:a16="http://schemas.microsoft.com/office/drawing/2014/main" id="{0FB2ECD8-F0E7-4206-BE02-0851F754C446}"/>
               </a:ext>
             </a:extLst>
           </p:cNvPr>
@@ -9027,7 +9159,7 @@
           <p:cNvPr id="6" name="">
             <a:extLst xmlns:a="http://schemas.openxmlformats.org/drawingml/2006/main">
               <a:ext uri="{FF2B5EF4-FFF2-40B4-BE49-F238E27FC236}">
-                <a16:creationId xmlns:a16="http://schemas.microsoft.com/office/drawing/2014/main" id="{4C7ACE10-A192-40EE-81B8-096564E15C2A}"/>
+                <a16:creationId xmlns:a16="http://schemas.microsoft.com/office/drawing/2014/main" id="{C6D7A978-CA87-4C8C-85E0-9BC698D1402E}"/>
               </a:ext>
             </a:extLst>
           </p:cNvPr>
@@ -9084,7 +9216,7 @@
           <p:cNvPr id="7" name="">
             <a:extLst xmlns:a="http://schemas.openxmlformats.org/drawingml/2006/main">
               <a:ext uri="{FF2B5EF4-FFF2-40B4-BE49-F238E27FC236}">
-                <a16:creationId xmlns:a16="http://schemas.microsoft.com/office/drawing/2014/main" id="{4FF61D81-CF0B-4587-8610-1041CEE279EA}"/>
+                <a16:creationId xmlns:a16="http://schemas.microsoft.com/office/drawing/2014/main" id="{5F5C0D5E-8E23-4BC2-984F-A13537458962}"/>
               </a:ext>
             </a:extLst>
           </p:cNvPr>
@@ -9141,7 +9273,7 @@
           <p:cNvPr id="8" name="">
             <a:extLst xmlns:a="http://schemas.openxmlformats.org/drawingml/2006/main">
               <a:ext uri="{FF2B5EF4-FFF2-40B4-BE49-F238E27FC236}">
-                <a16:creationId xmlns:a16="http://schemas.microsoft.com/office/drawing/2014/main" id="{CA793F46-9495-4FB5-A508-5BD02CC19A96}"/>
+                <a16:creationId xmlns:a16="http://schemas.microsoft.com/office/drawing/2014/main" id="{69061FC5-9F7A-4CDF-AC98-ED7EC1A6A7F6}"/>
               </a:ext>
             </a:extLst>
           </p:cNvPr>
@@ -9188,7 +9320,7 @@
                 <a:ea typeface="Apple SD Gothic Neo"/>
                 <a:cs typeface="Apple SD Gothic Neo"/>
               </a:rPr>
-              <a:t>scripted QM SIT 6건 통과. 실제 모델 UAT는 현재 진행 중이다.</a:t>
+              <a:t>scripted QM SIT 6건 통과. 현재 native QM은 검사 제안 전 실행 실패로 FAIL이다.</a:t>
             </a:r>
           </a:p>
         </p:txBody>
@@ -9198,7 +9330,7 @@
           <p:cNvPr id="9" name="">
             <a:extLst xmlns:a="http://schemas.openxmlformats.org/drawingml/2006/main">
               <a:ext uri="{FF2B5EF4-FFF2-40B4-BE49-F238E27FC236}">
-                <a16:creationId xmlns:a16="http://schemas.microsoft.com/office/drawing/2014/main" id="{4A48B157-F043-462D-BE97-B63AC1A6AF3B}"/>
+                <a16:creationId xmlns:a16="http://schemas.microsoft.com/office/drawing/2014/main" id="{46CAAA49-6E65-484B-9BC4-97EE8DB8D02B}"/>
               </a:ext>
             </a:extLst>
           </p:cNvPr>
@@ -9253,7 +9385,7 @@
     </p:spTree>
     <p:extLst>
       <p:ext uri="{BB962C8B-B14F-4D97-AF65-F5344CB8AC3E}">
-        <p14:creationId xmlns:p14="http://schemas.microsoft.com/office/powerpoint/2010/main" val="293705651"/>
+        <p14:creationId xmlns:p14="http://schemas.microsoft.com/office/powerpoint/2010/main" val="838041523"/>
       </p:ext>
     </p:extLst>
   </p:cSld>
@@ -9284,7 +9416,7 @@
           <p:cNvPr id="5" name="">
             <a:extLst xmlns:a="http://schemas.openxmlformats.org/drawingml/2006/main">
               <a:ext uri="{FF2B5EF4-FFF2-40B4-BE49-F238E27FC236}">
-                <a16:creationId xmlns:a16="http://schemas.microsoft.com/office/drawing/2014/main" id="{EE78B4B9-D2C1-47A0-AD96-84D9239A5858}"/>
+                <a16:creationId xmlns:a16="http://schemas.microsoft.com/office/drawing/2014/main" id="{A2904FE1-8B1A-4681-81BC-1A563699DDBC}"/>
               </a:ext>
             </a:extLst>
           </p:cNvPr>
@@ -9341,7 +9473,7 @@
           <p:cNvPr id="2" name="">
             <a:extLst xmlns:a="http://schemas.openxmlformats.org/drawingml/2006/main">
               <a:ext uri="{FF2B5EF4-FFF2-40B4-BE49-F238E27FC236}">
-                <a16:creationId xmlns:a16="http://schemas.microsoft.com/office/drawing/2014/main" id="{B32BAAE1-C747-41DE-B71A-7728BCE2A7F1}"/>
+                <a16:creationId xmlns:a16="http://schemas.microsoft.com/office/drawing/2014/main" id="{0BAA0F0F-5859-4741-BC37-D1B58AAAE2B3}"/>
               </a:ext>
             </a:extLst>
           </p:cNvPr>
@@ -9865,7 +9997,7 @@
           <p:cNvPr id="4" name="">
             <a:extLst xmlns:a="http://schemas.openxmlformats.org/drawingml/2006/main">
               <a:ext uri="{FF2B5EF4-FFF2-40B4-BE49-F238E27FC236}">
-                <a16:creationId xmlns:a16="http://schemas.microsoft.com/office/drawing/2014/main" id="{2A0152C1-DEBB-4D96-AB2F-63CD41D515AB}"/>
+                <a16:creationId xmlns:a16="http://schemas.microsoft.com/office/drawing/2014/main" id="{7A66F5D1-1CD7-4B15-BB5D-22A59E765F8E}"/>
               </a:ext>
             </a:extLst>
           </p:cNvPr>
@@ -9920,7 +10052,7 @@
     </p:spTree>
     <p:extLst>
       <p:ext uri="{BB962C8B-B14F-4D97-AF65-F5344CB8AC3E}">
-        <p14:creationId xmlns:p14="http://schemas.microsoft.com/office/powerpoint/2010/main" val="204489930"/>
+        <p14:creationId xmlns:p14="http://schemas.microsoft.com/office/powerpoint/2010/main" val="908953900"/>
       </p:ext>
     </p:extLst>
   </p:cSld>
@@ -9951,7 +10083,7 @@
           <p:cNvPr id="10" name="">
             <a:extLst xmlns:a="http://schemas.openxmlformats.org/drawingml/2006/main">
               <a:ext uri="{FF2B5EF4-FFF2-40B4-BE49-F238E27FC236}">
-                <a16:creationId xmlns:a16="http://schemas.microsoft.com/office/drawing/2014/main" id="{5A409A69-282C-49AD-AF80-A7E6F7D6C8B4}"/>
+                <a16:creationId xmlns:a16="http://schemas.microsoft.com/office/drawing/2014/main" id="{CB721724-C2F0-415C-AF2D-84DA81E6FCFB}"/>
               </a:ext>
             </a:extLst>
           </p:cNvPr>
@@ -10008,7 +10140,7 @@
           <p:cNvPr id="2" name="">
             <a:extLst xmlns:a="http://schemas.openxmlformats.org/drawingml/2006/main">
               <a:ext uri="{FF2B5EF4-FFF2-40B4-BE49-F238E27FC236}">
-                <a16:creationId xmlns:a16="http://schemas.microsoft.com/office/drawing/2014/main" id="{28625ECA-9076-4549-838B-5B074799640E}"/>
+                <a16:creationId xmlns:a16="http://schemas.microsoft.com/office/drawing/2014/main" id="{A313AF6F-C0C5-4CE8-A1A5-6B234D4252B7}"/>
               </a:ext>
             </a:extLst>
           </p:cNvPr>
@@ -10065,7 +10197,7 @@
           <p:cNvPr id="3" name="">
             <a:extLst xmlns:a="http://schemas.openxmlformats.org/drawingml/2006/main">
               <a:ext uri="{FF2B5EF4-FFF2-40B4-BE49-F238E27FC236}">
-                <a16:creationId xmlns:a16="http://schemas.microsoft.com/office/drawing/2014/main" id="{857688C7-208E-47CA-A5E1-554E15607523}"/>
+                <a16:creationId xmlns:a16="http://schemas.microsoft.com/office/drawing/2014/main" id="{9FFD5A4F-5125-4A6E-859C-7A8485CF614E}"/>
               </a:ext>
             </a:extLst>
           </p:cNvPr>
@@ -10122,7 +10254,7 @@
           <p:cNvPr id="4" name="">
             <a:extLst xmlns:a="http://schemas.openxmlformats.org/drawingml/2006/main">
               <a:ext uri="{FF2B5EF4-FFF2-40B4-BE49-F238E27FC236}">
-                <a16:creationId xmlns:a16="http://schemas.microsoft.com/office/drawing/2014/main" id="{F92F7747-E162-4B6F-AD37-3C72BF136F0D}"/>
+                <a16:creationId xmlns:a16="http://schemas.microsoft.com/office/drawing/2014/main" id="{1BAEC68C-A0AE-4B9C-956B-487CB29FA579}"/>
               </a:ext>
             </a:extLst>
           </p:cNvPr>
@@ -10179,7 +10311,7 @@
           <p:cNvPr id="5" name="">
             <a:extLst xmlns:a="http://schemas.openxmlformats.org/drawingml/2006/main">
               <a:ext uri="{FF2B5EF4-FFF2-40B4-BE49-F238E27FC236}">
-                <a16:creationId xmlns:a16="http://schemas.microsoft.com/office/drawing/2014/main" id="{4E8E529D-6923-4ED9-8C27-9981F31A8040}"/>
+                <a16:creationId xmlns:a16="http://schemas.microsoft.com/office/drawing/2014/main" id="{F299AA91-09EE-41B0-944D-328D3CAFAE51}"/>
               </a:ext>
             </a:extLst>
           </p:cNvPr>
@@ -10236,7 +10368,7 @@
           <p:cNvPr id="6" name="">
             <a:extLst xmlns:a="http://schemas.openxmlformats.org/drawingml/2006/main">
               <a:ext uri="{FF2B5EF4-FFF2-40B4-BE49-F238E27FC236}">
-                <a16:creationId xmlns:a16="http://schemas.microsoft.com/office/drawing/2014/main" id="{90270AB8-BCC5-4777-819D-2D1DAF43EDA4}"/>
+                <a16:creationId xmlns:a16="http://schemas.microsoft.com/office/drawing/2014/main" id="{9B83E838-FDBD-4A23-90D0-58D8E2DACF17}"/>
               </a:ext>
             </a:extLst>
           </p:cNvPr>
@@ -10293,7 +10425,7 @@
           <p:cNvPr id="7" name="">
             <a:extLst xmlns:a="http://schemas.openxmlformats.org/drawingml/2006/main">
               <a:ext uri="{FF2B5EF4-FFF2-40B4-BE49-F238E27FC236}">
-                <a16:creationId xmlns:a16="http://schemas.microsoft.com/office/drawing/2014/main" id="{5FD2C2CC-4F53-426C-AB85-7D5DC8E5CB31}"/>
+                <a16:creationId xmlns:a16="http://schemas.microsoft.com/office/drawing/2014/main" id="{D7FADCD5-85D2-4A74-9369-3FE8E2436D3C}"/>
               </a:ext>
             </a:extLst>
           </p:cNvPr>
@@ -10350,7 +10482,7 @@
           <p:cNvPr id="8" name="">
             <a:extLst xmlns:a="http://schemas.openxmlformats.org/drawingml/2006/main">
               <a:ext uri="{FF2B5EF4-FFF2-40B4-BE49-F238E27FC236}">
-                <a16:creationId xmlns:a16="http://schemas.microsoft.com/office/drawing/2014/main" id="{60A82200-436C-453D-A852-2E592F209906}"/>
+                <a16:creationId xmlns:a16="http://schemas.microsoft.com/office/drawing/2014/main" id="{0FC38AFB-CA67-49AD-A4CF-B59BD4A53CF3}"/>
               </a:ext>
             </a:extLst>
           </p:cNvPr>
@@ -10407,7 +10539,7 @@
           <p:cNvPr id="9" name="">
             <a:extLst xmlns:a="http://schemas.openxmlformats.org/drawingml/2006/main">
               <a:ext uri="{FF2B5EF4-FFF2-40B4-BE49-F238E27FC236}">
-                <a16:creationId xmlns:a16="http://schemas.microsoft.com/office/drawing/2014/main" id="{D32F2B5B-911F-4D12-A458-6A94C0302A7E}"/>
+                <a16:creationId xmlns:a16="http://schemas.microsoft.com/office/drawing/2014/main" id="{9773D3BC-9586-4560-88D3-195A47C8CE88}"/>
               </a:ext>
             </a:extLst>
           </p:cNvPr>
@@ -10462,7 +10594,7 @@
     </p:spTree>
     <p:extLst>
       <p:ext uri="{BB962C8B-B14F-4D97-AF65-F5344CB8AC3E}">
-        <p14:creationId xmlns:p14="http://schemas.microsoft.com/office/powerpoint/2010/main" val="730515820"/>
+        <p14:creationId xmlns:p14="http://schemas.microsoft.com/office/powerpoint/2010/main" val="790764881"/>
       </p:ext>
     </p:extLst>
   </p:cSld>

--- a/docs/portfolio/mulino-coreano-portfolio-ko.pptx
+++ b/docs/portfolio/mulino-coreano-portfolio-ko.pptx
@@ -2,26 +2,26 @@
 <file path=ppt/presentation.xml><?xml version="1.0" encoding="utf-8"?>
 <p:presentation xmlns:p="http://schemas.openxmlformats.org/presentationml/2006/main">
   <p:sldMasterIdLst>
-    <p:sldMasterId xmlns:r="http://schemas.openxmlformats.org/officeDocument/2006/relationships" id="2147483648" r:id="Rbcc3ce8e02624350"/>
+    <p:sldMasterId xmlns:r="http://schemas.openxmlformats.org/officeDocument/2006/relationships" id="2147483648" r:id="R8bac25ac660c44dc"/>
   </p:sldMasterIdLst>
   <p:notesMasterIdLst>
-    <p:notesMasterId xmlns:r="http://schemas.openxmlformats.org/officeDocument/2006/relationships" r:id="R470da54f270f46d3"/>
+    <p:notesMasterId xmlns:r="http://schemas.openxmlformats.org/officeDocument/2006/relationships" r:id="R9261039a96664751"/>
   </p:notesMasterIdLst>
   <p:sldIdLst>
-    <p:sldId xmlns:r="http://schemas.openxmlformats.org/officeDocument/2006/relationships" id="256" r:id="R5f7db1fd12b34d02"/>
-    <p:sldId xmlns:r="http://schemas.openxmlformats.org/officeDocument/2006/relationships" id="257" r:id="Re341e864a55040de"/>
-    <p:sldId xmlns:r="http://schemas.openxmlformats.org/officeDocument/2006/relationships" id="258" r:id="R33e1cc46d7de4a23"/>
-    <p:sldId xmlns:r="http://schemas.openxmlformats.org/officeDocument/2006/relationships" id="259" r:id="R4211de1264274184"/>
-    <p:sldId xmlns:r="http://schemas.openxmlformats.org/officeDocument/2006/relationships" id="260" r:id="Rb65a4de717224545"/>
-    <p:sldId xmlns:r="http://schemas.openxmlformats.org/officeDocument/2006/relationships" id="261" r:id="R82ae9c0a400d4691"/>
-    <p:sldId xmlns:r="http://schemas.openxmlformats.org/officeDocument/2006/relationships" id="262" r:id="R565800049ee14a04"/>
-    <p:sldId xmlns:r="http://schemas.openxmlformats.org/officeDocument/2006/relationships" id="263" r:id="R5364c025fc64432b"/>
-    <p:sldId xmlns:r="http://schemas.openxmlformats.org/officeDocument/2006/relationships" id="264" r:id="R7649be52d6c04857"/>
-    <p:sldId xmlns:r="http://schemas.openxmlformats.org/officeDocument/2006/relationships" id="265" r:id="R3230a30f10274602"/>
-    <p:sldId xmlns:r="http://schemas.openxmlformats.org/officeDocument/2006/relationships" id="266" r:id="Rb1f502b288524a12"/>
-    <p:sldId xmlns:r="http://schemas.openxmlformats.org/officeDocument/2006/relationships" id="267" r:id="R56e1d2e764344455"/>
-    <p:sldId xmlns:r="http://schemas.openxmlformats.org/officeDocument/2006/relationships" id="268" r:id="R0671c6c9f6c84410"/>
-    <p:sldId xmlns:r="http://schemas.openxmlformats.org/officeDocument/2006/relationships" id="269" r:id="R4ee60707e23a4e69"/>
+    <p:sldId xmlns:r="http://schemas.openxmlformats.org/officeDocument/2006/relationships" id="256" r:id="Rae107a6a45a34846"/>
+    <p:sldId xmlns:r="http://schemas.openxmlformats.org/officeDocument/2006/relationships" id="257" r:id="Rddd62883cc9a4169"/>
+    <p:sldId xmlns:r="http://schemas.openxmlformats.org/officeDocument/2006/relationships" id="258" r:id="Rb48144da15f242f8"/>
+    <p:sldId xmlns:r="http://schemas.openxmlformats.org/officeDocument/2006/relationships" id="259" r:id="Rca5d0f7e7d714083"/>
+    <p:sldId xmlns:r="http://schemas.openxmlformats.org/officeDocument/2006/relationships" id="260" r:id="R4652c4ef3f4a4827"/>
+    <p:sldId xmlns:r="http://schemas.openxmlformats.org/officeDocument/2006/relationships" id="261" r:id="R8c0b14575d584320"/>
+    <p:sldId xmlns:r="http://schemas.openxmlformats.org/officeDocument/2006/relationships" id="262" r:id="Ra392661835cd4b99"/>
+    <p:sldId xmlns:r="http://schemas.openxmlformats.org/officeDocument/2006/relationships" id="263" r:id="Rac448e6e721e4da3"/>
+    <p:sldId xmlns:r="http://schemas.openxmlformats.org/officeDocument/2006/relationships" id="264" r:id="Rc4fee66328704028"/>
+    <p:sldId xmlns:r="http://schemas.openxmlformats.org/officeDocument/2006/relationships" id="265" r:id="R1dbeee1b89ed4ea1"/>
+    <p:sldId xmlns:r="http://schemas.openxmlformats.org/officeDocument/2006/relationships" id="266" r:id="R3dd1e4229bf44ee6"/>
+    <p:sldId xmlns:r="http://schemas.openxmlformats.org/officeDocument/2006/relationships" id="267" r:id="Rc2b21a20447c4e2a"/>
+    <p:sldId xmlns:r="http://schemas.openxmlformats.org/officeDocument/2006/relationships" id="268" r:id="R60cbf2d887fc4bce"/>
+    <p:sldId xmlns:r="http://schemas.openxmlformats.org/officeDocument/2006/relationships" id="269" r:id="R4c58882b311c4595"/>
   </p:sldIdLst>
   <p:sldSz cx="12192000" cy="6858000"/>
   <p:notesSz cx="6858000" cy="9144000"/>
@@ -595,7 +595,7 @@
           <a:lstStyle xmlns:a="http://schemas.openxmlformats.org/drawingml/2006/main"/>
           <a:p xmlns:a="http://schemas.openxmlformats.org/drawingml/2006/main">
             <a:r>
-              <a:t>검증량은 업무 인수/규제 완전성을 뜻하지 않는다. Supplier 567 discovered -18 scenario discovery skips =549 executable passed, failures0 errors0. SIT current20=P2P6+QM6+RC6+restart2. Separate #44 tooling: MCP26 runner57 Zig7 CLI32. Final native source2d2a900 runner76/helper7/SIT20 pass, SIT before final logging-only Codex diagnostics. Full549 not repeated. Native acceptance incomplete. 출처: evidence.json 및 해시로 식별한 supplier/final-report.json, evidence/result.json. 원본 전체 로그는 coordinator 비공개 인수 bundle에 보존한다.</a:t>
+              <a:t>검증량은 업무 인수/규제 완전성을 뜻하지 않는다. Combined validated baseline fe6a51fadd2493018da59babd4a2eea908c2931f: clean test bootJar sitTest,569 discovered/18skip/551 executablePASS, failures0 errors0,20SITPASS/0fail/0skip,8m58s, modelcalls0, JARunchanged. Earlier Supplier0132 checkpoint567/18skip/549PASS remains historical. SIT20=P2P6+QM6+RC6+restart2. Separate #44 tooling: MCP26 runner57 Zig7 CLI32. Final native source2d2a900 runner76/helper7/SIT20 pass, SIT before final logging-only Codex diagnostics. Native worker did not repeat full549 at2d; subsequent combinedfe6 source passed551. Native acceptance remains incomplete. 출처: evidence.json 및 해시로 식별한 supplier/final-report.json, evidence/result.json. 원본 전체 로그는 coordinator 비공개 인수 bundle에 보존한다.</a:t>
             </a:r>
           </a:p>
         </p:txBody>
@@ -1433,7 +1433,7 @@
   </p:cSld>
   <p:clrMap bg1="lt1" tx1="dk1" bg2="lt2" tx2="dk2" accent1="accent1" accent2="accent2" accent3="accent3" accent4="accent4" accent5="accent5" accent6="accent6" hlink="hlink" folHlink="folHlink"/>
   <p:sldLayoutIdLst>
-    <p:sldLayoutId xmlns:r="http://schemas.openxmlformats.org/officeDocument/2006/relationships" id="2147483649" r:id="Re278db9a657941c0"/>
+    <p:sldLayoutId xmlns:r="http://schemas.openxmlformats.org/officeDocument/2006/relationships" id="2147483649" r:id="Rf11dea32bbf94ce1"/>
   </p:sldLayoutIdLst>
   <p:txStyles>
     <p:titleStyle>
@@ -2166,7 +2166,7 @@
           <p:cNvPr id="6" name="">
             <a:extLst xmlns:a="http://schemas.openxmlformats.org/drawingml/2006/main">
               <a:ext uri="{FF2B5EF4-FFF2-40B4-BE49-F238E27FC236}">
-                <a16:creationId xmlns:a16="http://schemas.microsoft.com/office/drawing/2014/main" id="{8799E9F7-6142-4E3A-8ED2-68FD95AEBFCA}"/>
+                <a16:creationId xmlns:a16="http://schemas.microsoft.com/office/drawing/2014/main" id="{83B1813B-456C-4CA8-B414-C0863F67151C}"/>
               </a:ext>
             </a:extLst>
           </p:cNvPr>
@@ -2223,7 +2223,7 @@
           <p:cNvPr id="2" name="">
             <a:extLst xmlns:a="http://schemas.openxmlformats.org/drawingml/2006/main">
               <a:ext uri="{FF2B5EF4-FFF2-40B4-BE49-F238E27FC236}">
-                <a16:creationId xmlns:a16="http://schemas.microsoft.com/office/drawing/2014/main" id="{44870D4A-872C-4C97-8DD3-96E9ED674A72}"/>
+                <a16:creationId xmlns:a16="http://schemas.microsoft.com/office/drawing/2014/main" id="{55379DB2-B05A-42BE-95B0-C111E39FFB62}"/>
               </a:ext>
             </a:extLst>
           </p:cNvPr>
@@ -2280,7 +2280,7 @@
           <p:cNvPr id="3" name="">
             <a:extLst xmlns:a="http://schemas.openxmlformats.org/drawingml/2006/main">
               <a:ext uri="{FF2B5EF4-FFF2-40B4-BE49-F238E27FC236}">
-                <a16:creationId xmlns:a16="http://schemas.microsoft.com/office/drawing/2014/main" id="{16BE941E-4E80-4B9B-A9DC-80F6AAAE8578}"/>
+                <a16:creationId xmlns:a16="http://schemas.microsoft.com/office/drawing/2014/main" id="{7BBF4012-0D4C-4AAA-B9A9-C71F8E59F507}"/>
               </a:ext>
             </a:extLst>
           </p:cNvPr>
@@ -2360,7 +2360,7 @@
           <p:cNvPr id="4" name="">
             <a:extLst xmlns:a="http://schemas.openxmlformats.org/drawingml/2006/main">
               <a:ext uri="{FF2B5EF4-FFF2-40B4-BE49-F238E27FC236}">
-                <a16:creationId xmlns:a16="http://schemas.microsoft.com/office/drawing/2014/main" id="{88BADEEA-6B74-4625-8222-764896828B56}"/>
+                <a16:creationId xmlns:a16="http://schemas.microsoft.com/office/drawing/2014/main" id="{5801D255-BEF4-47FD-B195-825638A025CC}"/>
               </a:ext>
             </a:extLst>
           </p:cNvPr>
@@ -2417,7 +2417,7 @@
           <p:cNvPr id="5" name="">
             <a:extLst xmlns:a="http://schemas.openxmlformats.org/drawingml/2006/main">
               <a:ext uri="{FF2B5EF4-FFF2-40B4-BE49-F238E27FC236}">
-                <a16:creationId xmlns:a16="http://schemas.microsoft.com/office/drawing/2014/main" id="{9C1DF49D-75A9-45B1-B11D-F2536ABCE7B0}"/>
+                <a16:creationId xmlns:a16="http://schemas.microsoft.com/office/drawing/2014/main" id="{8B0E8176-BB2E-4524-AE7D-505CF7A95358}"/>
               </a:ext>
             </a:extLst>
           </p:cNvPr>
@@ -2472,7 +2472,7 @@
     </p:spTree>
     <p:extLst>
       <p:ext uri="{BB962C8B-B14F-4D97-AF65-F5344CB8AC3E}">
-        <p14:creationId xmlns:p14="http://schemas.microsoft.com/office/powerpoint/2010/main" val="1957195764"/>
+        <p14:creationId xmlns:p14="http://schemas.microsoft.com/office/powerpoint/2010/main" val="112517984"/>
       </p:ext>
     </p:extLst>
   </p:cSld>
@@ -2503,7 +2503,7 @@
           <p:cNvPr id="5" name="">
             <a:extLst xmlns:a="http://schemas.openxmlformats.org/drawingml/2006/main">
               <a:ext uri="{FF2B5EF4-FFF2-40B4-BE49-F238E27FC236}">
-                <a16:creationId xmlns:a16="http://schemas.microsoft.com/office/drawing/2014/main" id="{13AF8638-125B-4166-B86B-618CE81F58D8}"/>
+                <a16:creationId xmlns:a16="http://schemas.microsoft.com/office/drawing/2014/main" id="{2B299F5E-3B24-4EF0-9F4A-CA907E30A34C}"/>
               </a:ext>
             </a:extLst>
           </p:cNvPr>
@@ -2560,7 +2560,7 @@
           <p:cNvPr id="2" name="">
             <a:extLst xmlns:a="http://schemas.openxmlformats.org/drawingml/2006/main">
               <a:ext uri="{FF2B5EF4-FFF2-40B4-BE49-F238E27FC236}">
-                <a16:creationId xmlns:a16="http://schemas.microsoft.com/office/drawing/2014/main" id="{FFFC5975-A056-4DFF-970C-D67CF4991F09}"/>
+                <a16:creationId xmlns:a16="http://schemas.microsoft.com/office/drawing/2014/main" id="{7ED31914-CF8B-4D15-B803-1D1BB4FC2367}"/>
               </a:ext>
             </a:extLst>
           </p:cNvPr>
@@ -3084,7 +3084,7 @@
           <p:cNvPr id="4" name="">
             <a:extLst xmlns:a="http://schemas.openxmlformats.org/drawingml/2006/main">
               <a:ext uri="{FF2B5EF4-FFF2-40B4-BE49-F238E27FC236}">
-                <a16:creationId xmlns:a16="http://schemas.microsoft.com/office/drawing/2014/main" id="{1FF209C7-87FD-4531-98EF-9DD05BBEC26E}"/>
+                <a16:creationId xmlns:a16="http://schemas.microsoft.com/office/drawing/2014/main" id="{84ADD6BA-8CB2-4EAF-B3FF-2B697C2CFCD3}"/>
               </a:ext>
             </a:extLst>
           </p:cNvPr>
@@ -3139,7 +3139,7 @@
     </p:spTree>
     <p:extLst>
       <p:ext uri="{BB962C8B-B14F-4D97-AF65-F5344CB8AC3E}">
-        <p14:creationId xmlns:p14="http://schemas.microsoft.com/office/powerpoint/2010/main" val="2007796444"/>
+        <p14:creationId xmlns:p14="http://schemas.microsoft.com/office/powerpoint/2010/main" val="196152736"/>
       </p:ext>
     </p:extLst>
   </p:cSld>
@@ -3170,7 +3170,7 @@
           <p:cNvPr id="9" name="">
             <a:extLst xmlns:a="http://schemas.openxmlformats.org/drawingml/2006/main">
               <a:ext uri="{FF2B5EF4-FFF2-40B4-BE49-F238E27FC236}">
-                <a16:creationId xmlns:a16="http://schemas.microsoft.com/office/drawing/2014/main" id="{6669A4FF-A07C-4ADE-AED1-360A82C29790}"/>
+                <a16:creationId xmlns:a16="http://schemas.microsoft.com/office/drawing/2014/main" id="{346E57D7-82AB-46DA-96EF-EB6804144F8C}"/>
               </a:ext>
             </a:extLst>
           </p:cNvPr>
@@ -3227,7 +3227,7 @@
           <p:cNvPr id="2" name="">
             <a:extLst xmlns:a="http://schemas.openxmlformats.org/drawingml/2006/main">
               <a:ext uri="{FF2B5EF4-FFF2-40B4-BE49-F238E27FC236}">
-                <a16:creationId xmlns:a16="http://schemas.microsoft.com/office/drawing/2014/main" id="{6A45095A-5C31-489E-8967-D38B060C6E16}"/>
+                <a16:creationId xmlns:a16="http://schemas.microsoft.com/office/drawing/2014/main" id="{E43496C1-9D48-4FE6-AA32-9F62FC228D30}"/>
               </a:ext>
             </a:extLst>
           </p:cNvPr>
@@ -3291,7 +3291,7 @@
         </p:xfrm>
         <a:graphic xmlns:a="http://schemas.openxmlformats.org/drawingml/2006/main">
           <a:graphicData uri="http://schemas.openxmlformats.org/drawingml/2006/chart">
-            <c:chart xmlns:r="http://schemas.openxmlformats.org/officeDocument/2006/relationships" xmlns:c="http://schemas.openxmlformats.org/drawingml/2006/chart" r:id="R7bae05097eea4661"/>
+            <c:chart xmlns:r="http://schemas.openxmlformats.org/officeDocument/2006/relationships" xmlns:c="http://schemas.openxmlformats.org/drawingml/2006/chart" r:id="R3e2350a5ef274369"/>
           </a:graphicData>
         </a:graphic>
       </p:graphicFrame>
@@ -3300,7 +3300,7 @@
           <p:cNvPr id="4" name="">
             <a:extLst xmlns:a="http://schemas.openxmlformats.org/drawingml/2006/main">
               <a:ext uri="{FF2B5EF4-FFF2-40B4-BE49-F238E27FC236}">
-                <a16:creationId xmlns:a16="http://schemas.microsoft.com/office/drawing/2014/main" id="{A2E9918C-A8E1-4EC6-98D5-80EAA1A2F5EC}"/>
+                <a16:creationId xmlns:a16="http://schemas.microsoft.com/office/drawing/2014/main" id="{E3F4978A-3FFB-416A-BA79-CF9CA5879ED3}"/>
               </a:ext>
             </a:extLst>
           </p:cNvPr>
@@ -3347,7 +3347,7 @@
                 <a:ea typeface="Apple SD Gothic Neo"/>
                 <a:cs typeface="Apple SD Gothic Neo"/>
               </a:rPr>
-              <a:t>549건 실행 통과</a:t>
+              <a:t>551건 실행 통과</a:t>
             </a:r>
           </a:p>
         </p:txBody>
@@ -3357,7 +3357,7 @@
           <p:cNvPr id="5" name="">
             <a:extLst xmlns:a="http://schemas.openxmlformats.org/drawingml/2006/main">
               <a:ext uri="{FF2B5EF4-FFF2-40B4-BE49-F238E27FC236}">
-                <a16:creationId xmlns:a16="http://schemas.microsoft.com/office/drawing/2014/main" id="{8D0D8402-2164-4F08-B525-26C8CE3BD330}"/>
+                <a16:creationId xmlns:a16="http://schemas.microsoft.com/office/drawing/2014/main" id="{37FEAFCD-6C4B-4562-A779-9CEAD8137974}"/>
               </a:ext>
             </a:extLst>
           </p:cNvPr>
@@ -3404,7 +3404,7 @@
                 <a:ea typeface="Apple SD Gothic Neo"/>
                 <a:cs typeface="Apple SD Gothic Neo"/>
               </a:rPr>
-              <a:t>567건 발견 / 18건 skip</a:t>
+              <a:t>569건 발견 / 18건 skip</a:t>
             </a:r>
           </a:p>
           <a:p xmlns:a="http://schemas.openxmlformats.org/drawingml/2006/main">
@@ -3427,7 +3427,7 @@
                 <a:ea typeface="Apple SD Gothic Neo"/>
                 <a:cs typeface="Apple SD Gothic Neo"/>
               </a:rPr>
-              <a:t>Supplier 기준 최신 source</a:t>
+              <a:t>통합 검증 baseline fe6a51f</a:t>
             </a:r>
           </a:p>
         </p:txBody>
@@ -3437,7 +3437,7 @@
           <p:cNvPr id="6" name="">
             <a:extLst xmlns:a="http://schemas.openxmlformats.org/drawingml/2006/main">
               <a:ext uri="{FF2B5EF4-FFF2-40B4-BE49-F238E27FC236}">
-                <a16:creationId xmlns:a16="http://schemas.microsoft.com/office/drawing/2014/main" id="{DA336E77-0217-42BB-97C2-AB8B140B7B6B}"/>
+                <a16:creationId xmlns:a16="http://schemas.microsoft.com/office/drawing/2014/main" id="{9BDD8E45-6297-4CE8-BAFB-A608073B42DA}"/>
               </a:ext>
             </a:extLst>
           </p:cNvPr>
@@ -3494,7 +3494,7 @@
           <p:cNvPr id="7" name="">
             <a:extLst xmlns:a="http://schemas.openxmlformats.org/drawingml/2006/main">
               <a:ext uri="{FF2B5EF4-FFF2-40B4-BE49-F238E27FC236}">
-                <a16:creationId xmlns:a16="http://schemas.microsoft.com/office/drawing/2014/main" id="{A4CE9346-6923-4163-821F-F3B292A77C80}"/>
+                <a16:creationId xmlns:a16="http://schemas.microsoft.com/office/drawing/2014/main" id="{880D353F-A894-46B3-BF73-ACDA1D618225}"/>
               </a:ext>
             </a:extLst>
           </p:cNvPr>
@@ -3597,7 +3597,7 @@
           <p:cNvPr id="8" name="">
             <a:extLst xmlns:a="http://schemas.openxmlformats.org/drawingml/2006/main">
               <a:ext uri="{FF2B5EF4-FFF2-40B4-BE49-F238E27FC236}">
-                <a16:creationId xmlns:a16="http://schemas.microsoft.com/office/drawing/2014/main" id="{5D72A8EF-BD2E-4BA6-94BD-CEB607647BE5}"/>
+                <a16:creationId xmlns:a16="http://schemas.microsoft.com/office/drawing/2014/main" id="{20EB83D8-0315-4702-AA60-28D3F5AC4699}"/>
               </a:ext>
             </a:extLst>
           </p:cNvPr>
@@ -3652,7 +3652,7 @@
     </p:spTree>
     <p:extLst>
       <p:ext uri="{BB962C8B-B14F-4D97-AF65-F5344CB8AC3E}">
-        <p14:creationId xmlns:p14="http://schemas.microsoft.com/office/powerpoint/2010/main" val="1552606471"/>
+        <p14:creationId xmlns:p14="http://schemas.microsoft.com/office/powerpoint/2010/main" val="1618333756"/>
       </p:ext>
     </p:extLst>
   </p:cSld>
@@ -3683,7 +3683,7 @@
           <p:cNvPr id="5" name="">
             <a:extLst xmlns:a="http://schemas.openxmlformats.org/drawingml/2006/main">
               <a:ext uri="{FF2B5EF4-FFF2-40B4-BE49-F238E27FC236}">
-                <a16:creationId xmlns:a16="http://schemas.microsoft.com/office/drawing/2014/main" id="{4AF621A8-27CC-456D-9F5F-A4E81C112F12}"/>
+                <a16:creationId xmlns:a16="http://schemas.microsoft.com/office/drawing/2014/main" id="{E27104DE-255C-4AE6-A2B7-2D627E67B45A}"/>
               </a:ext>
             </a:extLst>
           </p:cNvPr>
@@ -3740,7 +3740,7 @@
           <p:cNvPr id="2" name="">
             <a:extLst xmlns:a="http://schemas.openxmlformats.org/drawingml/2006/main">
               <a:ext uri="{FF2B5EF4-FFF2-40B4-BE49-F238E27FC236}">
-                <a16:creationId xmlns:a16="http://schemas.microsoft.com/office/drawing/2014/main" id="{B31AD3CB-B521-4612-B19C-926CC3ACDB1E}"/>
+                <a16:creationId xmlns:a16="http://schemas.microsoft.com/office/drawing/2014/main" id="{51E1A2F1-E1CC-4120-972D-7DC6EA10A2A7}"/>
               </a:ext>
             </a:extLst>
           </p:cNvPr>
@@ -4338,7 +4338,7 @@
           <p:cNvPr id="4" name="">
             <a:extLst xmlns:a="http://schemas.openxmlformats.org/drawingml/2006/main">
               <a:ext uri="{FF2B5EF4-FFF2-40B4-BE49-F238E27FC236}">
-                <a16:creationId xmlns:a16="http://schemas.microsoft.com/office/drawing/2014/main" id="{73D5F753-F692-436F-B035-89126717922F}"/>
+                <a16:creationId xmlns:a16="http://schemas.microsoft.com/office/drawing/2014/main" id="{B54EDD01-3F79-4C84-B091-47AAD568FCD7}"/>
               </a:ext>
             </a:extLst>
           </p:cNvPr>
@@ -4393,7 +4393,7 @@
     </p:spTree>
     <p:extLst>
       <p:ext uri="{BB962C8B-B14F-4D97-AF65-F5344CB8AC3E}">
-        <p14:creationId xmlns:p14="http://schemas.microsoft.com/office/powerpoint/2010/main" val="302678"/>
+        <p14:creationId xmlns:p14="http://schemas.microsoft.com/office/powerpoint/2010/main" val="175329987"/>
       </p:ext>
     </p:extLst>
   </p:cSld>
@@ -4424,7 +4424,7 @@
           <p:cNvPr id="10" name="">
             <a:extLst xmlns:a="http://schemas.openxmlformats.org/drawingml/2006/main">
               <a:ext uri="{FF2B5EF4-FFF2-40B4-BE49-F238E27FC236}">
-                <a16:creationId xmlns:a16="http://schemas.microsoft.com/office/drawing/2014/main" id="{72F8A784-0717-4E22-B958-561B6786750B}"/>
+                <a16:creationId xmlns:a16="http://schemas.microsoft.com/office/drawing/2014/main" id="{917AF00A-3507-408A-8060-C6B6B6E62BCD}"/>
               </a:ext>
             </a:extLst>
           </p:cNvPr>
@@ -4481,7 +4481,7 @@
           <p:cNvPr id="2" name="">
             <a:extLst xmlns:a="http://schemas.openxmlformats.org/drawingml/2006/main">
               <a:ext uri="{FF2B5EF4-FFF2-40B4-BE49-F238E27FC236}">
-                <a16:creationId xmlns:a16="http://schemas.microsoft.com/office/drawing/2014/main" id="{BA6B2FFD-19F8-42C3-9299-349023A5B2F7}"/>
+                <a16:creationId xmlns:a16="http://schemas.microsoft.com/office/drawing/2014/main" id="{5D4C2AAC-6DB7-4A54-9079-40D33CCF5923}"/>
               </a:ext>
             </a:extLst>
           </p:cNvPr>
@@ -4538,7 +4538,7 @@
           <p:cNvPr id="3" name="">
             <a:extLst xmlns:a="http://schemas.openxmlformats.org/drawingml/2006/main">
               <a:ext uri="{FF2B5EF4-FFF2-40B4-BE49-F238E27FC236}">
-                <a16:creationId xmlns:a16="http://schemas.microsoft.com/office/drawing/2014/main" id="{3F742531-D99D-4550-B3BD-3C145A51D664}"/>
+                <a16:creationId xmlns:a16="http://schemas.microsoft.com/office/drawing/2014/main" id="{8AE81CF3-E2ED-41D7-B43F-88DBE515193F}"/>
               </a:ext>
             </a:extLst>
           </p:cNvPr>
@@ -4595,7 +4595,7 @@
           <p:cNvPr id="4" name="">
             <a:extLst xmlns:a="http://schemas.openxmlformats.org/drawingml/2006/main">
               <a:ext uri="{FF2B5EF4-FFF2-40B4-BE49-F238E27FC236}">
-                <a16:creationId xmlns:a16="http://schemas.microsoft.com/office/drawing/2014/main" id="{A5C66684-416F-40EE-B5E4-1C26615AF0F5}"/>
+                <a16:creationId xmlns:a16="http://schemas.microsoft.com/office/drawing/2014/main" id="{120298AC-C386-480F-BD76-31B75F4B198D}"/>
               </a:ext>
             </a:extLst>
           </p:cNvPr>
@@ -4652,7 +4652,7 @@
           <p:cNvPr id="5" name="">
             <a:extLst xmlns:a="http://schemas.openxmlformats.org/drawingml/2006/main">
               <a:ext uri="{FF2B5EF4-FFF2-40B4-BE49-F238E27FC236}">
-                <a16:creationId xmlns:a16="http://schemas.microsoft.com/office/drawing/2014/main" id="{BBCAB269-72E4-45B0-8AA7-D5E442FEFB66}"/>
+                <a16:creationId xmlns:a16="http://schemas.microsoft.com/office/drawing/2014/main" id="{C5A01BCF-1274-4BBF-A772-081D66A694B4}"/>
               </a:ext>
             </a:extLst>
           </p:cNvPr>
@@ -4709,7 +4709,7 @@
           <p:cNvPr id="6" name="">
             <a:extLst xmlns:a="http://schemas.openxmlformats.org/drawingml/2006/main">
               <a:ext uri="{FF2B5EF4-FFF2-40B4-BE49-F238E27FC236}">
-                <a16:creationId xmlns:a16="http://schemas.microsoft.com/office/drawing/2014/main" id="{A2DE3CDA-D212-43A1-BFBD-F94FAB3C55D4}"/>
+                <a16:creationId xmlns:a16="http://schemas.microsoft.com/office/drawing/2014/main" id="{90B7B633-1390-4E5F-A7AF-AB345BCA9B3A}"/>
               </a:ext>
             </a:extLst>
           </p:cNvPr>
@@ -4766,7 +4766,7 @@
           <p:cNvPr id="7" name="">
             <a:extLst xmlns:a="http://schemas.openxmlformats.org/drawingml/2006/main">
               <a:ext uri="{FF2B5EF4-FFF2-40B4-BE49-F238E27FC236}">
-                <a16:creationId xmlns:a16="http://schemas.microsoft.com/office/drawing/2014/main" id="{D569291D-EC9C-4A90-A963-78426FC32AD3}"/>
+                <a16:creationId xmlns:a16="http://schemas.microsoft.com/office/drawing/2014/main" id="{04ABA4DB-ACB6-498F-BF83-2CE2D75C4F2F}"/>
               </a:ext>
             </a:extLst>
           </p:cNvPr>
@@ -4823,7 +4823,7 @@
           <p:cNvPr id="8" name="">
             <a:extLst xmlns:a="http://schemas.openxmlformats.org/drawingml/2006/main">
               <a:ext uri="{FF2B5EF4-FFF2-40B4-BE49-F238E27FC236}">
-                <a16:creationId xmlns:a16="http://schemas.microsoft.com/office/drawing/2014/main" id="{96C2B4B2-DA46-4201-8856-00BBE57FB4CF}"/>
+                <a16:creationId xmlns:a16="http://schemas.microsoft.com/office/drawing/2014/main" id="{7FEEB52F-B43F-418F-868D-9EAA7DAF98F7}"/>
               </a:ext>
             </a:extLst>
           </p:cNvPr>
@@ -4880,7 +4880,7 @@
           <p:cNvPr id="9" name="">
             <a:extLst xmlns:a="http://schemas.openxmlformats.org/drawingml/2006/main">
               <a:ext uri="{FF2B5EF4-FFF2-40B4-BE49-F238E27FC236}">
-                <a16:creationId xmlns:a16="http://schemas.microsoft.com/office/drawing/2014/main" id="{F376C74C-CF54-4EF6-9225-1A96BD9C398D}"/>
+                <a16:creationId xmlns:a16="http://schemas.microsoft.com/office/drawing/2014/main" id="{2BDBB6DB-8A92-4FD0-B90D-3C92AE3BE3E7}"/>
               </a:ext>
             </a:extLst>
           </p:cNvPr>
@@ -4935,7 +4935,7 @@
     </p:spTree>
     <p:extLst>
       <p:ext uri="{BB962C8B-B14F-4D97-AF65-F5344CB8AC3E}">
-        <p14:creationId xmlns:p14="http://schemas.microsoft.com/office/powerpoint/2010/main" val="1963465298"/>
+        <p14:creationId xmlns:p14="http://schemas.microsoft.com/office/powerpoint/2010/main" val="472536300"/>
       </p:ext>
     </p:extLst>
   </p:cSld>
@@ -4966,7 +4966,7 @@
           <p:cNvPr id="10" name="">
             <a:extLst xmlns:a="http://schemas.openxmlformats.org/drawingml/2006/main">
               <a:ext uri="{FF2B5EF4-FFF2-40B4-BE49-F238E27FC236}">
-                <a16:creationId xmlns:a16="http://schemas.microsoft.com/office/drawing/2014/main" id="{4C7316EA-2760-4BFC-B7FE-0CCE40E6F000}"/>
+                <a16:creationId xmlns:a16="http://schemas.microsoft.com/office/drawing/2014/main" id="{16A50DCA-89D4-4D5C-9B26-078F946CEF79}"/>
               </a:ext>
             </a:extLst>
           </p:cNvPr>
@@ -5023,7 +5023,7 @@
           <p:cNvPr id="2" name="">
             <a:extLst xmlns:a="http://schemas.openxmlformats.org/drawingml/2006/main">
               <a:ext uri="{FF2B5EF4-FFF2-40B4-BE49-F238E27FC236}">
-                <a16:creationId xmlns:a16="http://schemas.microsoft.com/office/drawing/2014/main" id="{0B18700B-C7D3-4A66-8F7D-B6BC99E19B23}"/>
+                <a16:creationId xmlns:a16="http://schemas.microsoft.com/office/drawing/2014/main" id="{3EEDDCA2-6CA6-4401-AFFE-B3EE405516F6}"/>
               </a:ext>
             </a:extLst>
           </p:cNvPr>
@@ -5080,7 +5080,7 @@
           <p:cNvPr id="3" name="">
             <a:extLst xmlns:a="http://schemas.openxmlformats.org/drawingml/2006/main">
               <a:ext uri="{FF2B5EF4-FFF2-40B4-BE49-F238E27FC236}">
-                <a16:creationId xmlns:a16="http://schemas.microsoft.com/office/drawing/2014/main" id="{D574AB4E-9650-4AC0-AF00-990EBA94201B}"/>
+                <a16:creationId xmlns:a16="http://schemas.microsoft.com/office/drawing/2014/main" id="{BFE25ADD-4D9D-4103-B124-99057534DE7E}"/>
               </a:ext>
             </a:extLst>
           </p:cNvPr>
@@ -5137,7 +5137,7 @@
           <p:cNvPr id="4" name="">
             <a:extLst xmlns:a="http://schemas.openxmlformats.org/drawingml/2006/main">
               <a:ext uri="{FF2B5EF4-FFF2-40B4-BE49-F238E27FC236}">
-                <a16:creationId xmlns:a16="http://schemas.microsoft.com/office/drawing/2014/main" id="{43D2F1ED-F537-41B6-8825-19FC861E2108}"/>
+                <a16:creationId xmlns:a16="http://schemas.microsoft.com/office/drawing/2014/main" id="{427B912E-42BE-4414-A9FC-1F546766C138}"/>
               </a:ext>
             </a:extLst>
           </p:cNvPr>
@@ -5194,7 +5194,7 @@
           <p:cNvPr id="5" name="">
             <a:extLst xmlns:a="http://schemas.openxmlformats.org/drawingml/2006/main">
               <a:ext uri="{FF2B5EF4-FFF2-40B4-BE49-F238E27FC236}">
-                <a16:creationId xmlns:a16="http://schemas.microsoft.com/office/drawing/2014/main" id="{F0842A37-3BE8-42A9-A584-C37064C97C1E}"/>
+                <a16:creationId xmlns:a16="http://schemas.microsoft.com/office/drawing/2014/main" id="{FAB88058-385F-45C5-8E8F-229495F96B64}"/>
               </a:ext>
             </a:extLst>
           </p:cNvPr>
@@ -5251,7 +5251,7 @@
           <p:cNvPr id="6" name="">
             <a:extLst xmlns:a="http://schemas.openxmlformats.org/drawingml/2006/main">
               <a:ext uri="{FF2B5EF4-FFF2-40B4-BE49-F238E27FC236}">
-                <a16:creationId xmlns:a16="http://schemas.microsoft.com/office/drawing/2014/main" id="{999D2113-647A-46E3-97A4-11CEF0E3F8CB}"/>
+                <a16:creationId xmlns:a16="http://schemas.microsoft.com/office/drawing/2014/main" id="{C4B92BD7-F0D5-4E65-BE5F-9318F89BF175}"/>
               </a:ext>
             </a:extLst>
           </p:cNvPr>
@@ -5308,7 +5308,7 @@
           <p:cNvPr id="7" name="">
             <a:extLst xmlns:a="http://schemas.openxmlformats.org/drawingml/2006/main">
               <a:ext uri="{FF2B5EF4-FFF2-40B4-BE49-F238E27FC236}">
-                <a16:creationId xmlns:a16="http://schemas.microsoft.com/office/drawing/2014/main" id="{3CD76AE9-4AEE-4850-8F33-92D0B18938D7}"/>
+                <a16:creationId xmlns:a16="http://schemas.microsoft.com/office/drawing/2014/main" id="{C800B5C8-6BC3-4895-B99C-026E3F8D40A3}"/>
               </a:ext>
             </a:extLst>
           </p:cNvPr>
@@ -5365,7 +5365,7 @@
           <p:cNvPr id="8" name="">
             <a:extLst xmlns:a="http://schemas.openxmlformats.org/drawingml/2006/main">
               <a:ext uri="{FF2B5EF4-FFF2-40B4-BE49-F238E27FC236}">
-                <a16:creationId xmlns:a16="http://schemas.microsoft.com/office/drawing/2014/main" id="{ED7B8A03-F1A8-4DDA-8D8E-29F3B37BD804}"/>
+                <a16:creationId xmlns:a16="http://schemas.microsoft.com/office/drawing/2014/main" id="{4F68ADF3-AD11-4EBA-93E0-F63BA2875579}"/>
               </a:ext>
             </a:extLst>
           </p:cNvPr>
@@ -5422,7 +5422,7 @@
           <p:cNvPr id="9" name="">
             <a:extLst xmlns:a="http://schemas.openxmlformats.org/drawingml/2006/main">
               <a:ext uri="{FF2B5EF4-FFF2-40B4-BE49-F238E27FC236}">
-                <a16:creationId xmlns:a16="http://schemas.microsoft.com/office/drawing/2014/main" id="{D5569BF2-DB5D-4F92-A50D-70386AD6F236}"/>
+                <a16:creationId xmlns:a16="http://schemas.microsoft.com/office/drawing/2014/main" id="{2061828C-4393-4C08-ACDA-9A0745ACAF54}"/>
               </a:ext>
             </a:extLst>
           </p:cNvPr>
@@ -5477,7 +5477,7 @@
     </p:spTree>
     <p:extLst>
       <p:ext uri="{BB962C8B-B14F-4D97-AF65-F5344CB8AC3E}">
-        <p14:creationId xmlns:p14="http://schemas.microsoft.com/office/powerpoint/2010/main" val="1932185867"/>
+        <p14:creationId xmlns:p14="http://schemas.microsoft.com/office/powerpoint/2010/main" val="375168767"/>
       </p:ext>
     </p:extLst>
   </p:cSld>
@@ -5508,7 +5508,7 @@
           <p:cNvPr id="5" name="">
             <a:extLst xmlns:a="http://schemas.openxmlformats.org/drawingml/2006/main">
               <a:ext uri="{FF2B5EF4-FFF2-40B4-BE49-F238E27FC236}">
-                <a16:creationId xmlns:a16="http://schemas.microsoft.com/office/drawing/2014/main" id="{57C5651F-D85C-4A0D-B991-428C31136075}"/>
+                <a16:creationId xmlns:a16="http://schemas.microsoft.com/office/drawing/2014/main" id="{12DCFE49-CE2A-4673-92F9-DC3BEEA645E1}"/>
               </a:ext>
             </a:extLst>
           </p:cNvPr>
@@ -5565,7 +5565,7 @@
           <p:cNvPr id="2" name="">
             <a:extLst xmlns:a="http://schemas.openxmlformats.org/drawingml/2006/main">
               <a:ext uri="{FF2B5EF4-FFF2-40B4-BE49-F238E27FC236}">
-                <a16:creationId xmlns:a16="http://schemas.microsoft.com/office/drawing/2014/main" id="{F63824D1-8C53-4263-8EE1-BE0CD941B906}"/>
+                <a16:creationId xmlns:a16="http://schemas.microsoft.com/office/drawing/2014/main" id="{4440468F-C1D2-400E-B196-82FB0C4FFCB4}"/>
               </a:ext>
             </a:extLst>
           </p:cNvPr>
@@ -6089,7 +6089,7 @@
           <p:cNvPr id="4" name="">
             <a:extLst xmlns:a="http://schemas.openxmlformats.org/drawingml/2006/main">
               <a:ext uri="{FF2B5EF4-FFF2-40B4-BE49-F238E27FC236}">
-                <a16:creationId xmlns:a16="http://schemas.microsoft.com/office/drawing/2014/main" id="{3D5FE85B-2B92-4868-B72A-1F125755F541}"/>
+                <a16:creationId xmlns:a16="http://schemas.microsoft.com/office/drawing/2014/main" id="{0010B7AC-9C2B-410C-BC04-4A3378653A6D}"/>
               </a:ext>
             </a:extLst>
           </p:cNvPr>
@@ -6144,7 +6144,7 @@
     </p:spTree>
     <p:extLst>
       <p:ext uri="{BB962C8B-B14F-4D97-AF65-F5344CB8AC3E}">
-        <p14:creationId xmlns:p14="http://schemas.microsoft.com/office/powerpoint/2010/main" val="904963157"/>
+        <p14:creationId xmlns:p14="http://schemas.microsoft.com/office/powerpoint/2010/main" val="857906691"/>
       </p:ext>
     </p:extLst>
   </p:cSld>
@@ -6175,7 +6175,7 @@
           <p:cNvPr id="5" name="">
             <a:extLst xmlns:a="http://schemas.openxmlformats.org/drawingml/2006/main">
               <a:ext uri="{FF2B5EF4-FFF2-40B4-BE49-F238E27FC236}">
-                <a16:creationId xmlns:a16="http://schemas.microsoft.com/office/drawing/2014/main" id="{D5A6BA8C-BF56-40A4-A1D9-2CAAE4828A7F}"/>
+                <a16:creationId xmlns:a16="http://schemas.microsoft.com/office/drawing/2014/main" id="{7D46FA23-1927-4E8E-846F-CC699CBDDA75}"/>
               </a:ext>
             </a:extLst>
           </p:cNvPr>
@@ -6232,7 +6232,7 @@
           <p:cNvPr id="2" name="">
             <a:extLst xmlns:a="http://schemas.openxmlformats.org/drawingml/2006/main">
               <a:ext uri="{FF2B5EF4-FFF2-40B4-BE49-F238E27FC236}">
-                <a16:creationId xmlns:a16="http://schemas.microsoft.com/office/drawing/2014/main" id="{EF27FB19-848B-4BAF-82F3-DBF28B9301BF}"/>
+                <a16:creationId xmlns:a16="http://schemas.microsoft.com/office/drawing/2014/main" id="{C658177E-39EE-4384-A9FB-1FBF05160E2D}"/>
               </a:ext>
             </a:extLst>
           </p:cNvPr>
@@ -6830,7 +6830,7 @@
           <p:cNvPr id="4" name="">
             <a:extLst xmlns:a="http://schemas.openxmlformats.org/drawingml/2006/main">
               <a:ext uri="{FF2B5EF4-FFF2-40B4-BE49-F238E27FC236}">
-                <a16:creationId xmlns:a16="http://schemas.microsoft.com/office/drawing/2014/main" id="{25EC8ADE-2BA7-46A8-ADD7-0D1F01509FC4}"/>
+                <a16:creationId xmlns:a16="http://schemas.microsoft.com/office/drawing/2014/main" id="{165E0374-0F5A-41A7-AAF9-E9F060F8BC9D}"/>
               </a:ext>
             </a:extLst>
           </p:cNvPr>
@@ -6885,7 +6885,7 @@
     </p:spTree>
     <p:extLst>
       <p:ext uri="{BB962C8B-B14F-4D97-AF65-F5344CB8AC3E}">
-        <p14:creationId xmlns:p14="http://schemas.microsoft.com/office/powerpoint/2010/main" val="84698760"/>
+        <p14:creationId xmlns:p14="http://schemas.microsoft.com/office/powerpoint/2010/main" val="197027452"/>
       </p:ext>
     </p:extLst>
   </p:cSld>
@@ -6916,7 +6916,7 @@
           <p:cNvPr id="13" name="">
             <a:extLst xmlns:a="http://schemas.openxmlformats.org/drawingml/2006/main">
               <a:ext uri="{FF2B5EF4-FFF2-40B4-BE49-F238E27FC236}">
-                <a16:creationId xmlns:a16="http://schemas.microsoft.com/office/drawing/2014/main" id="{8084A84F-0792-44B9-9BBF-2887DF22E183}"/>
+                <a16:creationId xmlns:a16="http://schemas.microsoft.com/office/drawing/2014/main" id="{37ADF154-CE68-4F05-AAFF-1A3B2EE64151}"/>
               </a:ext>
             </a:extLst>
           </p:cNvPr>
@@ -6973,7 +6973,7 @@
           <p:cNvPr id="2" name="">
             <a:extLst xmlns:a="http://schemas.openxmlformats.org/drawingml/2006/main">
               <a:ext uri="{FF2B5EF4-FFF2-40B4-BE49-F238E27FC236}">
-                <a16:creationId xmlns:a16="http://schemas.microsoft.com/office/drawing/2014/main" id="{16012AC1-FC96-48B6-A45B-B835C85A9FA0}"/>
+                <a16:creationId xmlns:a16="http://schemas.microsoft.com/office/drawing/2014/main" id="{32C6CC77-076A-43A4-BF0A-107F831ABC59}"/>
               </a:ext>
             </a:extLst>
           </p:cNvPr>
@@ -7030,7 +7030,7 @@
           <p:cNvPr id="3" name="">
             <a:extLst xmlns:a="http://schemas.openxmlformats.org/drawingml/2006/main">
               <a:ext uri="{FF2B5EF4-FFF2-40B4-BE49-F238E27FC236}">
-                <a16:creationId xmlns:a16="http://schemas.microsoft.com/office/drawing/2014/main" id="{1868333F-EED0-4C51-9778-8345A14975F0}"/>
+                <a16:creationId xmlns:a16="http://schemas.microsoft.com/office/drawing/2014/main" id="{801406A6-902A-41BF-81F9-3585B6923C9D}"/>
               </a:ext>
             </a:extLst>
           </p:cNvPr>
@@ -7112,7 +7112,7 @@
           <p:cNvPr id="4" name="">
             <a:extLst xmlns:a="http://schemas.openxmlformats.org/drawingml/2006/main">
               <a:ext uri="{FF2B5EF4-FFF2-40B4-BE49-F238E27FC236}">
-                <a16:creationId xmlns:a16="http://schemas.microsoft.com/office/drawing/2014/main" id="{1D849E14-C877-4B14-A5F0-E47D5A260206}"/>
+                <a16:creationId xmlns:a16="http://schemas.microsoft.com/office/drawing/2014/main" id="{8A766ACB-870A-458F-BBED-D72A66C673C1}"/>
               </a:ext>
             </a:extLst>
           </p:cNvPr>
@@ -7194,7 +7194,7 @@
           <p:cNvPr id="5" name="">
             <a:extLst xmlns:a="http://schemas.openxmlformats.org/drawingml/2006/main">
               <a:ext uri="{FF2B5EF4-FFF2-40B4-BE49-F238E27FC236}">
-                <a16:creationId xmlns:a16="http://schemas.microsoft.com/office/drawing/2014/main" id="{89C96DE7-AF2B-450D-85CE-B4C4B30CEB5E}"/>
+                <a16:creationId xmlns:a16="http://schemas.microsoft.com/office/drawing/2014/main" id="{39749D3B-3B41-4033-80B5-6DA49214C879}"/>
               </a:ext>
             </a:extLst>
           </p:cNvPr>
@@ -7276,7 +7276,7 @@
           <p:cNvPr id="6" name="">
             <a:extLst xmlns:a="http://schemas.openxmlformats.org/drawingml/2006/main">
               <a:ext uri="{FF2B5EF4-FFF2-40B4-BE49-F238E27FC236}">
-                <a16:creationId xmlns:a16="http://schemas.microsoft.com/office/drawing/2014/main" id="{F5E3E65B-7469-4D96-B1CA-D81D1DC1FF0F}"/>
+                <a16:creationId xmlns:a16="http://schemas.microsoft.com/office/drawing/2014/main" id="{15E514AC-1B98-46E5-8905-317538961338}"/>
               </a:ext>
             </a:extLst>
           </p:cNvPr>
@@ -7306,7 +7306,7 @@
           <p:cNvPr id="7" name="">
             <a:extLst xmlns:a="http://schemas.openxmlformats.org/drawingml/2006/main">
               <a:ext uri="{FF2B5EF4-FFF2-40B4-BE49-F238E27FC236}">
-                <a16:creationId xmlns:a16="http://schemas.microsoft.com/office/drawing/2014/main" id="{24F8AD82-40C8-4708-8E4C-3A0B92BF76E0}"/>
+                <a16:creationId xmlns:a16="http://schemas.microsoft.com/office/drawing/2014/main" id="{758C0D0B-B9A5-4374-B31E-8820996AAB78}"/>
               </a:ext>
             </a:extLst>
           </p:cNvPr>
@@ -7336,7 +7336,7 @@
           <p:cNvPr id="8" name="">
             <a:extLst xmlns:a="http://schemas.openxmlformats.org/drawingml/2006/main">
               <a:ext uri="{FF2B5EF4-FFF2-40B4-BE49-F238E27FC236}">
-                <a16:creationId xmlns:a16="http://schemas.microsoft.com/office/drawing/2014/main" id="{EFEF2AA4-81EE-43C3-B551-44B4F67914A6}"/>
+                <a16:creationId xmlns:a16="http://schemas.microsoft.com/office/drawing/2014/main" id="{C9E7720C-6620-4873-81FD-4EF7FA41B05D}"/>
               </a:ext>
             </a:extLst>
           </p:cNvPr>
@@ -7366,7 +7366,7 @@
           <p:cNvPr id="9" name="">
             <a:extLst xmlns:a="http://schemas.openxmlformats.org/drawingml/2006/main">
               <a:ext uri="{FF2B5EF4-FFF2-40B4-BE49-F238E27FC236}">
-                <a16:creationId xmlns:a16="http://schemas.microsoft.com/office/drawing/2014/main" id="{AAB1622E-1E2C-4D1A-A993-C1AE9F69339A}"/>
+                <a16:creationId xmlns:a16="http://schemas.microsoft.com/office/drawing/2014/main" id="{07FB4B77-BB4E-4EB6-8908-C5354AAB19AA}"/>
               </a:ext>
             </a:extLst>
           </p:cNvPr>
@@ -7425,7 +7425,7 @@
           <p:cNvPr id="10" name="">
             <a:extLst xmlns:a="http://schemas.openxmlformats.org/drawingml/2006/main">
               <a:ext uri="{FF2B5EF4-FFF2-40B4-BE49-F238E27FC236}">
-                <a16:creationId xmlns:a16="http://schemas.microsoft.com/office/drawing/2014/main" id="{22E48DEE-20E5-4D13-A54E-30B241D62347}"/>
+                <a16:creationId xmlns:a16="http://schemas.microsoft.com/office/drawing/2014/main" id="{F82A1AFE-B3B0-427A-B158-411340F6194B}"/>
               </a:ext>
             </a:extLst>
           </p:cNvPr>
@@ -7455,7 +7455,7 @@
           <p:cNvPr id="11" name="">
             <a:extLst xmlns:a="http://schemas.openxmlformats.org/drawingml/2006/main">
               <a:ext uri="{FF2B5EF4-FFF2-40B4-BE49-F238E27FC236}">
-                <a16:creationId xmlns:a16="http://schemas.microsoft.com/office/drawing/2014/main" id="{AC84E26E-2433-45FE-887E-A7A225EA23FE}"/>
+                <a16:creationId xmlns:a16="http://schemas.microsoft.com/office/drawing/2014/main" id="{A4D50086-354F-4538-A9AA-598736FF55FD}"/>
               </a:ext>
             </a:extLst>
           </p:cNvPr>
@@ -7514,7 +7514,7 @@
           <p:cNvPr id="12" name="">
             <a:extLst xmlns:a="http://schemas.openxmlformats.org/drawingml/2006/main">
               <a:ext uri="{FF2B5EF4-FFF2-40B4-BE49-F238E27FC236}">
-                <a16:creationId xmlns:a16="http://schemas.microsoft.com/office/drawing/2014/main" id="{345846FC-FD8F-49B0-80A5-637606B6FEC8}"/>
+                <a16:creationId xmlns:a16="http://schemas.microsoft.com/office/drawing/2014/main" id="{5D5B15DC-8616-4236-A0E1-23908E6F0A2B}"/>
               </a:ext>
             </a:extLst>
           </p:cNvPr>
@@ -7569,7 +7569,7 @@
     </p:spTree>
     <p:extLst>
       <p:ext uri="{BB962C8B-B14F-4D97-AF65-F5344CB8AC3E}">
-        <p14:creationId xmlns:p14="http://schemas.microsoft.com/office/powerpoint/2010/main" val="1133555174"/>
+        <p14:creationId xmlns:p14="http://schemas.microsoft.com/office/powerpoint/2010/main" val="1842418601"/>
       </p:ext>
     </p:extLst>
   </p:cSld>
@@ -7600,7 +7600,7 @@
           <p:cNvPr id="13" name="">
             <a:extLst xmlns:a="http://schemas.openxmlformats.org/drawingml/2006/main">
               <a:ext uri="{FF2B5EF4-FFF2-40B4-BE49-F238E27FC236}">
-                <a16:creationId xmlns:a16="http://schemas.microsoft.com/office/drawing/2014/main" id="{9F12C7F8-43C7-4DCF-AC6B-9E3818400544}"/>
+                <a16:creationId xmlns:a16="http://schemas.microsoft.com/office/drawing/2014/main" id="{2B47F3AE-2E1D-444A-A29A-138349ABC66A}"/>
               </a:ext>
             </a:extLst>
           </p:cNvPr>
@@ -7657,7 +7657,7 @@
           <p:cNvPr id="2" name="">
             <a:extLst xmlns:a="http://schemas.openxmlformats.org/drawingml/2006/main">
               <a:ext uri="{FF2B5EF4-FFF2-40B4-BE49-F238E27FC236}">
-                <a16:creationId xmlns:a16="http://schemas.microsoft.com/office/drawing/2014/main" id="{3217B1E5-C974-439B-9AC1-5E339CEE05A1}"/>
+                <a16:creationId xmlns:a16="http://schemas.microsoft.com/office/drawing/2014/main" id="{77B5B740-4267-411D-A2BD-723EF33E023D}"/>
               </a:ext>
             </a:extLst>
           </p:cNvPr>
@@ -7714,7 +7714,7 @@
           <p:cNvPr id="3" name="">
             <a:extLst xmlns:a="http://schemas.openxmlformats.org/drawingml/2006/main">
               <a:ext uri="{FF2B5EF4-FFF2-40B4-BE49-F238E27FC236}">
-                <a16:creationId xmlns:a16="http://schemas.microsoft.com/office/drawing/2014/main" id="{E87B71E6-DABB-43B5-98A3-A53D055EE4E7}"/>
+                <a16:creationId xmlns:a16="http://schemas.microsoft.com/office/drawing/2014/main" id="{EA171357-B93A-47ED-841B-106F4A41B3CB}"/>
               </a:ext>
             </a:extLst>
           </p:cNvPr>
@@ -7796,7 +7796,7 @@
           <p:cNvPr id="4" name="">
             <a:extLst xmlns:a="http://schemas.openxmlformats.org/drawingml/2006/main">
               <a:ext uri="{FF2B5EF4-FFF2-40B4-BE49-F238E27FC236}">
-                <a16:creationId xmlns:a16="http://schemas.microsoft.com/office/drawing/2014/main" id="{F37B0114-F6A6-4F08-8937-F709D8577536}"/>
+                <a16:creationId xmlns:a16="http://schemas.microsoft.com/office/drawing/2014/main" id="{FC962E9B-4C9F-4F01-8548-9413360B27EB}"/>
               </a:ext>
             </a:extLst>
           </p:cNvPr>
@@ -7826,7 +7826,7 @@
           <p:cNvPr id="5" name="">
             <a:extLst xmlns:a="http://schemas.openxmlformats.org/drawingml/2006/main">
               <a:ext uri="{FF2B5EF4-FFF2-40B4-BE49-F238E27FC236}">
-                <a16:creationId xmlns:a16="http://schemas.microsoft.com/office/drawing/2014/main" id="{765FA9C3-45E3-4A7B-9E0C-26263F885287}"/>
+                <a16:creationId xmlns:a16="http://schemas.microsoft.com/office/drawing/2014/main" id="{4B98B319-64FB-4C0A-B0FE-95C3B48FD504}"/>
               </a:ext>
             </a:extLst>
           </p:cNvPr>
@@ -7908,7 +7908,7 @@
           <p:cNvPr id="6" name="">
             <a:extLst xmlns:a="http://schemas.openxmlformats.org/drawingml/2006/main">
               <a:ext uri="{FF2B5EF4-FFF2-40B4-BE49-F238E27FC236}">
-                <a16:creationId xmlns:a16="http://schemas.microsoft.com/office/drawing/2014/main" id="{894747A2-E5AC-4208-A9BF-44CFEF3621D7}"/>
+                <a16:creationId xmlns:a16="http://schemas.microsoft.com/office/drawing/2014/main" id="{2A90C756-D986-4C1E-B0AD-72ED99C96A2F}"/>
               </a:ext>
             </a:extLst>
           </p:cNvPr>
@@ -7938,7 +7938,7 @@
           <p:cNvPr id="7" name="">
             <a:extLst xmlns:a="http://schemas.openxmlformats.org/drawingml/2006/main">
               <a:ext uri="{FF2B5EF4-FFF2-40B4-BE49-F238E27FC236}">
-                <a16:creationId xmlns:a16="http://schemas.microsoft.com/office/drawing/2014/main" id="{113C2B7B-4F6B-4556-ABF8-E05CF2652D7A}"/>
+                <a16:creationId xmlns:a16="http://schemas.microsoft.com/office/drawing/2014/main" id="{A2425EA1-8A0E-4E14-9610-8AFB1ADE1CE7}"/>
               </a:ext>
             </a:extLst>
           </p:cNvPr>
@@ -8020,7 +8020,7 @@
           <p:cNvPr id="8" name="">
             <a:extLst xmlns:a="http://schemas.openxmlformats.org/drawingml/2006/main">
               <a:ext uri="{FF2B5EF4-FFF2-40B4-BE49-F238E27FC236}">
-                <a16:creationId xmlns:a16="http://schemas.microsoft.com/office/drawing/2014/main" id="{A09A8D9A-2C43-4B72-96FE-619B90247621}"/>
+                <a16:creationId xmlns:a16="http://schemas.microsoft.com/office/drawing/2014/main" id="{74648190-9923-4C9F-B2C8-E2493C122168}"/>
               </a:ext>
             </a:extLst>
           </p:cNvPr>
@@ -8050,7 +8050,7 @@
           <p:cNvPr id="9" name="">
             <a:extLst xmlns:a="http://schemas.openxmlformats.org/drawingml/2006/main">
               <a:ext uri="{FF2B5EF4-FFF2-40B4-BE49-F238E27FC236}">
-                <a16:creationId xmlns:a16="http://schemas.microsoft.com/office/drawing/2014/main" id="{DDC66083-48E6-40BB-9E1F-C012EEC69738}"/>
+                <a16:creationId xmlns:a16="http://schemas.microsoft.com/office/drawing/2014/main" id="{FA9A0E97-EDCC-4C2E-BF05-221F45309F0E}"/>
               </a:ext>
             </a:extLst>
           </p:cNvPr>
@@ -8132,7 +8132,7 @@
           <p:cNvPr id="10" name="">
             <a:extLst xmlns:a="http://schemas.openxmlformats.org/drawingml/2006/main">
               <a:ext uri="{FF2B5EF4-FFF2-40B4-BE49-F238E27FC236}">
-                <a16:creationId xmlns:a16="http://schemas.microsoft.com/office/drawing/2014/main" id="{5472F88E-F545-4BD8-AAAD-26E1FA2393EA}"/>
+                <a16:creationId xmlns:a16="http://schemas.microsoft.com/office/drawing/2014/main" id="{17215E02-B4B3-4708-8C55-3C447FA600F8}"/>
               </a:ext>
             </a:extLst>
           </p:cNvPr>
@@ -8189,7 +8189,7 @@
           <p:cNvPr id="11" name="">
             <a:extLst xmlns:a="http://schemas.openxmlformats.org/drawingml/2006/main">
               <a:ext uri="{FF2B5EF4-FFF2-40B4-BE49-F238E27FC236}">
-                <a16:creationId xmlns:a16="http://schemas.microsoft.com/office/drawing/2014/main" id="{2EC7D1AE-8458-40A4-A140-DEE73F4C0855}"/>
+                <a16:creationId xmlns:a16="http://schemas.microsoft.com/office/drawing/2014/main" id="{3493FAD7-9800-4DE6-9B64-88DF34477DDC}"/>
               </a:ext>
             </a:extLst>
           </p:cNvPr>
@@ -8246,7 +8246,7 @@
           <p:cNvPr id="12" name="">
             <a:extLst xmlns:a="http://schemas.openxmlformats.org/drawingml/2006/main">
               <a:ext uri="{FF2B5EF4-FFF2-40B4-BE49-F238E27FC236}">
-                <a16:creationId xmlns:a16="http://schemas.microsoft.com/office/drawing/2014/main" id="{E253724C-6A2F-4038-BBE1-DEA34999D482}"/>
+                <a16:creationId xmlns:a16="http://schemas.microsoft.com/office/drawing/2014/main" id="{134970C8-A67D-47FF-8C3E-E0B50C75FC16}"/>
               </a:ext>
             </a:extLst>
           </p:cNvPr>
@@ -8301,7 +8301,7 @@
     </p:spTree>
     <p:extLst>
       <p:ext uri="{BB962C8B-B14F-4D97-AF65-F5344CB8AC3E}">
-        <p14:creationId xmlns:p14="http://schemas.microsoft.com/office/powerpoint/2010/main" val="2054261624"/>
+        <p14:creationId xmlns:p14="http://schemas.microsoft.com/office/powerpoint/2010/main" val="1121209416"/>
       </p:ext>
     </p:extLst>
   </p:cSld>
@@ -8332,7 +8332,7 @@
           <p:cNvPr id="10" name="">
             <a:extLst xmlns:a="http://schemas.openxmlformats.org/drawingml/2006/main">
               <a:ext uri="{FF2B5EF4-FFF2-40B4-BE49-F238E27FC236}">
-                <a16:creationId xmlns:a16="http://schemas.microsoft.com/office/drawing/2014/main" id="{FF66BDFD-0561-4A11-84CF-978222851FD9}"/>
+                <a16:creationId xmlns:a16="http://schemas.microsoft.com/office/drawing/2014/main" id="{2211DAFF-1EFF-4B29-9360-12A1ECC8341C}"/>
               </a:ext>
             </a:extLst>
           </p:cNvPr>
@@ -8389,7 +8389,7 @@
           <p:cNvPr id="2" name="">
             <a:extLst xmlns:a="http://schemas.openxmlformats.org/drawingml/2006/main">
               <a:ext uri="{FF2B5EF4-FFF2-40B4-BE49-F238E27FC236}">
-                <a16:creationId xmlns:a16="http://schemas.microsoft.com/office/drawing/2014/main" id="{4F00AA6B-4736-4371-9956-9AE06477A3A9}"/>
+                <a16:creationId xmlns:a16="http://schemas.microsoft.com/office/drawing/2014/main" id="{85ABFDB9-EFD4-4E42-A30E-BAD9A7F1A103}"/>
               </a:ext>
             </a:extLst>
           </p:cNvPr>
@@ -8446,7 +8446,7 @@
           <p:cNvPr id="3" name="">
             <a:extLst xmlns:a="http://schemas.openxmlformats.org/drawingml/2006/main">
               <a:ext uri="{FF2B5EF4-FFF2-40B4-BE49-F238E27FC236}">
-                <a16:creationId xmlns:a16="http://schemas.microsoft.com/office/drawing/2014/main" id="{E39A27DD-BC0D-44F0-9AA9-5CA6D7006A21}"/>
+                <a16:creationId xmlns:a16="http://schemas.microsoft.com/office/drawing/2014/main" id="{A63ECA8D-6A1F-4276-84CD-C8DB58088EF0}"/>
               </a:ext>
             </a:extLst>
           </p:cNvPr>
@@ -8503,7 +8503,7 @@
           <p:cNvPr id="4" name="">
             <a:extLst xmlns:a="http://schemas.openxmlformats.org/drawingml/2006/main">
               <a:ext uri="{FF2B5EF4-FFF2-40B4-BE49-F238E27FC236}">
-                <a16:creationId xmlns:a16="http://schemas.microsoft.com/office/drawing/2014/main" id="{6D63B68F-CBC7-438B-969D-385C76B7A542}"/>
+                <a16:creationId xmlns:a16="http://schemas.microsoft.com/office/drawing/2014/main" id="{5A672CE6-1073-4E53-BBD5-C4435020DA29}"/>
               </a:ext>
             </a:extLst>
           </p:cNvPr>
@@ -8560,7 +8560,7 @@
           <p:cNvPr id="5" name="">
             <a:extLst xmlns:a="http://schemas.openxmlformats.org/drawingml/2006/main">
               <a:ext uri="{FF2B5EF4-FFF2-40B4-BE49-F238E27FC236}">
-                <a16:creationId xmlns:a16="http://schemas.microsoft.com/office/drawing/2014/main" id="{8C276699-7A53-4A0C-B328-3A8083007DBC}"/>
+                <a16:creationId xmlns:a16="http://schemas.microsoft.com/office/drawing/2014/main" id="{F6E33010-B3F7-49EF-9999-ABE133507145}"/>
               </a:ext>
             </a:extLst>
           </p:cNvPr>
@@ -8617,7 +8617,7 @@
           <p:cNvPr id="6" name="">
             <a:extLst xmlns:a="http://schemas.openxmlformats.org/drawingml/2006/main">
               <a:ext uri="{FF2B5EF4-FFF2-40B4-BE49-F238E27FC236}">
-                <a16:creationId xmlns:a16="http://schemas.microsoft.com/office/drawing/2014/main" id="{B0E53FC4-7B8A-4085-A50C-A864B80CF49F}"/>
+                <a16:creationId xmlns:a16="http://schemas.microsoft.com/office/drawing/2014/main" id="{338CABC2-8860-4DEE-B7DB-3EBF83D086CC}"/>
               </a:ext>
             </a:extLst>
           </p:cNvPr>
@@ -8674,7 +8674,7 @@
           <p:cNvPr id="7" name="">
             <a:extLst xmlns:a="http://schemas.openxmlformats.org/drawingml/2006/main">
               <a:ext uri="{FF2B5EF4-FFF2-40B4-BE49-F238E27FC236}">
-                <a16:creationId xmlns:a16="http://schemas.microsoft.com/office/drawing/2014/main" id="{7747C8FC-09C4-47E1-AE2B-E0E953C5C378}"/>
+                <a16:creationId xmlns:a16="http://schemas.microsoft.com/office/drawing/2014/main" id="{C38A964E-3B6B-428B-B073-981953447AFB}"/>
               </a:ext>
             </a:extLst>
           </p:cNvPr>
@@ -8731,7 +8731,7 @@
           <p:cNvPr id="8" name="">
             <a:extLst xmlns:a="http://schemas.openxmlformats.org/drawingml/2006/main">
               <a:ext uri="{FF2B5EF4-FFF2-40B4-BE49-F238E27FC236}">
-                <a16:creationId xmlns:a16="http://schemas.microsoft.com/office/drawing/2014/main" id="{232D61AF-9547-45D4-8EEC-C5743BB3C681}"/>
+                <a16:creationId xmlns:a16="http://schemas.microsoft.com/office/drawing/2014/main" id="{E9B6D9DA-0C0E-4C86-8B7A-9394723C34D5}"/>
               </a:ext>
             </a:extLst>
           </p:cNvPr>
@@ -8788,7 +8788,7 @@
           <p:cNvPr id="9" name="">
             <a:extLst xmlns:a="http://schemas.openxmlformats.org/drawingml/2006/main">
               <a:ext uri="{FF2B5EF4-FFF2-40B4-BE49-F238E27FC236}">
-                <a16:creationId xmlns:a16="http://schemas.microsoft.com/office/drawing/2014/main" id="{741A9402-12B6-4DCF-A895-B7183EDA7B29}"/>
+                <a16:creationId xmlns:a16="http://schemas.microsoft.com/office/drawing/2014/main" id="{85F00009-E659-4542-B3D8-BF1973E9263E}"/>
               </a:ext>
             </a:extLst>
           </p:cNvPr>
@@ -8843,7 +8843,7 @@
     </p:spTree>
     <p:extLst>
       <p:ext uri="{BB962C8B-B14F-4D97-AF65-F5344CB8AC3E}">
-        <p14:creationId xmlns:p14="http://schemas.microsoft.com/office/powerpoint/2010/main" val="296239952"/>
+        <p14:creationId xmlns:p14="http://schemas.microsoft.com/office/powerpoint/2010/main" val="2040537260"/>
       </p:ext>
     </p:extLst>
   </p:cSld>
@@ -8874,7 +8874,7 @@
           <p:cNvPr id="10" name="">
             <a:extLst xmlns:a="http://schemas.openxmlformats.org/drawingml/2006/main">
               <a:ext uri="{FF2B5EF4-FFF2-40B4-BE49-F238E27FC236}">
-                <a16:creationId xmlns:a16="http://schemas.microsoft.com/office/drawing/2014/main" id="{D53092A6-AD20-45B3-8512-B1619EE3E077}"/>
+                <a16:creationId xmlns:a16="http://schemas.microsoft.com/office/drawing/2014/main" id="{019FF199-6ADD-43D2-B3F6-D0871A43DC6F}"/>
               </a:ext>
             </a:extLst>
           </p:cNvPr>
@@ -8931,7 +8931,7 @@
           <p:cNvPr id="2" name="">
             <a:extLst xmlns:a="http://schemas.openxmlformats.org/drawingml/2006/main">
               <a:ext uri="{FF2B5EF4-FFF2-40B4-BE49-F238E27FC236}">
-                <a16:creationId xmlns:a16="http://schemas.microsoft.com/office/drawing/2014/main" id="{CB789B08-0A2F-47CE-B373-86A282F46BFE}"/>
+                <a16:creationId xmlns:a16="http://schemas.microsoft.com/office/drawing/2014/main" id="{65B62BE5-08B4-46C4-BB87-E10884BA70DE}"/>
               </a:ext>
             </a:extLst>
           </p:cNvPr>
@@ -8988,7 +8988,7 @@
           <p:cNvPr id="3" name="">
             <a:extLst xmlns:a="http://schemas.openxmlformats.org/drawingml/2006/main">
               <a:ext uri="{FF2B5EF4-FFF2-40B4-BE49-F238E27FC236}">
-                <a16:creationId xmlns:a16="http://schemas.microsoft.com/office/drawing/2014/main" id="{AFCABE88-30C1-414E-B5E6-6A1C9AF03489}"/>
+                <a16:creationId xmlns:a16="http://schemas.microsoft.com/office/drawing/2014/main" id="{3CEFB67F-C8B4-4F66-A8BC-7A23A8256279}"/>
               </a:ext>
             </a:extLst>
           </p:cNvPr>
@@ -9045,7 +9045,7 @@
           <p:cNvPr id="4" name="">
             <a:extLst xmlns:a="http://schemas.openxmlformats.org/drawingml/2006/main">
               <a:ext uri="{FF2B5EF4-FFF2-40B4-BE49-F238E27FC236}">
-                <a16:creationId xmlns:a16="http://schemas.microsoft.com/office/drawing/2014/main" id="{4A1ECA75-0880-45EA-BCC5-A6FE080CBAD0}"/>
+                <a16:creationId xmlns:a16="http://schemas.microsoft.com/office/drawing/2014/main" id="{59FCA888-66EE-4572-9175-62554C764FE0}"/>
               </a:ext>
             </a:extLst>
           </p:cNvPr>
@@ -9102,7 +9102,7 @@
           <p:cNvPr id="5" name="">
             <a:extLst xmlns:a="http://schemas.openxmlformats.org/drawingml/2006/main">
               <a:ext uri="{FF2B5EF4-FFF2-40B4-BE49-F238E27FC236}">
-                <a16:creationId xmlns:a16="http://schemas.microsoft.com/office/drawing/2014/main" id="{0FB2ECD8-F0E7-4206-BE02-0851F754C446}"/>
+                <a16:creationId xmlns:a16="http://schemas.microsoft.com/office/drawing/2014/main" id="{23F1FE34-3CBF-414F-942C-7647D2C86AA4}"/>
               </a:ext>
             </a:extLst>
           </p:cNvPr>
@@ -9159,7 +9159,7 @@
           <p:cNvPr id="6" name="">
             <a:extLst xmlns:a="http://schemas.openxmlformats.org/drawingml/2006/main">
               <a:ext uri="{FF2B5EF4-FFF2-40B4-BE49-F238E27FC236}">
-                <a16:creationId xmlns:a16="http://schemas.microsoft.com/office/drawing/2014/main" id="{C6D7A978-CA87-4C8C-85E0-9BC698D1402E}"/>
+                <a16:creationId xmlns:a16="http://schemas.microsoft.com/office/drawing/2014/main" id="{F6555BDB-E7D9-4DD8-9D2B-EBEDBE25EAF4}"/>
               </a:ext>
             </a:extLst>
           </p:cNvPr>
@@ -9216,7 +9216,7 @@
           <p:cNvPr id="7" name="">
             <a:extLst xmlns:a="http://schemas.openxmlformats.org/drawingml/2006/main">
               <a:ext uri="{FF2B5EF4-FFF2-40B4-BE49-F238E27FC236}">
-                <a16:creationId xmlns:a16="http://schemas.microsoft.com/office/drawing/2014/main" id="{5F5C0D5E-8E23-4BC2-984F-A13537458962}"/>
+                <a16:creationId xmlns:a16="http://schemas.microsoft.com/office/drawing/2014/main" id="{CF38488C-3802-435C-832E-0E01863EF39E}"/>
               </a:ext>
             </a:extLst>
           </p:cNvPr>
@@ -9273,7 +9273,7 @@
           <p:cNvPr id="8" name="">
             <a:extLst xmlns:a="http://schemas.openxmlformats.org/drawingml/2006/main">
               <a:ext uri="{FF2B5EF4-FFF2-40B4-BE49-F238E27FC236}">
-                <a16:creationId xmlns:a16="http://schemas.microsoft.com/office/drawing/2014/main" id="{69061FC5-9F7A-4CDF-AC98-ED7EC1A6A7F6}"/>
+                <a16:creationId xmlns:a16="http://schemas.microsoft.com/office/drawing/2014/main" id="{ACA366BA-454C-4973-88A2-4C6D8A84F93B}"/>
               </a:ext>
             </a:extLst>
           </p:cNvPr>
@@ -9330,7 +9330,7 @@
           <p:cNvPr id="9" name="">
             <a:extLst xmlns:a="http://schemas.openxmlformats.org/drawingml/2006/main">
               <a:ext uri="{FF2B5EF4-FFF2-40B4-BE49-F238E27FC236}">
-                <a16:creationId xmlns:a16="http://schemas.microsoft.com/office/drawing/2014/main" id="{46CAAA49-6E65-484B-9BC4-97EE8DB8D02B}"/>
+                <a16:creationId xmlns:a16="http://schemas.microsoft.com/office/drawing/2014/main" id="{D0EF5405-2288-4116-AE97-09B541A7D02E}"/>
               </a:ext>
             </a:extLst>
           </p:cNvPr>
@@ -9385,7 +9385,7 @@
     </p:spTree>
     <p:extLst>
       <p:ext uri="{BB962C8B-B14F-4D97-AF65-F5344CB8AC3E}">
-        <p14:creationId xmlns:p14="http://schemas.microsoft.com/office/powerpoint/2010/main" val="838041523"/>
+        <p14:creationId xmlns:p14="http://schemas.microsoft.com/office/powerpoint/2010/main" val="737478432"/>
       </p:ext>
     </p:extLst>
   </p:cSld>
@@ -9416,7 +9416,7 @@
           <p:cNvPr id="5" name="">
             <a:extLst xmlns:a="http://schemas.openxmlformats.org/drawingml/2006/main">
               <a:ext uri="{FF2B5EF4-FFF2-40B4-BE49-F238E27FC236}">
-                <a16:creationId xmlns:a16="http://schemas.microsoft.com/office/drawing/2014/main" id="{A2904FE1-8B1A-4681-81BC-1A563699DDBC}"/>
+                <a16:creationId xmlns:a16="http://schemas.microsoft.com/office/drawing/2014/main" id="{BEFD7DE4-2174-44A7-AF51-BE3A9465D8F1}"/>
               </a:ext>
             </a:extLst>
           </p:cNvPr>
@@ -9473,7 +9473,7 @@
           <p:cNvPr id="2" name="">
             <a:extLst xmlns:a="http://schemas.openxmlformats.org/drawingml/2006/main">
               <a:ext uri="{FF2B5EF4-FFF2-40B4-BE49-F238E27FC236}">
-                <a16:creationId xmlns:a16="http://schemas.microsoft.com/office/drawing/2014/main" id="{0BAA0F0F-5859-4741-BC37-D1B58AAAE2B3}"/>
+                <a16:creationId xmlns:a16="http://schemas.microsoft.com/office/drawing/2014/main" id="{B47603D5-04CB-4451-B925-C6C671C293DD}"/>
               </a:ext>
             </a:extLst>
           </p:cNvPr>
@@ -9997,7 +9997,7 @@
           <p:cNvPr id="4" name="">
             <a:extLst xmlns:a="http://schemas.openxmlformats.org/drawingml/2006/main">
               <a:ext uri="{FF2B5EF4-FFF2-40B4-BE49-F238E27FC236}">
-                <a16:creationId xmlns:a16="http://schemas.microsoft.com/office/drawing/2014/main" id="{7A66F5D1-1CD7-4B15-BB5D-22A59E765F8E}"/>
+                <a16:creationId xmlns:a16="http://schemas.microsoft.com/office/drawing/2014/main" id="{67E73278-7A4A-43CE-9152-0E86F01D598B}"/>
               </a:ext>
             </a:extLst>
           </p:cNvPr>
@@ -10052,7 +10052,7 @@
     </p:spTree>
     <p:extLst>
       <p:ext uri="{BB962C8B-B14F-4D97-AF65-F5344CB8AC3E}">
-        <p14:creationId xmlns:p14="http://schemas.microsoft.com/office/powerpoint/2010/main" val="908953900"/>
+        <p14:creationId xmlns:p14="http://schemas.microsoft.com/office/powerpoint/2010/main" val="787823608"/>
       </p:ext>
     </p:extLst>
   </p:cSld>
@@ -10083,7 +10083,7 @@
           <p:cNvPr id="10" name="">
             <a:extLst xmlns:a="http://schemas.openxmlformats.org/drawingml/2006/main">
               <a:ext uri="{FF2B5EF4-FFF2-40B4-BE49-F238E27FC236}">
-                <a16:creationId xmlns:a16="http://schemas.microsoft.com/office/drawing/2014/main" id="{CB721724-C2F0-415C-AF2D-84DA81E6FCFB}"/>
+                <a16:creationId xmlns:a16="http://schemas.microsoft.com/office/drawing/2014/main" id="{B4EB7F82-5B39-49FD-96F1-09E4725A6D8C}"/>
               </a:ext>
             </a:extLst>
           </p:cNvPr>
@@ -10140,7 +10140,7 @@
           <p:cNvPr id="2" name="">
             <a:extLst xmlns:a="http://schemas.openxmlformats.org/drawingml/2006/main">
               <a:ext uri="{FF2B5EF4-FFF2-40B4-BE49-F238E27FC236}">
-                <a16:creationId xmlns:a16="http://schemas.microsoft.com/office/drawing/2014/main" id="{A313AF6F-C0C5-4CE8-A1A5-6B234D4252B7}"/>
+                <a16:creationId xmlns:a16="http://schemas.microsoft.com/office/drawing/2014/main" id="{800E8D62-A346-4A52-AB22-096D83473E8F}"/>
               </a:ext>
             </a:extLst>
           </p:cNvPr>
@@ -10197,7 +10197,7 @@
           <p:cNvPr id="3" name="">
             <a:extLst xmlns:a="http://schemas.openxmlformats.org/drawingml/2006/main">
               <a:ext uri="{FF2B5EF4-FFF2-40B4-BE49-F238E27FC236}">
-                <a16:creationId xmlns:a16="http://schemas.microsoft.com/office/drawing/2014/main" id="{9FFD5A4F-5125-4A6E-859C-7A8485CF614E}"/>
+                <a16:creationId xmlns:a16="http://schemas.microsoft.com/office/drawing/2014/main" id="{3B021839-A493-4A48-803C-D04B831D5878}"/>
               </a:ext>
             </a:extLst>
           </p:cNvPr>
@@ -10254,7 +10254,7 @@
           <p:cNvPr id="4" name="">
             <a:extLst xmlns:a="http://schemas.openxmlformats.org/drawingml/2006/main">
               <a:ext uri="{FF2B5EF4-FFF2-40B4-BE49-F238E27FC236}">
-                <a16:creationId xmlns:a16="http://schemas.microsoft.com/office/drawing/2014/main" id="{1BAEC68C-A0AE-4B9C-956B-487CB29FA579}"/>
+                <a16:creationId xmlns:a16="http://schemas.microsoft.com/office/drawing/2014/main" id="{F80B2310-42CD-4DFA-9F21-33E8EDFB284F}"/>
               </a:ext>
             </a:extLst>
           </p:cNvPr>
@@ -10311,7 +10311,7 @@
           <p:cNvPr id="5" name="">
             <a:extLst xmlns:a="http://schemas.openxmlformats.org/drawingml/2006/main">
               <a:ext uri="{FF2B5EF4-FFF2-40B4-BE49-F238E27FC236}">
-                <a16:creationId xmlns:a16="http://schemas.microsoft.com/office/drawing/2014/main" id="{F299AA91-09EE-41B0-944D-328D3CAFAE51}"/>
+                <a16:creationId xmlns:a16="http://schemas.microsoft.com/office/drawing/2014/main" id="{8BF5D3F1-5458-46AF-8EB9-56922BF7F112}"/>
               </a:ext>
             </a:extLst>
           </p:cNvPr>
@@ -10368,7 +10368,7 @@
           <p:cNvPr id="6" name="">
             <a:extLst xmlns:a="http://schemas.openxmlformats.org/drawingml/2006/main">
               <a:ext uri="{FF2B5EF4-FFF2-40B4-BE49-F238E27FC236}">
-                <a16:creationId xmlns:a16="http://schemas.microsoft.com/office/drawing/2014/main" id="{9B83E838-FDBD-4A23-90D0-58D8E2DACF17}"/>
+                <a16:creationId xmlns:a16="http://schemas.microsoft.com/office/drawing/2014/main" id="{C40D4841-01DD-4567-AF2B-02A16F5D3445}"/>
               </a:ext>
             </a:extLst>
           </p:cNvPr>
@@ -10425,7 +10425,7 @@
           <p:cNvPr id="7" name="">
             <a:extLst xmlns:a="http://schemas.openxmlformats.org/drawingml/2006/main">
               <a:ext uri="{FF2B5EF4-FFF2-40B4-BE49-F238E27FC236}">
-                <a16:creationId xmlns:a16="http://schemas.microsoft.com/office/drawing/2014/main" id="{D7FADCD5-85D2-4A74-9369-3FE8E2436D3C}"/>
+                <a16:creationId xmlns:a16="http://schemas.microsoft.com/office/drawing/2014/main" id="{5EC36800-B92E-46ED-BA72-267E3CE47D59}"/>
               </a:ext>
             </a:extLst>
           </p:cNvPr>
@@ -10482,7 +10482,7 @@
           <p:cNvPr id="8" name="">
             <a:extLst xmlns:a="http://schemas.openxmlformats.org/drawingml/2006/main">
               <a:ext uri="{FF2B5EF4-FFF2-40B4-BE49-F238E27FC236}">
-                <a16:creationId xmlns:a16="http://schemas.microsoft.com/office/drawing/2014/main" id="{0FC38AFB-CA67-49AD-A4CF-B59BD4A53CF3}"/>
+                <a16:creationId xmlns:a16="http://schemas.microsoft.com/office/drawing/2014/main" id="{DAD126F3-8197-416D-B346-1A8264B6B053}"/>
               </a:ext>
             </a:extLst>
           </p:cNvPr>
@@ -10539,7 +10539,7 @@
           <p:cNvPr id="9" name="">
             <a:extLst xmlns:a="http://schemas.openxmlformats.org/drawingml/2006/main">
               <a:ext uri="{FF2B5EF4-FFF2-40B4-BE49-F238E27FC236}">
-                <a16:creationId xmlns:a16="http://schemas.microsoft.com/office/drawing/2014/main" id="{9773D3BC-9586-4560-88D3-195A47C8CE88}"/>
+                <a16:creationId xmlns:a16="http://schemas.microsoft.com/office/drawing/2014/main" id="{64C60C79-19F7-4F23-9757-A75553FB7470}"/>
               </a:ext>
             </a:extLst>
           </p:cNvPr>
@@ -10594,7 +10594,7 @@
     </p:spTree>
     <p:extLst>
       <p:ext uri="{BB962C8B-B14F-4D97-AF65-F5344CB8AC3E}">
-        <p14:creationId xmlns:p14="http://schemas.microsoft.com/office/powerpoint/2010/main" val="790764881"/>
+        <p14:creationId xmlns:p14="http://schemas.microsoft.com/office/powerpoint/2010/main" val="1970671328"/>
       </p:ext>
     </p:extLst>
   </p:cSld>

--- a/docs/portfolio/mulino-coreano-portfolio-ko.pptx
+++ b/docs/portfolio/mulino-coreano-portfolio-ko.pptx
@@ -2,26 +2,26 @@
 <file path=ppt/presentation.xml><?xml version="1.0" encoding="utf-8"?>
 <p:presentation xmlns:p="http://schemas.openxmlformats.org/presentationml/2006/main">
   <p:sldMasterIdLst>
-    <p:sldMasterId xmlns:r="http://schemas.openxmlformats.org/officeDocument/2006/relationships" id="2147483648" r:id="R8bac25ac660c44dc"/>
+    <p:sldMasterId xmlns:r="http://schemas.openxmlformats.org/officeDocument/2006/relationships" id="2147483648" r:id="Rc4e72562fe714267"/>
   </p:sldMasterIdLst>
   <p:notesMasterIdLst>
-    <p:notesMasterId xmlns:r="http://schemas.openxmlformats.org/officeDocument/2006/relationships" r:id="R9261039a96664751"/>
+    <p:notesMasterId xmlns:r="http://schemas.openxmlformats.org/officeDocument/2006/relationships" r:id="R080206761b9e46ab"/>
   </p:notesMasterIdLst>
   <p:sldIdLst>
-    <p:sldId xmlns:r="http://schemas.openxmlformats.org/officeDocument/2006/relationships" id="256" r:id="Rae107a6a45a34846"/>
-    <p:sldId xmlns:r="http://schemas.openxmlformats.org/officeDocument/2006/relationships" id="257" r:id="Rddd62883cc9a4169"/>
-    <p:sldId xmlns:r="http://schemas.openxmlformats.org/officeDocument/2006/relationships" id="258" r:id="Rb48144da15f242f8"/>
-    <p:sldId xmlns:r="http://schemas.openxmlformats.org/officeDocument/2006/relationships" id="259" r:id="Rca5d0f7e7d714083"/>
-    <p:sldId xmlns:r="http://schemas.openxmlformats.org/officeDocument/2006/relationships" id="260" r:id="R4652c4ef3f4a4827"/>
-    <p:sldId xmlns:r="http://schemas.openxmlformats.org/officeDocument/2006/relationships" id="261" r:id="R8c0b14575d584320"/>
-    <p:sldId xmlns:r="http://schemas.openxmlformats.org/officeDocument/2006/relationships" id="262" r:id="Ra392661835cd4b99"/>
-    <p:sldId xmlns:r="http://schemas.openxmlformats.org/officeDocument/2006/relationships" id="263" r:id="Rac448e6e721e4da3"/>
-    <p:sldId xmlns:r="http://schemas.openxmlformats.org/officeDocument/2006/relationships" id="264" r:id="Rc4fee66328704028"/>
-    <p:sldId xmlns:r="http://schemas.openxmlformats.org/officeDocument/2006/relationships" id="265" r:id="R1dbeee1b89ed4ea1"/>
-    <p:sldId xmlns:r="http://schemas.openxmlformats.org/officeDocument/2006/relationships" id="266" r:id="R3dd1e4229bf44ee6"/>
-    <p:sldId xmlns:r="http://schemas.openxmlformats.org/officeDocument/2006/relationships" id="267" r:id="Rc2b21a20447c4e2a"/>
-    <p:sldId xmlns:r="http://schemas.openxmlformats.org/officeDocument/2006/relationships" id="268" r:id="R60cbf2d887fc4bce"/>
-    <p:sldId xmlns:r="http://schemas.openxmlformats.org/officeDocument/2006/relationships" id="269" r:id="R4c58882b311c4595"/>
+    <p:sldId xmlns:r="http://schemas.openxmlformats.org/officeDocument/2006/relationships" id="256" r:id="R709f6f8349c14a5d"/>
+    <p:sldId xmlns:r="http://schemas.openxmlformats.org/officeDocument/2006/relationships" id="257" r:id="Re60a37df260c4bad"/>
+    <p:sldId xmlns:r="http://schemas.openxmlformats.org/officeDocument/2006/relationships" id="258" r:id="R544575ac39a14c4f"/>
+    <p:sldId xmlns:r="http://schemas.openxmlformats.org/officeDocument/2006/relationships" id="259" r:id="R3d172498382e4c0b"/>
+    <p:sldId xmlns:r="http://schemas.openxmlformats.org/officeDocument/2006/relationships" id="260" r:id="R85209cfb29b4465c"/>
+    <p:sldId xmlns:r="http://schemas.openxmlformats.org/officeDocument/2006/relationships" id="261" r:id="Ra796101282614e73"/>
+    <p:sldId xmlns:r="http://schemas.openxmlformats.org/officeDocument/2006/relationships" id="262" r:id="R1b87077046a744de"/>
+    <p:sldId xmlns:r="http://schemas.openxmlformats.org/officeDocument/2006/relationships" id="263" r:id="R4bfa96d9efd9403f"/>
+    <p:sldId xmlns:r="http://schemas.openxmlformats.org/officeDocument/2006/relationships" id="264" r:id="R8fa565a17ead498f"/>
+    <p:sldId xmlns:r="http://schemas.openxmlformats.org/officeDocument/2006/relationships" id="265" r:id="R728e87b5c7ae4d5e"/>
+    <p:sldId xmlns:r="http://schemas.openxmlformats.org/officeDocument/2006/relationships" id="266" r:id="R29c3cb1e3f184fc7"/>
+    <p:sldId xmlns:r="http://schemas.openxmlformats.org/officeDocument/2006/relationships" id="267" r:id="R0768cee37bd644e9"/>
+    <p:sldId xmlns:r="http://schemas.openxmlformats.org/officeDocument/2006/relationships" id="268" r:id="R29e82e267dbd4b5a"/>
+    <p:sldId xmlns:r="http://schemas.openxmlformats.org/officeDocument/2006/relationships" id="269" r:id="R19769d0d66234a4d"/>
   </p:sldIdLst>
   <p:sldSz cx="12192000" cy="6858000"/>
   <p:notesSz cx="6858000" cy="9144000"/>
@@ -595,7 +595,7 @@
           <a:lstStyle xmlns:a="http://schemas.openxmlformats.org/drawingml/2006/main"/>
           <a:p xmlns:a="http://schemas.openxmlformats.org/drawingml/2006/main">
             <a:r>
-              <a:t>검증량은 업무 인수/규제 완전성을 뜻하지 않는다. Combined validated baseline fe6a51fadd2493018da59babd4a2eea908c2931f: clean test bootJar sitTest,569 discovered/18skip/551 executablePASS, failures0 errors0,20SITPASS/0fail/0skip,8m58s, modelcalls0, JARunchanged. Earlier Supplier0132 checkpoint567/18skip/549PASS remains historical. SIT20=P2P6+QM6+RC6+restart2. Separate #44 tooling: MCP26 runner57 Zig7 CLI32. Final native source2d2a900 runner76/helper7/SIT20 pass, SIT before final logging-only Codex diagnostics. Native worker did not repeat full549 at2d; subsequent combinedfe6 source passed551. Native acceptance remains incomplete. 출처: evidence.json 및 해시로 식별한 supplier/final-report.json, evidence/result.json. 원본 전체 로그는 coordinator 비공개 인수 bundle에 보존한다.</a:t>
+              <a:t>검증량은 업무 인수/규제 완전성을 뜻하지 않는다. Combined validated baseline fe6a51fadd2493018da59babd4a2eea908c2931f: clean test bootJar sitTest,569 discovered/18skip/551 executablePASS, failures0 errors0,20SITPASS/0fail/0skip,8m58s, modelcalls0, JARunchanged. Earlier Supplier0132 checkpoint567/18skip/549PASS remains historical. SIT20=P2P6+QM6+RC6+restart2. Separate #44 tooling: MCP26 runner57 Zig7 CLI32. Original native source2d2a900 runner76/helper7; later logging-only recovery sourcee61ded2 runner82/helper7PASS. Combined551/20 remains fe6 checkpoint, not rerun after recovery logging-only changes. Native worker did not repeat full549 at2d; subsequent combinedfe6 source passed551. Native acceptance remains incomplete. 출처: evidence.json 및 해시로 식별한 supplier/final-report.json, evidence/result.json. 원본 전체 로그는 coordinator 비공개 인수 bundle에 보존한다.</a:t>
             </a:r>
           </a:p>
         </p:txBody>
@@ -665,7 +665,7 @@
           <a:lstStyle xmlns:a="http://schemas.openxmlformats.org/drawingml/2006/main"/>
           <a:p xmlns:a="http://schemas.openxmlformats.org/drawingml/2006/main">
             <a:r>
-              <a:t>최종 인수/harness source 2d2a900b59a8704e27a4462740196b2c4902829b, production baseline 0132e0a62ad9f086e5c70c5c857d4546f5921ef9. image sha256:aa055d76d0c8d44b9707c84726101e551ec123dc0dba714bea4746b02d4d4656, JAR 4cc3ed1977f72538b51e025b09937f4b122a19e6305f4d0f5a939d82cfbb3369, CLI/role/JAR unchanged. CLAUDE/claude-sonnet-5: P2P001 and002 PASS,004/QM001 FAIL,RC001 INCOMPLETE. P2P002 manager BLOCK reason scenario BLOCK, CaseOPEN/coordinatorABORTED, no separate original decision/work/Attention DB export. 004 PO17000 does not excuse final coordinator MODEL_PROCESS_FAILED and usageComplete=false. QM zero is CLI reported, not imputed. RC rawPASSED preserved but final native usage missing, no valid reacceptance. CODEX/gpt-5.6-sol catalogdefaultlow firstRun fails before proposal, all metrics andresolvedModel unknown, executionReadyfalse/accountingStatusPARTIAL. Current account/rateLimits/read AUTHENTICATION does not establish earlier failure cause. Human login refresh prepared, not executed. Known CLI costUSD12.661439 only, overallunknown. Historical 2026-10-03 cb04403 Claude3PASS does not establish current acceptance. Source: evidence.json, https://github.com/se0nghe0n/mulino-coreano-erp/blob/2d2a900b59a8704e27a4462740196b2c4902829b/docs/16_scenario_tests.md, https://github.com/se0nghe0n/mulino-coreano-erp/blob/2d2a900b59a8704e27a4462740196b2c4902829b/docs/17_test_classification.md.</a:t>
+              <a:t>최종 인수/harness source 2d2a900b59a8704e27a4462740196b2c4902829b, production baseline 0132e0a62ad9f086e5c70c5c857d4546f5921ef9. image sha256:aa055d76d0c8d44b9707c84726101e551ec123dc0dba714bea4746b02d4d4656, JAR 4cc3ed1977f72538b51e025b09937f4b122a19e6305f4d0f5a939d82cfbb3369, CLI/role/JAR unchanged. CLAUDE/claude-sonnet-5: P2P001 and002 PASS,004/QM001 FAIL,RC001 INCOMPLETE. P2P002 manager BLOCK reason scenario BLOCK, CaseOPEN/coordinatorABORTED, no separate original decision/work/Attention DB export. 004 PO17000 does not excuse final coordinator MODEL_PROCESS_FAILED and usageComplete=false. QM zero is CLI reported, not imputed. RC rawPASSED preserved but final native usage missing, no valid reacceptance. CODEX/gpt-5.6-sol catalogdefaultlow firstRun fails before proposal, all metrics andresolvedModel unknown, executionReadyfalse/accountingStatusPARTIAL. Current account/rateLimits/read AUTHENTICATION does not establish earlier failure cause. Human login refresh prepared, not executed. Originalattempt knownCLIcostUSD12.661439; latestknownsubtotalUSD12.662505 including diagnostic0.001066, overallunknown. Later Recovery3allFAIL/zeroERPpreserves this original table; see slide14. Historical 2026-10-03 cb04403 Claude3PASS does not establish current acceptance. Source: evidence.json, https://github.com/se0nghe0n/mulino-coreano-erp/blob/2d2a900b59a8704e27a4462740196b2c4902829b/docs/16_scenario_tests.md, https://github.com/se0nghe0n/mulino-coreano-erp/blob/2d2a900b59a8704e27a4462740196b2c4902829b/docs/17_test_classification.md.</a:t>
             </a:r>
           </a:p>
         </p:txBody>
@@ -805,7 +805,7 @@
           <a:lstStyle xmlns:a="http://schemas.openxmlformats.org/drawingml/2006/main"/>
           <a:p xmlns:a="http://schemas.openxmlformats.org/drawingml/2006/main">
             <a:r>
-              <a:t>데모 runbook의 scripted/JAR proof와 현재 모델 인수를 구분한다. 최종 native source 2d2a900b59a8704e27a4462740196b2c4902829b, production baseline 0132e0a62ad9f086e5c70c5c857d4546f5921ef9. Valid Claude2PASS, 004/QMFAIL, RCINCOMPLETE and CodexFAIL. Known cost12.661439 only, overallunknown. Current Codex authmetadata error does not prove earlier cause. Verified human login refresh procedure prepared NOTexecuted. No recovery calls, production or actualclient35 acceptance. 출처: https://github.com/se0nghe0n/mulino-coreano-erp/blob/2d2a900b59a8704e27a4462740196b2c4902829b/docs/15_demo_runbook.md, https://github.com/se0nghe0n/mulino-coreano-erp/blob/2d2a900b59a8704e27a4462740196b2c4902829b/docs/16_scenario_tests.md, evidence.json.</a:t>
+              <a:t>원래 valid Claude001/002PASS와004/QMFAIL/RCINCOMPLETE를 보존한다. Recovery3 P2P004/QM001/RC001 allFAIL atfirstRun, zeroERP writes, caseOPEN/executionReadyfalse/accountingPARTIAL/usageCompletefalse. Recovery logging source e61ded2e93c0e241be62d87347534503652d74dc, integrated baseline5a6adda, production CLI/role/JAR/image unchanged. NormalRW mount minimalClaude diagnostic success USD0.001066 and USD0.05 cap is not business acceptance. Production/basic no-tool schema probes at USD0.045 cap bothFAIL, same fingerprint 8378c30e44e0ccecc1544d814a0fd4ad9f168c645c2716d0c0c49d52c7f111f0, exactcauseunknown, rawerror discarded. Tools-disabled x structured-output/schema/budget path and0.05vs0.045 cap difference remain caveats, no auth or specifickeyword conclusion. Latestknownreportedsubtotal12.662505, overallunknown. CodexcurrentAUTHENTICATION/humanrefreshNOTexecuted/client35/certgates unchanged. 출처: https://github.com/se0nghe0n/mulino-coreano-erp/blob/e61ded2e93c0e241be62d87347534503652d74dc/docs/15_demo_runbook.md, https://github.com/se0nghe0n/mulino-coreano-erp/blob/e61ded2e93c0e241be62d87347534503652d74dc/docs/16_scenario_tests.md, evidence.json.</a:t>
             </a:r>
           </a:p>
         </p:txBody>
@@ -1433,7 +1433,7 @@
   </p:cSld>
   <p:clrMap bg1="lt1" tx1="dk1" bg2="lt2" tx2="dk2" accent1="accent1" accent2="accent2" accent3="accent3" accent4="accent4" accent5="accent5" accent6="accent6" hlink="hlink" folHlink="folHlink"/>
   <p:sldLayoutIdLst>
-    <p:sldLayoutId xmlns:r="http://schemas.openxmlformats.org/officeDocument/2006/relationships" id="2147483649" r:id="Rf11dea32bbf94ce1"/>
+    <p:sldLayoutId xmlns:r="http://schemas.openxmlformats.org/officeDocument/2006/relationships" id="2147483649" r:id="R98c0b01572574e74"/>
   </p:sldLayoutIdLst>
   <p:txStyles>
     <p:titleStyle>
@@ -2166,7 +2166,7 @@
           <p:cNvPr id="6" name="">
             <a:extLst xmlns:a="http://schemas.openxmlformats.org/drawingml/2006/main">
               <a:ext uri="{FF2B5EF4-FFF2-40B4-BE49-F238E27FC236}">
-                <a16:creationId xmlns:a16="http://schemas.microsoft.com/office/drawing/2014/main" id="{83B1813B-456C-4CA8-B414-C0863F67151C}"/>
+                <a16:creationId xmlns:a16="http://schemas.microsoft.com/office/drawing/2014/main" id="{6F53F80F-1264-44E9-AF81-32F2EBD350FE}"/>
               </a:ext>
             </a:extLst>
           </p:cNvPr>
@@ -2223,7 +2223,7 @@
           <p:cNvPr id="2" name="">
             <a:extLst xmlns:a="http://schemas.openxmlformats.org/drawingml/2006/main">
               <a:ext uri="{FF2B5EF4-FFF2-40B4-BE49-F238E27FC236}">
-                <a16:creationId xmlns:a16="http://schemas.microsoft.com/office/drawing/2014/main" id="{55379DB2-B05A-42BE-95B0-C111E39FFB62}"/>
+                <a16:creationId xmlns:a16="http://schemas.microsoft.com/office/drawing/2014/main" id="{2BB90E2D-053B-4EF0-B8E6-B9D38DC1B347}"/>
               </a:ext>
             </a:extLst>
           </p:cNvPr>
@@ -2280,7 +2280,7 @@
           <p:cNvPr id="3" name="">
             <a:extLst xmlns:a="http://schemas.openxmlformats.org/drawingml/2006/main">
               <a:ext uri="{FF2B5EF4-FFF2-40B4-BE49-F238E27FC236}">
-                <a16:creationId xmlns:a16="http://schemas.microsoft.com/office/drawing/2014/main" id="{7BBF4012-0D4C-4AAA-B9A9-C71F8E59F507}"/>
+                <a16:creationId xmlns:a16="http://schemas.microsoft.com/office/drawing/2014/main" id="{50FD26EF-35DC-41B7-B01C-C2D0D3007D85}"/>
               </a:ext>
             </a:extLst>
           </p:cNvPr>
@@ -2360,7 +2360,7 @@
           <p:cNvPr id="4" name="">
             <a:extLst xmlns:a="http://schemas.openxmlformats.org/drawingml/2006/main">
               <a:ext uri="{FF2B5EF4-FFF2-40B4-BE49-F238E27FC236}">
-                <a16:creationId xmlns:a16="http://schemas.microsoft.com/office/drawing/2014/main" id="{5801D255-BEF4-47FD-B195-825638A025CC}"/>
+                <a16:creationId xmlns:a16="http://schemas.microsoft.com/office/drawing/2014/main" id="{271E02B0-42D7-40F3-A50B-0638DCCE49AA}"/>
               </a:ext>
             </a:extLst>
           </p:cNvPr>
@@ -2417,7 +2417,7 @@
           <p:cNvPr id="5" name="">
             <a:extLst xmlns:a="http://schemas.openxmlformats.org/drawingml/2006/main">
               <a:ext uri="{FF2B5EF4-FFF2-40B4-BE49-F238E27FC236}">
-                <a16:creationId xmlns:a16="http://schemas.microsoft.com/office/drawing/2014/main" id="{8B0E8176-BB2E-4524-AE7D-505CF7A95358}"/>
+                <a16:creationId xmlns:a16="http://schemas.microsoft.com/office/drawing/2014/main" id="{25F42A35-019A-4470-9BD4-C3E139631B85}"/>
               </a:ext>
             </a:extLst>
           </p:cNvPr>
@@ -2472,7 +2472,7 @@
     </p:spTree>
     <p:extLst>
       <p:ext uri="{BB962C8B-B14F-4D97-AF65-F5344CB8AC3E}">
-        <p14:creationId xmlns:p14="http://schemas.microsoft.com/office/powerpoint/2010/main" val="112517984"/>
+        <p14:creationId xmlns:p14="http://schemas.microsoft.com/office/powerpoint/2010/main" val="1919024043"/>
       </p:ext>
     </p:extLst>
   </p:cSld>
@@ -2503,7 +2503,7 @@
           <p:cNvPr id="5" name="">
             <a:extLst xmlns:a="http://schemas.openxmlformats.org/drawingml/2006/main">
               <a:ext uri="{FF2B5EF4-FFF2-40B4-BE49-F238E27FC236}">
-                <a16:creationId xmlns:a16="http://schemas.microsoft.com/office/drawing/2014/main" id="{2B299F5E-3B24-4EF0-9F4A-CA907E30A34C}"/>
+                <a16:creationId xmlns:a16="http://schemas.microsoft.com/office/drawing/2014/main" id="{4DF3D715-A99A-4EA3-9149-FDB469A60012}"/>
               </a:ext>
             </a:extLst>
           </p:cNvPr>
@@ -2560,7 +2560,7 @@
           <p:cNvPr id="2" name="">
             <a:extLst xmlns:a="http://schemas.openxmlformats.org/drawingml/2006/main">
               <a:ext uri="{FF2B5EF4-FFF2-40B4-BE49-F238E27FC236}">
-                <a16:creationId xmlns:a16="http://schemas.microsoft.com/office/drawing/2014/main" id="{7ED31914-CF8B-4D15-B803-1D1BB4FC2367}"/>
+                <a16:creationId xmlns:a16="http://schemas.microsoft.com/office/drawing/2014/main" id="{FE5C5163-841D-4809-A372-FD3D5FFC2DC8}"/>
               </a:ext>
             </a:extLst>
           </p:cNvPr>
@@ -3084,7 +3084,7 @@
           <p:cNvPr id="4" name="">
             <a:extLst xmlns:a="http://schemas.openxmlformats.org/drawingml/2006/main">
               <a:ext uri="{FF2B5EF4-FFF2-40B4-BE49-F238E27FC236}">
-                <a16:creationId xmlns:a16="http://schemas.microsoft.com/office/drawing/2014/main" id="{84ADD6BA-8CB2-4EAF-B3FF-2B697C2CFCD3}"/>
+                <a16:creationId xmlns:a16="http://schemas.microsoft.com/office/drawing/2014/main" id="{E40F6A3E-EC46-4907-9D0B-17BC0D821B33}"/>
               </a:ext>
             </a:extLst>
           </p:cNvPr>
@@ -3139,7 +3139,7 @@
     </p:spTree>
     <p:extLst>
       <p:ext uri="{BB962C8B-B14F-4D97-AF65-F5344CB8AC3E}">
-        <p14:creationId xmlns:p14="http://schemas.microsoft.com/office/powerpoint/2010/main" val="196152736"/>
+        <p14:creationId xmlns:p14="http://schemas.microsoft.com/office/powerpoint/2010/main" val="1666185768"/>
       </p:ext>
     </p:extLst>
   </p:cSld>
@@ -3170,7 +3170,7 @@
           <p:cNvPr id="9" name="">
             <a:extLst xmlns:a="http://schemas.openxmlformats.org/drawingml/2006/main">
               <a:ext uri="{FF2B5EF4-FFF2-40B4-BE49-F238E27FC236}">
-                <a16:creationId xmlns:a16="http://schemas.microsoft.com/office/drawing/2014/main" id="{346E57D7-82AB-46DA-96EF-EB6804144F8C}"/>
+                <a16:creationId xmlns:a16="http://schemas.microsoft.com/office/drawing/2014/main" id="{F8CBA202-7CFE-4A00-A6B2-DD253EAB04E2}"/>
               </a:ext>
             </a:extLst>
           </p:cNvPr>
@@ -3227,7 +3227,7 @@
           <p:cNvPr id="2" name="">
             <a:extLst xmlns:a="http://schemas.openxmlformats.org/drawingml/2006/main">
               <a:ext uri="{FF2B5EF4-FFF2-40B4-BE49-F238E27FC236}">
-                <a16:creationId xmlns:a16="http://schemas.microsoft.com/office/drawing/2014/main" id="{E43496C1-9D48-4FE6-AA32-9F62FC228D30}"/>
+                <a16:creationId xmlns:a16="http://schemas.microsoft.com/office/drawing/2014/main" id="{38C87091-239B-4D83-BB8A-6A33B20A1233}"/>
               </a:ext>
             </a:extLst>
           </p:cNvPr>
@@ -3291,7 +3291,7 @@
         </p:xfrm>
         <a:graphic xmlns:a="http://schemas.openxmlformats.org/drawingml/2006/main">
           <a:graphicData uri="http://schemas.openxmlformats.org/drawingml/2006/chart">
-            <c:chart xmlns:r="http://schemas.openxmlformats.org/officeDocument/2006/relationships" xmlns:c="http://schemas.openxmlformats.org/drawingml/2006/chart" r:id="R3e2350a5ef274369"/>
+            <c:chart xmlns:r="http://schemas.openxmlformats.org/officeDocument/2006/relationships" xmlns:c="http://schemas.openxmlformats.org/drawingml/2006/chart" r:id="R123fa86c978142b2"/>
           </a:graphicData>
         </a:graphic>
       </p:graphicFrame>
@@ -3300,7 +3300,7 @@
           <p:cNvPr id="4" name="">
             <a:extLst xmlns:a="http://schemas.openxmlformats.org/drawingml/2006/main">
               <a:ext uri="{FF2B5EF4-FFF2-40B4-BE49-F238E27FC236}">
-                <a16:creationId xmlns:a16="http://schemas.microsoft.com/office/drawing/2014/main" id="{E3F4978A-3FFB-416A-BA79-CF9CA5879ED3}"/>
+                <a16:creationId xmlns:a16="http://schemas.microsoft.com/office/drawing/2014/main" id="{B6E8F5FD-4420-4546-B385-7F04CA69C5DE}"/>
               </a:ext>
             </a:extLst>
           </p:cNvPr>
@@ -3357,7 +3357,7 @@
           <p:cNvPr id="5" name="">
             <a:extLst xmlns:a="http://schemas.openxmlformats.org/drawingml/2006/main">
               <a:ext uri="{FF2B5EF4-FFF2-40B4-BE49-F238E27FC236}">
-                <a16:creationId xmlns:a16="http://schemas.microsoft.com/office/drawing/2014/main" id="{37FEAFCD-6C4B-4562-A779-9CEAD8137974}"/>
+                <a16:creationId xmlns:a16="http://schemas.microsoft.com/office/drawing/2014/main" id="{0EAB4E10-E9BC-427C-8384-61A4D8549F65}"/>
               </a:ext>
             </a:extLst>
           </p:cNvPr>
@@ -3437,7 +3437,7 @@
           <p:cNvPr id="6" name="">
             <a:extLst xmlns:a="http://schemas.openxmlformats.org/drawingml/2006/main">
               <a:ext uri="{FF2B5EF4-FFF2-40B4-BE49-F238E27FC236}">
-                <a16:creationId xmlns:a16="http://schemas.microsoft.com/office/drawing/2014/main" id="{9BDD8E45-6297-4CE8-BAFB-A608073B42DA}"/>
+                <a16:creationId xmlns:a16="http://schemas.microsoft.com/office/drawing/2014/main" id="{759AD033-5629-47EF-A310-E65AFB8F5D1F}"/>
               </a:ext>
             </a:extLst>
           </p:cNvPr>
@@ -3494,7 +3494,7 @@
           <p:cNvPr id="7" name="">
             <a:extLst xmlns:a="http://schemas.openxmlformats.org/drawingml/2006/main">
               <a:ext uri="{FF2B5EF4-FFF2-40B4-BE49-F238E27FC236}">
-                <a16:creationId xmlns:a16="http://schemas.microsoft.com/office/drawing/2014/main" id="{880D353F-A894-46B3-BF73-ACDA1D618225}"/>
+                <a16:creationId xmlns:a16="http://schemas.microsoft.com/office/drawing/2014/main" id="{7A3EF104-39D5-4E75-A836-E0558F34AF40}"/>
               </a:ext>
             </a:extLst>
           </p:cNvPr>
@@ -3541,7 +3541,7 @@
                 <a:ea typeface="Apple SD Gothic Neo"/>
                 <a:cs typeface="Apple SD Gothic Neo"/>
               </a:rPr>
-              <a:t>runner 76 / helper 7</a:t>
+              <a:t>runner 82 / helper 7</a:t>
             </a:r>
           </a:p>
           <a:p xmlns:a="http://schemas.openxmlformats.org/drawingml/2006/main">
@@ -3564,7 +3564,7 @@
                 <a:ea typeface="Apple SD Gothic Neo"/>
                 <a:cs typeface="Apple SD Gothic Neo"/>
               </a:rPr>
-              <a:t>SIT 20 통과</a:t>
+              <a:t>SIT 20 (fe6 checkpoint)</a:t>
             </a:r>
           </a:p>
           <a:p xmlns:a="http://schemas.openxmlformats.org/drawingml/2006/main">
@@ -3597,7 +3597,7 @@
           <p:cNvPr id="8" name="">
             <a:extLst xmlns:a="http://schemas.openxmlformats.org/drawingml/2006/main">
               <a:ext uri="{FF2B5EF4-FFF2-40B4-BE49-F238E27FC236}">
-                <a16:creationId xmlns:a16="http://schemas.microsoft.com/office/drawing/2014/main" id="{20EB83D8-0315-4702-AA60-28D3F5AC4699}"/>
+                <a16:creationId xmlns:a16="http://schemas.microsoft.com/office/drawing/2014/main" id="{EE9A9F8E-7921-48F0-9481-73F088460111}"/>
               </a:ext>
             </a:extLst>
           </p:cNvPr>
@@ -3652,7 +3652,7 @@
     </p:spTree>
     <p:extLst>
       <p:ext uri="{BB962C8B-B14F-4D97-AF65-F5344CB8AC3E}">
-        <p14:creationId xmlns:p14="http://schemas.microsoft.com/office/powerpoint/2010/main" val="1618333756"/>
+        <p14:creationId xmlns:p14="http://schemas.microsoft.com/office/powerpoint/2010/main" val="2096169901"/>
       </p:ext>
     </p:extLst>
   </p:cSld>
@@ -3683,7 +3683,7 @@
           <p:cNvPr id="5" name="">
             <a:extLst xmlns:a="http://schemas.openxmlformats.org/drawingml/2006/main">
               <a:ext uri="{FF2B5EF4-FFF2-40B4-BE49-F238E27FC236}">
-                <a16:creationId xmlns:a16="http://schemas.microsoft.com/office/drawing/2014/main" id="{E27104DE-255C-4AE6-A2B7-2D627E67B45A}"/>
+                <a16:creationId xmlns:a16="http://schemas.microsoft.com/office/drawing/2014/main" id="{0C5D70FD-8742-4B82-8470-0637CB703AF1}"/>
               </a:ext>
             </a:extLst>
           </p:cNvPr>
@@ -3730,7 +3730,7 @@
                 <a:ea typeface="Apple SD Gothic Neo"/>
                 <a:cs typeface="Apple SD Gothic Neo"/>
               </a:rPr>
-              <a:t>현재 native UAT: 2 PASS, 전체 인수 미완료</a:t>
+              <a:t>원래 native UAT 이력: 2 PASS, 전체 인수 미완료</a:t>
             </a:r>
           </a:p>
         </p:txBody>
@@ -3740,7 +3740,7 @@
           <p:cNvPr id="2" name="">
             <a:extLst xmlns:a="http://schemas.openxmlformats.org/drawingml/2006/main">
               <a:ext uri="{FF2B5EF4-FFF2-40B4-BE49-F238E27FC236}">
-                <a16:creationId xmlns:a16="http://schemas.microsoft.com/office/drawing/2014/main" id="{51E1A2F1-E1CC-4120-972D-7DC6EA10A2A7}"/>
+                <a16:creationId xmlns:a16="http://schemas.microsoft.com/office/drawing/2014/main" id="{205EA969-0CA7-4FC5-9C6D-D7B30B731953}"/>
               </a:ext>
             </a:extLst>
           </p:cNvPr>
@@ -4338,7 +4338,7 @@
           <p:cNvPr id="4" name="">
             <a:extLst xmlns:a="http://schemas.openxmlformats.org/drawingml/2006/main">
               <a:ext uri="{FF2B5EF4-FFF2-40B4-BE49-F238E27FC236}">
-                <a16:creationId xmlns:a16="http://schemas.microsoft.com/office/drawing/2014/main" id="{B54EDD01-3F79-4C84-B091-47AAD568FCD7}"/>
+                <a16:creationId xmlns:a16="http://schemas.microsoft.com/office/drawing/2014/main" id="{8E645764-BB15-42FE-940E-E0849C3FCB81}"/>
               </a:ext>
             </a:extLst>
           </p:cNvPr>
@@ -4385,7 +4385,7 @@
                 <a:ea typeface="Apple SD Gothic Neo"/>
                 <a:cs typeface="Apple SD Gothic Neo"/>
               </a:rPr>
-              <a:t>알려진 보고 비용 USD 12.661439, 전체 비용 unknown. 현재 Codex 접근 gate: AUTHENTICATION</a:t>
+              <a:t>원래 시도 소계 USD 12.661439. 최신 알려진 소계 USD 12.662505, 전체 비용 unknown.</a:t>
             </a:r>
           </a:p>
         </p:txBody>
@@ -4393,7 +4393,7 @@
     </p:spTree>
     <p:extLst>
       <p:ext uri="{BB962C8B-B14F-4D97-AF65-F5344CB8AC3E}">
-        <p14:creationId xmlns:p14="http://schemas.microsoft.com/office/powerpoint/2010/main" val="175329987"/>
+        <p14:creationId xmlns:p14="http://schemas.microsoft.com/office/powerpoint/2010/main" val="1842255844"/>
       </p:ext>
     </p:extLst>
   </p:cSld>
@@ -4424,7 +4424,7 @@
           <p:cNvPr id="10" name="">
             <a:extLst xmlns:a="http://schemas.openxmlformats.org/drawingml/2006/main">
               <a:ext uri="{FF2B5EF4-FFF2-40B4-BE49-F238E27FC236}">
-                <a16:creationId xmlns:a16="http://schemas.microsoft.com/office/drawing/2014/main" id="{917AF00A-3507-408A-8060-C6B6B6E62BCD}"/>
+                <a16:creationId xmlns:a16="http://schemas.microsoft.com/office/drawing/2014/main" id="{803FBBB9-0D19-402E-B1F6-59DB273174AE}"/>
               </a:ext>
             </a:extLst>
           </p:cNvPr>
@@ -4481,7 +4481,7 @@
           <p:cNvPr id="2" name="">
             <a:extLst xmlns:a="http://schemas.openxmlformats.org/drawingml/2006/main">
               <a:ext uri="{FF2B5EF4-FFF2-40B4-BE49-F238E27FC236}">
-                <a16:creationId xmlns:a16="http://schemas.microsoft.com/office/drawing/2014/main" id="{5D4C2AAC-6DB7-4A54-9079-40D33CCF5923}"/>
+                <a16:creationId xmlns:a16="http://schemas.microsoft.com/office/drawing/2014/main" id="{BA2181B1-8760-47C5-9ECB-B62C666D7BB1}"/>
               </a:ext>
             </a:extLst>
           </p:cNvPr>
@@ -4538,7 +4538,7 @@
           <p:cNvPr id="3" name="">
             <a:extLst xmlns:a="http://schemas.openxmlformats.org/drawingml/2006/main">
               <a:ext uri="{FF2B5EF4-FFF2-40B4-BE49-F238E27FC236}">
-                <a16:creationId xmlns:a16="http://schemas.microsoft.com/office/drawing/2014/main" id="{8AE81CF3-E2ED-41D7-B43F-88DBE515193F}"/>
+                <a16:creationId xmlns:a16="http://schemas.microsoft.com/office/drawing/2014/main" id="{40C07243-03EE-4D06-8568-A52E80D730A7}"/>
               </a:ext>
             </a:extLst>
           </p:cNvPr>
@@ -4595,7 +4595,7 @@
           <p:cNvPr id="4" name="">
             <a:extLst xmlns:a="http://schemas.openxmlformats.org/drawingml/2006/main">
               <a:ext uri="{FF2B5EF4-FFF2-40B4-BE49-F238E27FC236}">
-                <a16:creationId xmlns:a16="http://schemas.microsoft.com/office/drawing/2014/main" id="{120298AC-C386-480F-BD76-31B75F4B198D}"/>
+                <a16:creationId xmlns:a16="http://schemas.microsoft.com/office/drawing/2014/main" id="{7C2FB43C-581B-47DC-80E3-DA20D93C729F}"/>
               </a:ext>
             </a:extLst>
           </p:cNvPr>
@@ -4652,7 +4652,7 @@
           <p:cNvPr id="5" name="">
             <a:extLst xmlns:a="http://schemas.openxmlformats.org/drawingml/2006/main">
               <a:ext uri="{FF2B5EF4-FFF2-40B4-BE49-F238E27FC236}">
-                <a16:creationId xmlns:a16="http://schemas.microsoft.com/office/drawing/2014/main" id="{C5A01BCF-1274-4BBF-A772-081D66A694B4}"/>
+                <a16:creationId xmlns:a16="http://schemas.microsoft.com/office/drawing/2014/main" id="{1481685A-5E91-4A8B-9063-EE6970E95C06}"/>
               </a:ext>
             </a:extLst>
           </p:cNvPr>
@@ -4709,7 +4709,7 @@
           <p:cNvPr id="6" name="">
             <a:extLst xmlns:a="http://schemas.openxmlformats.org/drawingml/2006/main">
               <a:ext uri="{FF2B5EF4-FFF2-40B4-BE49-F238E27FC236}">
-                <a16:creationId xmlns:a16="http://schemas.microsoft.com/office/drawing/2014/main" id="{90B7B633-1390-4E5F-A7AF-AB345BCA9B3A}"/>
+                <a16:creationId xmlns:a16="http://schemas.microsoft.com/office/drawing/2014/main" id="{70CD32B9-8BF3-45E9-A395-6808E3F30523}"/>
               </a:ext>
             </a:extLst>
           </p:cNvPr>
@@ -4766,7 +4766,7 @@
           <p:cNvPr id="7" name="">
             <a:extLst xmlns:a="http://schemas.openxmlformats.org/drawingml/2006/main">
               <a:ext uri="{FF2B5EF4-FFF2-40B4-BE49-F238E27FC236}">
-                <a16:creationId xmlns:a16="http://schemas.microsoft.com/office/drawing/2014/main" id="{04ABA4DB-ACB6-498F-BF83-2CE2D75C4F2F}"/>
+                <a16:creationId xmlns:a16="http://schemas.microsoft.com/office/drawing/2014/main" id="{2D05A19B-62F2-41A4-B82B-8897703706CF}"/>
               </a:ext>
             </a:extLst>
           </p:cNvPr>
@@ -4823,7 +4823,7 @@
           <p:cNvPr id="8" name="">
             <a:extLst xmlns:a="http://schemas.openxmlformats.org/drawingml/2006/main">
               <a:ext uri="{FF2B5EF4-FFF2-40B4-BE49-F238E27FC236}">
-                <a16:creationId xmlns:a16="http://schemas.microsoft.com/office/drawing/2014/main" id="{7FEEB52F-B43F-418F-868D-9EAA7DAF98F7}"/>
+                <a16:creationId xmlns:a16="http://schemas.microsoft.com/office/drawing/2014/main" id="{13DEDDF0-13D0-40A7-B832-B496D9820B7B}"/>
               </a:ext>
             </a:extLst>
           </p:cNvPr>
@@ -4880,7 +4880,7 @@
           <p:cNvPr id="9" name="">
             <a:extLst xmlns:a="http://schemas.openxmlformats.org/drawingml/2006/main">
               <a:ext uri="{FF2B5EF4-FFF2-40B4-BE49-F238E27FC236}">
-                <a16:creationId xmlns:a16="http://schemas.microsoft.com/office/drawing/2014/main" id="{2BDBB6DB-8A92-4FD0-B90D-3C92AE3BE3E7}"/>
+                <a16:creationId xmlns:a16="http://schemas.microsoft.com/office/drawing/2014/main" id="{8A7B7A32-75FF-463E-A294-48466A5CC606}"/>
               </a:ext>
             </a:extLst>
           </p:cNvPr>
@@ -4935,7 +4935,7 @@
     </p:spTree>
     <p:extLst>
       <p:ext uri="{BB962C8B-B14F-4D97-AF65-F5344CB8AC3E}">
-        <p14:creationId xmlns:p14="http://schemas.microsoft.com/office/powerpoint/2010/main" val="472536300"/>
+        <p14:creationId xmlns:p14="http://schemas.microsoft.com/office/powerpoint/2010/main" val="1262414515"/>
       </p:ext>
     </p:extLst>
   </p:cSld>
@@ -4966,7 +4966,7 @@
           <p:cNvPr id="10" name="">
             <a:extLst xmlns:a="http://schemas.openxmlformats.org/drawingml/2006/main">
               <a:ext uri="{FF2B5EF4-FFF2-40B4-BE49-F238E27FC236}">
-                <a16:creationId xmlns:a16="http://schemas.microsoft.com/office/drawing/2014/main" id="{16A50DCA-89D4-4D5C-9B26-078F946CEF79}"/>
+                <a16:creationId xmlns:a16="http://schemas.microsoft.com/office/drawing/2014/main" id="{7BFD2018-5DB5-4BA0-8B92-A82D9561AC5C}"/>
               </a:ext>
             </a:extLst>
           </p:cNvPr>
@@ -5013,7 +5013,7 @@
                 <a:ea typeface="Apple SD Gothic Neo"/>
                 <a:cs typeface="Apple SD Gothic Neo"/>
               </a:rPr>
-              <a:t>데모와 남은 runtime 인수 gate</a:t>
+              <a:t>Recovery 실패와 남은 runtime 인수 gate</a:t>
             </a:r>
           </a:p>
         </p:txBody>
@@ -5023,7 +5023,7 @@
           <p:cNvPr id="2" name="">
             <a:extLst xmlns:a="http://schemas.openxmlformats.org/drawingml/2006/main">
               <a:ext uri="{FF2B5EF4-FFF2-40B4-BE49-F238E27FC236}">
-                <a16:creationId xmlns:a16="http://schemas.microsoft.com/office/drawing/2014/main" id="{3EEDDCA2-6CA6-4401-AFFE-B3EE405516F6}"/>
+                <a16:creationId xmlns:a16="http://schemas.microsoft.com/office/drawing/2014/main" id="{A2A3390A-4FB8-4514-8874-148311E77E0A}"/>
               </a:ext>
             </a:extLst>
           </p:cNvPr>
@@ -5080,7 +5080,7 @@
           <p:cNvPr id="3" name="">
             <a:extLst xmlns:a="http://schemas.openxmlformats.org/drawingml/2006/main">
               <a:ext uri="{FF2B5EF4-FFF2-40B4-BE49-F238E27FC236}">
-                <a16:creationId xmlns:a16="http://schemas.microsoft.com/office/drawing/2014/main" id="{BFE25ADD-4D9D-4103-B124-99057534DE7E}"/>
+                <a16:creationId xmlns:a16="http://schemas.microsoft.com/office/drawing/2014/main" id="{FA1D1AEA-5D7F-497D-BD2D-9227489D4C84}"/>
               </a:ext>
             </a:extLst>
           </p:cNvPr>
@@ -5127,7 +5127,7 @@
                 <a:ea typeface="Apple SD Gothic Neo"/>
                 <a:cs typeface="Apple SD Gothic Neo"/>
               </a:rPr>
-              <a:t>구매 데모와 현재 모델 결과를 구분한다</a:t>
+              <a:t>유효한 PASS와 재시도 실패를 보존한다</a:t>
             </a:r>
           </a:p>
         </p:txBody>
@@ -5137,7 +5137,7 @@
           <p:cNvPr id="4" name="">
             <a:extLst xmlns:a="http://schemas.openxmlformats.org/drawingml/2006/main">
               <a:ext uri="{FF2B5EF4-FFF2-40B4-BE49-F238E27FC236}">
-                <a16:creationId xmlns:a16="http://schemas.microsoft.com/office/drawing/2014/main" id="{427B912E-42BE-4414-A9FC-1F546766C138}"/>
+                <a16:creationId xmlns:a16="http://schemas.microsoft.com/office/drawing/2014/main" id="{6D9BC72F-D51A-48D6-8B08-BDCD3B321A3A}"/>
               </a:ext>
             </a:extLst>
           </p:cNvPr>
@@ -5184,7 +5184,7 @@
                 <a:ea typeface="Apple SD Gothic Neo"/>
                 <a:cs typeface="Apple SD Gothic Neo"/>
               </a:rPr>
-              <a:t>001·002는 PASS다. 004는 발주가 있어도 최종 조정 실패로 FAIL이다.</a:t>
+              <a:t>001·002는 PASS다. 004·QM·RC의 Recovery 3건은 모두 FAIL, ERP 쓰기 0건이다.</a:t>
             </a:r>
           </a:p>
         </p:txBody>
@@ -5194,7 +5194,7 @@
           <p:cNvPr id="5" name="">
             <a:extLst xmlns:a="http://schemas.openxmlformats.org/drawingml/2006/main">
               <a:ext uri="{FF2B5EF4-FFF2-40B4-BE49-F238E27FC236}">
-                <a16:creationId xmlns:a16="http://schemas.microsoft.com/office/drawing/2014/main" id="{FAB88058-385F-45C5-8E8F-229495F96B64}"/>
+                <a16:creationId xmlns:a16="http://schemas.microsoft.com/office/drawing/2014/main" id="{F5244B84-6F21-4A16-9CA6-AB20E7B5BCC5}"/>
               </a:ext>
             </a:extLst>
           </p:cNvPr>
@@ -5241,7 +5241,7 @@
                 <a:ea typeface="Apple SD Gothic Neo"/>
                 <a:cs typeface="Apple SD Gothic Neo"/>
               </a:rPr>
-              <a:t>품질·리콜의 미인수 결과를 보존한다</a:t>
+              <a:t>최소 진단 성공을 업무 인수로 세지 않는다</a:t>
             </a:r>
           </a:p>
         </p:txBody>
@@ -5251,7 +5251,7 @@
           <p:cNvPr id="6" name="">
             <a:extLst xmlns:a="http://schemas.openxmlformats.org/drawingml/2006/main">
               <a:ext uri="{FF2B5EF4-FFF2-40B4-BE49-F238E27FC236}">
-                <a16:creationId xmlns:a16="http://schemas.microsoft.com/office/drawing/2014/main" id="{C4B92BD7-F0D5-4E65-BE5F-9318F89BF175}"/>
+                <a16:creationId xmlns:a16="http://schemas.microsoft.com/office/drawing/2014/main" id="{902CABB5-4C0E-4954-974A-07E14F9C49EF}"/>
               </a:ext>
             </a:extLst>
           </p:cNvPr>
@@ -5298,7 +5298,7 @@
                 <a:ea typeface="Apple SD Gothic Neo"/>
                 <a:cs typeface="Apple SD Gothic Neo"/>
               </a:rPr>
-              <a:t>QM은 검사 제안 전 FAIL, RC는 종료·사용량 누락으로 INCOMPLETE다.</a:t>
+              <a:t>RW 최소 진단 USD 0.001066 성공. no-tool production/basic probe는 둘 다 FAIL이다.</a:t>
             </a:r>
           </a:p>
         </p:txBody>
@@ -5308,7 +5308,7 @@
           <p:cNvPr id="7" name="">
             <a:extLst xmlns:a="http://schemas.openxmlformats.org/drawingml/2006/main">
               <a:ext uri="{FF2B5EF4-FFF2-40B4-BE49-F238E27FC236}">
-                <a16:creationId xmlns:a16="http://schemas.microsoft.com/office/drawing/2014/main" id="{C800B5C8-6BC3-4895-B99C-026E3F8D40A3}"/>
+                <a16:creationId xmlns:a16="http://schemas.microsoft.com/office/drawing/2014/main" id="{B2630CC1-BF93-4491-A0F3-75AA30CC2686}"/>
               </a:ext>
             </a:extLst>
           </p:cNvPr>
@@ -5355,7 +5355,7 @@
                 <a:ea typeface="Apple SD Gothic Neo"/>
                 <a:cs typeface="Apple SD Gothic Neo"/>
               </a:rPr>
-              <a:t>현재 접근 gate와 인간 절차를 명시한다</a:t>
+              <a:t>정확한 실패 원인은 unknown이다</a:t>
             </a:r>
           </a:p>
         </p:txBody>
@@ -5365,7 +5365,7 @@
           <p:cNvPr id="8" name="">
             <a:extLst xmlns:a="http://schemas.openxmlformats.org/drawingml/2006/main">
               <a:ext uri="{FF2B5EF4-FFF2-40B4-BE49-F238E27FC236}">
-                <a16:creationId xmlns:a16="http://schemas.microsoft.com/office/drawing/2014/main" id="{4F68ADF3-AD11-4EBA-93E0-F63BA2875579}"/>
+                <a16:creationId xmlns:a16="http://schemas.microsoft.com/office/drawing/2014/main" id="{6D937E13-878C-4012-AA20-5A4D6DC3B899}"/>
               </a:ext>
             </a:extLst>
           </p:cNvPr>
@@ -5412,7 +5412,7 @@
                 <a:ea typeface="Apple SD Gothic Neo"/>
                 <a:cs typeface="Apple SD Gothic Neo"/>
               </a:rPr>
-              <a:t>Codex account 접근은 AUTHENTICATION이다. 인간 login 갱신 절차는 준비했고 실행하지 않았다.</a:t>
+              <a:t>같은 fingerprint만 확인했다. tools-disabled·schema·budget 경로는 미해소다.</a:t>
             </a:r>
           </a:p>
         </p:txBody>
@@ -5422,7 +5422,7 @@
           <p:cNvPr id="9" name="">
             <a:extLst xmlns:a="http://schemas.openxmlformats.org/drawingml/2006/main">
               <a:ext uri="{FF2B5EF4-FFF2-40B4-BE49-F238E27FC236}">
-                <a16:creationId xmlns:a16="http://schemas.microsoft.com/office/drawing/2014/main" id="{2061828C-4393-4C08-ACDA-9A0745ACAF54}"/>
+                <a16:creationId xmlns:a16="http://schemas.microsoft.com/office/drawing/2014/main" id="{6F3D9D09-8FE5-40EC-AF42-FC810FAF5730}"/>
               </a:ext>
             </a:extLst>
           </p:cNvPr>
@@ -5469,7 +5469,7 @@
                 <a:ea typeface="Apple SD Gothic Neo"/>
                 <a:cs typeface="Apple SD Gothic Neo"/>
               </a:rPr>
-              <a:t>5개 native 인수·Codex parity·실제 클라이언트 #35는 미완료다. 과거 PASS를 현재 source로 이월하지 않는다.</a:t>
+              <a:t>Codex AUTHENTICATION·인간 login 갱신 미실행. 최신 소계 USD 12.662505, 전체 비용 unknown.</a:t>
             </a:r>
           </a:p>
         </p:txBody>
@@ -5477,7 +5477,7 @@
     </p:spTree>
     <p:extLst>
       <p:ext uri="{BB962C8B-B14F-4D97-AF65-F5344CB8AC3E}">
-        <p14:creationId xmlns:p14="http://schemas.microsoft.com/office/powerpoint/2010/main" val="375168767"/>
+        <p14:creationId xmlns:p14="http://schemas.microsoft.com/office/powerpoint/2010/main" val="1062955570"/>
       </p:ext>
     </p:extLst>
   </p:cSld>
@@ -5508,7 +5508,7 @@
           <p:cNvPr id="5" name="">
             <a:extLst xmlns:a="http://schemas.openxmlformats.org/drawingml/2006/main">
               <a:ext uri="{FF2B5EF4-FFF2-40B4-BE49-F238E27FC236}">
-                <a16:creationId xmlns:a16="http://schemas.microsoft.com/office/drawing/2014/main" id="{12DCFE49-CE2A-4673-92F9-DC3BEEA645E1}"/>
+                <a16:creationId xmlns:a16="http://schemas.microsoft.com/office/drawing/2014/main" id="{04C00F79-CFC1-46FC-9D94-58B060665DBD}"/>
               </a:ext>
             </a:extLst>
           </p:cNvPr>
@@ -5565,7 +5565,7 @@
           <p:cNvPr id="2" name="">
             <a:extLst xmlns:a="http://schemas.openxmlformats.org/drawingml/2006/main">
               <a:ext uri="{FF2B5EF4-FFF2-40B4-BE49-F238E27FC236}">
-                <a16:creationId xmlns:a16="http://schemas.microsoft.com/office/drawing/2014/main" id="{4440468F-C1D2-400E-B196-82FB0C4FFCB4}"/>
+                <a16:creationId xmlns:a16="http://schemas.microsoft.com/office/drawing/2014/main" id="{C4D91056-F6E6-447A-8C17-F396B4DDC8BC}"/>
               </a:ext>
             </a:extLst>
           </p:cNvPr>
@@ -6089,7 +6089,7 @@
           <p:cNvPr id="4" name="">
             <a:extLst xmlns:a="http://schemas.openxmlformats.org/drawingml/2006/main">
               <a:ext uri="{FF2B5EF4-FFF2-40B4-BE49-F238E27FC236}">
-                <a16:creationId xmlns:a16="http://schemas.microsoft.com/office/drawing/2014/main" id="{0010B7AC-9C2B-410C-BC04-4A3378653A6D}"/>
+                <a16:creationId xmlns:a16="http://schemas.microsoft.com/office/drawing/2014/main" id="{CC98A845-7762-415C-A7D1-35ECE017A084}"/>
               </a:ext>
             </a:extLst>
           </p:cNvPr>
@@ -6144,7 +6144,7 @@
     </p:spTree>
     <p:extLst>
       <p:ext uri="{BB962C8B-B14F-4D97-AF65-F5344CB8AC3E}">
-        <p14:creationId xmlns:p14="http://schemas.microsoft.com/office/powerpoint/2010/main" val="857906691"/>
+        <p14:creationId xmlns:p14="http://schemas.microsoft.com/office/powerpoint/2010/main" val="1901063976"/>
       </p:ext>
     </p:extLst>
   </p:cSld>
@@ -6175,7 +6175,7 @@
           <p:cNvPr id="5" name="">
             <a:extLst xmlns:a="http://schemas.openxmlformats.org/drawingml/2006/main">
               <a:ext uri="{FF2B5EF4-FFF2-40B4-BE49-F238E27FC236}">
-                <a16:creationId xmlns:a16="http://schemas.microsoft.com/office/drawing/2014/main" id="{7D46FA23-1927-4E8E-846F-CC699CBDDA75}"/>
+                <a16:creationId xmlns:a16="http://schemas.microsoft.com/office/drawing/2014/main" id="{4D02C316-3C78-465E-8710-CDF0446A6A6F}"/>
               </a:ext>
             </a:extLst>
           </p:cNvPr>
@@ -6232,7 +6232,7 @@
           <p:cNvPr id="2" name="">
             <a:extLst xmlns:a="http://schemas.openxmlformats.org/drawingml/2006/main">
               <a:ext uri="{FF2B5EF4-FFF2-40B4-BE49-F238E27FC236}">
-                <a16:creationId xmlns:a16="http://schemas.microsoft.com/office/drawing/2014/main" id="{C658177E-39EE-4384-A9FB-1FBF05160E2D}"/>
+                <a16:creationId xmlns:a16="http://schemas.microsoft.com/office/drawing/2014/main" id="{3CAB2A3E-D4B8-4322-8D2E-A390C7A79F98}"/>
               </a:ext>
             </a:extLst>
           </p:cNvPr>
@@ -6830,7 +6830,7 @@
           <p:cNvPr id="4" name="">
             <a:extLst xmlns:a="http://schemas.openxmlformats.org/drawingml/2006/main">
               <a:ext uri="{FF2B5EF4-FFF2-40B4-BE49-F238E27FC236}">
-                <a16:creationId xmlns:a16="http://schemas.microsoft.com/office/drawing/2014/main" id="{165E0374-0F5A-41A7-AAF9-E9F060F8BC9D}"/>
+                <a16:creationId xmlns:a16="http://schemas.microsoft.com/office/drawing/2014/main" id="{178780FC-52F4-4B9C-B33C-B0BCF2FBC5D2}"/>
               </a:ext>
             </a:extLst>
           </p:cNvPr>
@@ -6885,7 +6885,7 @@
     </p:spTree>
     <p:extLst>
       <p:ext uri="{BB962C8B-B14F-4D97-AF65-F5344CB8AC3E}">
-        <p14:creationId xmlns:p14="http://schemas.microsoft.com/office/powerpoint/2010/main" val="197027452"/>
+        <p14:creationId xmlns:p14="http://schemas.microsoft.com/office/powerpoint/2010/main" val="4942086"/>
       </p:ext>
     </p:extLst>
   </p:cSld>
@@ -6916,7 +6916,7 @@
           <p:cNvPr id="13" name="">
             <a:extLst xmlns:a="http://schemas.openxmlformats.org/drawingml/2006/main">
               <a:ext uri="{FF2B5EF4-FFF2-40B4-BE49-F238E27FC236}">
-                <a16:creationId xmlns:a16="http://schemas.microsoft.com/office/drawing/2014/main" id="{37ADF154-CE68-4F05-AAFF-1A3B2EE64151}"/>
+                <a16:creationId xmlns:a16="http://schemas.microsoft.com/office/drawing/2014/main" id="{D57D2E92-9885-438B-BD84-A3A99990375D}"/>
               </a:ext>
             </a:extLst>
           </p:cNvPr>
@@ -6973,7 +6973,7 @@
           <p:cNvPr id="2" name="">
             <a:extLst xmlns:a="http://schemas.openxmlformats.org/drawingml/2006/main">
               <a:ext uri="{FF2B5EF4-FFF2-40B4-BE49-F238E27FC236}">
-                <a16:creationId xmlns:a16="http://schemas.microsoft.com/office/drawing/2014/main" id="{32C6CC77-076A-43A4-BF0A-107F831ABC59}"/>
+                <a16:creationId xmlns:a16="http://schemas.microsoft.com/office/drawing/2014/main" id="{33D89B27-2D51-4F50-81DF-98FC453AA58A}"/>
               </a:ext>
             </a:extLst>
           </p:cNvPr>
@@ -7030,7 +7030,7 @@
           <p:cNvPr id="3" name="">
             <a:extLst xmlns:a="http://schemas.openxmlformats.org/drawingml/2006/main">
               <a:ext uri="{FF2B5EF4-FFF2-40B4-BE49-F238E27FC236}">
-                <a16:creationId xmlns:a16="http://schemas.microsoft.com/office/drawing/2014/main" id="{801406A6-902A-41BF-81F9-3585B6923C9D}"/>
+                <a16:creationId xmlns:a16="http://schemas.microsoft.com/office/drawing/2014/main" id="{3C50A298-D604-4BA7-B119-7167DF696CFA}"/>
               </a:ext>
             </a:extLst>
           </p:cNvPr>
@@ -7112,7 +7112,7 @@
           <p:cNvPr id="4" name="">
             <a:extLst xmlns:a="http://schemas.openxmlformats.org/drawingml/2006/main">
               <a:ext uri="{FF2B5EF4-FFF2-40B4-BE49-F238E27FC236}">
-                <a16:creationId xmlns:a16="http://schemas.microsoft.com/office/drawing/2014/main" id="{8A766ACB-870A-458F-BBED-D72A66C673C1}"/>
+                <a16:creationId xmlns:a16="http://schemas.microsoft.com/office/drawing/2014/main" id="{284371E0-B538-48CF-84B9-241C502CC10E}"/>
               </a:ext>
             </a:extLst>
           </p:cNvPr>
@@ -7194,7 +7194,7 @@
           <p:cNvPr id="5" name="">
             <a:extLst xmlns:a="http://schemas.openxmlformats.org/drawingml/2006/main">
               <a:ext uri="{FF2B5EF4-FFF2-40B4-BE49-F238E27FC236}">
-                <a16:creationId xmlns:a16="http://schemas.microsoft.com/office/drawing/2014/main" id="{39749D3B-3B41-4033-80B5-6DA49214C879}"/>
+                <a16:creationId xmlns:a16="http://schemas.microsoft.com/office/drawing/2014/main" id="{E1513D98-DA18-44E8-BA84-DB0293ED9663}"/>
               </a:ext>
             </a:extLst>
           </p:cNvPr>
@@ -7276,7 +7276,7 @@
           <p:cNvPr id="6" name="">
             <a:extLst xmlns:a="http://schemas.openxmlformats.org/drawingml/2006/main">
               <a:ext uri="{FF2B5EF4-FFF2-40B4-BE49-F238E27FC236}">
-                <a16:creationId xmlns:a16="http://schemas.microsoft.com/office/drawing/2014/main" id="{15E514AC-1B98-46E5-8905-317538961338}"/>
+                <a16:creationId xmlns:a16="http://schemas.microsoft.com/office/drawing/2014/main" id="{4F7D33BC-B60A-4F50-B419-53059C2A74DF}"/>
               </a:ext>
             </a:extLst>
           </p:cNvPr>
@@ -7306,7 +7306,7 @@
           <p:cNvPr id="7" name="">
             <a:extLst xmlns:a="http://schemas.openxmlformats.org/drawingml/2006/main">
               <a:ext uri="{FF2B5EF4-FFF2-40B4-BE49-F238E27FC236}">
-                <a16:creationId xmlns:a16="http://schemas.microsoft.com/office/drawing/2014/main" id="{758C0D0B-B9A5-4374-B31E-8820996AAB78}"/>
+                <a16:creationId xmlns:a16="http://schemas.microsoft.com/office/drawing/2014/main" id="{FE9A7DF8-4429-42DB-99D3-D042BEAC8EA7}"/>
               </a:ext>
             </a:extLst>
           </p:cNvPr>
@@ -7336,7 +7336,7 @@
           <p:cNvPr id="8" name="">
             <a:extLst xmlns:a="http://schemas.openxmlformats.org/drawingml/2006/main">
               <a:ext uri="{FF2B5EF4-FFF2-40B4-BE49-F238E27FC236}">
-                <a16:creationId xmlns:a16="http://schemas.microsoft.com/office/drawing/2014/main" id="{C9E7720C-6620-4873-81FD-4EF7FA41B05D}"/>
+                <a16:creationId xmlns:a16="http://schemas.microsoft.com/office/drawing/2014/main" id="{AA4002FA-077C-4FF6-BF62-F7C6216CB32F}"/>
               </a:ext>
             </a:extLst>
           </p:cNvPr>
@@ -7366,7 +7366,7 @@
           <p:cNvPr id="9" name="">
             <a:extLst xmlns:a="http://schemas.openxmlformats.org/drawingml/2006/main">
               <a:ext uri="{FF2B5EF4-FFF2-40B4-BE49-F238E27FC236}">
-                <a16:creationId xmlns:a16="http://schemas.microsoft.com/office/drawing/2014/main" id="{07FB4B77-BB4E-4EB6-8908-C5354AAB19AA}"/>
+                <a16:creationId xmlns:a16="http://schemas.microsoft.com/office/drawing/2014/main" id="{D2C6CB81-C7D6-4FA2-844B-9612608C1DF3}"/>
               </a:ext>
             </a:extLst>
           </p:cNvPr>
@@ -7425,7 +7425,7 @@
           <p:cNvPr id="10" name="">
             <a:extLst xmlns:a="http://schemas.openxmlformats.org/drawingml/2006/main">
               <a:ext uri="{FF2B5EF4-FFF2-40B4-BE49-F238E27FC236}">
-                <a16:creationId xmlns:a16="http://schemas.microsoft.com/office/drawing/2014/main" id="{F82A1AFE-B3B0-427A-B158-411340F6194B}"/>
+                <a16:creationId xmlns:a16="http://schemas.microsoft.com/office/drawing/2014/main" id="{18F985CD-7202-41B0-8B81-6313896822C1}"/>
               </a:ext>
             </a:extLst>
           </p:cNvPr>
@@ -7455,7 +7455,7 @@
           <p:cNvPr id="11" name="">
             <a:extLst xmlns:a="http://schemas.openxmlformats.org/drawingml/2006/main">
               <a:ext uri="{FF2B5EF4-FFF2-40B4-BE49-F238E27FC236}">
-                <a16:creationId xmlns:a16="http://schemas.microsoft.com/office/drawing/2014/main" id="{A4D50086-354F-4538-A9AA-598736FF55FD}"/>
+                <a16:creationId xmlns:a16="http://schemas.microsoft.com/office/drawing/2014/main" id="{2948134D-6C50-453B-82FA-E2DE78293AF1}"/>
               </a:ext>
             </a:extLst>
           </p:cNvPr>
@@ -7514,7 +7514,7 @@
           <p:cNvPr id="12" name="">
             <a:extLst xmlns:a="http://schemas.openxmlformats.org/drawingml/2006/main">
               <a:ext uri="{FF2B5EF4-FFF2-40B4-BE49-F238E27FC236}">
-                <a16:creationId xmlns:a16="http://schemas.microsoft.com/office/drawing/2014/main" id="{5D5B15DC-8616-4236-A0E1-23908E6F0A2B}"/>
+                <a16:creationId xmlns:a16="http://schemas.microsoft.com/office/drawing/2014/main" id="{6D64D17A-B504-4BA2-A796-18899F0C5307}"/>
               </a:ext>
             </a:extLst>
           </p:cNvPr>
@@ -7569,7 +7569,7 @@
     </p:spTree>
     <p:extLst>
       <p:ext uri="{BB962C8B-B14F-4D97-AF65-F5344CB8AC3E}">
-        <p14:creationId xmlns:p14="http://schemas.microsoft.com/office/powerpoint/2010/main" val="1842418601"/>
+        <p14:creationId xmlns:p14="http://schemas.microsoft.com/office/powerpoint/2010/main" val="2083228185"/>
       </p:ext>
     </p:extLst>
   </p:cSld>
@@ -7600,7 +7600,7 @@
           <p:cNvPr id="13" name="">
             <a:extLst xmlns:a="http://schemas.openxmlformats.org/drawingml/2006/main">
               <a:ext uri="{FF2B5EF4-FFF2-40B4-BE49-F238E27FC236}">
-                <a16:creationId xmlns:a16="http://schemas.microsoft.com/office/drawing/2014/main" id="{2B47F3AE-2E1D-444A-A29A-138349ABC66A}"/>
+                <a16:creationId xmlns:a16="http://schemas.microsoft.com/office/drawing/2014/main" id="{A4BF5FA5-3E0C-4B47-A871-CE624BE47F70}"/>
               </a:ext>
             </a:extLst>
           </p:cNvPr>
@@ -7657,7 +7657,7 @@
           <p:cNvPr id="2" name="">
             <a:extLst xmlns:a="http://schemas.openxmlformats.org/drawingml/2006/main">
               <a:ext uri="{FF2B5EF4-FFF2-40B4-BE49-F238E27FC236}">
-                <a16:creationId xmlns:a16="http://schemas.microsoft.com/office/drawing/2014/main" id="{77B5B740-4267-411D-A2BD-723EF33E023D}"/>
+                <a16:creationId xmlns:a16="http://schemas.microsoft.com/office/drawing/2014/main" id="{451CC574-F4AA-41B7-8243-1A5AC715AFD2}"/>
               </a:ext>
             </a:extLst>
           </p:cNvPr>
@@ -7714,7 +7714,7 @@
           <p:cNvPr id="3" name="">
             <a:extLst xmlns:a="http://schemas.openxmlformats.org/drawingml/2006/main">
               <a:ext uri="{FF2B5EF4-FFF2-40B4-BE49-F238E27FC236}">
-                <a16:creationId xmlns:a16="http://schemas.microsoft.com/office/drawing/2014/main" id="{EA171357-B93A-47ED-841B-106F4A41B3CB}"/>
+                <a16:creationId xmlns:a16="http://schemas.microsoft.com/office/drawing/2014/main" id="{132CE39B-C955-43A6-A6D7-15B49E51A05A}"/>
               </a:ext>
             </a:extLst>
           </p:cNvPr>
@@ -7796,7 +7796,7 @@
           <p:cNvPr id="4" name="">
             <a:extLst xmlns:a="http://schemas.openxmlformats.org/drawingml/2006/main">
               <a:ext uri="{FF2B5EF4-FFF2-40B4-BE49-F238E27FC236}">
-                <a16:creationId xmlns:a16="http://schemas.microsoft.com/office/drawing/2014/main" id="{FC962E9B-4C9F-4F01-8548-9413360B27EB}"/>
+                <a16:creationId xmlns:a16="http://schemas.microsoft.com/office/drawing/2014/main" id="{25267CF1-48A3-4925-B2AE-FFBEC0F06F82}"/>
               </a:ext>
             </a:extLst>
           </p:cNvPr>
@@ -7826,7 +7826,7 @@
           <p:cNvPr id="5" name="">
             <a:extLst xmlns:a="http://schemas.openxmlformats.org/drawingml/2006/main">
               <a:ext uri="{FF2B5EF4-FFF2-40B4-BE49-F238E27FC236}">
-                <a16:creationId xmlns:a16="http://schemas.microsoft.com/office/drawing/2014/main" id="{4B98B319-64FB-4C0A-B0FE-95C3B48FD504}"/>
+                <a16:creationId xmlns:a16="http://schemas.microsoft.com/office/drawing/2014/main" id="{70BC8DB3-4352-48DA-BADD-C78D9E65E0E7}"/>
               </a:ext>
             </a:extLst>
           </p:cNvPr>
@@ -7908,7 +7908,7 @@
           <p:cNvPr id="6" name="">
             <a:extLst xmlns:a="http://schemas.openxmlformats.org/drawingml/2006/main">
               <a:ext uri="{FF2B5EF4-FFF2-40B4-BE49-F238E27FC236}">
-                <a16:creationId xmlns:a16="http://schemas.microsoft.com/office/drawing/2014/main" id="{2A90C756-D986-4C1E-B0AD-72ED99C96A2F}"/>
+                <a16:creationId xmlns:a16="http://schemas.microsoft.com/office/drawing/2014/main" id="{9CCFCB1C-0C26-4C58-925A-58A4D7D60236}"/>
               </a:ext>
             </a:extLst>
           </p:cNvPr>
@@ -7938,7 +7938,7 @@
           <p:cNvPr id="7" name="">
             <a:extLst xmlns:a="http://schemas.openxmlformats.org/drawingml/2006/main">
               <a:ext uri="{FF2B5EF4-FFF2-40B4-BE49-F238E27FC236}">
-                <a16:creationId xmlns:a16="http://schemas.microsoft.com/office/drawing/2014/main" id="{A2425EA1-8A0E-4E14-9610-8AFB1ADE1CE7}"/>
+                <a16:creationId xmlns:a16="http://schemas.microsoft.com/office/drawing/2014/main" id="{A138A4CC-137B-4AD6-92B5-972271FF958E}"/>
               </a:ext>
             </a:extLst>
           </p:cNvPr>
@@ -8020,7 +8020,7 @@
           <p:cNvPr id="8" name="">
             <a:extLst xmlns:a="http://schemas.openxmlformats.org/drawingml/2006/main">
               <a:ext uri="{FF2B5EF4-FFF2-40B4-BE49-F238E27FC236}">
-                <a16:creationId xmlns:a16="http://schemas.microsoft.com/office/drawing/2014/main" id="{74648190-9923-4C9F-B2C8-E2493C122168}"/>
+                <a16:creationId xmlns:a16="http://schemas.microsoft.com/office/drawing/2014/main" id="{EB65C76D-EBEF-44A0-8DAD-B4488EA94C64}"/>
               </a:ext>
             </a:extLst>
           </p:cNvPr>
@@ -8050,7 +8050,7 @@
           <p:cNvPr id="9" name="">
             <a:extLst xmlns:a="http://schemas.openxmlformats.org/drawingml/2006/main">
               <a:ext uri="{FF2B5EF4-FFF2-40B4-BE49-F238E27FC236}">
-                <a16:creationId xmlns:a16="http://schemas.microsoft.com/office/drawing/2014/main" id="{FA9A0E97-EDCC-4C2E-BF05-221F45309F0E}"/>
+                <a16:creationId xmlns:a16="http://schemas.microsoft.com/office/drawing/2014/main" id="{79CEEEF5-B047-4C41-867F-0229310E3122}"/>
               </a:ext>
             </a:extLst>
           </p:cNvPr>
@@ -8132,7 +8132,7 @@
           <p:cNvPr id="10" name="">
             <a:extLst xmlns:a="http://schemas.openxmlformats.org/drawingml/2006/main">
               <a:ext uri="{FF2B5EF4-FFF2-40B4-BE49-F238E27FC236}">
-                <a16:creationId xmlns:a16="http://schemas.microsoft.com/office/drawing/2014/main" id="{17215E02-B4B3-4708-8C55-3C447FA600F8}"/>
+                <a16:creationId xmlns:a16="http://schemas.microsoft.com/office/drawing/2014/main" id="{D1BA57D1-2AE2-401F-8EC8-8DD4C079AA2F}"/>
               </a:ext>
             </a:extLst>
           </p:cNvPr>
@@ -8189,7 +8189,7 @@
           <p:cNvPr id="11" name="">
             <a:extLst xmlns:a="http://schemas.openxmlformats.org/drawingml/2006/main">
               <a:ext uri="{FF2B5EF4-FFF2-40B4-BE49-F238E27FC236}">
-                <a16:creationId xmlns:a16="http://schemas.microsoft.com/office/drawing/2014/main" id="{3493FAD7-9800-4DE6-9B64-88DF34477DDC}"/>
+                <a16:creationId xmlns:a16="http://schemas.microsoft.com/office/drawing/2014/main" id="{8F572901-74C5-4458-ADB4-B88E8ED6BD0D}"/>
               </a:ext>
             </a:extLst>
           </p:cNvPr>
@@ -8246,7 +8246,7 @@
           <p:cNvPr id="12" name="">
             <a:extLst xmlns:a="http://schemas.openxmlformats.org/drawingml/2006/main">
               <a:ext uri="{FF2B5EF4-FFF2-40B4-BE49-F238E27FC236}">
-                <a16:creationId xmlns:a16="http://schemas.microsoft.com/office/drawing/2014/main" id="{134970C8-A67D-47FF-8C3E-E0B50C75FC16}"/>
+                <a16:creationId xmlns:a16="http://schemas.microsoft.com/office/drawing/2014/main" id="{623BB8A5-580E-42BF-921A-9D6F730484B8}"/>
               </a:ext>
             </a:extLst>
           </p:cNvPr>
@@ -8301,7 +8301,7 @@
     </p:spTree>
     <p:extLst>
       <p:ext uri="{BB962C8B-B14F-4D97-AF65-F5344CB8AC3E}">
-        <p14:creationId xmlns:p14="http://schemas.microsoft.com/office/powerpoint/2010/main" val="1121209416"/>
+        <p14:creationId xmlns:p14="http://schemas.microsoft.com/office/powerpoint/2010/main" val="1709090866"/>
       </p:ext>
     </p:extLst>
   </p:cSld>
@@ -8332,7 +8332,7 @@
           <p:cNvPr id="10" name="">
             <a:extLst xmlns:a="http://schemas.openxmlformats.org/drawingml/2006/main">
               <a:ext uri="{FF2B5EF4-FFF2-40B4-BE49-F238E27FC236}">
-                <a16:creationId xmlns:a16="http://schemas.microsoft.com/office/drawing/2014/main" id="{2211DAFF-1EFF-4B29-9360-12A1ECC8341C}"/>
+                <a16:creationId xmlns:a16="http://schemas.microsoft.com/office/drawing/2014/main" id="{9854A320-4C2E-45B3-B080-60ED9BC35561}"/>
               </a:ext>
             </a:extLst>
           </p:cNvPr>
@@ -8389,7 +8389,7 @@
           <p:cNvPr id="2" name="">
             <a:extLst xmlns:a="http://schemas.openxmlformats.org/drawingml/2006/main">
               <a:ext uri="{FF2B5EF4-FFF2-40B4-BE49-F238E27FC236}">
-                <a16:creationId xmlns:a16="http://schemas.microsoft.com/office/drawing/2014/main" id="{85ABFDB9-EFD4-4E42-A30E-BAD9A7F1A103}"/>
+                <a16:creationId xmlns:a16="http://schemas.microsoft.com/office/drawing/2014/main" id="{F7A4C2F3-5C4C-400A-9595-D5721F46592E}"/>
               </a:ext>
             </a:extLst>
           </p:cNvPr>
@@ -8446,7 +8446,7 @@
           <p:cNvPr id="3" name="">
             <a:extLst xmlns:a="http://schemas.openxmlformats.org/drawingml/2006/main">
               <a:ext uri="{FF2B5EF4-FFF2-40B4-BE49-F238E27FC236}">
-                <a16:creationId xmlns:a16="http://schemas.microsoft.com/office/drawing/2014/main" id="{A63ECA8D-6A1F-4276-84CD-C8DB58088EF0}"/>
+                <a16:creationId xmlns:a16="http://schemas.microsoft.com/office/drawing/2014/main" id="{F5AAD6E3-3580-4D8A-91C5-858FB4DC13C7}"/>
               </a:ext>
             </a:extLst>
           </p:cNvPr>
@@ -8503,7 +8503,7 @@
           <p:cNvPr id="4" name="">
             <a:extLst xmlns:a="http://schemas.openxmlformats.org/drawingml/2006/main">
               <a:ext uri="{FF2B5EF4-FFF2-40B4-BE49-F238E27FC236}">
-                <a16:creationId xmlns:a16="http://schemas.microsoft.com/office/drawing/2014/main" id="{5A672CE6-1073-4E53-BBD5-C4435020DA29}"/>
+                <a16:creationId xmlns:a16="http://schemas.microsoft.com/office/drawing/2014/main" id="{136882A3-A99A-4B78-AACD-EB9B019E763B}"/>
               </a:ext>
             </a:extLst>
           </p:cNvPr>
@@ -8560,7 +8560,7 @@
           <p:cNvPr id="5" name="">
             <a:extLst xmlns:a="http://schemas.openxmlformats.org/drawingml/2006/main">
               <a:ext uri="{FF2B5EF4-FFF2-40B4-BE49-F238E27FC236}">
-                <a16:creationId xmlns:a16="http://schemas.microsoft.com/office/drawing/2014/main" id="{F6E33010-B3F7-49EF-9999-ABE133507145}"/>
+                <a16:creationId xmlns:a16="http://schemas.microsoft.com/office/drawing/2014/main" id="{564B719E-6D4C-477A-9F67-7B180C9E697F}"/>
               </a:ext>
             </a:extLst>
           </p:cNvPr>
@@ -8617,7 +8617,7 @@
           <p:cNvPr id="6" name="">
             <a:extLst xmlns:a="http://schemas.openxmlformats.org/drawingml/2006/main">
               <a:ext uri="{FF2B5EF4-FFF2-40B4-BE49-F238E27FC236}">
-                <a16:creationId xmlns:a16="http://schemas.microsoft.com/office/drawing/2014/main" id="{338CABC2-8860-4DEE-B7DB-3EBF83D086CC}"/>
+                <a16:creationId xmlns:a16="http://schemas.microsoft.com/office/drawing/2014/main" id="{538BD367-66D9-4581-80B8-68214F7EAAEC}"/>
               </a:ext>
             </a:extLst>
           </p:cNvPr>
@@ -8674,7 +8674,7 @@
           <p:cNvPr id="7" name="">
             <a:extLst xmlns:a="http://schemas.openxmlformats.org/drawingml/2006/main">
               <a:ext uri="{FF2B5EF4-FFF2-40B4-BE49-F238E27FC236}">
-                <a16:creationId xmlns:a16="http://schemas.microsoft.com/office/drawing/2014/main" id="{C38A964E-3B6B-428B-B073-981953447AFB}"/>
+                <a16:creationId xmlns:a16="http://schemas.microsoft.com/office/drawing/2014/main" id="{266B4651-3249-48E1-91D1-EF9BF306D65A}"/>
               </a:ext>
             </a:extLst>
           </p:cNvPr>
@@ -8731,7 +8731,7 @@
           <p:cNvPr id="8" name="">
             <a:extLst xmlns:a="http://schemas.openxmlformats.org/drawingml/2006/main">
               <a:ext uri="{FF2B5EF4-FFF2-40B4-BE49-F238E27FC236}">
-                <a16:creationId xmlns:a16="http://schemas.microsoft.com/office/drawing/2014/main" id="{E9B6D9DA-0C0E-4C86-8B7A-9394723C34D5}"/>
+                <a16:creationId xmlns:a16="http://schemas.microsoft.com/office/drawing/2014/main" id="{8491C1C7-31E7-4702-BF97-7974D0F7950A}"/>
               </a:ext>
             </a:extLst>
           </p:cNvPr>
@@ -8788,7 +8788,7 @@
           <p:cNvPr id="9" name="">
             <a:extLst xmlns:a="http://schemas.openxmlformats.org/drawingml/2006/main">
               <a:ext uri="{FF2B5EF4-FFF2-40B4-BE49-F238E27FC236}">
-                <a16:creationId xmlns:a16="http://schemas.microsoft.com/office/drawing/2014/main" id="{85F00009-E659-4542-B3D8-BF1973E9263E}"/>
+                <a16:creationId xmlns:a16="http://schemas.microsoft.com/office/drawing/2014/main" id="{01D0DB54-B601-4499-B337-6AB0F3CE61B9}"/>
               </a:ext>
             </a:extLst>
           </p:cNvPr>
@@ -8843,7 +8843,7 @@
     </p:spTree>
     <p:extLst>
       <p:ext uri="{BB962C8B-B14F-4D97-AF65-F5344CB8AC3E}">
-        <p14:creationId xmlns:p14="http://schemas.microsoft.com/office/powerpoint/2010/main" val="2040537260"/>
+        <p14:creationId xmlns:p14="http://schemas.microsoft.com/office/powerpoint/2010/main" val="2085710026"/>
       </p:ext>
     </p:extLst>
   </p:cSld>
@@ -8874,7 +8874,7 @@
           <p:cNvPr id="10" name="">
             <a:extLst xmlns:a="http://schemas.openxmlformats.org/drawingml/2006/main">
               <a:ext uri="{FF2B5EF4-FFF2-40B4-BE49-F238E27FC236}">
-                <a16:creationId xmlns:a16="http://schemas.microsoft.com/office/drawing/2014/main" id="{019FF199-6ADD-43D2-B3F6-D0871A43DC6F}"/>
+                <a16:creationId xmlns:a16="http://schemas.microsoft.com/office/drawing/2014/main" id="{F4F2905E-6C92-4DDD-B3AE-571199ECC1BF}"/>
               </a:ext>
             </a:extLst>
           </p:cNvPr>
@@ -8931,7 +8931,7 @@
           <p:cNvPr id="2" name="">
             <a:extLst xmlns:a="http://schemas.openxmlformats.org/drawingml/2006/main">
               <a:ext uri="{FF2B5EF4-FFF2-40B4-BE49-F238E27FC236}">
-                <a16:creationId xmlns:a16="http://schemas.microsoft.com/office/drawing/2014/main" id="{65B62BE5-08B4-46C4-BB87-E10884BA70DE}"/>
+                <a16:creationId xmlns:a16="http://schemas.microsoft.com/office/drawing/2014/main" id="{6C9A2C23-2DD0-4445-B71D-95BA1DD4143C}"/>
               </a:ext>
             </a:extLst>
           </p:cNvPr>
@@ -8988,7 +8988,7 @@
           <p:cNvPr id="3" name="">
             <a:extLst xmlns:a="http://schemas.openxmlformats.org/drawingml/2006/main">
               <a:ext uri="{FF2B5EF4-FFF2-40B4-BE49-F238E27FC236}">
-                <a16:creationId xmlns:a16="http://schemas.microsoft.com/office/drawing/2014/main" id="{3CEFB67F-C8B4-4F66-A8BC-7A23A8256279}"/>
+                <a16:creationId xmlns:a16="http://schemas.microsoft.com/office/drawing/2014/main" id="{32E00378-1560-4DE1-8942-934A9ADEFF91}"/>
               </a:ext>
             </a:extLst>
           </p:cNvPr>
@@ -9045,7 +9045,7 @@
           <p:cNvPr id="4" name="">
             <a:extLst xmlns:a="http://schemas.openxmlformats.org/drawingml/2006/main">
               <a:ext uri="{FF2B5EF4-FFF2-40B4-BE49-F238E27FC236}">
-                <a16:creationId xmlns:a16="http://schemas.microsoft.com/office/drawing/2014/main" id="{59FCA888-66EE-4572-9175-62554C764FE0}"/>
+                <a16:creationId xmlns:a16="http://schemas.microsoft.com/office/drawing/2014/main" id="{30D8099E-15F6-4AD5-B51E-76E91429F632}"/>
               </a:ext>
             </a:extLst>
           </p:cNvPr>
@@ -9102,7 +9102,7 @@
           <p:cNvPr id="5" name="">
             <a:extLst xmlns:a="http://schemas.openxmlformats.org/drawingml/2006/main">
               <a:ext uri="{FF2B5EF4-FFF2-40B4-BE49-F238E27FC236}">
-                <a16:creationId xmlns:a16="http://schemas.microsoft.com/office/drawing/2014/main" id="{23F1FE34-3CBF-414F-942C-7647D2C86AA4}"/>
+                <a16:creationId xmlns:a16="http://schemas.microsoft.com/office/drawing/2014/main" id="{D4DD83F5-70A7-49EC-91CA-75827FD5758F}"/>
               </a:ext>
             </a:extLst>
           </p:cNvPr>
@@ -9159,7 +9159,7 @@
           <p:cNvPr id="6" name="">
             <a:extLst xmlns:a="http://schemas.openxmlformats.org/drawingml/2006/main">
               <a:ext uri="{FF2B5EF4-FFF2-40B4-BE49-F238E27FC236}">
-                <a16:creationId xmlns:a16="http://schemas.microsoft.com/office/drawing/2014/main" id="{F6555BDB-E7D9-4DD8-9D2B-EBEDBE25EAF4}"/>
+                <a16:creationId xmlns:a16="http://schemas.microsoft.com/office/drawing/2014/main" id="{780D3729-63EB-4B65-85C3-A37D1A9A41B5}"/>
               </a:ext>
             </a:extLst>
           </p:cNvPr>
@@ -9216,7 +9216,7 @@
           <p:cNvPr id="7" name="">
             <a:extLst xmlns:a="http://schemas.openxmlformats.org/drawingml/2006/main">
               <a:ext uri="{FF2B5EF4-FFF2-40B4-BE49-F238E27FC236}">
-                <a16:creationId xmlns:a16="http://schemas.microsoft.com/office/drawing/2014/main" id="{CF38488C-3802-435C-832E-0E01863EF39E}"/>
+                <a16:creationId xmlns:a16="http://schemas.microsoft.com/office/drawing/2014/main" id="{0A370924-88A3-42F9-8457-D5D3B48CCA76}"/>
               </a:ext>
             </a:extLst>
           </p:cNvPr>
@@ -9273,7 +9273,7 @@
           <p:cNvPr id="8" name="">
             <a:extLst xmlns:a="http://schemas.openxmlformats.org/drawingml/2006/main">
               <a:ext uri="{FF2B5EF4-FFF2-40B4-BE49-F238E27FC236}">
-                <a16:creationId xmlns:a16="http://schemas.microsoft.com/office/drawing/2014/main" id="{ACA366BA-454C-4973-88A2-4C6D8A84F93B}"/>
+                <a16:creationId xmlns:a16="http://schemas.microsoft.com/office/drawing/2014/main" id="{6E284E8D-639A-45BB-A50F-F3BFB1CB87C2}"/>
               </a:ext>
             </a:extLst>
           </p:cNvPr>
@@ -9330,7 +9330,7 @@
           <p:cNvPr id="9" name="">
             <a:extLst xmlns:a="http://schemas.openxmlformats.org/drawingml/2006/main">
               <a:ext uri="{FF2B5EF4-FFF2-40B4-BE49-F238E27FC236}">
-                <a16:creationId xmlns:a16="http://schemas.microsoft.com/office/drawing/2014/main" id="{D0EF5405-2288-4116-AE97-09B541A7D02E}"/>
+                <a16:creationId xmlns:a16="http://schemas.microsoft.com/office/drawing/2014/main" id="{DA25F96D-7612-4C75-9DA1-94A83F97A9DC}"/>
               </a:ext>
             </a:extLst>
           </p:cNvPr>
@@ -9385,7 +9385,7 @@
     </p:spTree>
     <p:extLst>
       <p:ext uri="{BB962C8B-B14F-4D97-AF65-F5344CB8AC3E}">
-        <p14:creationId xmlns:p14="http://schemas.microsoft.com/office/powerpoint/2010/main" val="737478432"/>
+        <p14:creationId xmlns:p14="http://schemas.microsoft.com/office/powerpoint/2010/main" val="488552968"/>
       </p:ext>
     </p:extLst>
   </p:cSld>
@@ -9416,7 +9416,7 @@
           <p:cNvPr id="5" name="">
             <a:extLst xmlns:a="http://schemas.openxmlformats.org/drawingml/2006/main">
               <a:ext uri="{FF2B5EF4-FFF2-40B4-BE49-F238E27FC236}">
-                <a16:creationId xmlns:a16="http://schemas.microsoft.com/office/drawing/2014/main" id="{BEFD7DE4-2174-44A7-AF51-BE3A9465D8F1}"/>
+                <a16:creationId xmlns:a16="http://schemas.microsoft.com/office/drawing/2014/main" id="{2E7C77DF-1999-4060-88B5-21E697D59724}"/>
               </a:ext>
             </a:extLst>
           </p:cNvPr>
@@ -9473,7 +9473,7 @@
           <p:cNvPr id="2" name="">
             <a:extLst xmlns:a="http://schemas.openxmlformats.org/drawingml/2006/main">
               <a:ext uri="{FF2B5EF4-FFF2-40B4-BE49-F238E27FC236}">
-                <a16:creationId xmlns:a16="http://schemas.microsoft.com/office/drawing/2014/main" id="{B47603D5-04CB-4451-B925-C6C671C293DD}"/>
+                <a16:creationId xmlns:a16="http://schemas.microsoft.com/office/drawing/2014/main" id="{C0A546F5-757F-4AD5-A502-38D929557CBF}"/>
               </a:ext>
             </a:extLst>
           </p:cNvPr>
@@ -9997,7 +9997,7 @@
           <p:cNvPr id="4" name="">
             <a:extLst xmlns:a="http://schemas.openxmlformats.org/drawingml/2006/main">
               <a:ext uri="{FF2B5EF4-FFF2-40B4-BE49-F238E27FC236}">
-                <a16:creationId xmlns:a16="http://schemas.microsoft.com/office/drawing/2014/main" id="{67E73278-7A4A-43CE-9152-0E86F01D598B}"/>
+                <a16:creationId xmlns:a16="http://schemas.microsoft.com/office/drawing/2014/main" id="{091A4895-EF6E-473F-A1CA-240E21CE893A}"/>
               </a:ext>
             </a:extLst>
           </p:cNvPr>
@@ -10052,7 +10052,7 @@
     </p:spTree>
     <p:extLst>
       <p:ext uri="{BB962C8B-B14F-4D97-AF65-F5344CB8AC3E}">
-        <p14:creationId xmlns:p14="http://schemas.microsoft.com/office/powerpoint/2010/main" val="787823608"/>
+        <p14:creationId xmlns:p14="http://schemas.microsoft.com/office/powerpoint/2010/main" val="1058758076"/>
       </p:ext>
     </p:extLst>
   </p:cSld>
@@ -10083,7 +10083,7 @@
           <p:cNvPr id="10" name="">
             <a:extLst xmlns:a="http://schemas.openxmlformats.org/drawingml/2006/main">
               <a:ext uri="{FF2B5EF4-FFF2-40B4-BE49-F238E27FC236}">
-                <a16:creationId xmlns:a16="http://schemas.microsoft.com/office/drawing/2014/main" id="{B4EB7F82-5B39-49FD-96F1-09E4725A6D8C}"/>
+                <a16:creationId xmlns:a16="http://schemas.microsoft.com/office/drawing/2014/main" id="{7620F1E7-1DB1-47EC-B36E-E109C228D4F3}"/>
               </a:ext>
             </a:extLst>
           </p:cNvPr>
@@ -10140,7 +10140,7 @@
           <p:cNvPr id="2" name="">
             <a:extLst xmlns:a="http://schemas.openxmlformats.org/drawingml/2006/main">
               <a:ext uri="{FF2B5EF4-FFF2-40B4-BE49-F238E27FC236}">
-                <a16:creationId xmlns:a16="http://schemas.microsoft.com/office/drawing/2014/main" id="{800E8D62-A346-4A52-AB22-096D83473E8F}"/>
+                <a16:creationId xmlns:a16="http://schemas.microsoft.com/office/drawing/2014/main" id="{1AAE5189-5922-48A6-874A-FAD225185731}"/>
               </a:ext>
             </a:extLst>
           </p:cNvPr>
@@ -10197,7 +10197,7 @@
           <p:cNvPr id="3" name="">
             <a:extLst xmlns:a="http://schemas.openxmlformats.org/drawingml/2006/main">
               <a:ext uri="{FF2B5EF4-FFF2-40B4-BE49-F238E27FC236}">
-                <a16:creationId xmlns:a16="http://schemas.microsoft.com/office/drawing/2014/main" id="{3B021839-A493-4A48-803C-D04B831D5878}"/>
+                <a16:creationId xmlns:a16="http://schemas.microsoft.com/office/drawing/2014/main" id="{4C047F3E-7017-4145-B5A7-6B1D416E9644}"/>
               </a:ext>
             </a:extLst>
           </p:cNvPr>
@@ -10254,7 +10254,7 @@
           <p:cNvPr id="4" name="">
             <a:extLst xmlns:a="http://schemas.openxmlformats.org/drawingml/2006/main">
               <a:ext uri="{FF2B5EF4-FFF2-40B4-BE49-F238E27FC236}">
-                <a16:creationId xmlns:a16="http://schemas.microsoft.com/office/drawing/2014/main" id="{F80B2310-42CD-4DFA-9F21-33E8EDFB284F}"/>
+                <a16:creationId xmlns:a16="http://schemas.microsoft.com/office/drawing/2014/main" id="{4D6B527B-58F5-49D9-945B-915C2B335877}"/>
               </a:ext>
             </a:extLst>
           </p:cNvPr>
@@ -10311,7 +10311,7 @@
           <p:cNvPr id="5" name="">
             <a:extLst xmlns:a="http://schemas.openxmlformats.org/drawingml/2006/main">
               <a:ext uri="{FF2B5EF4-FFF2-40B4-BE49-F238E27FC236}">
-                <a16:creationId xmlns:a16="http://schemas.microsoft.com/office/drawing/2014/main" id="{8BF5D3F1-5458-46AF-8EB9-56922BF7F112}"/>
+                <a16:creationId xmlns:a16="http://schemas.microsoft.com/office/drawing/2014/main" id="{68C8F805-C4A0-4A06-A93E-CC9BCF74FFCD}"/>
               </a:ext>
             </a:extLst>
           </p:cNvPr>
@@ -10368,7 +10368,7 @@
           <p:cNvPr id="6" name="">
             <a:extLst xmlns:a="http://schemas.openxmlformats.org/drawingml/2006/main">
               <a:ext uri="{FF2B5EF4-FFF2-40B4-BE49-F238E27FC236}">
-                <a16:creationId xmlns:a16="http://schemas.microsoft.com/office/drawing/2014/main" id="{C40D4841-01DD-4567-AF2B-02A16F5D3445}"/>
+                <a16:creationId xmlns:a16="http://schemas.microsoft.com/office/drawing/2014/main" id="{F5695888-8B0B-4EDF-A485-021B13BB82AC}"/>
               </a:ext>
             </a:extLst>
           </p:cNvPr>
@@ -10425,7 +10425,7 @@
           <p:cNvPr id="7" name="">
             <a:extLst xmlns:a="http://schemas.openxmlformats.org/drawingml/2006/main">
               <a:ext uri="{FF2B5EF4-FFF2-40B4-BE49-F238E27FC236}">
-                <a16:creationId xmlns:a16="http://schemas.microsoft.com/office/drawing/2014/main" id="{5EC36800-B92E-46ED-BA72-267E3CE47D59}"/>
+                <a16:creationId xmlns:a16="http://schemas.microsoft.com/office/drawing/2014/main" id="{1F3EFDB3-5E0A-4A94-B887-FCCC85480500}"/>
               </a:ext>
             </a:extLst>
           </p:cNvPr>
@@ -10482,7 +10482,7 @@
           <p:cNvPr id="8" name="">
             <a:extLst xmlns:a="http://schemas.openxmlformats.org/drawingml/2006/main">
               <a:ext uri="{FF2B5EF4-FFF2-40B4-BE49-F238E27FC236}">
-                <a16:creationId xmlns:a16="http://schemas.microsoft.com/office/drawing/2014/main" id="{DAD126F3-8197-416D-B346-1A8264B6B053}"/>
+                <a16:creationId xmlns:a16="http://schemas.microsoft.com/office/drawing/2014/main" id="{AC8E32BF-3908-44F3-8967-BBB1CD95E625}"/>
               </a:ext>
             </a:extLst>
           </p:cNvPr>
@@ -10539,7 +10539,7 @@
           <p:cNvPr id="9" name="">
             <a:extLst xmlns:a="http://schemas.openxmlformats.org/drawingml/2006/main">
               <a:ext uri="{FF2B5EF4-FFF2-40B4-BE49-F238E27FC236}">
-                <a16:creationId xmlns:a16="http://schemas.microsoft.com/office/drawing/2014/main" id="{64C60C79-19F7-4F23-9757-A75553FB7470}"/>
+                <a16:creationId xmlns:a16="http://schemas.microsoft.com/office/drawing/2014/main" id="{65175AC6-612E-4742-A3BE-FEEA2859B8D8}"/>
               </a:ext>
             </a:extLst>
           </p:cNvPr>
@@ -10594,7 +10594,7 @@
     </p:spTree>
     <p:extLst>
       <p:ext uri="{BB962C8B-B14F-4D97-AF65-F5344CB8AC3E}">
-        <p14:creationId xmlns:p14="http://schemas.microsoft.com/office/powerpoint/2010/main" val="1970671328"/>
+        <p14:creationId xmlns:p14="http://schemas.microsoft.com/office/powerpoint/2010/main" val="1218435796"/>
       </p:ext>
     </p:extLst>
   </p:cSld>

--- a/docs/portfolio/mulino-coreano-portfolio-ko.pptx
+++ b/docs/portfolio/mulino-coreano-portfolio-ko.pptx
@@ -2,26 +2,26 @@
 <file path=ppt/presentation.xml><?xml version="1.0" encoding="utf-8"?>
 <p:presentation xmlns:p="http://schemas.openxmlformats.org/presentationml/2006/main">
   <p:sldMasterIdLst>
-    <p:sldMasterId xmlns:r="http://schemas.openxmlformats.org/officeDocument/2006/relationships" id="2147483648" r:id="Rc4e72562fe714267"/>
+    <p:sldMasterId xmlns:r="http://schemas.openxmlformats.org/officeDocument/2006/relationships" id="2147483648" r:id="Rbb5c2e04d0be4074"/>
   </p:sldMasterIdLst>
   <p:notesMasterIdLst>
-    <p:notesMasterId xmlns:r="http://schemas.openxmlformats.org/officeDocument/2006/relationships" r:id="R080206761b9e46ab"/>
+    <p:notesMasterId xmlns:r="http://schemas.openxmlformats.org/officeDocument/2006/relationships" r:id="R46987cd57512430c"/>
   </p:notesMasterIdLst>
   <p:sldIdLst>
-    <p:sldId xmlns:r="http://schemas.openxmlformats.org/officeDocument/2006/relationships" id="256" r:id="R709f6f8349c14a5d"/>
-    <p:sldId xmlns:r="http://schemas.openxmlformats.org/officeDocument/2006/relationships" id="257" r:id="Re60a37df260c4bad"/>
-    <p:sldId xmlns:r="http://schemas.openxmlformats.org/officeDocument/2006/relationships" id="258" r:id="R544575ac39a14c4f"/>
-    <p:sldId xmlns:r="http://schemas.openxmlformats.org/officeDocument/2006/relationships" id="259" r:id="R3d172498382e4c0b"/>
-    <p:sldId xmlns:r="http://schemas.openxmlformats.org/officeDocument/2006/relationships" id="260" r:id="R85209cfb29b4465c"/>
-    <p:sldId xmlns:r="http://schemas.openxmlformats.org/officeDocument/2006/relationships" id="261" r:id="Ra796101282614e73"/>
-    <p:sldId xmlns:r="http://schemas.openxmlformats.org/officeDocument/2006/relationships" id="262" r:id="R1b87077046a744de"/>
-    <p:sldId xmlns:r="http://schemas.openxmlformats.org/officeDocument/2006/relationships" id="263" r:id="R4bfa96d9efd9403f"/>
-    <p:sldId xmlns:r="http://schemas.openxmlformats.org/officeDocument/2006/relationships" id="264" r:id="R8fa565a17ead498f"/>
-    <p:sldId xmlns:r="http://schemas.openxmlformats.org/officeDocument/2006/relationships" id="265" r:id="R728e87b5c7ae4d5e"/>
-    <p:sldId xmlns:r="http://schemas.openxmlformats.org/officeDocument/2006/relationships" id="266" r:id="R29c3cb1e3f184fc7"/>
-    <p:sldId xmlns:r="http://schemas.openxmlformats.org/officeDocument/2006/relationships" id="267" r:id="R0768cee37bd644e9"/>
-    <p:sldId xmlns:r="http://schemas.openxmlformats.org/officeDocument/2006/relationships" id="268" r:id="R29e82e267dbd4b5a"/>
-    <p:sldId xmlns:r="http://schemas.openxmlformats.org/officeDocument/2006/relationships" id="269" r:id="R19769d0d66234a4d"/>
+    <p:sldId xmlns:r="http://schemas.openxmlformats.org/officeDocument/2006/relationships" id="256" r:id="Rde235967f63c46b5"/>
+    <p:sldId xmlns:r="http://schemas.openxmlformats.org/officeDocument/2006/relationships" id="257" r:id="R3899dbbe64d24160"/>
+    <p:sldId xmlns:r="http://schemas.openxmlformats.org/officeDocument/2006/relationships" id="258" r:id="R90ecfbe49f954968"/>
+    <p:sldId xmlns:r="http://schemas.openxmlformats.org/officeDocument/2006/relationships" id="259" r:id="Rf33ce9532e134a38"/>
+    <p:sldId xmlns:r="http://schemas.openxmlformats.org/officeDocument/2006/relationships" id="260" r:id="R8d4c813e871c4f1b"/>
+    <p:sldId xmlns:r="http://schemas.openxmlformats.org/officeDocument/2006/relationships" id="261" r:id="Rf4cc0d84829c4cf8"/>
+    <p:sldId xmlns:r="http://schemas.openxmlformats.org/officeDocument/2006/relationships" id="262" r:id="Rfa34737afae04bfb"/>
+    <p:sldId xmlns:r="http://schemas.openxmlformats.org/officeDocument/2006/relationships" id="263" r:id="Rbe617ef43ce94d08"/>
+    <p:sldId xmlns:r="http://schemas.openxmlformats.org/officeDocument/2006/relationships" id="264" r:id="R22243b5cff2d4f16"/>
+    <p:sldId xmlns:r="http://schemas.openxmlformats.org/officeDocument/2006/relationships" id="265" r:id="Rc73cf29790494bbe"/>
+    <p:sldId xmlns:r="http://schemas.openxmlformats.org/officeDocument/2006/relationships" id="266" r:id="R0660732379374fbe"/>
+    <p:sldId xmlns:r="http://schemas.openxmlformats.org/officeDocument/2006/relationships" id="267" r:id="R1419737ead4e474e"/>
+    <p:sldId xmlns:r="http://schemas.openxmlformats.org/officeDocument/2006/relationships" id="268" r:id="R821a1c35a2674d7f"/>
+    <p:sldId xmlns:r="http://schemas.openxmlformats.org/officeDocument/2006/relationships" id="269" r:id="R31bb8f916a844a96"/>
   </p:sldIdLst>
   <p:sldSz cx="12192000" cy="6858000"/>
   <p:notesSz cx="6858000" cy="9144000"/>
@@ -455,7 +455,7 @@
           <a:lstStyle xmlns:a="http://schemas.openxmlformats.org/drawingml/2006/main"/>
           <a:p xmlns:a="http://schemas.openxmlformats.org/drawingml/2006/main">
             <a:r>
-              <a:t>가상 식품 제조 ERP 포트폴리오. 실제 Mulino Bianco 프로젝트나 SAP 제품 구현이 아니다. 기본 독자는 SAP/ERP 면접 평가자, 발표 시간은 10–15분이다. 2026-10-06 source 0132e0a. 출처: README.md, docs/portfolio/evidence.json.</a:t>
+              <a:t>가상 식품 제조 ERP 포트폴리오. 실제 Mulino Bianco 프로젝트나 SAP 제품 구현이 아니다. 기본 독자는 SAP/ERP 면접 평가자, 발표 시간은 10–15분이다. 2026-10-06 역사적 Supplier baseline 0132e0a, 현재 Claude 인수 source 4e6935d. 출처: README.md, docs/portfolio/evidence.json.</a:t>
             </a:r>
           </a:p>
         </p:txBody>
@@ -595,7 +595,7 @@
           <a:lstStyle xmlns:a="http://schemas.openxmlformats.org/drawingml/2006/main"/>
           <a:p xmlns:a="http://schemas.openxmlformats.org/drawingml/2006/main">
             <a:r>
-              <a:t>검증량은 업무 인수/규제 완전성을 뜻하지 않는다. Combined validated baseline fe6a51fadd2493018da59babd4a2eea908c2931f: clean test bootJar sitTest,569 discovered/18skip/551 executablePASS, failures0 errors0,20SITPASS/0fail/0skip,8m58s, modelcalls0, JARunchanged. Earlier Supplier0132 checkpoint567/18skip/549PASS remains historical. SIT20=P2P6+QM6+RC6+restart2. Separate #44 tooling: MCP26 runner57 Zig7 CLI32. Original native source2d2a900 runner76/helper7; later logging-only recovery sourcee61ded2 runner82/helper7PASS. Combined551/20 remains fe6 checkpoint, not rerun after recovery logging-only changes. Native worker did not repeat full549 at2d; subsequent combinedfe6 source passed551. Native acceptance remains incomplete. 출처: evidence.json 및 해시로 식별한 supplier/final-report.json, evidence/result.json. 원본 전체 로그는 coordinator 비공개 인수 bundle에 보존한다.</a:t>
+              <a:t>현재 accepted source 4e6935de693b433755e12b4ffcf0197297a6ae31. Full backend checkpoint는 최종 helper·prose CANCEL 교정 전 587 발견/18 제외/569 active PASS 및 bootJar PASS다. 처음 scripted SIT 19/20의 CANCEL 실패는 generic helper가 BLOCK만 허용한 오류이며 보존했다. 최종 helper·prose 교정 뒤 focused22 active/18excluded, full scripted SIT20,bootJar,runner84 PASS다. Full backend는 이 교정만을 위해 재실행하지 않았다. 모델 없는 image smoke/cancellation PASS,modelRequests0. CLI/native/lock bytes는 compact image와 같다. compact17560f2 checkpoint backend562active/SIT20/MCP26/CLI34/Zig7. 과거 fe6a51f551active/SIT20와 Supplier0132 549active는 별도다. 현재 실제 Claude5PASS/21complete native runs와 scripted 검증을 구분한다. 출처: evidence.json nativeUat.currentAccepted.verification, native/manager-stop-1006의 해시로 식별한 담당자 보고서. 원본 로그는 private acceptance bundle에 보존한다.</a:t>
             </a:r>
           </a:p>
         </p:txBody>
@@ -665,7 +665,7 @@
           <a:lstStyle xmlns:a="http://schemas.openxmlformats.org/drawingml/2006/main"/>
           <a:p xmlns:a="http://schemas.openxmlformats.org/drawingml/2006/main">
             <a:r>
-              <a:t>최종 인수/harness source 2d2a900b59a8704e27a4462740196b2c4902829b, production baseline 0132e0a62ad9f086e5c70c5c857d4546f5921ef9. image sha256:aa055d76d0c8d44b9707c84726101e551ec123dc0dba714bea4746b02d4d4656, JAR 4cc3ed1977f72538b51e025b09937f4b122a19e6305f4d0f5a939d82cfbb3369, CLI/role/JAR unchanged. CLAUDE/claude-sonnet-5: P2P001 and002 PASS,004/QM001 FAIL,RC001 INCOMPLETE. P2P002 manager BLOCK reason scenario BLOCK, CaseOPEN/coordinatorABORTED, no separate original decision/work/Attention DB export. 004 PO17000 does not excuse final coordinator MODEL_PROCESS_FAILED and usageComplete=false. QM zero is CLI reported, not imputed. RC rawPASSED preserved but final native usage missing, no valid reacceptance. CODEX/gpt-5.6-sol catalogdefaultlow firstRun fails before proposal, all metrics andresolvedModel unknown, executionReadyfalse/accountingStatusPARTIAL. Current account/rateLimits/read AUTHENTICATION does not establish earlier failure cause. Human login refresh prepared, not executed. Originalattempt knownCLIcostUSD12.661439; latestknownsubtotalUSD12.662505 including diagnostic0.001066, overallunknown. Later Recovery3allFAIL/zeroERPpreserves this original table; see slide14. Historical 2026-10-03 cb04403 Claude3PASS does not establish current acceptance. Source: evidence.json, https://github.com/se0nghe0n/mulino-coreano-erp/blob/2d2a900b59a8704e27a4462740196b2c4902829b/docs/16_scenario_tests.md, https://github.com/se0nghe0n/mulino-coreano-erp/blob/2d2a900b59a8704e27a4462740196b2c4902829b/docs/17_test_classification.md.</a:t>
+              <a:t>현재 clean accepted production source 4e6935de693b433755e12b4ffcf0197297a6ae31, CLAUDE/claude-sonnet-5. image sha256:143e19e38f669ecd6bc0f71c4396008140701e7e57a69c52f9e5f88e520f1567, JAR 11d73935589fee336f6011d5a034e497814bbc917f759e829024e02e59604f2d. 역사적 Supplier0132와 backend/read/role이 달라 runtime unchanged를 주장하지 않는다. P2P001 approved PO1/16500/originalCoordDONE. P2P002 final immutable MANAGER BLOCK/PO0/no reissue/nativeABORTED=receiptABORTED/originalWorkBLOCKED/CaseOPEN/backendJUDGMENTAttention retained. P2P004 oldEXPIRED/PO0 then explicit human recalc/newapprove PO1/17000/originalCoordDONE. QM PENDINGQC/HOLD/quantity2/zeroapplied. RC PENDINGADMIN/raw3/production10/customer2/shipments115/zeroapplied/OFFLINE. 21 unique model_finished/native runs exit0, accountingCOMPLETE/usagecomplete/receiptmatch/denial0. Thisbatch displayed costUSD2.9853428, exactJSONDecimal2.98534280000000011 contains float representation; unknowncost0 onlythisbatch. Historical totals remainunknown. Codex supported account/read refreshTokentrue returned accountnull/requiresOpenaiAuthtrue; rateAUTHENTICATION, no login/start/model calls. Earlier parityFAIL causeunknown. Source: evidence.json nativeUat.currentAccepted and SHA-256 provenance for five-case-summary/per-case JSONs and immutable-provenance-work-attention.jsonl.</a:t>
             </a:r>
           </a:p>
         </p:txBody>
@@ -805,7 +805,7 @@
           <a:lstStyle xmlns:a="http://schemas.openxmlformats.org/drawingml/2006/main"/>
           <a:p xmlns:a="http://schemas.openxmlformats.org/drawingml/2006/main">
             <a:r>
-              <a:t>원래 valid Claude001/002PASS와004/QMFAIL/RCINCOMPLETE를 보존한다. Recovery3 P2P004/QM001/RC001 allFAIL atfirstRun, zeroERP writes, caseOPEN/executionReadyfalse/accountingPARTIAL/usageCompletefalse. Recovery logging source e61ded2e93c0e241be62d87347534503652d74dc, integrated baseline5a6adda, production CLI/role/JAR/image unchanged. NormalRW mount minimalClaude diagnostic success USD0.001066 and USD0.05 cap is not business acceptance. Production/basic no-tool schema probes at USD0.045 cap bothFAIL, same fingerprint 8378c30e44e0ccecc1544d814a0fd4ad9f168c645c2716d0c0c49d52c7f111f0, exactcauseunknown, rawerror discarded. Tools-disabled x structured-output/schema/budget path and0.05vs0.045 cap difference remain caveats, no auth or specifickeyword conclusion. Latestknownreportedsubtotal12.662505, overallunknown. CodexcurrentAUTHENTICATION/humanrefreshNOTexecuted/client35/certgates unchanged. 출처: https://github.com/se0nghe0n/mulino-coreano-erp/blob/e61ded2e93c0e241be62d87347534503652d74dc/docs/15_demo_runbook.md, https://github.com/se0nghe0n/mulino-coreano-erp/blob/e61ded2e93c0e241be62d87347534503652d74dc/docs/16_scenario_tests.md, evidence.json.</a:t>
+              <a:t>현재 Claude5PASS와 과거 인수·진단을 구분한다. Original source2d2a900 2PASS/2FAIL/1INCOMPLETE, recovery3FAIL/zeroERP, canonicalQM native finalization failure and compact17560f2 4PASS/1FAIL retained. Compact002 MANAGER BLOCK kept PO0 but native FAILED due to ambiguous guidance; never convert historical FAILED to ABORTED. Current source provides parent/plan/action/finaldecision and forward-only immutable actor snapshot; legacyUNKNOWN/no backfill. Backend approval and Attention policies unchanged. Minimal Claude/schema newer diagnostics succeeded but are not business acceptance. Earlier failures exact causeunknown. Historical knownCLI subtotal12.662505 preserved, overallcost/tokensunknown. Currentbatch2.9853428/unknowncost0 does not make historical overall complete. Codex prior native parityFAIL causeunknown; supported accountread refreshTokentrue currentnull/requiresAuthtrue/rateAUTH, no login/modelcalls. Actualclient35 pending, OAuth/dashboard excluded, certificate fulltype/auto30day untracked awaiting registration; no MFDS actualtransmission/formvalidation, no productiondeploy/individualIAM/PowerPoint app validation. 출처: evidence.json의 original current/recoveryAttempt와 currentAccepted, docs/15_demo_runbook.md, docs/16_scenario_tests.md.</a:t>
             </a:r>
           </a:p>
         </p:txBody>
@@ -1015,7 +1015,7 @@
           <a:lstStyle xmlns:a="http://schemas.openxmlformats.org/drawingml/2006/main"/>
           <a:p xmlns:a="http://schemas.openxmlformats.org/drawingml/2006/main">
             <a:r>
-              <a:t>source baseline 0132e0a62ad9f086e5c70c5c857d4546f5921ef9. DDL 61개 CREATE TABLE: 원래 ERP 30 + interface 13 + 후속 18. 별도 governance/는 scaffold이며 승인 게이트는 backend에 구현한다. MONITOR reads는 ERP 승인 없이 진행하되 채널 인증과 Case scope를 적용한다. 공유 local role/key는 개인별 운영 IAM이 아니다. #36 결정은 #24/#25 current UAT와 #35 client 인수 전까지 설계 판단이다. 출처: docs/16_decisions.md, https://github.com/se0nghe0n/mulino-coreano-erp/blob/0132e0a62ad9f086e5c70c5c857d4546f5921ef9/mcp-server/src/tools.js, https://github.com/se0nghe0n/mulino-coreano-erp/blob/0132e0a62ad9f086e5c70c5c857d4546f5921ef9/backend/src/main/java/com/mulinocoreano/backend/security/LocalSecurityConfiguration.java, https://github.com/se0nghe0n/mulino-coreano-erp/blob/0132e0a62ad9f086e5c70c5c857d4546f5921ef9/agents/cli/README.md.</a:t>
+              <a:t>역사적 Supplier baseline 0132e0a62ad9f086e5c70c5c857d4546f5921ef9, 현재 accepted production source 4e6935de693b433755e12b4ffcf0197297a6ae31. backend/read/role 변경을 포함한다. DDL 61개 CREATE TABLE: 원래 ERP 30 + interface 13 + 후속 18. 별도 governance/는 scaffold이며 승인 게이트는 backend에 구현한다. MONITOR reads는 ERP 승인 없이 진행하되 채널 인증과 Case scope를 적용한다. 공유 local role/key는 개인별 운영 IAM이 아니다. #24/#25 현재 Claude five-case 인수는 PASS다. #35 actual client 인수는 남아 있다. 출처: docs/16_decisions.md, https://github.com/se0nghe0n/mulino-coreano-erp/blob/0132e0a62ad9f086e5c70c5c857d4546f5921ef9/mcp-server/src/tools.js, https://github.com/se0nghe0n/mulino-coreano-erp/blob/0132e0a62ad9f086e5c70c5c857d4546f5921ef9/backend/src/main/java/com/mulinocoreano/backend/security/LocalSecurityConfiguration.java, https://github.com/se0nghe0n/mulino-coreano-erp/blob/0132e0a62ad9f086e5c70c5c857d4546f5921ef9/agents/cli/README.md.</a:t>
             </a:r>
           </a:p>
         </p:txBody>
@@ -1225,7 +1225,7 @@
           <a:lstStyle xmlns:a="http://schemas.openxmlformats.org/drawingml/2006/main"/>
           <a:p xmlns:a="http://schemas.openxmlformats.org/drawingml/2006/main">
             <a:r>
-              <a:t>scripted SIT QM 6건: 승인·반려·잘못된 역할·인증서/알레르겐·온도/Case 경계를 실제 business state로 확인한다. canonical 22 master / 19 legal categories. Certificate all-required-type and automatic 30-day notices remain gap; don't claim Goal6 complete. 출처: https://github.com/se0nghe0n/mulino-coreano-erp/blob/0132e0a62ad9f086e5c70c5c857d4546f5921ef9/docs/18_inbound_quality_api.md, https://github.com/se0nghe0n/mulino-coreano-erp/blob/0132e0a62ad9f086e5c70c5c857d4546f5921ef9/backend/src/test/resources/scenarios/qm-inbound-inspection.feature, https://github.com/se0nghe0n/mulino-coreano-erp/blob/0132e0a62ad9f086e5c70c5c857d4546f5921ef9/database/seed/allergens.sql.</a:t>
+              <a:t>scripted SIT QM 6건: 승인·반려·잘못된 역할·인증서/알레르겐·온도/Case 경계를 실제 business state로 확인한다. 현재 Claude native QM PASS는 QC 승인안 PENDING, 입고 HOLD·잔량 2·적용 0과 native WAITING/receipt WAITING, 완전 사용량을 확인한다. canonical 22 master / 19 legal categories. Certificate all-required-type and automatic 30-day notices remain gap; don't claim Goal6 complete. 출처: https://github.com/se0nghe0n/mulino-coreano-erp/blob/0132e0a62ad9f086e5c70c5c857d4546f5921ef9/docs/18_inbound_quality_api.md, https://github.com/se0nghe0n/mulino-coreano-erp/blob/0132e0a62ad9f086e5c70c5c857d4546f5921ef9/backend/src/test/resources/scenarios/qm-inbound-inspection.feature, https://github.com/se0nghe0n/mulino-coreano-erp/blob/0132e0a62ad9f086e5c70c5c857d4546f5921ef9/database/seed/allergens.sql.</a:t>
             </a:r>
           </a:p>
         </p:txBody>
@@ -1433,7 +1433,7 @@
   </p:cSld>
   <p:clrMap bg1="lt1" tx1="dk1" bg2="lt2" tx2="dk2" accent1="accent1" accent2="accent2" accent3="accent3" accent4="accent4" accent5="accent5" accent6="accent6" hlink="hlink" folHlink="folHlink"/>
   <p:sldLayoutIdLst>
-    <p:sldLayoutId xmlns:r="http://schemas.openxmlformats.org/officeDocument/2006/relationships" id="2147483649" r:id="R98c0b01572574e74"/>
+    <p:sldLayoutId xmlns:r="http://schemas.openxmlformats.org/officeDocument/2006/relationships" id="2147483649" r:id="R0856747953f94847"/>
   </p:sldLayoutIdLst>
   <p:txStyles>
     <p:titleStyle>
@@ -2166,7 +2166,7 @@
           <p:cNvPr id="6" name="">
             <a:extLst xmlns:a="http://schemas.openxmlformats.org/drawingml/2006/main">
               <a:ext uri="{FF2B5EF4-FFF2-40B4-BE49-F238E27FC236}">
-                <a16:creationId xmlns:a16="http://schemas.microsoft.com/office/drawing/2014/main" id="{6F53F80F-1264-44E9-AF81-32F2EBD350FE}"/>
+                <a16:creationId xmlns:a16="http://schemas.microsoft.com/office/drawing/2014/main" id="{0E3A3F34-8BCE-4A3F-85E5-46BBAAF7F5D6}"/>
               </a:ext>
             </a:extLst>
           </p:cNvPr>
@@ -2223,7 +2223,7 @@
           <p:cNvPr id="2" name="">
             <a:extLst xmlns:a="http://schemas.openxmlformats.org/drawingml/2006/main">
               <a:ext uri="{FF2B5EF4-FFF2-40B4-BE49-F238E27FC236}">
-                <a16:creationId xmlns:a16="http://schemas.microsoft.com/office/drawing/2014/main" id="{2BB90E2D-053B-4EF0-B8E6-B9D38DC1B347}"/>
+                <a16:creationId xmlns:a16="http://schemas.microsoft.com/office/drawing/2014/main" id="{9BFE282D-DABC-410E-A620-453BBEDF9C81}"/>
               </a:ext>
             </a:extLst>
           </p:cNvPr>
@@ -2280,7 +2280,7 @@
           <p:cNvPr id="3" name="">
             <a:extLst xmlns:a="http://schemas.openxmlformats.org/drawingml/2006/main">
               <a:ext uri="{FF2B5EF4-FFF2-40B4-BE49-F238E27FC236}">
-                <a16:creationId xmlns:a16="http://schemas.microsoft.com/office/drawing/2014/main" id="{50FD26EF-35DC-41B7-B01C-C2D0D3007D85}"/>
+                <a16:creationId xmlns:a16="http://schemas.microsoft.com/office/drawing/2014/main" id="{CC273A32-13D8-48A4-8282-120575360748}"/>
               </a:ext>
             </a:extLst>
           </p:cNvPr>
@@ -2360,7 +2360,7 @@
           <p:cNvPr id="4" name="">
             <a:extLst xmlns:a="http://schemas.openxmlformats.org/drawingml/2006/main">
               <a:ext uri="{FF2B5EF4-FFF2-40B4-BE49-F238E27FC236}">
-                <a16:creationId xmlns:a16="http://schemas.microsoft.com/office/drawing/2014/main" id="{271E02B0-42D7-40F3-A50B-0638DCCE49AA}"/>
+                <a16:creationId xmlns:a16="http://schemas.microsoft.com/office/drawing/2014/main" id="{AAB51943-9850-4EB2-B1DA-3288FEE818AF}"/>
               </a:ext>
             </a:extLst>
           </p:cNvPr>
@@ -2417,7 +2417,7 @@
           <p:cNvPr id="5" name="">
             <a:extLst xmlns:a="http://schemas.openxmlformats.org/drawingml/2006/main">
               <a:ext uri="{FF2B5EF4-FFF2-40B4-BE49-F238E27FC236}">
-                <a16:creationId xmlns:a16="http://schemas.microsoft.com/office/drawing/2014/main" id="{25F42A35-019A-4470-9BD4-C3E139631B85}"/>
+                <a16:creationId xmlns:a16="http://schemas.microsoft.com/office/drawing/2014/main" id="{164066D8-25B7-4C1F-9322-E3047AD0F934}"/>
               </a:ext>
             </a:extLst>
           </p:cNvPr>
@@ -2472,7 +2472,7 @@
     </p:spTree>
     <p:extLst>
       <p:ext uri="{BB962C8B-B14F-4D97-AF65-F5344CB8AC3E}">
-        <p14:creationId xmlns:p14="http://schemas.microsoft.com/office/powerpoint/2010/main" val="1919024043"/>
+        <p14:creationId xmlns:p14="http://schemas.microsoft.com/office/powerpoint/2010/main" val="1591102224"/>
       </p:ext>
     </p:extLst>
   </p:cSld>
@@ -2503,7 +2503,7 @@
           <p:cNvPr id="5" name="">
             <a:extLst xmlns:a="http://schemas.openxmlformats.org/drawingml/2006/main">
               <a:ext uri="{FF2B5EF4-FFF2-40B4-BE49-F238E27FC236}">
-                <a16:creationId xmlns:a16="http://schemas.microsoft.com/office/drawing/2014/main" id="{4DF3D715-A99A-4EA3-9149-FDB469A60012}"/>
+                <a16:creationId xmlns:a16="http://schemas.microsoft.com/office/drawing/2014/main" id="{DDECAD77-0278-41DB-AFE7-BD3F669EAA53}"/>
               </a:ext>
             </a:extLst>
           </p:cNvPr>
@@ -2560,7 +2560,7 @@
           <p:cNvPr id="2" name="">
             <a:extLst xmlns:a="http://schemas.openxmlformats.org/drawingml/2006/main">
               <a:ext uri="{FF2B5EF4-FFF2-40B4-BE49-F238E27FC236}">
-                <a16:creationId xmlns:a16="http://schemas.microsoft.com/office/drawing/2014/main" id="{FE5C5163-841D-4809-A372-FD3D5FFC2DC8}"/>
+                <a16:creationId xmlns:a16="http://schemas.microsoft.com/office/drawing/2014/main" id="{E276D096-4D57-485F-94DD-B4CF007A617C}"/>
               </a:ext>
             </a:extLst>
           </p:cNvPr>
@@ -3084,7 +3084,7 @@
           <p:cNvPr id="4" name="">
             <a:extLst xmlns:a="http://schemas.openxmlformats.org/drawingml/2006/main">
               <a:ext uri="{FF2B5EF4-FFF2-40B4-BE49-F238E27FC236}">
-                <a16:creationId xmlns:a16="http://schemas.microsoft.com/office/drawing/2014/main" id="{E40F6A3E-EC46-4907-9D0B-17BC0D821B33}"/>
+                <a16:creationId xmlns:a16="http://schemas.microsoft.com/office/drawing/2014/main" id="{3472EC67-3FBB-47DA-AB57-3C0428A135D3}"/>
               </a:ext>
             </a:extLst>
           </p:cNvPr>
@@ -3139,7 +3139,7 @@
     </p:spTree>
     <p:extLst>
       <p:ext uri="{BB962C8B-B14F-4D97-AF65-F5344CB8AC3E}">
-        <p14:creationId xmlns:p14="http://schemas.microsoft.com/office/powerpoint/2010/main" val="1666185768"/>
+        <p14:creationId xmlns:p14="http://schemas.microsoft.com/office/powerpoint/2010/main" val="1485817865"/>
       </p:ext>
     </p:extLst>
   </p:cSld>
@@ -3170,7 +3170,7 @@
           <p:cNvPr id="9" name="">
             <a:extLst xmlns:a="http://schemas.openxmlformats.org/drawingml/2006/main">
               <a:ext uri="{FF2B5EF4-FFF2-40B4-BE49-F238E27FC236}">
-                <a16:creationId xmlns:a16="http://schemas.microsoft.com/office/drawing/2014/main" id="{F8CBA202-7CFE-4A00-A6B2-DD253EAB04E2}"/>
+                <a16:creationId xmlns:a16="http://schemas.microsoft.com/office/drawing/2014/main" id="{A32090FD-7CC6-4E8C-A0DF-B0247A29F5A9}"/>
               </a:ext>
             </a:extLst>
           </p:cNvPr>
@@ -3227,7 +3227,7 @@
           <p:cNvPr id="2" name="">
             <a:extLst xmlns:a="http://schemas.openxmlformats.org/drawingml/2006/main">
               <a:ext uri="{FF2B5EF4-FFF2-40B4-BE49-F238E27FC236}">
-                <a16:creationId xmlns:a16="http://schemas.microsoft.com/office/drawing/2014/main" id="{38C87091-239B-4D83-BB8A-6A33B20A1233}"/>
+                <a16:creationId xmlns:a16="http://schemas.microsoft.com/office/drawing/2014/main" id="{0CD6C264-81F2-416E-B693-3FB651587AD0}"/>
               </a:ext>
             </a:extLst>
           </p:cNvPr>
@@ -3291,7 +3291,7 @@
         </p:xfrm>
         <a:graphic xmlns:a="http://schemas.openxmlformats.org/drawingml/2006/main">
           <a:graphicData uri="http://schemas.openxmlformats.org/drawingml/2006/chart">
-            <c:chart xmlns:r="http://schemas.openxmlformats.org/officeDocument/2006/relationships" xmlns:c="http://schemas.openxmlformats.org/drawingml/2006/chart" r:id="R123fa86c978142b2"/>
+            <c:chart xmlns:r="http://schemas.openxmlformats.org/officeDocument/2006/relationships" xmlns:c="http://schemas.openxmlformats.org/drawingml/2006/chart" r:id="R6024933078114d6d"/>
           </a:graphicData>
         </a:graphic>
       </p:graphicFrame>
@@ -3300,7 +3300,7 @@
           <p:cNvPr id="4" name="">
             <a:extLst xmlns:a="http://schemas.openxmlformats.org/drawingml/2006/main">
               <a:ext uri="{FF2B5EF4-FFF2-40B4-BE49-F238E27FC236}">
-                <a16:creationId xmlns:a16="http://schemas.microsoft.com/office/drawing/2014/main" id="{B6E8F5FD-4420-4546-B385-7F04CA69C5DE}"/>
+                <a16:creationId xmlns:a16="http://schemas.microsoft.com/office/drawing/2014/main" id="{82E90FA3-64A7-4378-A81E-1C1E9115F2F0}"/>
               </a:ext>
             </a:extLst>
           </p:cNvPr>
@@ -3347,7 +3347,7 @@
                 <a:ea typeface="Apple SD Gothic Neo"/>
                 <a:cs typeface="Apple SD Gothic Neo"/>
               </a:rPr>
-              <a:t>551건 실행 통과</a:t>
+              <a:t>569건 실행 통과</a:t>
             </a:r>
           </a:p>
         </p:txBody>
@@ -3357,7 +3357,7 @@
           <p:cNvPr id="5" name="">
             <a:extLst xmlns:a="http://schemas.openxmlformats.org/drawingml/2006/main">
               <a:ext uri="{FF2B5EF4-FFF2-40B4-BE49-F238E27FC236}">
-                <a16:creationId xmlns:a16="http://schemas.microsoft.com/office/drawing/2014/main" id="{0EAB4E10-E9BC-427C-8384-61A4D8549F65}"/>
+                <a16:creationId xmlns:a16="http://schemas.microsoft.com/office/drawing/2014/main" id="{ADB60DFA-ABB5-41F7-AD26-DE32C766D98C}"/>
               </a:ext>
             </a:extLst>
           </p:cNvPr>
@@ -3404,7 +3404,7 @@
                 <a:ea typeface="Apple SD Gothic Neo"/>
                 <a:cs typeface="Apple SD Gothic Neo"/>
               </a:rPr>
-              <a:t>569건 발견 / 18건 skip</a:t>
+              <a:t>587건 발견 / 18건 제외</a:t>
             </a:r>
           </a:p>
           <a:p xmlns:a="http://schemas.openxmlformats.org/drawingml/2006/main">
@@ -3427,7 +3427,7 @@
                 <a:ea typeface="Apple SD Gothic Neo"/>
                 <a:cs typeface="Apple SD Gothic Neo"/>
               </a:rPr>
-              <a:t>통합 검증 baseline fe6a51f</a:t>
+              <a:t>최종 helper·prose 교정 전</a:t>
             </a:r>
           </a:p>
         </p:txBody>
@@ -3437,7 +3437,7 @@
           <p:cNvPr id="6" name="">
             <a:extLst xmlns:a="http://schemas.openxmlformats.org/drawingml/2006/main">
               <a:ext uri="{FF2B5EF4-FFF2-40B4-BE49-F238E27FC236}">
-                <a16:creationId xmlns:a16="http://schemas.microsoft.com/office/drawing/2014/main" id="{759AD033-5629-47EF-A310-E65AFB8F5D1F}"/>
+                <a16:creationId xmlns:a16="http://schemas.microsoft.com/office/drawing/2014/main" id="{BBCF132D-127B-4933-A69F-3270D7664DC1}"/>
               </a:ext>
             </a:extLst>
           </p:cNvPr>
@@ -3494,7 +3494,7 @@
           <p:cNvPr id="7" name="">
             <a:extLst xmlns:a="http://schemas.openxmlformats.org/drawingml/2006/main">
               <a:ext uri="{FF2B5EF4-FFF2-40B4-BE49-F238E27FC236}">
-                <a16:creationId xmlns:a16="http://schemas.microsoft.com/office/drawing/2014/main" id="{7A3EF104-39D5-4E75-A836-E0558F34AF40}"/>
+                <a16:creationId xmlns:a16="http://schemas.microsoft.com/office/drawing/2014/main" id="{0BFBF1FF-B705-4671-B56B-97F8D584C17A}"/>
               </a:ext>
             </a:extLst>
           </p:cNvPr>
@@ -3541,7 +3541,7 @@
                 <a:ea typeface="Apple SD Gothic Neo"/>
                 <a:cs typeface="Apple SD Gothic Neo"/>
               </a:rPr>
-              <a:t>runner 82 / helper 7</a:t>
+              <a:t>focused 22 / 제외 18</a:t>
             </a:r>
           </a:p>
           <a:p xmlns:a="http://schemas.openxmlformats.org/drawingml/2006/main">
@@ -3564,7 +3564,7 @@
                 <a:ea typeface="Apple SD Gothic Neo"/>
                 <a:cs typeface="Apple SD Gothic Neo"/>
               </a:rPr>
-              <a:t>SIT 20 (fe6 checkpoint)</a:t>
+              <a:t>SIT 20 / runner 84 / bootJar</a:t>
             </a:r>
           </a:p>
           <a:p xmlns:a="http://schemas.openxmlformats.org/drawingml/2006/main">
@@ -3587,7 +3587,7 @@
                 <a:ea typeface="Apple SD Gothic Neo"/>
                 <a:cs typeface="Apple SD Gothic Neo"/>
               </a:rPr>
-              <a:t>#44 MCP 26 / Zig 7 / CLI 32</a:t>
+              <a:t>full backend 재실행 없음</a:t>
             </a:r>
           </a:p>
         </p:txBody>
@@ -3597,7 +3597,7 @@
           <p:cNvPr id="8" name="">
             <a:extLst xmlns:a="http://schemas.openxmlformats.org/drawingml/2006/main">
               <a:ext uri="{FF2B5EF4-FFF2-40B4-BE49-F238E27FC236}">
-                <a16:creationId xmlns:a16="http://schemas.microsoft.com/office/drawing/2014/main" id="{EE9A9F8E-7921-48F0-9481-73F088460111}"/>
+                <a16:creationId xmlns:a16="http://schemas.microsoft.com/office/drawing/2014/main" id="{D32879CA-F518-4704-ADEB-742751C2035E}"/>
               </a:ext>
             </a:extLst>
           </p:cNvPr>
@@ -3652,7 +3652,7 @@
     </p:spTree>
     <p:extLst>
       <p:ext uri="{BB962C8B-B14F-4D97-AF65-F5344CB8AC3E}">
-        <p14:creationId xmlns:p14="http://schemas.microsoft.com/office/powerpoint/2010/main" val="2096169901"/>
+        <p14:creationId xmlns:p14="http://schemas.microsoft.com/office/powerpoint/2010/main" val="1824090003"/>
       </p:ext>
     </p:extLst>
   </p:cSld>
@@ -3683,7 +3683,7 @@
           <p:cNvPr id="5" name="">
             <a:extLst xmlns:a="http://schemas.openxmlformats.org/drawingml/2006/main">
               <a:ext uri="{FF2B5EF4-FFF2-40B4-BE49-F238E27FC236}">
-                <a16:creationId xmlns:a16="http://schemas.microsoft.com/office/drawing/2014/main" id="{0C5D70FD-8742-4B82-8470-0637CB703AF1}"/>
+                <a16:creationId xmlns:a16="http://schemas.microsoft.com/office/drawing/2014/main" id="{2CC7997B-DEDC-4D51-9FB3-2954EA4DFCA7}"/>
               </a:ext>
             </a:extLst>
           </p:cNvPr>
@@ -3730,7 +3730,7 @@
                 <a:ea typeface="Apple SD Gothic Neo"/>
                 <a:cs typeface="Apple SD Gothic Neo"/>
               </a:rPr>
-              <a:t>원래 native UAT 이력: 2 PASS, 전체 인수 미완료</a:t>
+              <a:t>현재 Claude native UAT: 다섯 업무 PASS</a:t>
             </a:r>
           </a:p>
         </p:txBody>
@@ -3740,7 +3740,7 @@
           <p:cNvPr id="2" name="">
             <a:extLst xmlns:a="http://schemas.openxmlformats.org/drawingml/2006/main">
               <a:ext uri="{FF2B5EF4-FFF2-40B4-BE49-F238E27FC236}">
-                <a16:creationId xmlns:a16="http://schemas.microsoft.com/office/drawing/2014/main" id="{205EA969-0CA7-4FC5-9C6D-D7B30B731953}"/>
+                <a16:creationId xmlns:a16="http://schemas.microsoft.com/office/drawing/2014/main" id="{997F9C2F-7C9C-4E39-9DB9-2F510C716D21}"/>
               </a:ext>
             </a:extLst>
           </p:cNvPr>
@@ -3850,7 +3850,7 @@
                           <a:ea typeface="Apple SD Gothic Neo"/>
                           <a:cs typeface="Apple SD Gothic Neo"/>
                         </a:rPr>
-                        <a:t>최종 판정·업무 결과</a:t>
+                        <a:t>현재 판정·업무 결과</a:t>
                       </a:r>
                     </a:p>
                   </a:txBody>
@@ -3924,7 +3924,7 @@
                           <a:ea typeface="Apple SD Gothic Neo"/>
                           <a:cs typeface="Apple SD Gothic Neo"/>
                         </a:rPr>
-                        <a:t>PASS. PO 1 · 16,500원, coordinator DONE</a:t>
+                        <a:t>PASS. 승인 PO 1 · 16,500원, 조정 DONE</a:t>
                       </a:r>
                     </a:p>
                   </a:txBody>
@@ -3948,7 +3948,7 @@
                           <a:ea typeface="Apple SD Gothic Neo"/>
                           <a:cs typeface="Apple SD Gothic Neo"/>
                         </a:rPr>
-                        <a:t>3.0874898</a:t>
+                        <a:t>0.6780952</a:t>
                       </a:r>
                     </a:p>
                   </a:txBody>
@@ -3998,7 +3998,7 @@
                           <a:ea typeface="Apple SD Gothic Neo"/>
                           <a:cs typeface="Apple SD Gothic Neo"/>
                         </a:rPr>
-                        <a:t>PASS. PO·followup 0, MANAGER BLOCK</a:t>
+                        <a:t>PASS. MANAGER BLOCK, PO 0 · ABORTED</a:t>
                       </a:r>
                     </a:p>
                   </a:txBody>
@@ -4022,7 +4022,7 @@
                           <a:ea typeface="Apple SD Gothic Neo"/>
                           <a:cs typeface="Apple SD Gothic Neo"/>
                         </a:rPr>
-                        <a:t>3.2866446</a:t>
+                        <a:t>0.7219284</a:t>
                       </a:r>
                     </a:p>
                   </a:txBody>
@@ -4072,7 +4072,7 @@
                           <a:ea typeface="Apple SD Gothic Neo"/>
                           <a:cs typeface="Apple SD Gothic Neo"/>
                         </a:rPr>
-                        <a:t>FAIL. PO 17,000원 후 최종 조정 실패</a:t>
+                        <a:t>PASS. 만료 후 인간 재계산 · 새 PO 17,000원</a:t>
                       </a:r>
                     </a:p>
                   </a:txBody>
@@ -4096,7 +4096,7 @@
                           <a:ea typeface="Apple SD Gothic Neo"/>
                           <a:cs typeface="Apple SD Gothic Neo"/>
                         </a:rPr>
-                        <a:t>6.2873046</a:t>
+                        <a:t>1.3771636</a:t>
                       </a:r>
                     </a:p>
                   </a:txBody>
@@ -4146,7 +4146,7 @@
                           <a:ea typeface="Apple SD Gothic Neo"/>
                           <a:cs typeface="Apple SD Gothic Neo"/>
                         </a:rPr>
-                        <a:t>FAIL. 검사 제안 전 실행 실패</a:t>
+                        <a:t>PASS. QC PENDING · HOLD 2 · 적용 0</a:t>
                       </a:r>
                     </a:p>
                   </a:txBody>
@@ -4170,7 +4170,7 @@
                           <a:ea typeface="Apple SD Gothic Neo"/>
                           <a:cs typeface="Apple SD Gothic Neo"/>
                         </a:rPr>
-                        <a:t>0 (CLI 보고)</a:t>
+                        <a:t>0.1040890</a:t>
                       </a:r>
                     </a:p>
                   </a:txBody>
@@ -4220,7 +4220,7 @@
                           <a:ea typeface="Apple SD Gothic Neo"/>
                           <a:cs typeface="Apple SD Gothic Neo"/>
                         </a:rPr>
-                        <a:t>INCOMPLETE. native 종료·사용량 누락</a:t>
+                        <a:t>PASS. ADMIN PENDING · 적용 0 · OFFLINE</a:t>
                       </a:r>
                     </a:p>
                   </a:txBody>
@@ -4244,7 +4244,7 @@
                           <a:ea typeface="Apple SD Gothic Neo"/>
                           <a:cs typeface="Apple SD Gothic Neo"/>
                         </a:rPr>
-                        <a:t>unknown</a:t>
+                        <a:t>0.1040666</a:t>
                       </a:r>
                     </a:p>
                   </a:txBody>
@@ -4270,7 +4270,7 @@
                           <a:ea typeface="Apple SD Gothic Neo"/>
                           <a:cs typeface="Apple SD Gothic Neo"/>
                         </a:rPr>
-                        <a:t>Codex P2P-001</a:t>
+                        <a:t>Codex 접근 gate</a:t>
                       </a:r>
                     </a:p>
                   </a:txBody>
@@ -4294,7 +4294,7 @@
                           <a:ea typeface="Apple SD Gothic Neo"/>
                           <a:cs typeface="Apple SD Gothic Neo"/>
                         </a:rPr>
-                        <a:t>FAIL. 제안 전 실행 실패, 사용량 미보고</a:t>
+                        <a:t>account null · 인증 필요, parity 미완료</a:t>
                       </a:r>
                     </a:p>
                   </a:txBody>
@@ -4338,7 +4338,7 @@
           <p:cNvPr id="4" name="">
             <a:extLst xmlns:a="http://schemas.openxmlformats.org/drawingml/2006/main">
               <a:ext uri="{FF2B5EF4-FFF2-40B4-BE49-F238E27FC236}">
-                <a16:creationId xmlns:a16="http://schemas.microsoft.com/office/drawing/2014/main" id="{8E645764-BB15-42FE-940E-E0849C3FCB81}"/>
+                <a16:creationId xmlns:a16="http://schemas.microsoft.com/office/drawing/2014/main" id="{7ED3110A-E1EE-47BC-82DA-09663A1ACB24}"/>
               </a:ext>
             </a:extLst>
           </p:cNvPr>
@@ -4385,7 +4385,7 @@
                 <a:ea typeface="Apple SD Gothic Neo"/>
                 <a:cs typeface="Apple SD Gothic Neo"/>
               </a:rPr>
-              <a:t>원래 시도 소계 USD 12.661439. 최신 알려진 소계 USD 12.662505, 전체 비용 unknown.</a:t>
+              <a:t>현재 batch USD 2.9853428. 21 Run 완전 사용량·receipt 일치·denial 0. 과거 전체 비용 unknown.</a:t>
             </a:r>
           </a:p>
         </p:txBody>
@@ -4393,7 +4393,7 @@
     </p:spTree>
     <p:extLst>
       <p:ext uri="{BB962C8B-B14F-4D97-AF65-F5344CB8AC3E}">
-        <p14:creationId xmlns:p14="http://schemas.microsoft.com/office/powerpoint/2010/main" val="1842255844"/>
+        <p14:creationId xmlns:p14="http://schemas.microsoft.com/office/powerpoint/2010/main" val="994414622"/>
       </p:ext>
     </p:extLst>
   </p:cSld>
@@ -4424,7 +4424,7 @@
           <p:cNvPr id="10" name="">
             <a:extLst xmlns:a="http://schemas.openxmlformats.org/drawingml/2006/main">
               <a:ext uri="{FF2B5EF4-FFF2-40B4-BE49-F238E27FC236}">
-                <a16:creationId xmlns:a16="http://schemas.microsoft.com/office/drawing/2014/main" id="{803FBBB9-0D19-402E-B1F6-59DB273174AE}"/>
+                <a16:creationId xmlns:a16="http://schemas.microsoft.com/office/drawing/2014/main" id="{4F72A5B0-106E-4D38-907F-B6A2678A1A4C}"/>
               </a:ext>
             </a:extLst>
           </p:cNvPr>
@@ -4481,7 +4481,7 @@
           <p:cNvPr id="2" name="">
             <a:extLst xmlns:a="http://schemas.openxmlformats.org/drawingml/2006/main">
               <a:ext uri="{FF2B5EF4-FFF2-40B4-BE49-F238E27FC236}">
-                <a16:creationId xmlns:a16="http://schemas.microsoft.com/office/drawing/2014/main" id="{BA2181B1-8760-47C5-9ECB-B62C666D7BB1}"/>
+                <a16:creationId xmlns:a16="http://schemas.microsoft.com/office/drawing/2014/main" id="{018E3699-20B7-46BF-87A7-69BDE7915BB9}"/>
               </a:ext>
             </a:extLst>
           </p:cNvPr>
@@ -4538,7 +4538,7 @@
           <p:cNvPr id="3" name="">
             <a:extLst xmlns:a="http://schemas.openxmlformats.org/drawingml/2006/main">
               <a:ext uri="{FF2B5EF4-FFF2-40B4-BE49-F238E27FC236}">
-                <a16:creationId xmlns:a16="http://schemas.microsoft.com/office/drawing/2014/main" id="{40C07243-03EE-4D06-8568-A52E80D730A7}"/>
+                <a16:creationId xmlns:a16="http://schemas.microsoft.com/office/drawing/2014/main" id="{09FBCCFE-7C39-426B-8E6A-37342D55092B}"/>
               </a:ext>
             </a:extLst>
           </p:cNvPr>
@@ -4595,7 +4595,7 @@
           <p:cNvPr id="4" name="">
             <a:extLst xmlns:a="http://schemas.openxmlformats.org/drawingml/2006/main">
               <a:ext uri="{FF2B5EF4-FFF2-40B4-BE49-F238E27FC236}">
-                <a16:creationId xmlns:a16="http://schemas.microsoft.com/office/drawing/2014/main" id="{7C2FB43C-581B-47DC-80E3-DA20D93C729F}"/>
+                <a16:creationId xmlns:a16="http://schemas.microsoft.com/office/drawing/2014/main" id="{E8952485-8A49-4623-B6EE-A9B1DEA76D4D}"/>
               </a:ext>
             </a:extLst>
           </p:cNvPr>
@@ -4652,7 +4652,7 @@
           <p:cNvPr id="5" name="">
             <a:extLst xmlns:a="http://schemas.openxmlformats.org/drawingml/2006/main">
               <a:ext uri="{FF2B5EF4-FFF2-40B4-BE49-F238E27FC236}">
-                <a16:creationId xmlns:a16="http://schemas.microsoft.com/office/drawing/2014/main" id="{1481685A-5E91-4A8B-9063-EE6970E95C06}"/>
+                <a16:creationId xmlns:a16="http://schemas.microsoft.com/office/drawing/2014/main" id="{DAF72797-2490-426D-84F8-5192A5F60273}"/>
               </a:ext>
             </a:extLst>
           </p:cNvPr>
@@ -4709,7 +4709,7 @@
           <p:cNvPr id="6" name="">
             <a:extLst xmlns:a="http://schemas.openxmlformats.org/drawingml/2006/main">
               <a:ext uri="{FF2B5EF4-FFF2-40B4-BE49-F238E27FC236}">
-                <a16:creationId xmlns:a16="http://schemas.microsoft.com/office/drawing/2014/main" id="{70CD32B9-8BF3-45E9-A395-6808E3F30523}"/>
+                <a16:creationId xmlns:a16="http://schemas.microsoft.com/office/drawing/2014/main" id="{451375E4-9A17-4156-A094-A42D582A02F2}"/>
               </a:ext>
             </a:extLst>
           </p:cNvPr>
@@ -4766,7 +4766,7 @@
           <p:cNvPr id="7" name="">
             <a:extLst xmlns:a="http://schemas.openxmlformats.org/drawingml/2006/main">
               <a:ext uri="{FF2B5EF4-FFF2-40B4-BE49-F238E27FC236}">
-                <a16:creationId xmlns:a16="http://schemas.microsoft.com/office/drawing/2014/main" id="{2D05A19B-62F2-41A4-B82B-8897703706CF}"/>
+                <a16:creationId xmlns:a16="http://schemas.microsoft.com/office/drawing/2014/main" id="{5DC10F55-7DCF-4D65-9B6B-FCCA5042ED5A}"/>
               </a:ext>
             </a:extLst>
           </p:cNvPr>
@@ -4823,7 +4823,7 @@
           <p:cNvPr id="8" name="">
             <a:extLst xmlns:a="http://schemas.openxmlformats.org/drawingml/2006/main">
               <a:ext uri="{FF2B5EF4-FFF2-40B4-BE49-F238E27FC236}">
-                <a16:creationId xmlns:a16="http://schemas.microsoft.com/office/drawing/2014/main" id="{13DEDDF0-13D0-40A7-B832-B496D9820B7B}"/>
+                <a16:creationId xmlns:a16="http://schemas.microsoft.com/office/drawing/2014/main" id="{5B7D3A33-2D9D-4C9A-A8F5-53FE13A7E7B6}"/>
               </a:ext>
             </a:extLst>
           </p:cNvPr>
@@ -4880,7 +4880,7 @@
           <p:cNvPr id="9" name="">
             <a:extLst xmlns:a="http://schemas.openxmlformats.org/drawingml/2006/main">
               <a:ext uri="{FF2B5EF4-FFF2-40B4-BE49-F238E27FC236}">
-                <a16:creationId xmlns:a16="http://schemas.microsoft.com/office/drawing/2014/main" id="{8A7B7A32-75FF-463E-A294-48466A5CC606}"/>
+                <a16:creationId xmlns:a16="http://schemas.microsoft.com/office/drawing/2014/main" id="{A1706BEE-AF11-4BAD-9184-BA093FF44FB1}"/>
               </a:ext>
             </a:extLst>
           </p:cNvPr>
@@ -4935,7 +4935,7 @@
     </p:spTree>
     <p:extLst>
       <p:ext uri="{BB962C8B-B14F-4D97-AF65-F5344CB8AC3E}">
-        <p14:creationId xmlns:p14="http://schemas.microsoft.com/office/powerpoint/2010/main" val="1262414515"/>
+        <p14:creationId xmlns:p14="http://schemas.microsoft.com/office/powerpoint/2010/main" val="307447691"/>
       </p:ext>
     </p:extLst>
   </p:cSld>
@@ -4966,7 +4966,7 @@
           <p:cNvPr id="10" name="">
             <a:extLst xmlns:a="http://schemas.openxmlformats.org/drawingml/2006/main">
               <a:ext uri="{FF2B5EF4-FFF2-40B4-BE49-F238E27FC236}">
-                <a16:creationId xmlns:a16="http://schemas.microsoft.com/office/drawing/2014/main" id="{7BFD2018-5DB5-4BA0-8B92-A82D9561AC5C}"/>
+                <a16:creationId xmlns:a16="http://schemas.microsoft.com/office/drawing/2014/main" id="{B7A86EBD-689E-43C3-9486-2E33378D1FD6}"/>
               </a:ext>
             </a:extLst>
           </p:cNvPr>
@@ -5013,7 +5013,7 @@
                 <a:ea typeface="Apple SD Gothic Neo"/>
                 <a:cs typeface="Apple SD Gothic Neo"/>
               </a:rPr>
-              <a:t>Recovery 실패와 남은 runtime 인수 gate</a:t>
+              <a:t>보존한 실패 이력과 남은 인수 gate</a:t>
             </a:r>
           </a:p>
         </p:txBody>
@@ -5023,7 +5023,7 @@
           <p:cNvPr id="2" name="">
             <a:extLst xmlns:a="http://schemas.openxmlformats.org/drawingml/2006/main">
               <a:ext uri="{FF2B5EF4-FFF2-40B4-BE49-F238E27FC236}">
-                <a16:creationId xmlns:a16="http://schemas.microsoft.com/office/drawing/2014/main" id="{A2A3390A-4FB8-4514-8874-148311E77E0A}"/>
+                <a16:creationId xmlns:a16="http://schemas.microsoft.com/office/drawing/2014/main" id="{8DCD97AD-C196-4806-9429-F7CEB687BC1F}"/>
               </a:ext>
             </a:extLst>
           </p:cNvPr>
@@ -5080,7 +5080,7 @@
           <p:cNvPr id="3" name="">
             <a:extLst xmlns:a="http://schemas.openxmlformats.org/drawingml/2006/main">
               <a:ext uri="{FF2B5EF4-FFF2-40B4-BE49-F238E27FC236}">
-                <a16:creationId xmlns:a16="http://schemas.microsoft.com/office/drawing/2014/main" id="{FA1D1AEA-5D7F-497D-BD2D-9227489D4C84}"/>
+                <a16:creationId xmlns:a16="http://schemas.microsoft.com/office/drawing/2014/main" id="{5DE8DB1D-85BD-4E31-A60A-F69E335F938D}"/>
               </a:ext>
             </a:extLst>
           </p:cNvPr>
@@ -5127,7 +5127,7 @@
                 <a:ea typeface="Apple SD Gothic Neo"/>
                 <a:cs typeface="Apple SD Gothic Neo"/>
               </a:rPr>
-              <a:t>유효한 PASS와 재시도 실패를 보존한다</a:t>
+              <a:t>원래 실패와 이후 재시도를 보존한다</a:t>
             </a:r>
           </a:p>
         </p:txBody>
@@ -5137,7 +5137,7 @@
           <p:cNvPr id="4" name="">
             <a:extLst xmlns:a="http://schemas.openxmlformats.org/drawingml/2006/main">
               <a:ext uri="{FF2B5EF4-FFF2-40B4-BE49-F238E27FC236}">
-                <a16:creationId xmlns:a16="http://schemas.microsoft.com/office/drawing/2014/main" id="{6D9BC72F-D51A-48D6-8B08-BDCD3B321A3A}"/>
+                <a16:creationId xmlns:a16="http://schemas.microsoft.com/office/drawing/2014/main" id="{6F01071A-81A4-4EA2-BCD2-60F77860E234}"/>
               </a:ext>
             </a:extLst>
           </p:cNvPr>
@@ -5184,7 +5184,7 @@
                 <a:ea typeface="Apple SD Gothic Neo"/>
                 <a:cs typeface="Apple SD Gothic Neo"/>
               </a:rPr>
-              <a:t>001·002는 PASS다. 004·QM·RC의 Recovery 3건은 모두 FAIL, ERP 쓰기 0건이다.</a:t>
+              <a:t>원래 2 PASS·2 FAIL·1 INCOMPLETE, Recovery 3 FAIL, compact 4 PASS·1 FAIL을 남긴다.</a:t>
             </a:r>
           </a:p>
         </p:txBody>
@@ -5194,7 +5194,7 @@
           <p:cNvPr id="5" name="">
             <a:extLst xmlns:a="http://schemas.openxmlformats.org/drawingml/2006/main">
               <a:ext uri="{FF2B5EF4-FFF2-40B4-BE49-F238E27FC236}">
-                <a16:creationId xmlns:a16="http://schemas.microsoft.com/office/drawing/2014/main" id="{F5244B84-6F21-4A16-9CA6-AB20E7B5BCC5}"/>
+                <a16:creationId xmlns:a16="http://schemas.microsoft.com/office/drawing/2014/main" id="{C615208D-77FF-4E03-9E0C-514B49F42FF8}"/>
               </a:ext>
             </a:extLst>
           </p:cNvPr>
@@ -5241,7 +5241,7 @@
                 <a:ea typeface="Apple SD Gothic Neo"/>
                 <a:cs typeface="Apple SD Gothic Neo"/>
               </a:rPr>
-              <a:t>최소 진단 성공을 업무 인수로 세지 않는다</a:t>
+              <a:t>현재 Claude 업무 인수와 진단을 구분한다</a:t>
             </a:r>
           </a:p>
         </p:txBody>
@@ -5251,7 +5251,7 @@
           <p:cNvPr id="6" name="">
             <a:extLst xmlns:a="http://schemas.openxmlformats.org/drawingml/2006/main">
               <a:ext uri="{FF2B5EF4-FFF2-40B4-BE49-F238E27FC236}">
-                <a16:creationId xmlns:a16="http://schemas.microsoft.com/office/drawing/2014/main" id="{902CABB5-4C0E-4954-974A-07E14F9C49EF}"/>
+                <a16:creationId xmlns:a16="http://schemas.microsoft.com/office/drawing/2014/main" id="{5B83F972-A740-4AE3-B3E6-0EBF6B74F4FA}"/>
               </a:ext>
             </a:extLst>
           </p:cNvPr>
@@ -5298,7 +5298,7 @@
                 <a:ea typeface="Apple SD Gothic Neo"/>
                 <a:cs typeface="Apple SD Gothic Neo"/>
               </a:rPr>
-              <a:t>RW 최소 진단 USD 0.001066 성공. no-tool production/basic probe는 둘 다 FAIL이다.</a:t>
+              <a:t>현재 다섯 PASS는 업무·native 종료를 검증했다. 최소 Claude/schema 진단은 별도다.</a:t>
             </a:r>
           </a:p>
         </p:txBody>
@@ -5308,7 +5308,7 @@
           <p:cNvPr id="7" name="">
             <a:extLst xmlns:a="http://schemas.openxmlformats.org/drawingml/2006/main">
               <a:ext uri="{FF2B5EF4-FFF2-40B4-BE49-F238E27FC236}">
-                <a16:creationId xmlns:a16="http://schemas.microsoft.com/office/drawing/2014/main" id="{B2630CC1-BF93-4491-A0F3-75AA30CC2686}"/>
+                <a16:creationId xmlns:a16="http://schemas.microsoft.com/office/drawing/2014/main" id="{18D82729-44B9-4B3D-AFE2-5DF6F10B5090}"/>
               </a:ext>
             </a:extLst>
           </p:cNvPr>
@@ -5355,7 +5355,7 @@
                 <a:ea typeface="Apple SD Gothic Neo"/>
                 <a:cs typeface="Apple SD Gothic Neo"/>
               </a:rPr>
-              <a:t>정확한 실패 원인은 unknown이다</a:t>
+              <a:t>Codex와 실제 클라이언트 인수가 남아 있다</a:t>
             </a:r>
           </a:p>
         </p:txBody>
@@ -5365,7 +5365,7 @@
           <p:cNvPr id="8" name="">
             <a:extLst xmlns:a="http://schemas.openxmlformats.org/drawingml/2006/main">
               <a:ext uri="{FF2B5EF4-FFF2-40B4-BE49-F238E27FC236}">
-                <a16:creationId xmlns:a16="http://schemas.microsoft.com/office/drawing/2014/main" id="{6D937E13-878C-4012-AA20-5A4D6DC3B899}"/>
+                <a16:creationId xmlns:a16="http://schemas.microsoft.com/office/drawing/2014/main" id="{490B2D64-BFE0-4CAF-8117-A8990D1FED1B}"/>
               </a:ext>
             </a:extLst>
           </p:cNvPr>
@@ -5412,7 +5412,7 @@
                 <a:ea typeface="Apple SD Gothic Neo"/>
                 <a:cs typeface="Apple SD Gothic Neo"/>
               </a:rPr>
-              <a:t>같은 fingerprint만 확인했다. tools-disabled·schema·budget 경로는 미해소다.</a:t>
+              <a:t>Codex account 인증 gate와 #35를 해소하지 않았다. 규제·운영 인수는 별도다.</a:t>
             </a:r>
           </a:p>
         </p:txBody>
@@ -5422,7 +5422,7 @@
           <p:cNvPr id="9" name="">
             <a:extLst xmlns:a="http://schemas.openxmlformats.org/drawingml/2006/main">
               <a:ext uri="{FF2B5EF4-FFF2-40B4-BE49-F238E27FC236}">
-                <a16:creationId xmlns:a16="http://schemas.microsoft.com/office/drawing/2014/main" id="{6F3D9D09-8FE5-40EC-AF42-FC810FAF5730}"/>
+                <a16:creationId xmlns:a16="http://schemas.microsoft.com/office/drawing/2014/main" id="{3D8EDC24-C600-478D-8C59-2CEF05EF18A0}"/>
               </a:ext>
             </a:extLst>
           </p:cNvPr>
@@ -5469,7 +5469,7 @@
                 <a:ea typeface="Apple SD Gothic Neo"/>
                 <a:cs typeface="Apple SD Gothic Neo"/>
               </a:rPr>
-              <a:t>Codex AUTHENTICATION·인간 login 갱신 미실행. 최신 소계 USD 12.662505, 전체 비용 unknown.</a:t>
+              <a:t>이전 실패 원인·역사적 전체 비용은 unknown이다. 현재 five-case PASS로 과거 기록을 덮어쓰지 않는다.</a:t>
             </a:r>
           </a:p>
         </p:txBody>
@@ -5477,7 +5477,7 @@
     </p:spTree>
     <p:extLst>
       <p:ext uri="{BB962C8B-B14F-4D97-AF65-F5344CB8AC3E}">
-        <p14:creationId xmlns:p14="http://schemas.microsoft.com/office/powerpoint/2010/main" val="1062955570"/>
+        <p14:creationId xmlns:p14="http://schemas.microsoft.com/office/powerpoint/2010/main" val="770519817"/>
       </p:ext>
     </p:extLst>
   </p:cSld>
@@ -5508,7 +5508,7 @@
           <p:cNvPr id="5" name="">
             <a:extLst xmlns:a="http://schemas.openxmlformats.org/drawingml/2006/main">
               <a:ext uri="{FF2B5EF4-FFF2-40B4-BE49-F238E27FC236}">
-                <a16:creationId xmlns:a16="http://schemas.microsoft.com/office/drawing/2014/main" id="{04C00F79-CFC1-46FC-9D94-58B060665DBD}"/>
+                <a16:creationId xmlns:a16="http://schemas.microsoft.com/office/drawing/2014/main" id="{0D888E4F-8A95-4D79-ABC9-73E4781C150F}"/>
               </a:ext>
             </a:extLst>
           </p:cNvPr>
@@ -5565,7 +5565,7 @@
           <p:cNvPr id="2" name="">
             <a:extLst xmlns:a="http://schemas.openxmlformats.org/drawingml/2006/main">
               <a:ext uri="{FF2B5EF4-FFF2-40B4-BE49-F238E27FC236}">
-                <a16:creationId xmlns:a16="http://schemas.microsoft.com/office/drawing/2014/main" id="{C4D91056-F6E6-447A-8C17-F396B4DDC8BC}"/>
+                <a16:creationId xmlns:a16="http://schemas.microsoft.com/office/drawing/2014/main" id="{D7B5BAB1-E8CB-4A3B-AFDD-D967F5E87982}"/>
               </a:ext>
             </a:extLst>
           </p:cNvPr>
@@ -6089,7 +6089,7 @@
           <p:cNvPr id="4" name="">
             <a:extLst xmlns:a="http://schemas.openxmlformats.org/drawingml/2006/main">
               <a:ext uri="{FF2B5EF4-FFF2-40B4-BE49-F238E27FC236}">
-                <a16:creationId xmlns:a16="http://schemas.microsoft.com/office/drawing/2014/main" id="{CC98A845-7762-415C-A7D1-35ECE017A084}"/>
+                <a16:creationId xmlns:a16="http://schemas.microsoft.com/office/drawing/2014/main" id="{37822217-AD49-44FF-972E-E59E4C4B4EFB}"/>
               </a:ext>
             </a:extLst>
           </p:cNvPr>
@@ -6144,7 +6144,7 @@
     </p:spTree>
     <p:extLst>
       <p:ext uri="{BB962C8B-B14F-4D97-AF65-F5344CB8AC3E}">
-        <p14:creationId xmlns:p14="http://schemas.microsoft.com/office/powerpoint/2010/main" val="1901063976"/>
+        <p14:creationId xmlns:p14="http://schemas.microsoft.com/office/powerpoint/2010/main" val="1264299318"/>
       </p:ext>
     </p:extLst>
   </p:cSld>
@@ -6175,7 +6175,7 @@
           <p:cNvPr id="5" name="">
             <a:extLst xmlns:a="http://schemas.openxmlformats.org/drawingml/2006/main">
               <a:ext uri="{FF2B5EF4-FFF2-40B4-BE49-F238E27FC236}">
-                <a16:creationId xmlns:a16="http://schemas.microsoft.com/office/drawing/2014/main" id="{4D02C316-3C78-465E-8710-CDF0446A6A6F}"/>
+                <a16:creationId xmlns:a16="http://schemas.microsoft.com/office/drawing/2014/main" id="{81F3ACA7-EC5A-4083-B4CA-2BEBB972C754}"/>
               </a:ext>
             </a:extLst>
           </p:cNvPr>
@@ -6232,7 +6232,7 @@
           <p:cNvPr id="2" name="">
             <a:extLst xmlns:a="http://schemas.openxmlformats.org/drawingml/2006/main">
               <a:ext uri="{FF2B5EF4-FFF2-40B4-BE49-F238E27FC236}">
-                <a16:creationId xmlns:a16="http://schemas.microsoft.com/office/drawing/2014/main" id="{3CAB2A3E-D4B8-4322-8D2E-A390C7A79F98}"/>
+                <a16:creationId xmlns:a16="http://schemas.microsoft.com/office/drawing/2014/main" id="{8B11FE25-7190-4AD1-B76D-D5D1B1659972}"/>
               </a:ext>
             </a:extLst>
           </p:cNvPr>
@@ -6830,7 +6830,7 @@
           <p:cNvPr id="4" name="">
             <a:extLst xmlns:a="http://schemas.openxmlformats.org/drawingml/2006/main">
               <a:ext uri="{FF2B5EF4-FFF2-40B4-BE49-F238E27FC236}">
-                <a16:creationId xmlns:a16="http://schemas.microsoft.com/office/drawing/2014/main" id="{178780FC-52F4-4B9C-B33C-B0BCF2FBC5D2}"/>
+                <a16:creationId xmlns:a16="http://schemas.microsoft.com/office/drawing/2014/main" id="{40ABF6CC-9B55-4252-B14A-690E4712E0F4}"/>
               </a:ext>
             </a:extLst>
           </p:cNvPr>
@@ -6885,7 +6885,7 @@
     </p:spTree>
     <p:extLst>
       <p:ext uri="{BB962C8B-B14F-4D97-AF65-F5344CB8AC3E}">
-        <p14:creationId xmlns:p14="http://schemas.microsoft.com/office/powerpoint/2010/main" val="4942086"/>
+        <p14:creationId xmlns:p14="http://schemas.microsoft.com/office/powerpoint/2010/main" val="1987716295"/>
       </p:ext>
     </p:extLst>
   </p:cSld>
@@ -6916,7 +6916,7 @@
           <p:cNvPr id="13" name="">
             <a:extLst xmlns:a="http://schemas.openxmlformats.org/drawingml/2006/main">
               <a:ext uri="{FF2B5EF4-FFF2-40B4-BE49-F238E27FC236}">
-                <a16:creationId xmlns:a16="http://schemas.microsoft.com/office/drawing/2014/main" id="{D57D2E92-9885-438B-BD84-A3A99990375D}"/>
+                <a16:creationId xmlns:a16="http://schemas.microsoft.com/office/drawing/2014/main" id="{7A12B2DC-2D15-40ED-8889-66F346598E77}"/>
               </a:ext>
             </a:extLst>
           </p:cNvPr>
@@ -6973,7 +6973,7 @@
           <p:cNvPr id="2" name="">
             <a:extLst xmlns:a="http://schemas.openxmlformats.org/drawingml/2006/main">
               <a:ext uri="{FF2B5EF4-FFF2-40B4-BE49-F238E27FC236}">
-                <a16:creationId xmlns:a16="http://schemas.microsoft.com/office/drawing/2014/main" id="{33D89B27-2D51-4F50-81DF-98FC453AA58A}"/>
+                <a16:creationId xmlns:a16="http://schemas.microsoft.com/office/drawing/2014/main" id="{AE35FD6A-AA17-471E-B5F1-BD58D89BFA0D}"/>
               </a:ext>
             </a:extLst>
           </p:cNvPr>
@@ -7030,7 +7030,7 @@
           <p:cNvPr id="3" name="">
             <a:extLst xmlns:a="http://schemas.openxmlformats.org/drawingml/2006/main">
               <a:ext uri="{FF2B5EF4-FFF2-40B4-BE49-F238E27FC236}">
-                <a16:creationId xmlns:a16="http://schemas.microsoft.com/office/drawing/2014/main" id="{3C50A298-D604-4BA7-B119-7167DF696CFA}"/>
+                <a16:creationId xmlns:a16="http://schemas.microsoft.com/office/drawing/2014/main" id="{0F5C2AB8-41F2-4DE4-81B1-57FC88C6AA93}"/>
               </a:ext>
             </a:extLst>
           </p:cNvPr>
@@ -7112,7 +7112,7 @@
           <p:cNvPr id="4" name="">
             <a:extLst xmlns:a="http://schemas.openxmlformats.org/drawingml/2006/main">
               <a:ext uri="{FF2B5EF4-FFF2-40B4-BE49-F238E27FC236}">
-                <a16:creationId xmlns:a16="http://schemas.microsoft.com/office/drawing/2014/main" id="{284371E0-B538-48CF-84B9-241C502CC10E}"/>
+                <a16:creationId xmlns:a16="http://schemas.microsoft.com/office/drawing/2014/main" id="{EEC448AA-CDEC-4F93-8C71-23501723F866}"/>
               </a:ext>
             </a:extLst>
           </p:cNvPr>
@@ -7194,7 +7194,7 @@
           <p:cNvPr id="5" name="">
             <a:extLst xmlns:a="http://schemas.openxmlformats.org/drawingml/2006/main">
               <a:ext uri="{FF2B5EF4-FFF2-40B4-BE49-F238E27FC236}">
-                <a16:creationId xmlns:a16="http://schemas.microsoft.com/office/drawing/2014/main" id="{E1513D98-DA18-44E8-BA84-DB0293ED9663}"/>
+                <a16:creationId xmlns:a16="http://schemas.microsoft.com/office/drawing/2014/main" id="{6E238620-0FD6-4C00-BDE1-6C46DEEC12BE}"/>
               </a:ext>
             </a:extLst>
           </p:cNvPr>
@@ -7276,7 +7276,7 @@
           <p:cNvPr id="6" name="">
             <a:extLst xmlns:a="http://schemas.openxmlformats.org/drawingml/2006/main">
               <a:ext uri="{FF2B5EF4-FFF2-40B4-BE49-F238E27FC236}">
-                <a16:creationId xmlns:a16="http://schemas.microsoft.com/office/drawing/2014/main" id="{4F7D33BC-B60A-4F50-B419-53059C2A74DF}"/>
+                <a16:creationId xmlns:a16="http://schemas.microsoft.com/office/drawing/2014/main" id="{1B066783-3B8E-4CEE-8BD3-0FB3890C0056}"/>
               </a:ext>
             </a:extLst>
           </p:cNvPr>
@@ -7306,7 +7306,7 @@
           <p:cNvPr id="7" name="">
             <a:extLst xmlns:a="http://schemas.openxmlformats.org/drawingml/2006/main">
               <a:ext uri="{FF2B5EF4-FFF2-40B4-BE49-F238E27FC236}">
-                <a16:creationId xmlns:a16="http://schemas.microsoft.com/office/drawing/2014/main" id="{FE9A7DF8-4429-42DB-99D3-D042BEAC8EA7}"/>
+                <a16:creationId xmlns:a16="http://schemas.microsoft.com/office/drawing/2014/main" id="{9F0EFC5A-C9AC-4E30-BF65-141E58561EEF}"/>
               </a:ext>
             </a:extLst>
           </p:cNvPr>
@@ -7336,7 +7336,7 @@
           <p:cNvPr id="8" name="">
             <a:extLst xmlns:a="http://schemas.openxmlformats.org/drawingml/2006/main">
               <a:ext uri="{FF2B5EF4-FFF2-40B4-BE49-F238E27FC236}">
-                <a16:creationId xmlns:a16="http://schemas.microsoft.com/office/drawing/2014/main" id="{AA4002FA-077C-4FF6-BF62-F7C6216CB32F}"/>
+                <a16:creationId xmlns:a16="http://schemas.microsoft.com/office/drawing/2014/main" id="{F5350F13-2B61-415B-AF25-D1CB6AC741C2}"/>
               </a:ext>
             </a:extLst>
           </p:cNvPr>
@@ -7366,7 +7366,7 @@
           <p:cNvPr id="9" name="">
             <a:extLst xmlns:a="http://schemas.openxmlformats.org/drawingml/2006/main">
               <a:ext uri="{FF2B5EF4-FFF2-40B4-BE49-F238E27FC236}">
-                <a16:creationId xmlns:a16="http://schemas.microsoft.com/office/drawing/2014/main" id="{D2C6CB81-C7D6-4FA2-844B-9612608C1DF3}"/>
+                <a16:creationId xmlns:a16="http://schemas.microsoft.com/office/drawing/2014/main" id="{3573F175-5F14-4F22-82E7-D0335FAB8D2E}"/>
               </a:ext>
             </a:extLst>
           </p:cNvPr>
@@ -7425,7 +7425,7 @@
           <p:cNvPr id="10" name="">
             <a:extLst xmlns:a="http://schemas.openxmlformats.org/drawingml/2006/main">
               <a:ext uri="{FF2B5EF4-FFF2-40B4-BE49-F238E27FC236}">
-                <a16:creationId xmlns:a16="http://schemas.microsoft.com/office/drawing/2014/main" id="{18F985CD-7202-41B0-8B81-6313896822C1}"/>
+                <a16:creationId xmlns:a16="http://schemas.microsoft.com/office/drawing/2014/main" id="{82DBF5B7-226E-4798-9B5C-26AAA882A702}"/>
               </a:ext>
             </a:extLst>
           </p:cNvPr>
@@ -7455,7 +7455,7 @@
           <p:cNvPr id="11" name="">
             <a:extLst xmlns:a="http://schemas.openxmlformats.org/drawingml/2006/main">
               <a:ext uri="{FF2B5EF4-FFF2-40B4-BE49-F238E27FC236}">
-                <a16:creationId xmlns:a16="http://schemas.microsoft.com/office/drawing/2014/main" id="{2948134D-6C50-453B-82FA-E2DE78293AF1}"/>
+                <a16:creationId xmlns:a16="http://schemas.microsoft.com/office/drawing/2014/main" id="{AEC636EA-77E5-41AA-A21F-B80689A8AA27}"/>
               </a:ext>
             </a:extLst>
           </p:cNvPr>
@@ -7514,7 +7514,7 @@
           <p:cNvPr id="12" name="">
             <a:extLst xmlns:a="http://schemas.openxmlformats.org/drawingml/2006/main">
               <a:ext uri="{FF2B5EF4-FFF2-40B4-BE49-F238E27FC236}">
-                <a16:creationId xmlns:a16="http://schemas.microsoft.com/office/drawing/2014/main" id="{6D64D17A-B504-4BA2-A796-18899F0C5307}"/>
+                <a16:creationId xmlns:a16="http://schemas.microsoft.com/office/drawing/2014/main" id="{EF2F2F14-94F2-4BCE-B747-6B6B89F7EE0F}"/>
               </a:ext>
             </a:extLst>
           </p:cNvPr>
@@ -7569,7 +7569,7 @@
     </p:spTree>
     <p:extLst>
       <p:ext uri="{BB962C8B-B14F-4D97-AF65-F5344CB8AC3E}">
-        <p14:creationId xmlns:p14="http://schemas.microsoft.com/office/powerpoint/2010/main" val="2083228185"/>
+        <p14:creationId xmlns:p14="http://schemas.microsoft.com/office/powerpoint/2010/main" val="1778547373"/>
       </p:ext>
     </p:extLst>
   </p:cSld>
@@ -7600,7 +7600,7 @@
           <p:cNvPr id="13" name="">
             <a:extLst xmlns:a="http://schemas.openxmlformats.org/drawingml/2006/main">
               <a:ext uri="{FF2B5EF4-FFF2-40B4-BE49-F238E27FC236}">
-                <a16:creationId xmlns:a16="http://schemas.microsoft.com/office/drawing/2014/main" id="{A4BF5FA5-3E0C-4B47-A871-CE624BE47F70}"/>
+                <a16:creationId xmlns:a16="http://schemas.microsoft.com/office/drawing/2014/main" id="{A5C793CE-42F1-46BE-92E2-7F455807CFF3}"/>
               </a:ext>
             </a:extLst>
           </p:cNvPr>
@@ -7657,7 +7657,7 @@
           <p:cNvPr id="2" name="">
             <a:extLst xmlns:a="http://schemas.openxmlformats.org/drawingml/2006/main">
               <a:ext uri="{FF2B5EF4-FFF2-40B4-BE49-F238E27FC236}">
-                <a16:creationId xmlns:a16="http://schemas.microsoft.com/office/drawing/2014/main" id="{451CC574-F4AA-41B7-8243-1A5AC715AFD2}"/>
+                <a16:creationId xmlns:a16="http://schemas.microsoft.com/office/drawing/2014/main" id="{DCB8F50D-EC82-41E2-9A8E-DFC27E5EE4FD}"/>
               </a:ext>
             </a:extLst>
           </p:cNvPr>
@@ -7714,7 +7714,7 @@
           <p:cNvPr id="3" name="">
             <a:extLst xmlns:a="http://schemas.openxmlformats.org/drawingml/2006/main">
               <a:ext uri="{FF2B5EF4-FFF2-40B4-BE49-F238E27FC236}">
-                <a16:creationId xmlns:a16="http://schemas.microsoft.com/office/drawing/2014/main" id="{132CE39B-C955-43A6-A6D7-15B49E51A05A}"/>
+                <a16:creationId xmlns:a16="http://schemas.microsoft.com/office/drawing/2014/main" id="{01A7ED87-4F70-4DD9-BECA-F85BE4732787}"/>
               </a:ext>
             </a:extLst>
           </p:cNvPr>
@@ -7796,7 +7796,7 @@
           <p:cNvPr id="4" name="">
             <a:extLst xmlns:a="http://schemas.openxmlformats.org/drawingml/2006/main">
               <a:ext uri="{FF2B5EF4-FFF2-40B4-BE49-F238E27FC236}">
-                <a16:creationId xmlns:a16="http://schemas.microsoft.com/office/drawing/2014/main" id="{25267CF1-48A3-4925-B2AE-FFBEC0F06F82}"/>
+                <a16:creationId xmlns:a16="http://schemas.microsoft.com/office/drawing/2014/main" id="{91887761-1312-44CB-82C8-01146253C6B1}"/>
               </a:ext>
             </a:extLst>
           </p:cNvPr>
@@ -7826,7 +7826,7 @@
           <p:cNvPr id="5" name="">
             <a:extLst xmlns:a="http://schemas.openxmlformats.org/drawingml/2006/main">
               <a:ext uri="{FF2B5EF4-FFF2-40B4-BE49-F238E27FC236}">
-                <a16:creationId xmlns:a16="http://schemas.microsoft.com/office/drawing/2014/main" id="{70BC8DB3-4352-48DA-BADD-C78D9E65E0E7}"/>
+                <a16:creationId xmlns:a16="http://schemas.microsoft.com/office/drawing/2014/main" id="{D726C246-69D1-4E76-892F-7456B1960F98}"/>
               </a:ext>
             </a:extLst>
           </p:cNvPr>
@@ -7908,7 +7908,7 @@
           <p:cNvPr id="6" name="">
             <a:extLst xmlns:a="http://schemas.openxmlformats.org/drawingml/2006/main">
               <a:ext uri="{FF2B5EF4-FFF2-40B4-BE49-F238E27FC236}">
-                <a16:creationId xmlns:a16="http://schemas.microsoft.com/office/drawing/2014/main" id="{9CCFCB1C-0C26-4C58-925A-58A4D7D60236}"/>
+                <a16:creationId xmlns:a16="http://schemas.microsoft.com/office/drawing/2014/main" id="{C1BEC05C-544E-446A-AFE0-8D630E62E9A0}"/>
               </a:ext>
             </a:extLst>
           </p:cNvPr>
@@ -7938,7 +7938,7 @@
           <p:cNvPr id="7" name="">
             <a:extLst xmlns:a="http://schemas.openxmlformats.org/drawingml/2006/main">
               <a:ext uri="{FF2B5EF4-FFF2-40B4-BE49-F238E27FC236}">
-                <a16:creationId xmlns:a16="http://schemas.microsoft.com/office/drawing/2014/main" id="{A138A4CC-137B-4AD6-92B5-972271FF958E}"/>
+                <a16:creationId xmlns:a16="http://schemas.microsoft.com/office/drawing/2014/main" id="{BA4B53A8-0F37-4B39-B6F3-9DFA0810E443}"/>
               </a:ext>
             </a:extLst>
           </p:cNvPr>
@@ -8020,7 +8020,7 @@
           <p:cNvPr id="8" name="">
             <a:extLst xmlns:a="http://schemas.openxmlformats.org/drawingml/2006/main">
               <a:ext uri="{FF2B5EF4-FFF2-40B4-BE49-F238E27FC236}">
-                <a16:creationId xmlns:a16="http://schemas.microsoft.com/office/drawing/2014/main" id="{EB65C76D-EBEF-44A0-8DAD-B4488EA94C64}"/>
+                <a16:creationId xmlns:a16="http://schemas.microsoft.com/office/drawing/2014/main" id="{13E9A1F5-D57F-4BF5-A7ED-A76164842552}"/>
               </a:ext>
             </a:extLst>
           </p:cNvPr>
@@ -8050,7 +8050,7 @@
           <p:cNvPr id="9" name="">
             <a:extLst xmlns:a="http://schemas.openxmlformats.org/drawingml/2006/main">
               <a:ext uri="{FF2B5EF4-FFF2-40B4-BE49-F238E27FC236}">
-                <a16:creationId xmlns:a16="http://schemas.microsoft.com/office/drawing/2014/main" id="{79CEEEF5-B047-4C41-867F-0229310E3122}"/>
+                <a16:creationId xmlns:a16="http://schemas.microsoft.com/office/drawing/2014/main" id="{CB5E22A9-CD32-409B-92A1-AB4D5C10F2AD}"/>
               </a:ext>
             </a:extLst>
           </p:cNvPr>
@@ -8132,7 +8132,7 @@
           <p:cNvPr id="10" name="">
             <a:extLst xmlns:a="http://schemas.openxmlformats.org/drawingml/2006/main">
               <a:ext uri="{FF2B5EF4-FFF2-40B4-BE49-F238E27FC236}">
-                <a16:creationId xmlns:a16="http://schemas.microsoft.com/office/drawing/2014/main" id="{D1BA57D1-2AE2-401F-8EC8-8DD4C079AA2F}"/>
+                <a16:creationId xmlns:a16="http://schemas.microsoft.com/office/drawing/2014/main" id="{20588C75-8853-48FE-92CB-07940CC38CA0}"/>
               </a:ext>
             </a:extLst>
           </p:cNvPr>
@@ -8189,7 +8189,7 @@
           <p:cNvPr id="11" name="">
             <a:extLst xmlns:a="http://schemas.openxmlformats.org/drawingml/2006/main">
               <a:ext uri="{FF2B5EF4-FFF2-40B4-BE49-F238E27FC236}">
-                <a16:creationId xmlns:a16="http://schemas.microsoft.com/office/drawing/2014/main" id="{8F572901-74C5-4458-ADB4-B88E8ED6BD0D}"/>
+                <a16:creationId xmlns:a16="http://schemas.microsoft.com/office/drawing/2014/main" id="{F9AFF6CE-F79E-4D18-84FB-42AFB451AAD2}"/>
               </a:ext>
             </a:extLst>
           </p:cNvPr>
@@ -8246,7 +8246,7 @@
           <p:cNvPr id="12" name="">
             <a:extLst xmlns:a="http://schemas.openxmlformats.org/drawingml/2006/main">
               <a:ext uri="{FF2B5EF4-FFF2-40B4-BE49-F238E27FC236}">
-                <a16:creationId xmlns:a16="http://schemas.microsoft.com/office/drawing/2014/main" id="{623BB8A5-580E-42BF-921A-9D6F730484B8}"/>
+                <a16:creationId xmlns:a16="http://schemas.microsoft.com/office/drawing/2014/main" id="{9B4EE41C-0178-42CD-9665-B489C1998C38}"/>
               </a:ext>
             </a:extLst>
           </p:cNvPr>
@@ -8301,7 +8301,7 @@
     </p:spTree>
     <p:extLst>
       <p:ext uri="{BB962C8B-B14F-4D97-AF65-F5344CB8AC3E}">
-        <p14:creationId xmlns:p14="http://schemas.microsoft.com/office/powerpoint/2010/main" val="1709090866"/>
+        <p14:creationId xmlns:p14="http://schemas.microsoft.com/office/powerpoint/2010/main" val="34154812"/>
       </p:ext>
     </p:extLst>
   </p:cSld>
@@ -8332,7 +8332,7 @@
           <p:cNvPr id="10" name="">
             <a:extLst xmlns:a="http://schemas.openxmlformats.org/drawingml/2006/main">
               <a:ext uri="{FF2B5EF4-FFF2-40B4-BE49-F238E27FC236}">
-                <a16:creationId xmlns:a16="http://schemas.microsoft.com/office/drawing/2014/main" id="{9854A320-4C2E-45B3-B080-60ED9BC35561}"/>
+                <a16:creationId xmlns:a16="http://schemas.microsoft.com/office/drawing/2014/main" id="{D15C2943-6A4A-4221-AD06-92890FC2A147}"/>
               </a:ext>
             </a:extLst>
           </p:cNvPr>
@@ -8389,7 +8389,7 @@
           <p:cNvPr id="2" name="">
             <a:extLst xmlns:a="http://schemas.openxmlformats.org/drawingml/2006/main">
               <a:ext uri="{FF2B5EF4-FFF2-40B4-BE49-F238E27FC236}">
-                <a16:creationId xmlns:a16="http://schemas.microsoft.com/office/drawing/2014/main" id="{F7A4C2F3-5C4C-400A-9595-D5721F46592E}"/>
+                <a16:creationId xmlns:a16="http://schemas.microsoft.com/office/drawing/2014/main" id="{A561D1A6-F5AC-427E-8332-46D17EAD70A3}"/>
               </a:ext>
             </a:extLst>
           </p:cNvPr>
@@ -8446,7 +8446,7 @@
           <p:cNvPr id="3" name="">
             <a:extLst xmlns:a="http://schemas.openxmlformats.org/drawingml/2006/main">
               <a:ext uri="{FF2B5EF4-FFF2-40B4-BE49-F238E27FC236}">
-                <a16:creationId xmlns:a16="http://schemas.microsoft.com/office/drawing/2014/main" id="{F5AAD6E3-3580-4D8A-91C5-858FB4DC13C7}"/>
+                <a16:creationId xmlns:a16="http://schemas.microsoft.com/office/drawing/2014/main" id="{04163B53-8FC6-4780-B596-B940F17BB514}"/>
               </a:ext>
             </a:extLst>
           </p:cNvPr>
@@ -8503,7 +8503,7 @@
           <p:cNvPr id="4" name="">
             <a:extLst xmlns:a="http://schemas.openxmlformats.org/drawingml/2006/main">
               <a:ext uri="{FF2B5EF4-FFF2-40B4-BE49-F238E27FC236}">
-                <a16:creationId xmlns:a16="http://schemas.microsoft.com/office/drawing/2014/main" id="{136882A3-A99A-4B78-AACD-EB9B019E763B}"/>
+                <a16:creationId xmlns:a16="http://schemas.microsoft.com/office/drawing/2014/main" id="{CCAC98D8-65C7-47AC-92D7-915A032159CB}"/>
               </a:ext>
             </a:extLst>
           </p:cNvPr>
@@ -8560,7 +8560,7 @@
           <p:cNvPr id="5" name="">
             <a:extLst xmlns:a="http://schemas.openxmlformats.org/drawingml/2006/main">
               <a:ext uri="{FF2B5EF4-FFF2-40B4-BE49-F238E27FC236}">
-                <a16:creationId xmlns:a16="http://schemas.microsoft.com/office/drawing/2014/main" id="{564B719E-6D4C-477A-9F67-7B180C9E697F}"/>
+                <a16:creationId xmlns:a16="http://schemas.microsoft.com/office/drawing/2014/main" id="{4C174CFE-F44A-4D13-8B1D-232A4FC4F462}"/>
               </a:ext>
             </a:extLst>
           </p:cNvPr>
@@ -8617,7 +8617,7 @@
           <p:cNvPr id="6" name="">
             <a:extLst xmlns:a="http://schemas.openxmlformats.org/drawingml/2006/main">
               <a:ext uri="{FF2B5EF4-FFF2-40B4-BE49-F238E27FC236}">
-                <a16:creationId xmlns:a16="http://schemas.microsoft.com/office/drawing/2014/main" id="{538BD367-66D9-4581-80B8-68214F7EAAEC}"/>
+                <a16:creationId xmlns:a16="http://schemas.microsoft.com/office/drawing/2014/main" id="{592026B1-9C49-4924-818B-093FEB1FA538}"/>
               </a:ext>
             </a:extLst>
           </p:cNvPr>
@@ -8674,7 +8674,7 @@
           <p:cNvPr id="7" name="">
             <a:extLst xmlns:a="http://schemas.openxmlformats.org/drawingml/2006/main">
               <a:ext uri="{FF2B5EF4-FFF2-40B4-BE49-F238E27FC236}">
-                <a16:creationId xmlns:a16="http://schemas.microsoft.com/office/drawing/2014/main" id="{266B4651-3249-48E1-91D1-EF9BF306D65A}"/>
+                <a16:creationId xmlns:a16="http://schemas.microsoft.com/office/drawing/2014/main" id="{1880EC1E-C79C-4564-9224-96AE7CC78184}"/>
               </a:ext>
             </a:extLst>
           </p:cNvPr>
@@ -8731,7 +8731,7 @@
           <p:cNvPr id="8" name="">
             <a:extLst xmlns:a="http://schemas.openxmlformats.org/drawingml/2006/main">
               <a:ext uri="{FF2B5EF4-FFF2-40B4-BE49-F238E27FC236}">
-                <a16:creationId xmlns:a16="http://schemas.microsoft.com/office/drawing/2014/main" id="{8491C1C7-31E7-4702-BF97-7974D0F7950A}"/>
+                <a16:creationId xmlns:a16="http://schemas.microsoft.com/office/drawing/2014/main" id="{156FD306-F229-41D5-9580-48D37255B219}"/>
               </a:ext>
             </a:extLst>
           </p:cNvPr>
@@ -8788,7 +8788,7 @@
           <p:cNvPr id="9" name="">
             <a:extLst xmlns:a="http://schemas.openxmlformats.org/drawingml/2006/main">
               <a:ext uri="{FF2B5EF4-FFF2-40B4-BE49-F238E27FC236}">
-                <a16:creationId xmlns:a16="http://schemas.microsoft.com/office/drawing/2014/main" id="{01D0DB54-B601-4499-B337-6AB0F3CE61B9}"/>
+                <a16:creationId xmlns:a16="http://schemas.microsoft.com/office/drawing/2014/main" id="{BF8F758D-0577-4F62-B8EC-CEAFB9A12317}"/>
               </a:ext>
             </a:extLst>
           </p:cNvPr>
@@ -8843,7 +8843,7 @@
     </p:spTree>
     <p:extLst>
       <p:ext uri="{BB962C8B-B14F-4D97-AF65-F5344CB8AC3E}">
-        <p14:creationId xmlns:p14="http://schemas.microsoft.com/office/powerpoint/2010/main" val="2085710026"/>
+        <p14:creationId xmlns:p14="http://schemas.microsoft.com/office/powerpoint/2010/main" val="314176501"/>
       </p:ext>
     </p:extLst>
   </p:cSld>
@@ -8874,7 +8874,7 @@
           <p:cNvPr id="10" name="">
             <a:extLst xmlns:a="http://schemas.openxmlformats.org/drawingml/2006/main">
               <a:ext uri="{FF2B5EF4-FFF2-40B4-BE49-F238E27FC236}">
-                <a16:creationId xmlns:a16="http://schemas.microsoft.com/office/drawing/2014/main" id="{F4F2905E-6C92-4DDD-B3AE-571199ECC1BF}"/>
+                <a16:creationId xmlns:a16="http://schemas.microsoft.com/office/drawing/2014/main" id="{4B8351A6-C211-479D-B022-472E5FC96923}"/>
               </a:ext>
             </a:extLst>
           </p:cNvPr>
@@ -8931,7 +8931,7 @@
           <p:cNvPr id="2" name="">
             <a:extLst xmlns:a="http://schemas.openxmlformats.org/drawingml/2006/main">
               <a:ext uri="{FF2B5EF4-FFF2-40B4-BE49-F238E27FC236}">
-                <a16:creationId xmlns:a16="http://schemas.microsoft.com/office/drawing/2014/main" id="{6C9A2C23-2DD0-4445-B71D-95BA1DD4143C}"/>
+                <a16:creationId xmlns:a16="http://schemas.microsoft.com/office/drawing/2014/main" id="{89F082AA-68D8-49E6-A923-AAD4BA4226F2}"/>
               </a:ext>
             </a:extLst>
           </p:cNvPr>
@@ -8988,7 +8988,7 @@
           <p:cNvPr id="3" name="">
             <a:extLst xmlns:a="http://schemas.openxmlformats.org/drawingml/2006/main">
               <a:ext uri="{FF2B5EF4-FFF2-40B4-BE49-F238E27FC236}">
-                <a16:creationId xmlns:a16="http://schemas.microsoft.com/office/drawing/2014/main" id="{32E00378-1560-4DE1-8942-934A9ADEFF91}"/>
+                <a16:creationId xmlns:a16="http://schemas.microsoft.com/office/drawing/2014/main" id="{0328B6D3-62AD-441B-B02F-0A18640B08EA}"/>
               </a:ext>
             </a:extLst>
           </p:cNvPr>
@@ -9045,7 +9045,7 @@
           <p:cNvPr id="4" name="">
             <a:extLst xmlns:a="http://schemas.openxmlformats.org/drawingml/2006/main">
               <a:ext uri="{FF2B5EF4-FFF2-40B4-BE49-F238E27FC236}">
-                <a16:creationId xmlns:a16="http://schemas.microsoft.com/office/drawing/2014/main" id="{30D8099E-15F6-4AD5-B51E-76E91429F632}"/>
+                <a16:creationId xmlns:a16="http://schemas.microsoft.com/office/drawing/2014/main" id="{BCEFD5A0-344F-4D51-8BF2-D8999DBB9B74}"/>
               </a:ext>
             </a:extLst>
           </p:cNvPr>
@@ -9102,7 +9102,7 @@
           <p:cNvPr id="5" name="">
             <a:extLst xmlns:a="http://schemas.openxmlformats.org/drawingml/2006/main">
               <a:ext uri="{FF2B5EF4-FFF2-40B4-BE49-F238E27FC236}">
-                <a16:creationId xmlns:a16="http://schemas.microsoft.com/office/drawing/2014/main" id="{D4DD83F5-70A7-49EC-91CA-75827FD5758F}"/>
+                <a16:creationId xmlns:a16="http://schemas.microsoft.com/office/drawing/2014/main" id="{180FF683-9EE7-4263-AEC7-582330D2A7D1}"/>
               </a:ext>
             </a:extLst>
           </p:cNvPr>
@@ -9159,7 +9159,7 @@
           <p:cNvPr id="6" name="">
             <a:extLst xmlns:a="http://schemas.openxmlformats.org/drawingml/2006/main">
               <a:ext uri="{FF2B5EF4-FFF2-40B4-BE49-F238E27FC236}">
-                <a16:creationId xmlns:a16="http://schemas.microsoft.com/office/drawing/2014/main" id="{780D3729-63EB-4B65-85C3-A37D1A9A41B5}"/>
+                <a16:creationId xmlns:a16="http://schemas.microsoft.com/office/drawing/2014/main" id="{A256216E-5C34-42FD-A515-8DC8EC3092E6}"/>
               </a:ext>
             </a:extLst>
           </p:cNvPr>
@@ -9216,7 +9216,7 @@
           <p:cNvPr id="7" name="">
             <a:extLst xmlns:a="http://schemas.openxmlformats.org/drawingml/2006/main">
               <a:ext uri="{FF2B5EF4-FFF2-40B4-BE49-F238E27FC236}">
-                <a16:creationId xmlns:a16="http://schemas.microsoft.com/office/drawing/2014/main" id="{0A370924-88A3-42F9-8457-D5D3B48CCA76}"/>
+                <a16:creationId xmlns:a16="http://schemas.microsoft.com/office/drawing/2014/main" id="{0FDE0AB4-4FD7-4CAA-87A7-3C8B554297C0}"/>
               </a:ext>
             </a:extLst>
           </p:cNvPr>
@@ -9273,7 +9273,7 @@
           <p:cNvPr id="8" name="">
             <a:extLst xmlns:a="http://schemas.openxmlformats.org/drawingml/2006/main">
               <a:ext uri="{FF2B5EF4-FFF2-40B4-BE49-F238E27FC236}">
-                <a16:creationId xmlns:a16="http://schemas.microsoft.com/office/drawing/2014/main" id="{6E284E8D-639A-45BB-A50F-F3BFB1CB87C2}"/>
+                <a16:creationId xmlns:a16="http://schemas.microsoft.com/office/drawing/2014/main" id="{7B38B496-DA84-445C-BCDC-C9CD7362E5E1}"/>
               </a:ext>
             </a:extLst>
           </p:cNvPr>
@@ -9320,7 +9320,7 @@
                 <a:ea typeface="Apple SD Gothic Neo"/>
                 <a:cs typeface="Apple SD Gothic Neo"/>
               </a:rPr>
-              <a:t>scripted QM SIT 6건 통과. 현재 native QM은 검사 제안 전 실행 실패로 FAIL이다.</a:t>
+              <a:t>scripted QM SIT 6건 통과. native QM은 QC PENDING·HOLD·잔량 2·적용 0으로 PASS다.</a:t>
             </a:r>
           </a:p>
         </p:txBody>
@@ -9330,7 +9330,7 @@
           <p:cNvPr id="9" name="">
             <a:extLst xmlns:a="http://schemas.openxmlformats.org/drawingml/2006/main">
               <a:ext uri="{FF2B5EF4-FFF2-40B4-BE49-F238E27FC236}">
-                <a16:creationId xmlns:a16="http://schemas.microsoft.com/office/drawing/2014/main" id="{DA25F96D-7612-4C75-9DA1-94A83F97A9DC}"/>
+                <a16:creationId xmlns:a16="http://schemas.microsoft.com/office/drawing/2014/main" id="{62B8EBFD-D8DB-4E7F-A973-12D2596BEAF1}"/>
               </a:ext>
             </a:extLst>
           </p:cNvPr>
@@ -9385,7 +9385,7 @@
     </p:spTree>
     <p:extLst>
       <p:ext uri="{BB962C8B-B14F-4D97-AF65-F5344CB8AC3E}">
-        <p14:creationId xmlns:p14="http://schemas.microsoft.com/office/powerpoint/2010/main" val="488552968"/>
+        <p14:creationId xmlns:p14="http://schemas.microsoft.com/office/powerpoint/2010/main" val="1171432618"/>
       </p:ext>
     </p:extLst>
   </p:cSld>
@@ -9416,7 +9416,7 @@
           <p:cNvPr id="5" name="">
             <a:extLst xmlns:a="http://schemas.openxmlformats.org/drawingml/2006/main">
               <a:ext uri="{FF2B5EF4-FFF2-40B4-BE49-F238E27FC236}">
-                <a16:creationId xmlns:a16="http://schemas.microsoft.com/office/drawing/2014/main" id="{2E7C77DF-1999-4060-88B5-21E697D59724}"/>
+                <a16:creationId xmlns:a16="http://schemas.microsoft.com/office/drawing/2014/main" id="{0617BEDC-7558-404D-9D66-CDB025A7F74A}"/>
               </a:ext>
             </a:extLst>
           </p:cNvPr>
@@ -9473,7 +9473,7 @@
           <p:cNvPr id="2" name="">
             <a:extLst xmlns:a="http://schemas.openxmlformats.org/drawingml/2006/main">
               <a:ext uri="{FF2B5EF4-FFF2-40B4-BE49-F238E27FC236}">
-                <a16:creationId xmlns:a16="http://schemas.microsoft.com/office/drawing/2014/main" id="{C0A546F5-757F-4AD5-A502-38D929557CBF}"/>
+                <a16:creationId xmlns:a16="http://schemas.microsoft.com/office/drawing/2014/main" id="{0B86320F-A2BD-4FB7-A693-B7796AE050CD}"/>
               </a:ext>
             </a:extLst>
           </p:cNvPr>
@@ -9997,7 +9997,7 @@
           <p:cNvPr id="4" name="">
             <a:extLst xmlns:a="http://schemas.openxmlformats.org/drawingml/2006/main">
               <a:ext uri="{FF2B5EF4-FFF2-40B4-BE49-F238E27FC236}">
-                <a16:creationId xmlns:a16="http://schemas.microsoft.com/office/drawing/2014/main" id="{091A4895-EF6E-473F-A1CA-240E21CE893A}"/>
+                <a16:creationId xmlns:a16="http://schemas.microsoft.com/office/drawing/2014/main" id="{D136555B-3C39-46B4-8C47-856720892818}"/>
               </a:ext>
             </a:extLst>
           </p:cNvPr>
@@ -10052,7 +10052,7 @@
     </p:spTree>
     <p:extLst>
       <p:ext uri="{BB962C8B-B14F-4D97-AF65-F5344CB8AC3E}">
-        <p14:creationId xmlns:p14="http://schemas.microsoft.com/office/powerpoint/2010/main" val="1058758076"/>
+        <p14:creationId xmlns:p14="http://schemas.microsoft.com/office/powerpoint/2010/main" val="598373609"/>
       </p:ext>
     </p:extLst>
   </p:cSld>
@@ -10083,7 +10083,7 @@
           <p:cNvPr id="10" name="">
             <a:extLst xmlns:a="http://schemas.openxmlformats.org/drawingml/2006/main">
               <a:ext uri="{FF2B5EF4-FFF2-40B4-BE49-F238E27FC236}">
-                <a16:creationId xmlns:a16="http://schemas.microsoft.com/office/drawing/2014/main" id="{7620F1E7-1DB1-47EC-B36E-E109C228D4F3}"/>
+                <a16:creationId xmlns:a16="http://schemas.microsoft.com/office/drawing/2014/main" id="{7812275E-2527-4B94-A19C-DFA34A2F8C0A}"/>
               </a:ext>
             </a:extLst>
           </p:cNvPr>
@@ -10140,7 +10140,7 @@
           <p:cNvPr id="2" name="">
             <a:extLst xmlns:a="http://schemas.openxmlformats.org/drawingml/2006/main">
               <a:ext uri="{FF2B5EF4-FFF2-40B4-BE49-F238E27FC236}">
-                <a16:creationId xmlns:a16="http://schemas.microsoft.com/office/drawing/2014/main" id="{1AAE5189-5922-48A6-874A-FAD225185731}"/>
+                <a16:creationId xmlns:a16="http://schemas.microsoft.com/office/drawing/2014/main" id="{C87089CC-877C-4DD0-B13A-DA3A573D0A79}"/>
               </a:ext>
             </a:extLst>
           </p:cNvPr>
@@ -10197,7 +10197,7 @@
           <p:cNvPr id="3" name="">
             <a:extLst xmlns:a="http://schemas.openxmlformats.org/drawingml/2006/main">
               <a:ext uri="{FF2B5EF4-FFF2-40B4-BE49-F238E27FC236}">
-                <a16:creationId xmlns:a16="http://schemas.microsoft.com/office/drawing/2014/main" id="{4C047F3E-7017-4145-B5A7-6B1D416E9644}"/>
+                <a16:creationId xmlns:a16="http://schemas.microsoft.com/office/drawing/2014/main" id="{8EB19811-B36F-4D4F-BF8B-5DCA5856EF22}"/>
               </a:ext>
             </a:extLst>
           </p:cNvPr>
@@ -10254,7 +10254,7 @@
           <p:cNvPr id="4" name="">
             <a:extLst xmlns:a="http://schemas.openxmlformats.org/drawingml/2006/main">
               <a:ext uri="{FF2B5EF4-FFF2-40B4-BE49-F238E27FC236}">
-                <a16:creationId xmlns:a16="http://schemas.microsoft.com/office/drawing/2014/main" id="{4D6B527B-58F5-49D9-945B-915C2B335877}"/>
+                <a16:creationId xmlns:a16="http://schemas.microsoft.com/office/drawing/2014/main" id="{1CF556EE-3E3B-4636-B6E5-04AD6A7F68E4}"/>
               </a:ext>
             </a:extLst>
           </p:cNvPr>
@@ -10311,7 +10311,7 @@
           <p:cNvPr id="5" name="">
             <a:extLst xmlns:a="http://schemas.openxmlformats.org/drawingml/2006/main">
               <a:ext uri="{FF2B5EF4-FFF2-40B4-BE49-F238E27FC236}">
-                <a16:creationId xmlns:a16="http://schemas.microsoft.com/office/drawing/2014/main" id="{68C8F805-C4A0-4A06-A93E-CC9BCF74FFCD}"/>
+                <a16:creationId xmlns:a16="http://schemas.microsoft.com/office/drawing/2014/main" id="{095D13A1-1C0E-4605-9CAD-0EE148D59D45}"/>
               </a:ext>
             </a:extLst>
           </p:cNvPr>
@@ -10368,7 +10368,7 @@
           <p:cNvPr id="6" name="">
             <a:extLst xmlns:a="http://schemas.openxmlformats.org/drawingml/2006/main">
               <a:ext uri="{FF2B5EF4-FFF2-40B4-BE49-F238E27FC236}">
-                <a16:creationId xmlns:a16="http://schemas.microsoft.com/office/drawing/2014/main" id="{F5695888-8B0B-4EDF-A485-021B13BB82AC}"/>
+                <a16:creationId xmlns:a16="http://schemas.microsoft.com/office/drawing/2014/main" id="{7C8D6116-8200-4C5B-97FF-9EE0874E2F84}"/>
               </a:ext>
             </a:extLst>
           </p:cNvPr>
@@ -10425,7 +10425,7 @@
           <p:cNvPr id="7" name="">
             <a:extLst xmlns:a="http://schemas.openxmlformats.org/drawingml/2006/main">
               <a:ext uri="{FF2B5EF4-FFF2-40B4-BE49-F238E27FC236}">
-                <a16:creationId xmlns:a16="http://schemas.microsoft.com/office/drawing/2014/main" id="{1F3EFDB3-5E0A-4A94-B887-FCCC85480500}"/>
+                <a16:creationId xmlns:a16="http://schemas.microsoft.com/office/drawing/2014/main" id="{76BD3574-AF4D-4078-BF30-658048FB17FE}"/>
               </a:ext>
             </a:extLst>
           </p:cNvPr>
@@ -10482,7 +10482,7 @@
           <p:cNvPr id="8" name="">
             <a:extLst xmlns:a="http://schemas.openxmlformats.org/drawingml/2006/main">
               <a:ext uri="{FF2B5EF4-FFF2-40B4-BE49-F238E27FC236}">
-                <a16:creationId xmlns:a16="http://schemas.microsoft.com/office/drawing/2014/main" id="{AC8E32BF-3908-44F3-8967-BBB1CD95E625}"/>
+                <a16:creationId xmlns:a16="http://schemas.microsoft.com/office/drawing/2014/main" id="{D409FD9D-E5A4-41DB-9699-4FC69E38A72E}"/>
               </a:ext>
             </a:extLst>
           </p:cNvPr>
@@ -10539,7 +10539,7 @@
           <p:cNvPr id="9" name="">
             <a:extLst xmlns:a="http://schemas.openxmlformats.org/drawingml/2006/main">
               <a:ext uri="{FF2B5EF4-FFF2-40B4-BE49-F238E27FC236}">
-                <a16:creationId xmlns:a16="http://schemas.microsoft.com/office/drawing/2014/main" id="{65175AC6-612E-4742-A3BE-FEEA2859B8D8}"/>
+                <a16:creationId xmlns:a16="http://schemas.microsoft.com/office/drawing/2014/main" id="{2EE63FE0-03B8-44B9-A698-708A223ECB1E}"/>
               </a:ext>
             </a:extLst>
           </p:cNvPr>
@@ -10594,7 +10594,7 @@
     </p:spTree>
     <p:extLst>
       <p:ext uri="{BB962C8B-B14F-4D97-AF65-F5344CB8AC3E}">
-        <p14:creationId xmlns:p14="http://schemas.microsoft.com/office/powerpoint/2010/main" val="1218435796"/>
+        <p14:creationId xmlns:p14="http://schemas.microsoft.com/office/powerpoint/2010/main" val="2114186799"/>
       </p:ext>
     </p:extLst>
   </p:cSld>
